--- a/pm/kristen-share/SHP-Spine-Team-Rollout_Kristen_Jul22.pptx
+++ b/pm/kristen-share/SHP-Spine-Team-Rollout_Kristen_Jul22.pptx
@@ -7155,7 +7155,7 @@
                 <a:ea typeface="Calibri" pitchFamily="34" charset="-122"/>
                 <a:cs typeface="Calibri" pitchFamily="34" charset="-120"/>
               </a:rPr>
-              <a:t>PATIENTS ARRIVED 'COLD'</a:t>
+              <a:t>'COLD' = NO PRIOR VISIT</a:t>
             </a:r>
             <a:endParaRPr lang="en-US" sz="1100" dirty="0"/>
           </a:p>
@@ -7194,7 +7194,7 @@
                 <a:ea typeface="Calibri" pitchFamily="34" charset="-122"/>
                 <a:cs typeface="Calibri" pitchFamily="34" charset="-120"/>
               </a:rPr>
-              <a:t>Virtually every referral followed a field visit. Your windshield time IS the pipeline.</a:t>
+              <a:t>Only 6 matched referrals came from a practice we'd never visited. Virtually every referral followed field contact - your windshield time IS the pipeline.</a:t>
             </a:r>
             <a:endParaRPr lang="en-US" sz="1100" dirty="0"/>
           </a:p>

--- a/pm/kristen-share/SHP-Spine-Team-Rollout_Kristen_Jul22.pptx
+++ b/pm/kristen-share/SHP-Spine-Team-Rollout_Kristen_Jul22.pptx
@@ -19,10 +19,9 @@
     <p:sldId id="267" r:id="rId13"/>
     <p:sldId id="268" r:id="rId14"/>
     <p:sldId id="269" r:id="rId15"/>
-    <p:sldId id="270" r:id="rId16"/>
   </p:sldIdLst>
   <p:notesMasterIdLst>
-    <p:notesMasterId r:id="rId17"/>
+    <p:notesMasterId r:id="rId16"/>
   </p:notesMasterIdLst>
   <p:sldSz cx="12192000" cy="6858000"/>
   <p:notesSz cx="6858000" cy="12192000"/>
@@ -604,7 +603,7 @@
           <a:p>
             <a:r>
               <a:rPr lang="en-US" dirty="0"/>
-              <a:t>The attorney rules protect the team. Say the never-list out loud once, seriously, then move on.</a:t>
+              <a:t>Live demo here - hand a phone around. 90 seconds, someone else's thumb.</a:t>
             </a:r>
             <a:endParaRPr lang="en-US" dirty="0"/>
           </a:p>
@@ -692,7 +691,7 @@
           <a:p>
             <a:r>
               <a:rPr lang="en-US" dirty="0"/>
-              <a:t>Live demo here - hand a phone around. 90 seconds, someone else's thumb.</a:t>
+              <a:t>Frame validation as respect for their market knowledge, not homework.</a:t>
             </a:r>
             <a:endParaRPr lang="en-US" dirty="0"/>
           </a:p>
@@ -780,7 +779,7 @@
           <a:p>
             <a:r>
               <a:rPr lang="en-US" dirty="0"/>
-              <a:t>Frame validation as respect for their market knowledge, not homework.</a:t>
+              <a:t>Hand out glossary.md printed. Ask: which of these do we use differently in real life?</a:t>
             </a:r>
             <a:endParaRPr lang="en-US" dirty="0"/>
           </a:p>
@@ -868,7 +867,7 @@
           <a:p>
             <a:r>
               <a:rPr lang="en-US" dirty="0"/>
-              <a:t>Hand out glossary.md printed. Ask: which of these do we use differently in real life?</a:t>
+              <a:t>This slide is the credibility play: we name our own possible blind spot before anyone else does.</a:t>
             </a:r>
             <a:endParaRPr lang="en-US" dirty="0"/>
           </a:p>
@@ -956,7 +955,7 @@
           <a:p>
             <a:r>
               <a:rPr lang="en-US" dirty="0"/>
-              <a:t>This slide is the credibility play: we name our own possible blind spot before anyone else does.</a:t>
+              <a:t>End on the invitation to correct the data - it converts skeptics into co-authors.</a:t>
             </a:r>
             <a:endParaRPr lang="en-US" dirty="0"/>
           </a:p>
@@ -980,94 +979,6 @@
             <a:fld id="{F7021451-1387-4CA6-816F-3879F97B5CBC}" type="slidenum">
               <a:rPr lang="en-US"/>
               <a:t>14</a:t>
-            </a:fld>
-            <a:endParaRPr lang="en-US"/>
-          </a:p>
-        </p:txBody>
-      </p:sp>
-    </p:spTree>
-    <p:extLst>
-      <p:ext uri="{BB962C8B-B14F-4D97-AF65-F5344CB8AC3E}">
-        <p14:creationId xmlns:p14="http://schemas.microsoft.com/office/powerpoint/2010/main" val="1024086991"/>
-      </p:ext>
-    </p:extLst>
-  </p:cSld>
-  <p:clrMapOvr>
-    <a:masterClrMapping/>
-  </p:clrMapOvr>
-</p:notes>
-</file>
-
-<file path=ppt/notesSlides/notesSlide15.xml><?xml version="1.0" encoding="utf-8"?>
-<p:notes xmlns:a="http://schemas.openxmlformats.org/drawingml/2006/main" xmlns:r="http://schemas.openxmlformats.org/officeDocument/2006/relationships" xmlns:p="http://schemas.openxmlformats.org/presentationml/2006/main">
-  <p:cSld>
-    <p:spTree>
-      <p:nvGrpSpPr>
-        <p:cNvPr id="1" name=""/>
-        <p:cNvGrpSpPr/>
-        <p:nvPr/>
-      </p:nvGrpSpPr>
-      <p:grpSpPr>
-        <a:xfrm>
-          <a:off x="0" y="0"/>
-          <a:ext cx="0" cy="0"/>
-          <a:chOff x="0" y="0"/>
-          <a:chExt cx="0" cy="0"/>
-        </a:xfrm>
-      </p:grpSpPr>
-      <p:sp>
-        <p:nvSpPr>
-          <p:cNvPr id="2" name="Slide Image Placeholder 1"/>
-          <p:cNvSpPr>
-            <a:spLocks noGrp="1" noRot="1" noChangeAspect="1"/>
-          </p:cNvSpPr>
-          <p:nvPr>
-            <p:ph type="sldImg"/>
-          </p:nvPr>
-        </p:nvSpPr>
-        <p:spPr/>
-      </p:sp>
-      <p:sp>
-        <p:nvSpPr>
-          <p:cNvPr id="3" name="Notes Placeholder 2"/>
-          <p:cNvSpPr>
-            <a:spLocks noGrp="1"/>
-          </p:cNvSpPr>
-          <p:nvPr>
-            <p:ph type="body" idx="1"/>
-          </p:nvPr>
-        </p:nvSpPr>
-        <p:spPr/>
-        <p:txBody>
-          <a:bodyPr/>
-          <a:lstStyle/>
-          <a:p>
-            <a:r>
-              <a:rPr lang="en-US" dirty="0"/>
-              <a:t>End on the invitation to correct the data - it converts skeptics into co-authors.</a:t>
-            </a:r>
-            <a:endParaRPr lang="en-US" dirty="0"/>
-          </a:p>
-        </p:txBody>
-      </p:sp>
-      <p:sp>
-        <p:nvSpPr>
-          <p:cNvPr id="4" name="Slide Number Placeholder 3"/>
-          <p:cNvSpPr>
-            <a:spLocks noGrp="1"/>
-          </p:cNvSpPr>
-          <p:nvPr>
-            <p:ph type="sldNum" sz="quarter" idx="10"/>
-          </p:nvPr>
-        </p:nvSpPr>
-        <p:spPr/>
-        <p:txBody>
-          <a:bodyPr/>
-          <a:lstStyle/>
-          <a:p>
-            <a:fld id="{F7021451-1387-4CA6-816F-3879F97B5CBC}" type="slidenum">
-              <a:rPr lang="en-US"/>
-              <a:t>15</a:t>
             </a:fld>
             <a:endParaRPr lang="en-US"/>
           </a:p>
@@ -1308,7 +1219,7 @@
           <a:p>
             <a:r>
               <a:rPr lang="en-US" dirty="0"/>
-              <a:t>This slide is why the plan starts with protection, not prospecting.</a:t>
+              <a:t>This is the shared vocabulary slide - point at the glossary handout for the rest.</a:t>
             </a:r>
             <a:endParaRPr lang="en-US" dirty="0"/>
           </a:p>
@@ -1396,7 +1307,7 @@
           <a:p>
             <a:r>
               <a:rPr lang="en-US" dirty="0"/>
-              <a:t>This is the shared vocabulary slide - point at the glossary handout for the rest.</a:t>
+              <a:t>Teach the skeleton once; the next slides are the per-type content.</a:t>
             </a:r>
             <a:endParaRPr lang="en-US" dirty="0"/>
           </a:p>
@@ -1484,7 +1395,7 @@
           <a:p>
             <a:r>
               <a:rPr lang="en-US" dirty="0"/>
-              <a:t>Teach the skeleton once; the next slides are the per-type content.</a:t>
+              <a:t>Roleplay one of each Thursday. The lapsed opener is the one people get wrong - they explain instead of owning.</a:t>
             </a:r>
             <a:endParaRPr lang="en-US" dirty="0"/>
           </a:p>
@@ -1572,7 +1483,7 @@
           <a:p>
             <a:r>
               <a:rPr lang="en-US" dirty="0"/>
-              <a:t>Roleplay one of each Thursday. The lapsed opener is the one people get wrong - they explain instead of owning.</a:t>
+              <a:t>The one-spine OPEN is the money question - a bad first experience is why they never sent a second.</a:t>
             </a:r>
             <a:endParaRPr lang="en-US" dirty="0"/>
           </a:p>
@@ -1660,7 +1571,7 @@
           <a:p>
             <a:r>
               <a:rPr lang="en-US" dirty="0"/>
-              <a:t>The one-spine OPEN is the money question - a bad first experience is why they never sent a second.</a:t>
+              <a:t>Give the team explicit permission to drop - guilt-visiting dead accounts is where field time goes to die.</a:t>
             </a:r>
             <a:endParaRPr lang="en-US" dirty="0"/>
           </a:p>
@@ -1748,7 +1659,7 @@
           <a:p>
             <a:r>
               <a:rPr lang="en-US" dirty="0"/>
-              <a:t>Give the team explicit permission to drop - guilt-visiting dead accounts is where field time goes to die.</a:t>
+              <a:t>The attorney rules protect the team. Say the never-list out loud once, seriously, then move on.</a:t>
             </a:r>
             <a:endParaRPr lang="en-US" dirty="0"/>
           </a:p>
@@ -2335,677 +2246,6 @@
                 <a:ea typeface="Cambria" pitchFamily="34" charset="-122"/>
                 <a:cs typeface="Cambria" pitchFamily="34" charset="-120"/>
               </a:rPr>
-              <a:t>Attorneys &amp; payer flags — the careful lane</a:t>
-            </a:r>
-            <a:endParaRPr lang="en-US" sz="2900" dirty="0"/>
-          </a:p>
-        </p:txBody>
-      </p:sp>
-      <p:sp>
-        <p:nvSpPr>
-          <p:cNvPr id="3" name="Text 1"/>
-          <p:cNvSpPr/>
-          <p:nvPr/>
-        </p:nvSpPr>
-        <p:spPr>
-          <a:xfrm>
-            <a:off x="502920" y="841248"/>
-            <a:ext cx="11155680" cy="320040"/>
-          </a:xfrm>
-          <a:prstGeom prst="rect">
-            <a:avLst/>
-          </a:prstGeom>
-          <a:noFill/>
-          <a:ln/>
-        </p:spPr>
-        <p:txBody>
-          <a:bodyPr wrap="square" rtlCol="0" anchor="ctr"/>
-          <a:lstStyle/>
-          <a:p>
-            <a:pPr indent="0" marL="0">
-              <a:buNone/>
-            </a:pPr>
-            <a:r>
-              <a:rPr lang="en-US" sz="1300" dirty="0">
-                <a:solidFill>
-                  <a:srgbClr val="5E7773"/>
-                </a:solidFill>
-                <a:latin typeface="Calibri" pitchFamily="34" charset="0"/>
-                <a:ea typeface="Calibri" pitchFamily="34" charset="-122"/>
-                <a:cs typeface="Calibri" pitchFamily="34" charset="-120"/>
-              </a:rPr>
-              <a:t>31% of our spine comes from 14 law firms. Highest yield per account, tightest rules.</a:t>
-            </a:r>
-            <a:endParaRPr lang="en-US" sz="1300" dirty="0"/>
-          </a:p>
-        </p:txBody>
-      </p:sp>
-      <p:sp>
-        <p:nvSpPr>
-          <p:cNvPr id="4" name="Shape 2"/>
-          <p:cNvSpPr/>
-          <p:nvPr/>
-        </p:nvSpPr>
-        <p:spPr>
-          <a:xfrm>
-            <a:off x="502920" y="1463040"/>
-            <a:ext cx="5486400" cy="4480560"/>
-          </a:xfrm>
-          <a:prstGeom prst="roundRect">
-            <a:avLst>
-              <a:gd name="adj" fmla="val 1633"/>
-            </a:avLst>
-          </a:prstGeom>
-          <a:solidFill>
-            <a:srgbClr val="FDF6E7"/>
-          </a:solidFill>
-          <a:ln w="12700">
-            <a:solidFill>
-              <a:srgbClr val="DCE7E3"/>
-            </a:solidFill>
-            <a:prstDash val="solid"/>
-          </a:ln>
-        </p:spPr>
-      </p:sp>
-      <p:sp>
-        <p:nvSpPr>
-          <p:cNvPr id="5" name="Text 3"/>
-          <p:cNvSpPr/>
-          <p:nvPr/>
-        </p:nvSpPr>
-        <p:spPr>
-          <a:xfrm>
-            <a:off x="777240" y="1645920"/>
-            <a:ext cx="4937760" cy="365760"/>
-          </a:xfrm>
-          <a:prstGeom prst="rect">
-            <a:avLst/>
-          </a:prstGeom>
-          <a:noFill/>
-          <a:ln/>
-        </p:spPr>
-        <p:txBody>
-          <a:bodyPr wrap="square" rtlCol="0" anchor="ctr"/>
-          <a:lstStyle/>
-          <a:p>
-            <a:pPr indent="0" marL="0">
-              <a:buNone/>
-            </a:pPr>
-            <a:r>
-              <a:rPr lang="en-US" sz="1500" b="1" dirty="0">
-                <a:solidFill>
-                  <a:srgbClr val="14322C"/>
-                </a:solidFill>
-                <a:latin typeface="Cambria" pitchFamily="34" charset="0"/>
-                <a:ea typeface="Cambria" pitchFamily="34" charset="-122"/>
-                <a:cs typeface="Cambria" pitchFamily="34" charset="-120"/>
-              </a:rPr>
-              <a:t>WC / auto no-fault attorneys (Kristen's lane)</a:t>
-            </a:r>
-            <a:endParaRPr lang="en-US" sz="1500" dirty="0"/>
-          </a:p>
-        </p:txBody>
-      </p:sp>
-      <p:sp>
-        <p:nvSpPr>
-          <p:cNvPr id="6" name="Text 4"/>
-          <p:cNvSpPr/>
-          <p:nvPr/>
-        </p:nvSpPr>
-        <p:spPr>
-          <a:xfrm>
-            <a:off x="777240" y="2103120"/>
-            <a:ext cx="4937760" cy="3657600"/>
-          </a:xfrm>
-          <a:prstGeom prst="rect">
-            <a:avLst/>
-          </a:prstGeom>
-          <a:noFill/>
-          <a:ln/>
-        </p:spPr>
-        <p:txBody>
-          <a:bodyPr wrap="square" rtlCol="0" anchor="ctr"/>
-          <a:lstStyle/>
-          <a:p>
-            <a:pPr indent="0" marL="0">
-              <a:lnSpc>
-                <a:spcPct val="122000"/>
-              </a:lnSpc>
-              <a:buNone/>
-            </a:pPr>
-            <a:r>
-              <a:rPr lang="en-US" sz="1250" dirty="0">
-                <a:solidFill>
-                  <a:srgbClr val="14322C"/>
-                </a:solidFill>
-                <a:latin typeface="Calibri" pitchFamily="34" charset="0"/>
-                <a:ea typeface="Calibri" pitchFamily="34" charset="-122"/>
-                <a:cs typeface="Calibri" pitchFamily="34" charset="-120"/>
-              </a:rPr>
-              <a:t>OPEN: “Are records, scheduling, and communication meeting your standard?” — it's a SERVICE call, always.</a:t>
-            </a:r>
-            <a:endParaRPr lang="en-US" sz="1250" dirty="0"/>
-          </a:p>
-          <a:p>
-            <a:pPr indent="0" marL="0">
-              <a:lnSpc>
-                <a:spcPct val="122000"/>
-              </a:lnSpc>
-              <a:buNone/>
-            </a:pPr>
-            <a:endParaRPr lang="en-US" sz="1250" dirty="0"/>
-          </a:p>
-          <a:p>
-            <a:pPr indent="0" marL="0">
-              <a:lnSpc>
-                <a:spcPct val="122000"/>
-              </a:lnSpc>
-              <a:buNone/>
-            </a:pPr>
-            <a:r>
-              <a:rPr lang="en-US" sz="1250" dirty="0">
-                <a:solidFill>
-                  <a:srgbClr val="14322C"/>
-                </a:solidFill>
-                <a:latin typeface="Calibri" pitchFamily="34" charset="0"/>
-                <a:ea typeface="Calibri" pitchFamily="34" charset="-122"/>
-                <a:cs typeface="Calibri" pitchFamily="34" charset="-120"/>
-              </a:rPr>
-              <a:t>MESSAGE: “Auto no-fault and workers' comp spine evaluations — fast scheduling, thorough documentation, clean records turnaround.”</a:t>
-            </a:r>
-            <a:endParaRPr lang="en-US" sz="1250" dirty="0"/>
-          </a:p>
-          <a:p>
-            <a:pPr indent="0" marL="0">
-              <a:lnSpc>
-                <a:spcPct val="122000"/>
-              </a:lnSpc>
-              <a:buNone/>
-            </a:pPr>
-            <a:endParaRPr lang="en-US" sz="1250" dirty="0"/>
-          </a:p>
-          <a:p>
-            <a:pPr indent="0" marL="0">
-              <a:lnSpc>
-                <a:spcPct val="122000"/>
-              </a:lnSpc>
-              <a:buNone/>
-            </a:pPr>
-            <a:r>
-              <a:rPr lang="en-US" sz="1250" dirty="0">
-                <a:solidFill>
-                  <a:srgbClr val="14322C"/>
-                </a:solidFill>
-                <a:latin typeface="Calibri" pitchFamily="34" charset="0"/>
-                <a:ea typeface="Calibri" pitchFamily="34" charset="-122"/>
-                <a:cs typeface="Calibri" pitchFamily="34" charset="-120"/>
-              </a:rPr>
-              <a:t>ASK: keep us as the evaluation resource; leave the direct line + turnaround commitment.</a:t>
-            </a:r>
-            <a:endParaRPr lang="en-US" sz="1250" dirty="0"/>
-          </a:p>
-          <a:p>
-            <a:pPr indent="0" marL="0">
-              <a:lnSpc>
-                <a:spcPct val="122000"/>
-              </a:lnSpc>
-              <a:buNone/>
-            </a:pPr>
-            <a:endParaRPr lang="en-US" sz="1250" dirty="0"/>
-          </a:p>
-          <a:p>
-            <a:pPr indent="0" marL="0">
-              <a:lnSpc>
-                <a:spcPct val="122000"/>
-              </a:lnSpc>
-              <a:buNone/>
-            </a:pPr>
-            <a:r>
-              <a:rPr lang="en-US" sz="1250" dirty="0">
-                <a:solidFill>
-                  <a:srgbClr val="14322C"/>
-                </a:solidFill>
-                <a:latin typeface="Calibri" pitchFamily="34" charset="0"/>
-                <a:ea typeface="Calibri" pitchFamily="34" charset="-122"/>
-                <a:cs typeface="Calibri" pitchFamily="34" charset="-120"/>
-              </a:rPr>
-              <a:t>NEVER: payments, gifts, referral fees, event sponsorships-for-referrals. Service and merit only — that line is legal, not cultural.</a:t>
-            </a:r>
-            <a:endParaRPr lang="en-US" sz="1250" dirty="0"/>
-          </a:p>
-        </p:txBody>
-      </p:sp>
-      <p:sp>
-        <p:nvSpPr>
-          <p:cNvPr id="7" name="Text 5"/>
-          <p:cNvSpPr/>
-          <p:nvPr/>
-        </p:nvSpPr>
-        <p:spPr>
-          <a:xfrm>
-            <a:off x="6172200" y="1463040"/>
-            <a:ext cx="5486400" cy="365760"/>
-          </a:xfrm>
-          <a:prstGeom prst="rect">
-            <a:avLst/>
-          </a:prstGeom>
-          <a:noFill/>
-          <a:ln/>
-        </p:spPr>
-        <p:txBody>
-          <a:bodyPr wrap="square" rtlCol="0" anchor="ctr"/>
-          <a:lstStyle/>
-          <a:p>
-            <a:pPr indent="0" marL="0">
-              <a:buNone/>
-            </a:pPr>
-            <a:r>
-              <a:rPr lang="en-US" sz="1400" b="1" dirty="0">
-                <a:solidFill>
-                  <a:srgbClr val="14322C"/>
-                </a:solidFill>
-                <a:latin typeface="Cambria" pitchFamily="34" charset="0"/>
-                <a:ea typeface="Cambria" pitchFamily="34" charset="-122"/>
-                <a:cs typeface="Cambria" pitchFamily="34" charset="-120"/>
-              </a:rPr>
-              <a:t>The payer chip on every stop card:</a:t>
-            </a:r>
-            <a:endParaRPr lang="en-US" sz="1400" dirty="0"/>
-          </a:p>
-        </p:txBody>
-      </p:sp>
-      <p:sp>
-        <p:nvSpPr>
-          <p:cNvPr id="8" name="Text 6"/>
-          <p:cNvSpPr/>
-          <p:nvPr/>
-        </p:nvSpPr>
-        <p:spPr>
-          <a:xfrm>
-            <a:off x="6172200" y="1920240"/>
-            <a:ext cx="5486400" cy="777240"/>
-          </a:xfrm>
-          <a:prstGeom prst="rect">
-            <a:avLst/>
-          </a:prstGeom>
-          <a:noFill/>
-          <a:ln/>
-        </p:spPr>
-        <p:txBody>
-          <a:bodyPr wrap="square" rtlCol="0" anchor="ctr"/>
-          <a:lstStyle/>
-          <a:p>
-            <a:pPr indent="0" marL="0">
-              <a:lnSpc>
-                <a:spcPct val="105000"/>
-              </a:lnSpc>
-              <a:buNone/>
-            </a:pPr>
-            <a:r>
-              <a:rPr lang="en-US" sz="1150" b="1" dirty="0">
-                <a:solidFill>
-                  <a:srgbClr val="14322C"/>
-                </a:solidFill>
-                <a:latin typeface="Calibri" pitchFamily="34" charset="0"/>
-                <a:ea typeface="Calibri" pitchFamily="34" charset="-122"/>
-                <a:cs typeface="Calibri" pitchFamily="34" charset="-120"/>
-              </a:rPr>
-              <a:t>Comm/Medicare (grey chip) — </a:t>
-            </a:r>
-            <a:pPr indent="0" marL="0">
-              <a:lnSpc>
-                <a:spcPct val="105000"/>
-              </a:lnSpc>
-              <a:buNone/>
-            </a:pPr>
-            <a:r>
-              <a:rPr lang="en-US" sz="1150" dirty="0">
-                <a:solidFill>
-                  <a:srgbClr val="14322C"/>
-                </a:solidFill>
-                <a:latin typeface="Calibri" pitchFamily="34" charset="0"/>
-                <a:ea typeface="Calibri" pitchFamily="34" charset="-122"/>
-                <a:cs typeface="Calibri" pitchFamily="34" charset="-120"/>
-              </a:rPr>
-              <a:t>Qualified — confirm HMO share; we handle referral paperwork.</a:t>
-            </a:r>
-            <a:endParaRPr lang="en-US" sz="1150" dirty="0"/>
-          </a:p>
-        </p:txBody>
-      </p:sp>
-      <p:sp>
-        <p:nvSpPr>
-          <p:cNvPr id="9" name="Text 7"/>
-          <p:cNvSpPr/>
-          <p:nvPr/>
-        </p:nvSpPr>
-        <p:spPr>
-          <a:xfrm>
-            <a:off x="6172200" y="2761488"/>
-            <a:ext cx="5486400" cy="777240"/>
-          </a:xfrm>
-          <a:prstGeom prst="rect">
-            <a:avLst/>
-          </a:prstGeom>
-          <a:noFill/>
-          <a:ln/>
-        </p:spPr>
-        <p:txBody>
-          <a:bodyPr wrap="square" rtlCol="0" anchor="ctr"/>
-          <a:lstStyle/>
-          <a:p>
-            <a:pPr indent="0" marL="0">
-              <a:lnSpc>
-                <a:spcPct val="105000"/>
-              </a:lnSpc>
-              <a:buNone/>
-            </a:pPr>
-            <a:r>
-              <a:rPr lang="en-US" sz="1150" b="1" dirty="0">
-                <a:solidFill>
-                  <a:srgbClr val="14322C"/>
-                </a:solidFill>
-                <a:latin typeface="Calibri" pitchFamily="34" charset="0"/>
-                <a:ea typeface="Calibri" pitchFamily="34" charset="-122"/>
-                <a:cs typeface="Calibri" pitchFamily="34" charset="-120"/>
-              </a:rPr>
-              <a:t>Mixed panel (amber chip) — </a:t>
-            </a:r>
-            <a:pPr indent="0" marL="0">
-              <a:lnSpc>
-                <a:spcPct val="105000"/>
-              </a:lnSpc>
-              <a:buNone/>
-            </a:pPr>
-            <a:r>
-              <a:rPr lang="en-US" sz="1150" dirty="0">
-                <a:solidFill>
-                  <a:srgbClr val="14322C"/>
-                </a:solidFill>
-                <a:latin typeface="Calibri" pitchFamily="34" charset="0"/>
-                <a:ea typeface="Calibri" pitchFamily="34" charset="-122"/>
-                <a:cs typeface="Calibri" pitchFamily="34" charset="-120"/>
-              </a:rPr>
-              <a:t>Hospital-system or walk-in — intake screens each referral.</a:t>
-            </a:r>
-            <a:endParaRPr lang="en-US" sz="1150" dirty="0"/>
-          </a:p>
-        </p:txBody>
-      </p:sp>
-      <p:sp>
-        <p:nvSpPr>
-          <p:cNvPr id="10" name="Text 8"/>
-          <p:cNvSpPr/>
-          <p:nvPr/>
-        </p:nvSpPr>
-        <p:spPr>
-          <a:xfrm>
-            <a:off x="6172200" y="3602736"/>
-            <a:ext cx="5486400" cy="777240"/>
-          </a:xfrm>
-          <a:prstGeom prst="rect">
-            <a:avLst/>
-          </a:prstGeom>
-          <a:noFill/>
-          <a:ln/>
-        </p:spPr>
-        <p:txBody>
-          <a:bodyPr wrap="square" rtlCol="0" anchor="ctr"/>
-          <a:lstStyle/>
-          <a:p>
-            <a:pPr indent="0" marL="0">
-              <a:lnSpc>
-                <a:spcPct val="105000"/>
-              </a:lnSpc>
-              <a:buNone/>
-            </a:pPr>
-            <a:r>
-              <a:rPr lang="en-US" sz="1150" b="1" dirty="0">
-                <a:solidFill>
-                  <a:srgbClr val="14322C"/>
-                </a:solidFill>
-                <a:latin typeface="Calibri" pitchFamily="34" charset="0"/>
-                <a:ea typeface="Calibri" pitchFamily="34" charset="-122"/>
-                <a:cs typeface="Calibri" pitchFamily="34" charset="-120"/>
-              </a:rPr>
-              <a:t>WC/Auto ✓ (teal chip) — </a:t>
-            </a:r>
-            <a:pPr indent="0" marL="0">
-              <a:lnSpc>
-                <a:spcPct val="105000"/>
-              </a:lnSpc>
-              <a:buNone/>
-            </a:pPr>
-            <a:r>
-              <a:rPr lang="en-US" sz="1150" dirty="0">
-                <a:solidFill>
-                  <a:srgbClr val="14322C"/>
-                </a:solidFill>
-                <a:latin typeface="Calibri" pitchFamily="34" charset="0"/>
-                <a:ea typeface="Calibri" pitchFamily="34" charset="-122"/>
-                <a:cs typeface="Calibri" pitchFamily="34" charset="-120"/>
-              </a:rPr>
-              <a:t>No referral, no copay — commercial-equivalent. Go.</a:t>
-            </a:r>
-            <a:endParaRPr lang="en-US" sz="1150" dirty="0"/>
-          </a:p>
-        </p:txBody>
-      </p:sp>
-      <p:sp>
-        <p:nvSpPr>
-          <p:cNvPr id="11" name="Text 9"/>
-          <p:cNvSpPr/>
-          <p:nvPr/>
-        </p:nvSpPr>
-        <p:spPr>
-          <a:xfrm>
-            <a:off x="6172200" y="4443984"/>
-            <a:ext cx="5486400" cy="777240"/>
-          </a:xfrm>
-          <a:prstGeom prst="rect">
-            <a:avLst/>
-          </a:prstGeom>
-          <a:noFill/>
-          <a:ln/>
-        </p:spPr>
-        <p:txBody>
-          <a:bodyPr wrap="square" rtlCol="0" anchor="ctr"/>
-          <a:lstStyle/>
-          <a:p>
-            <a:pPr indent="0" marL="0">
-              <a:lnSpc>
-                <a:spcPct val="105000"/>
-              </a:lnSpc>
-              <a:buNone/>
-            </a:pPr>
-            <a:r>
-              <a:rPr lang="en-US" sz="1150" b="1" dirty="0">
-                <a:solidFill>
-                  <a:srgbClr val="14322C"/>
-                </a:solidFill>
-                <a:latin typeface="Calibri" pitchFamily="34" charset="0"/>
-                <a:ea typeface="Calibri" pitchFamily="34" charset="-122"/>
-                <a:cs typeface="Calibri" pitchFamily="34" charset="-120"/>
-              </a:rPr>
-              <a:t>Medicaid? VERIFY (red chip) — </a:t>
-            </a:r>
-            <a:pPr indent="0" marL="0">
-              <a:lnSpc>
-                <a:spcPct val="105000"/>
-              </a:lnSpc>
-              <a:buNone/>
-            </a:pPr>
-            <a:r>
-              <a:rPr lang="en-US" sz="1150" dirty="0">
-                <a:solidFill>
-                  <a:srgbClr val="14322C"/>
-                </a:solidFill>
-                <a:latin typeface="Calibri" pitchFamily="34" charset="0"/>
-                <a:ea typeface="Calibri" pitchFamily="34" charset="-122"/>
-                <a:cs typeface="Calibri" pitchFamily="34" charset="-120"/>
-              </a:rPr>
-              <a:t>FQHC/community pattern — do NOT promise same-week until verified. Uninsured → Harmony Direct Pay.</a:t>
-            </a:r>
-            <a:endParaRPr lang="en-US" sz="1150" dirty="0"/>
-          </a:p>
-        </p:txBody>
-      </p:sp>
-      <p:sp>
-        <p:nvSpPr>
-          <p:cNvPr id="12" name="Text 10"/>
-          <p:cNvSpPr/>
-          <p:nvPr/>
-        </p:nvSpPr>
-        <p:spPr>
-          <a:xfrm>
-            <a:off x="6172200" y="5285232"/>
-            <a:ext cx="5486400" cy="777240"/>
-          </a:xfrm>
-          <a:prstGeom prst="rect">
-            <a:avLst/>
-          </a:prstGeom>
-          <a:noFill/>
-          <a:ln/>
-        </p:spPr>
-        <p:txBody>
-          <a:bodyPr wrap="square" rtlCol="0" anchor="ctr"/>
-          <a:lstStyle/>
-          <a:p>
-            <a:pPr indent="0" marL="0">
-              <a:lnSpc>
-                <a:spcPct val="105000"/>
-              </a:lnSpc>
-              <a:buNone/>
-            </a:pPr>
-            <a:r>
-              <a:rPr lang="en-US" sz="1150" b="1" dirty="0">
-                <a:solidFill>
-                  <a:srgbClr val="14322C"/>
-                </a:solidFill>
-                <a:latin typeface="Calibri" pitchFamily="34" charset="0"/>
-                <a:ea typeface="Calibri" pitchFamily="34" charset="-122"/>
-                <a:cs typeface="Calibri" pitchFamily="34" charset="-120"/>
-              </a:rPr>
-              <a:t>Peds — low fit — </a:t>
-            </a:r>
-            <a:pPr indent="0" marL="0">
-              <a:lnSpc>
-                <a:spcPct val="105000"/>
-              </a:lnSpc>
-              <a:buNone/>
-            </a:pPr>
-            <a:r>
-              <a:rPr lang="en-US" sz="1150" dirty="0">
-                <a:solidFill>
-                  <a:srgbClr val="14322C"/>
-                </a:solidFill>
-                <a:latin typeface="Calibri" pitchFamily="34" charset="0"/>
-                <a:ea typeface="Calibri" pitchFamily="34" charset="-122"/>
-                <a:cs typeface="Calibri" pitchFamily="34" charset="-120"/>
-              </a:rPr>
-              <a:t>Adult family/staff referrals only.</a:t>
-            </a:r>
-            <a:endParaRPr lang="en-US" sz="1150" dirty="0"/>
-          </a:p>
-        </p:txBody>
-      </p:sp>
-      <p:sp>
-        <p:nvSpPr>
-          <p:cNvPr id="13" name="Text 11"/>
-          <p:cNvSpPr/>
-          <p:nvPr/>
-        </p:nvSpPr>
-        <p:spPr>
-          <a:xfrm>
-            <a:off x="6172200" y="6172200"/>
-            <a:ext cx="5486400" cy="640080"/>
-          </a:xfrm>
-          <a:prstGeom prst="rect">
-            <a:avLst/>
-          </a:prstGeom>
-          <a:noFill/>
-          <a:ln/>
-        </p:spPr>
-        <p:txBody>
-          <a:bodyPr wrap="square" rtlCol="0" anchor="ctr"/>
-          <a:lstStyle/>
-          <a:p>
-            <a:pPr indent="0" marL="0">
-              <a:buNone/>
-            </a:pPr>
-            <a:r>
-              <a:rPr lang="en-US" sz="1050" i="1" dirty="0">
-                <a:solidFill>
-                  <a:srgbClr val="5E7773"/>
-                </a:solidFill>
-                <a:latin typeface="Calibri" pitchFamily="34" charset="0"/>
-                <a:ea typeface="Calibri" pitchFamily="34" charset="-122"/>
-                <a:cs typeface="Calibri" pitchFamily="34" charset="-120"/>
-              </a:rPr>
-              <a:t>Payer chips are pattern-based guesses until Kelly's verification pass (Tier 1 first, by Jul 31). When unsure: “intake will confirm coverage the same day.”</a:t>
-            </a:r>
-            <a:endParaRPr lang="en-US" sz="1050" dirty="0"/>
-          </a:p>
-        </p:txBody>
-      </p:sp>
-    </p:spTree>
-  </p:cSld>
-  <p:clrMapOvr>
-    <a:masterClrMapping/>
-  </p:clrMapOvr>
-</p:sld>
-</file>
-
-<file path=ppt/slides/slide11.xml><?xml version="1.0" encoding="utf-8"?>
-<p:sld xmlns:a="http://schemas.openxmlformats.org/drawingml/2006/main" xmlns:r="http://schemas.openxmlformats.org/officeDocument/2006/relationships" xmlns:p="http://schemas.openxmlformats.org/presentationml/2006/main">
-  <p:cSld name="Slide 11">
-    <p:spTree>
-      <p:nvGrpSpPr>
-        <p:cNvPr id="1" name=""/>
-        <p:cNvGrpSpPr/>
-        <p:nvPr/>
-      </p:nvGrpSpPr>
-      <p:grpSpPr>
-        <a:xfrm>
-          <a:off x="0" y="0"/>
-          <a:ext cx="0" cy="0"/>
-          <a:chOff x="0" y="0"/>
-          <a:chExt cx="0" cy="0"/>
-        </a:xfrm>
-      </p:grpSpPr>
-      <p:sp>
-        <p:nvSpPr>
-          <p:cNvPr id="2" name="Text 0"/>
-          <p:cNvSpPr/>
-          <p:nvPr/>
-        </p:nvSpPr>
-        <p:spPr>
-          <a:xfrm>
-            <a:off x="502920" y="256032"/>
-            <a:ext cx="11155680" cy="594360"/>
-          </a:xfrm>
-          <a:prstGeom prst="rect">
-            <a:avLst/>
-          </a:prstGeom>
-          <a:noFill/>
-          <a:ln/>
-        </p:spPr>
-        <p:txBody>
-          <a:bodyPr wrap="square" rtlCol="0" anchor="ctr"/>
-          <a:lstStyle/>
-          <a:p>
-            <a:pPr indent="0" marL="0">
-              <a:buNone/>
-            </a:pPr>
-            <a:r>
-              <a:rPr lang="en-US" sz="2900" b="1" dirty="0">
-                <a:solidFill>
-                  <a:srgbClr val="14322C"/>
-                </a:solidFill>
-                <a:latin typeface="Cambria" pitchFamily="34" charset="0"/>
-                <a:ea typeface="Cambria" pitchFamily="34" charset="-122"/>
-                <a:cs typeface="Cambria" pitchFamily="34" charset="-120"/>
-              </a:rPr>
               <a:t>Your week and your tool</a:t>
             </a:r>
             <a:endParaRPr lang="en-US" sz="2900" dirty="0"/>
@@ -3119,7 +2359,7 @@
         <p:spPr>
           <a:xfrm>
             <a:off x="1143000" y="1399032"/>
-            <a:ext cx="6035040" cy="548640"/>
+            <a:ext cx="10241280" cy="548640"/>
           </a:xfrm>
           <a:prstGeom prst="rect">
             <a:avLst/>
@@ -3217,7 +2457,7 @@
         <p:spPr>
           <a:xfrm>
             <a:off x="1143000" y="1965960"/>
-            <a:ext cx="6035040" cy="548640"/>
+            <a:ext cx="10241280" cy="548640"/>
           </a:xfrm>
           <a:prstGeom prst="rect">
             <a:avLst/>
@@ -3315,7 +2555,7 @@
         <p:spPr>
           <a:xfrm>
             <a:off x="1143000" y="2532888"/>
-            <a:ext cx="6035040" cy="548640"/>
+            <a:ext cx="10241280" cy="548640"/>
           </a:xfrm>
           <a:prstGeom prst="rect">
             <a:avLst/>
@@ -3413,7 +2653,7 @@
         <p:spPr>
           <a:xfrm>
             <a:off x="1143000" y="3099816"/>
-            <a:ext cx="6035040" cy="548640"/>
+            <a:ext cx="10241280" cy="548640"/>
           </a:xfrm>
           <a:prstGeom prst="rect">
             <a:avLst/>
@@ -3511,7 +2751,7 @@
         <p:spPr>
           <a:xfrm>
             <a:off x="1143000" y="3666744"/>
-            <a:ext cx="6035040" cy="548640"/>
+            <a:ext cx="10241280" cy="548640"/>
           </a:xfrm>
           <a:prstGeom prst="rect">
             <a:avLst/>
@@ -3543,7 +2783,7 @@
       </p:sp>
       <p:graphicFrame>
         <p:nvGraphicFramePr>
-          <p:cNvPr id="12" name="Table 0"/>
+          <p:cNvPr id="11" name="Table 0"/>
           <p:cNvGraphicFramePr>
             <a:graphicFrameLocks noGrp="1"/>
           </p:cNvGraphicFramePr>
@@ -3788,7 +3028,7 @@
                           <a:ea typeface="Calibri" pitchFamily="34" charset="-122"/>
                           <a:cs typeface="Calibri" pitchFamily="34" charset="-120"/>
                         </a:rPr>
-                        <a:t>3 route days + 4 pull-forward recoveries · 34 stops (Hesselberg, MI Auto Law…)</a:t>
+                        <a:t>3 route days · 34 stops</a:t>
                       </a:r>
                       <a:endParaRPr lang="en-US" sz="1200" dirty="0">
                         <a:latin typeface="Calibri" charset="0"/>
@@ -3920,7 +3160,7 @@
                           <a:ea typeface="Calibri" pitchFamily="34" charset="-122"/>
                           <a:cs typeface="Calibri" pitchFamily="34" charset="-120"/>
                         </a:rPr>
-                        <a:t>Days 02·05·09 · 30 stops (QuickDoc, Oak Street, NORLIVO first)</a:t>
+                        <a:t>Days 02·05·09 · 30 stops</a:t>
                       </a:r>
                       <a:endParaRPr lang="en-US" sz="1200" dirty="0">
                         <a:latin typeface="Calibri" charset="0"/>
@@ -4052,7 +3292,7 @@
                           <a:ea typeface="Calibri" pitchFamily="34" charset="-122"/>
                           <a:cs typeface="Calibri" pitchFamily="34" charset="-120"/>
                         </a:rPr>
-                        <a:t>Days 01·04·03 · 30 stops (Be Well, Chronic Pain Institute first)</a:t>
+                        <a:t>Days 01·04·03 · 30 stops</a:t>
                       </a:r>
                       <a:endParaRPr lang="en-US" sz="1200" dirty="0">
                         <a:latin typeface="Calibri" charset="0"/>
@@ -4237,29 +3477,433 @@
           </a:graphicData>
         </a:graphic>
       </p:graphicFrame>
-      <p:pic>
-        <p:nvPicPr>
-          <p:cNvPr id="20" name="Image 0" descr="app_stop_detail.png">    </p:cNvPr>
-          <p:cNvPicPr>
-            <a:picLocks noChangeAspect="1"/>
-          </p:cNvPicPr>
-          <p:nvPr/>
-        </p:nvPicPr>
-        <p:blipFill>
-          <a:blip r:embed="rId1"/>
-          <a:srcRect l="0" r="0" t="0" b="0"/>
-          <a:stretch/>
-        </p:blipFill>
-        <p:spPr>
-          <a:xfrm>
-            <a:off x="7863840" y="1325880"/>
-            <a:ext cx="2743200" cy="2926080"/>
-          </a:xfrm>
-          <a:prstGeom prst="rect">
-            <a:avLst/>
-          </a:prstGeom>
-        </p:spPr>
-      </p:pic>
+    </p:spTree>
+  </p:cSld>
+  <p:clrMapOvr>
+    <a:masterClrMapping/>
+  </p:clrMapOvr>
+</p:sld>
+</file>
+
+<file path=ppt/slides/slide11.xml><?xml version="1.0" encoding="utf-8"?>
+<p:sld xmlns:a="http://schemas.openxmlformats.org/drawingml/2006/main" xmlns:r="http://schemas.openxmlformats.org/officeDocument/2006/relationships" xmlns:p="http://schemas.openxmlformats.org/presentationml/2006/main">
+  <p:cSld name="Slide 11">
+    <p:spTree>
+      <p:nvGrpSpPr>
+        <p:cNvPr id="1" name=""/>
+        <p:cNvGrpSpPr/>
+        <p:nvPr/>
+      </p:nvGrpSpPr>
+      <p:grpSpPr>
+        <a:xfrm>
+          <a:off x="0" y="0"/>
+          <a:ext cx="0" cy="0"/>
+          <a:chOff x="0" y="0"/>
+          <a:chExt cx="0" cy="0"/>
+        </a:xfrm>
+      </p:grpSpPr>
+      <p:sp>
+        <p:nvSpPr>
+          <p:cNvPr id="2" name="Text 0"/>
+          <p:cNvSpPr/>
+          <p:nvPr/>
+        </p:nvSpPr>
+        <p:spPr>
+          <a:xfrm>
+            <a:off x="502920" y="256032"/>
+            <a:ext cx="11155680" cy="594360"/>
+          </a:xfrm>
+          <a:prstGeom prst="rect">
+            <a:avLst/>
+          </a:prstGeom>
+          <a:noFill/>
+          <a:ln/>
+        </p:spPr>
+        <p:txBody>
+          <a:bodyPr wrap="square" rtlCol="0" anchor="ctr"/>
+          <a:lstStyle/>
+          <a:p>
+            <a:pPr indent="0" marL="0">
+              <a:buNone/>
+            </a:pPr>
+            <a:r>
+              <a:rPr lang="en-US" sz="2900" b="1" dirty="0">
+                <a:solidFill>
+                  <a:srgbClr val="14322C"/>
+                </a:solidFill>
+                <a:latin typeface="Cambria" pitchFamily="34" charset="0"/>
+                <a:ea typeface="Cambria" pitchFamily="34" charset="-122"/>
+                <a:cs typeface="Cambria" pitchFamily="34" charset="-120"/>
+              </a:rPr>
+              <a:t>One ask this week: validate your book</a:t>
+            </a:r>
+            <a:endParaRPr lang="en-US" sz="2900" dirty="0"/>
+          </a:p>
+        </p:txBody>
+      </p:sp>
+      <p:sp>
+        <p:nvSpPr>
+          <p:cNvPr id="3" name="Text 1"/>
+          <p:cNvSpPr/>
+          <p:nvPr/>
+        </p:nvSpPr>
+        <p:spPr>
+          <a:xfrm>
+            <a:off x="502920" y="841248"/>
+            <a:ext cx="11155680" cy="320040"/>
+          </a:xfrm>
+          <a:prstGeom prst="rect">
+            <a:avLst/>
+          </a:prstGeom>
+          <a:noFill/>
+          <a:ln/>
+        </p:spPr>
+        <p:txBody>
+          <a:bodyPr wrap="square" rtlCol="0" anchor="ctr"/>
+          <a:lstStyle/>
+          <a:p>
+            <a:pPr indent="0" marL="0">
+              <a:buNone/>
+            </a:pPr>
+            <a:r>
+              <a:rPr lang="en-US" sz="1300" dirty="0">
+                <a:solidFill>
+                  <a:srgbClr val="5E7773"/>
+                </a:solidFill>
+                <a:latin typeface="Calibri" pitchFamily="34" charset="0"/>
+                <a:ea typeface="Calibri" pitchFamily="34" charset="-122"/>
+                <a:cs typeface="Calibri" pitchFamily="34" charset="-120"/>
+              </a:rPr>
+              <a:t>You know the market; the data only knows the exports. Fix it where it's wrong.</a:t>
+            </a:r>
+            <a:endParaRPr lang="en-US" sz="1300" dirty="0"/>
+          </a:p>
+        </p:txBody>
+      </p:sp>
+      <p:sp>
+        <p:nvSpPr>
+          <p:cNvPr id="4" name="Text 2"/>
+          <p:cNvSpPr/>
+          <p:nvPr/>
+        </p:nvSpPr>
+        <p:spPr>
+          <a:xfrm>
+            <a:off x="548640" y="1463040"/>
+            <a:ext cx="2377440" cy="822960"/>
+          </a:xfrm>
+          <a:prstGeom prst="rect">
+            <a:avLst/>
+          </a:prstGeom>
+          <a:noFill/>
+          <a:ln/>
+        </p:spPr>
+        <p:txBody>
+          <a:bodyPr wrap="square" rtlCol="0" anchor="ctr"/>
+          <a:lstStyle/>
+          <a:p>
+            <a:pPr indent="0" marL="0">
+              <a:buNone/>
+            </a:pPr>
+            <a:r>
+              <a:rPr lang="en-US" sz="1200" b="1" spc="150" kern="0" dirty="0">
+                <a:solidFill>
+                  <a:srgbClr val="49A698"/>
+                </a:solidFill>
+                <a:latin typeface="Calibri" pitchFamily="34" charset="0"/>
+                <a:ea typeface="Calibri" pitchFamily="34" charset="-122"/>
+                <a:cs typeface="Calibri" pitchFamily="34" charset="-120"/>
+              </a:rPr>
+              <a:t>WHAT</a:t>
+            </a:r>
+            <a:endParaRPr lang="en-US" sz="1200" dirty="0"/>
+          </a:p>
+        </p:txBody>
+      </p:sp>
+      <p:sp>
+        <p:nvSpPr>
+          <p:cNvPr id="5" name="Text 3"/>
+          <p:cNvSpPr/>
+          <p:nvPr/>
+        </p:nvSpPr>
+        <p:spPr>
+          <a:xfrm>
+            <a:off x="3108960" y="1463040"/>
+            <a:ext cx="8503920" cy="1051560"/>
+          </a:xfrm>
+          <a:prstGeom prst="rect">
+            <a:avLst/>
+          </a:prstGeom>
+          <a:noFill/>
+          <a:ln/>
+        </p:spPr>
+        <p:txBody>
+          <a:bodyPr wrap="square" rtlCol="0" anchor="ctr"/>
+          <a:lstStyle/>
+          <a:p>
+            <a:pPr indent="0" marL="0">
+              <a:lnSpc>
+                <a:spcPct val="112000"/>
+              </a:lnSpc>
+              <a:buNone/>
+            </a:pPr>
+            <a:r>
+              <a:rPr lang="en-US" sz="1250" dirty="0">
+                <a:solidFill>
+                  <a:srgbClr val="14322C"/>
+                </a:solidFill>
+                <a:latin typeface="Calibri" pitchFamily="34" charset="0"/>
+                <a:ea typeface="Calibri" pitchFamily="34" charset="-122"/>
+                <a:cs typeface="Calibri" pitchFamily="34" charset="-120"/>
+              </a:rPr>
+              <a:t>Your review tab in the validation workbook (Joel distributes Wed): every account gets Keep / Remove / Reassign + a reason. Dropdowns, ~60–90 min a day, done by Tue Jul 29.</a:t>
+            </a:r>
+            <a:endParaRPr lang="en-US" sz="1250" dirty="0"/>
+          </a:p>
+        </p:txBody>
+      </p:sp>
+      <p:sp>
+        <p:nvSpPr>
+          <p:cNvPr id="6" name="Text 4"/>
+          <p:cNvSpPr/>
+          <p:nvPr/>
+        </p:nvSpPr>
+        <p:spPr>
+          <a:xfrm>
+            <a:off x="548640" y="2633472"/>
+            <a:ext cx="2377440" cy="822960"/>
+          </a:xfrm>
+          <a:prstGeom prst="rect">
+            <a:avLst/>
+          </a:prstGeom>
+          <a:noFill/>
+          <a:ln/>
+        </p:spPr>
+        <p:txBody>
+          <a:bodyPr wrap="square" rtlCol="0" anchor="ctr"/>
+          <a:lstStyle/>
+          <a:p>
+            <a:pPr indent="0" marL="0">
+              <a:buNone/>
+            </a:pPr>
+            <a:r>
+              <a:rPr lang="en-US" sz="1200" b="1" spc="150" kern="0" dirty="0">
+                <a:solidFill>
+                  <a:srgbClr val="49A698"/>
+                </a:solidFill>
+                <a:latin typeface="Calibri" pitchFamily="34" charset="0"/>
+                <a:ea typeface="Calibri" pitchFamily="34" charset="-122"/>
+                <a:cs typeface="Calibri" pitchFamily="34" charset="-120"/>
+              </a:rPr>
+              <a:t>PRE-FLAGGED FOR YOU</a:t>
+            </a:r>
+            <a:endParaRPr lang="en-US" sz="1200" dirty="0"/>
+          </a:p>
+        </p:txBody>
+      </p:sp>
+      <p:sp>
+        <p:nvSpPr>
+          <p:cNvPr id="7" name="Text 5"/>
+          <p:cNvSpPr/>
+          <p:nvPr/>
+        </p:nvSpPr>
+        <p:spPr>
+          <a:xfrm>
+            <a:off x="3108960" y="2633472"/>
+            <a:ext cx="8503920" cy="1051560"/>
+          </a:xfrm>
+          <a:prstGeom prst="rect">
+            <a:avLst/>
+          </a:prstGeom>
+          <a:noFill/>
+          <a:ln/>
+        </p:spPr>
+        <p:txBody>
+          <a:bodyPr wrap="square" rtlCol="0" anchor="ctr"/>
+          <a:lstStyle/>
+          <a:p>
+            <a:pPr indent="0" marL="0">
+              <a:lnSpc>
+                <a:spcPct val="112000"/>
+              </a:lnSpc>
+              <a:buNone/>
+            </a:pPr>
+            <a:r>
+              <a:rPr lang="en-US" sz="1250" dirty="0">
+                <a:solidFill>
+                  <a:srgbClr val="14322C"/>
+                </a:solidFill>
+                <a:latin typeface="Calibri" pitchFamily="34" charset="0"/>
+                <a:ea typeface="Calibri" pitchFamily="34" charset="-122"/>
+                <a:cs typeface="Calibri" pitchFamily="34" charset="-120"/>
+              </a:rPr>
+              <a:t>54 auto-flags already marked: pediatric offices, addiction medicine (Gammons), possible competitors, ortho groups with in-house spine, neurosurgeons. Confirm or override.</a:t>
+            </a:r>
+            <a:endParaRPr lang="en-US" sz="1250" dirty="0"/>
+          </a:p>
+        </p:txBody>
+      </p:sp>
+      <p:sp>
+        <p:nvSpPr>
+          <p:cNvPr id="8" name="Text 6"/>
+          <p:cNvSpPr/>
+          <p:nvPr/>
+        </p:nvSpPr>
+        <p:spPr>
+          <a:xfrm>
+            <a:off x="548640" y="3803904"/>
+            <a:ext cx="2377440" cy="822960"/>
+          </a:xfrm>
+          <a:prstGeom prst="rect">
+            <a:avLst/>
+          </a:prstGeom>
+          <a:noFill/>
+          <a:ln/>
+        </p:spPr>
+        <p:txBody>
+          <a:bodyPr wrap="square" rtlCol="0" anchor="ctr"/>
+          <a:lstStyle/>
+          <a:p>
+            <a:pPr indent="0" marL="0">
+              <a:buNone/>
+            </a:pPr>
+            <a:r>
+              <a:rPr lang="en-US" sz="1200" b="1" spc="150" kern="0" dirty="0">
+                <a:solidFill>
+                  <a:srgbClr val="49A698"/>
+                </a:solidFill>
+                <a:latin typeface="Calibri" pitchFamily="34" charset="0"/>
+                <a:ea typeface="Calibri" pitchFamily="34" charset="-122"/>
+                <a:cs typeface="Calibri" pitchFamily="34" charset="-120"/>
+              </a:rPr>
+              <a:t>ONE RULE</a:t>
+            </a:r>
+            <a:endParaRPr lang="en-US" sz="1200" dirty="0"/>
+          </a:p>
+        </p:txBody>
+      </p:sp>
+      <p:sp>
+        <p:nvSpPr>
+          <p:cNvPr id="9" name="Text 7"/>
+          <p:cNvSpPr/>
+          <p:nvPr/>
+        </p:nvSpPr>
+        <p:spPr>
+          <a:xfrm>
+            <a:off x="3108960" y="3803904"/>
+            <a:ext cx="8503920" cy="1051560"/>
+          </a:xfrm>
+          <a:prstGeom prst="rect">
+            <a:avLst/>
+          </a:prstGeom>
+          <a:noFill/>
+          <a:ln/>
+        </p:spPr>
+        <p:txBody>
+          <a:bodyPr wrap="square" rtlCol="0" anchor="ctr"/>
+          <a:lstStyle/>
+          <a:p>
+            <a:pPr indent="0" marL="0">
+              <a:lnSpc>
+                <a:spcPct val="112000"/>
+              </a:lnSpc>
+              <a:buNone/>
+            </a:pPr>
+            <a:r>
+              <a:rPr lang="en-US" sz="1250" dirty="0">
+                <a:solidFill>
+                  <a:srgbClr val="14322C"/>
+                </a:solidFill>
+                <a:latin typeface="Calibri" pitchFamily="34" charset="0"/>
+                <a:ea typeface="Calibri" pitchFamily="34" charset="-122"/>
+                <a:cs typeface="Calibri" pitchFamily="34" charset="-120"/>
+              </a:rPr>
+              <a:t>Producing accounts are never deleted on a hunch — flag “verify relationship” instead. Removal needs a reason; that's what makes the final list defensible.</a:t>
+            </a:r>
+            <a:endParaRPr lang="en-US" sz="1250" dirty="0"/>
+          </a:p>
+        </p:txBody>
+      </p:sp>
+      <p:sp>
+        <p:nvSpPr>
+          <p:cNvPr id="10" name="Text 8"/>
+          <p:cNvSpPr/>
+          <p:nvPr/>
+        </p:nvSpPr>
+        <p:spPr>
+          <a:xfrm>
+            <a:off x="548640" y="4974336"/>
+            <a:ext cx="2377440" cy="822960"/>
+          </a:xfrm>
+          <a:prstGeom prst="rect">
+            <a:avLst/>
+          </a:prstGeom>
+          <a:noFill/>
+          <a:ln/>
+        </p:spPr>
+        <p:txBody>
+          <a:bodyPr wrap="square" rtlCol="0" anchor="ctr"/>
+          <a:lstStyle/>
+          <a:p>
+            <a:pPr indent="0" marL="0">
+              <a:buNone/>
+            </a:pPr>
+            <a:r>
+              <a:rPr lang="en-US" sz="1200" b="1" spc="150" kern="0" dirty="0">
+                <a:solidFill>
+                  <a:srgbClr val="49A698"/>
+                </a:solidFill>
+                <a:latin typeface="Calibri" pitchFamily="34" charset="0"/>
+                <a:ea typeface="Calibri" pitchFamily="34" charset="-122"/>
+                <a:cs typeface="Calibri" pitchFamily="34" charset="-120"/>
+              </a:rPr>
+              <a:t>WHAT HAPPENS THEN</a:t>
+            </a:r>
+            <a:endParaRPr lang="en-US" sz="1200" dirty="0"/>
+          </a:p>
+        </p:txBody>
+      </p:sp>
+      <p:sp>
+        <p:nvSpPr>
+          <p:cNvPr id="11" name="Text 9"/>
+          <p:cNvSpPr/>
+          <p:nvPr/>
+        </p:nvSpPr>
+        <p:spPr>
+          <a:xfrm>
+            <a:off x="3108960" y="4974336"/>
+            <a:ext cx="8503920" cy="1051560"/>
+          </a:xfrm>
+          <a:prstGeom prst="rect">
+            <a:avLst/>
+          </a:prstGeom>
+          <a:noFill/>
+          <a:ln/>
+        </p:spPr>
+        <p:txBody>
+          <a:bodyPr wrap="square" rtlCol="0" anchor="ctr"/>
+          <a:lstStyle/>
+          <a:p>
+            <a:pPr indent="0" marL="0">
+              <a:lnSpc>
+                <a:spcPct val="112000"/>
+              </a:lnSpc>
+              <a:buNone/>
+            </a:pPr>
+            <a:r>
+              <a:rPr lang="en-US" sz="1250" dirty="0">
+                <a:solidFill>
+                  <a:srgbClr val="14322C"/>
+                </a:solidFill>
+                <a:latin typeface="Calibri" pitchFamily="34" charset="0"/>
+                <a:ea typeface="Calibri" pitchFamily="34" charset="-122"/>
+                <a:cs typeface="Calibri" pitchFamily="34" charset="-120"/>
+              </a:rPr>
+              <a:t>Jul 31: approved universe locked, routes regenerated, the app refreshes. Aug 3: we run on a book everyone trusts — because you built it.</a:t>
+            </a:r>
+            <a:endParaRPr lang="en-US" sz="1250" dirty="0"/>
+          </a:p>
+        </p:txBody>
+      </p:sp>
     </p:spTree>
   </p:cSld>
   <p:clrMapOvr>
@@ -4318,7 +3962,7 @@
                 <a:ea typeface="Cambria" pitchFamily="34" charset="-122"/>
                 <a:cs typeface="Cambria" pitchFamily="34" charset="-120"/>
               </a:rPr>
-              <a:t>One ask this week: validate your book</a:t>
+              <a:t>Say what we mean — the shared vocabulary</a:t>
             </a:r>
             <a:endParaRPr lang="en-US" sz="2900" dirty="0"/>
           </a:p>
@@ -4357,7 +4001,7 @@
                 <a:ea typeface="Calibri" pitchFamily="34" charset="-122"/>
                 <a:cs typeface="Calibri" pitchFamily="34" charset="-120"/>
               </a:rPr>
-              <a:t>You know the market; the data only knows the exports. Fix it where it's wrong.</a:t>
+              <a:t>Full glossary in pm/glossary.md — flag anything that reads wrong</a:t>
             </a:r>
             <a:endParaRPr lang="en-US" sz="1300" dirty="0"/>
           </a:p>
@@ -4371,34 +4015,54 @@
         </p:nvSpPr>
         <p:spPr>
           <a:xfrm>
-            <a:off x="548640" y="1463040"/>
-            <a:ext cx="2377440" cy="822960"/>
-          </a:xfrm>
-          <a:prstGeom prst="rect">
-            <a:avLst/>
-          </a:prstGeom>
-          <a:noFill/>
-          <a:ln/>
-        </p:spPr>
-        <p:txBody>
-          <a:bodyPr wrap="square" rtlCol="0" anchor="ctr"/>
-          <a:lstStyle/>
-          <a:p>
-            <a:pPr indent="0" marL="0">
-              <a:buNone/>
-            </a:pPr>
-            <a:r>
-              <a:rPr lang="en-US" sz="1200" b="1" spc="150" kern="0" dirty="0">
-                <a:solidFill>
-                  <a:srgbClr val="49A698"/>
-                </a:solidFill>
-                <a:latin typeface="Calibri" pitchFamily="34" charset="0"/>
-                <a:ea typeface="Calibri" pitchFamily="34" charset="-122"/>
-                <a:cs typeface="Calibri" pitchFamily="34" charset="-120"/>
-              </a:rPr>
-              <a:t>WHAT</a:t>
-            </a:r>
-            <a:endParaRPr lang="en-US" sz="1200" dirty="0"/>
+            <a:off x="548640" y="1417320"/>
+            <a:ext cx="5394960" cy="749808"/>
+          </a:xfrm>
+          <a:prstGeom prst="rect">
+            <a:avLst/>
+          </a:prstGeom>
+          <a:noFill/>
+          <a:ln/>
+        </p:spPr>
+        <p:txBody>
+          <a:bodyPr wrap="square" rtlCol="0" anchor="ctr"/>
+          <a:lstStyle/>
+          <a:p>
+            <a:pPr indent="0" marL="0">
+              <a:lnSpc>
+                <a:spcPct val="105000"/>
+              </a:lnSpc>
+              <a:buNone/>
+            </a:pPr>
+            <a:r>
+              <a:rPr lang="en-US" sz="1150" b="1" dirty="0">
+                <a:solidFill>
+                  <a:srgbClr val="1F4E4A"/>
+                </a:solidFill>
+                <a:latin typeface="Calibri" pitchFamily="34" charset="0"/>
+                <a:ea typeface="Calibri" pitchFamily="34" charset="-122"/>
+                <a:cs typeface="Calibri" pitchFamily="34" charset="-120"/>
+              </a:rPr>
+              <a:t>PL — </a:t>
+            </a:r>
+            <a:pPr indent="0" marL="0">
+              <a:lnSpc>
+                <a:spcPct val="105000"/>
+              </a:lnSpc>
+              <a:buNone/>
+            </a:pPr>
+            <a:r>
+              <a:rPr lang="en-US" sz="1150" dirty="0">
+                <a:solidFill>
+                  <a:srgbClr val="14322C"/>
+                </a:solidFill>
+                <a:latin typeface="Calibri" pitchFamily="34" charset="0"/>
+                <a:ea typeface="Calibri" pitchFamily="34" charset="-122"/>
+                <a:cs typeface="Calibri" pitchFamily="34" charset="-120"/>
+              </a:rPr>
+              <a:t>Physician Liaison — you.</a:t>
+            </a:r>
+            <a:endParaRPr lang="en-US" sz="1150" dirty="0"/>
           </a:p>
         </p:txBody>
       </p:sp>
@@ -4410,8 +4074,8 @@
         </p:nvSpPr>
         <p:spPr>
           <a:xfrm>
-            <a:off x="3108960" y="1463040"/>
-            <a:ext cx="8503920" cy="1051560"/>
+            <a:off x="548640" y="2203704"/>
+            <a:ext cx="5394960" cy="749808"/>
           </a:xfrm>
           <a:prstGeom prst="rect">
             <a:avLst/>
@@ -4425,12 +4089,29 @@
           <a:p>
             <a:pPr indent="0" marL="0">
               <a:lnSpc>
-                <a:spcPct val="112000"/>
+                <a:spcPct val="105000"/>
               </a:lnSpc>
               <a:buNone/>
             </a:pPr>
             <a:r>
-              <a:rPr lang="en-US" sz="1250" dirty="0">
+              <a:rPr lang="en-US" sz="1150" b="1" dirty="0">
+                <a:solidFill>
+                  <a:srgbClr val="1F4E4A"/>
+                </a:solidFill>
+                <a:latin typeface="Calibri" pitchFamily="34" charset="0"/>
+                <a:ea typeface="Calibri" pitchFamily="34" charset="-122"/>
+                <a:cs typeface="Calibri" pitchFamily="34" charset="-120"/>
+              </a:rPr>
+              <a:t>NP — </a:t>
+            </a:r>
+            <a:pPr indent="0" marL="0">
+              <a:lnSpc>
+                <a:spcPct val="105000"/>
+              </a:lnSpc>
+              <a:buNone/>
+            </a:pPr>
+            <a:r>
+              <a:rPr lang="en-US" sz="1150" dirty="0">
                 <a:solidFill>
                   <a:srgbClr val="14322C"/>
                 </a:solidFill>
@@ -4438,9 +4119,9 @@
                 <a:ea typeface="Calibri" pitchFamily="34" charset="-122"/>
                 <a:cs typeface="Calibri" pitchFamily="34" charset="-120"/>
               </a:rPr>
-              <a:t>Your review tab in the validation workbook (Joel distributes Wed): every account gets Keep / Remove / Reassign + a reason. Dropdowns, ~60–90 min a day, done by Tue Jul 29.</a:t>
-            </a:r>
-            <a:endParaRPr lang="en-US" sz="1250" dirty="0"/>
+              <a:t>New patient (first appointment).</a:t>
+            </a:r>
+            <a:endParaRPr lang="en-US" sz="1150" dirty="0"/>
           </a:p>
         </p:txBody>
       </p:sp>
@@ -4452,34 +4133,54 @@
         </p:nvSpPr>
         <p:spPr>
           <a:xfrm>
-            <a:off x="548640" y="2633472"/>
-            <a:ext cx="2377440" cy="822960"/>
-          </a:xfrm>
-          <a:prstGeom prst="rect">
-            <a:avLst/>
-          </a:prstGeom>
-          <a:noFill/>
-          <a:ln/>
-        </p:spPr>
-        <p:txBody>
-          <a:bodyPr wrap="square" rtlCol="0" anchor="ctr"/>
-          <a:lstStyle/>
-          <a:p>
-            <a:pPr indent="0" marL="0">
-              <a:buNone/>
-            </a:pPr>
-            <a:r>
-              <a:rPr lang="en-US" sz="1200" b="1" spc="150" kern="0" dirty="0">
-                <a:solidFill>
-                  <a:srgbClr val="49A698"/>
-                </a:solidFill>
-                <a:latin typeface="Calibri" pitchFamily="34" charset="0"/>
-                <a:ea typeface="Calibri" pitchFamily="34" charset="-122"/>
-                <a:cs typeface="Calibri" pitchFamily="34" charset="-120"/>
-              </a:rPr>
-              <a:t>PRE-FLAGGED FOR YOU</a:t>
-            </a:r>
-            <a:endParaRPr lang="en-US" sz="1200" dirty="0"/>
+            <a:off x="548640" y="2990088"/>
+            <a:ext cx="5394960" cy="749808"/>
+          </a:xfrm>
+          <a:prstGeom prst="rect">
+            <a:avLst/>
+          </a:prstGeom>
+          <a:noFill/>
+          <a:ln/>
+        </p:spPr>
+        <p:txBody>
+          <a:bodyPr wrap="square" rtlCol="0" anchor="ctr"/>
+          <a:lstStyle/>
+          <a:p>
+            <a:pPr indent="0" marL="0">
+              <a:lnSpc>
+                <a:spcPct val="105000"/>
+              </a:lnSpc>
+              <a:buNone/>
+            </a:pPr>
+            <a:r>
+              <a:rPr lang="en-US" sz="1150" b="1" dirty="0">
+                <a:solidFill>
+                  <a:srgbClr val="1F4E4A"/>
+                </a:solidFill>
+                <a:latin typeface="Calibri" pitchFamily="34" charset="0"/>
+                <a:ea typeface="Calibri" pitchFamily="34" charset="-122"/>
+                <a:cs typeface="Calibri" pitchFamily="34" charset="-120"/>
+              </a:rPr>
+              <a:t>B2B / B2C — </a:t>
+            </a:r>
+            <a:pPr indent="0" marL="0">
+              <a:lnSpc>
+                <a:spcPct val="105000"/>
+              </a:lnSpc>
+              <a:buNone/>
+            </a:pPr>
+            <a:r>
+              <a:rPr lang="en-US" sz="1150" dirty="0">
+                <a:solidFill>
+                  <a:srgbClr val="14322C"/>
+                </a:solidFill>
+                <a:latin typeface="Calibri" pitchFamily="34" charset="0"/>
+                <a:ea typeface="Calibri" pitchFamily="34" charset="-122"/>
+                <a:cs typeface="Calibri" pitchFamily="34" charset="-120"/>
+              </a:rPr>
+              <a:t>Referred through a practice / came directly. B2C is inferred (total − B2B) until Analytics validates.</a:t>
+            </a:r>
+            <a:endParaRPr lang="en-US" sz="1150" dirty="0"/>
           </a:p>
         </p:txBody>
       </p:sp>
@@ -4491,8 +4192,8 @@
         </p:nvSpPr>
         <p:spPr>
           <a:xfrm>
-            <a:off x="3108960" y="2633472"/>
-            <a:ext cx="8503920" cy="1051560"/>
+            <a:off x="548640" y="3776472"/>
+            <a:ext cx="5394960" cy="749808"/>
           </a:xfrm>
           <a:prstGeom prst="rect">
             <a:avLst/>
@@ -4506,12 +4207,29 @@
           <a:p>
             <a:pPr indent="0" marL="0">
               <a:lnSpc>
-                <a:spcPct val="112000"/>
+                <a:spcPct val="105000"/>
               </a:lnSpc>
               <a:buNone/>
             </a:pPr>
             <a:r>
-              <a:rPr lang="en-US" sz="1250" dirty="0">
+              <a:rPr lang="en-US" sz="1150" b="1" dirty="0">
+                <a:solidFill>
+                  <a:srgbClr val="1F4E4A"/>
+                </a:solidFill>
+                <a:latin typeface="Calibri" pitchFamily="34" charset="0"/>
+                <a:ea typeface="Calibri" pitchFamily="34" charset="-122"/>
+                <a:cs typeface="Calibri" pitchFamily="34" charset="-120"/>
+              </a:rPr>
+              <a:t>MMC — </a:t>
+            </a:r>
+            <a:pPr indent="0" marL="0">
+              <a:lnSpc>
+                <a:spcPct val="105000"/>
+              </a:lnSpc>
+              <a:buNone/>
+            </a:pPr>
+            <a:r>
+              <a:rPr lang="en-US" sz="1150" dirty="0">
                 <a:solidFill>
                   <a:srgbClr val="14322C"/>
                 </a:solidFill>
@@ -4519,9 +4237,9 @@
                 <a:ea typeface="Calibri" pitchFamily="34" charset="-122"/>
                 <a:cs typeface="Calibri" pitchFamily="34" charset="-120"/>
               </a:rPr>
-              <a:t>54 auto-flags already marked: pediatric offices, addiction medicine (Gammons), possible competitors, ortho groups with in-house spine, neurosurgeons. Confirm or override.</a:t>
-            </a:r>
-            <a:endParaRPr lang="en-US" sz="1250" dirty="0"/>
+              <a:t>Map My Customers — the field CRM you check into.</a:t>
+            </a:r>
+            <a:endParaRPr lang="en-US" sz="1150" dirty="0"/>
           </a:p>
         </p:txBody>
       </p:sp>
@@ -4533,34 +4251,54 @@
         </p:nvSpPr>
         <p:spPr>
           <a:xfrm>
-            <a:off x="548640" y="3803904"/>
-            <a:ext cx="2377440" cy="822960"/>
-          </a:xfrm>
-          <a:prstGeom prst="rect">
-            <a:avLst/>
-          </a:prstGeom>
-          <a:noFill/>
-          <a:ln/>
-        </p:spPr>
-        <p:txBody>
-          <a:bodyPr wrap="square" rtlCol="0" anchor="ctr"/>
-          <a:lstStyle/>
-          <a:p>
-            <a:pPr indent="0" marL="0">
-              <a:buNone/>
-            </a:pPr>
-            <a:r>
-              <a:rPr lang="en-US" sz="1200" b="1" spc="150" kern="0" dirty="0">
-                <a:solidFill>
-                  <a:srgbClr val="49A698"/>
-                </a:solidFill>
-                <a:latin typeface="Calibri" pitchFamily="34" charset="0"/>
-                <a:ea typeface="Calibri" pitchFamily="34" charset="-122"/>
-                <a:cs typeface="Calibri" pitchFamily="34" charset="-120"/>
-              </a:rPr>
-              <a:t>ONE RULE</a:t>
-            </a:r>
-            <a:endParaRPr lang="en-US" sz="1200" dirty="0"/>
+            <a:off x="548640" y="4562856"/>
+            <a:ext cx="5394960" cy="749808"/>
+          </a:xfrm>
+          <a:prstGeom prst="rect">
+            <a:avLst/>
+          </a:prstGeom>
+          <a:noFill/>
+          <a:ln/>
+        </p:spPr>
+        <p:txBody>
+          <a:bodyPr wrap="square" rtlCol="0" anchor="ctr"/>
+          <a:lstStyle/>
+          <a:p>
+            <a:pPr indent="0" marL="0">
+              <a:lnSpc>
+                <a:spcPct val="105000"/>
+              </a:lnSpc>
+              <a:buNone/>
+            </a:pPr>
+            <a:r>
+              <a:rPr lang="en-US" sz="1150" b="1" dirty="0">
+                <a:solidFill>
+                  <a:srgbClr val="1F4E4A"/>
+                </a:solidFill>
+                <a:latin typeface="Calibri" pitchFamily="34" charset="0"/>
+                <a:ea typeface="Calibri" pitchFamily="34" charset="-122"/>
+                <a:cs typeface="Calibri" pitchFamily="34" charset="-120"/>
+              </a:rPr>
+              <a:t>PER number — </a:t>
+            </a:r>
+            <a:pPr indent="0" marL="0">
+              <a:lnSpc>
+                <a:spcPct val="105000"/>
+              </a:lnSpc>
+              <a:buNone/>
+            </a:pPr>
+            <a:r>
+              <a:rPr lang="en-US" sz="1150" dirty="0">
+                <a:solidFill>
+                  <a:srgbClr val="14322C"/>
+                </a:solidFill>
+                <a:latin typeface="Calibri" pitchFamily="34" charset="0"/>
+                <a:ea typeface="Calibri" pitchFamily="34" charset="-122"/>
+                <a:cs typeface="Calibri" pitchFamily="34" charset="-120"/>
+              </a:rPr>
+              <a:t>The patient ID in the referral export; distinct PER = one patient.</a:t>
+            </a:r>
+            <a:endParaRPr lang="en-US" sz="1150" dirty="0"/>
           </a:p>
         </p:txBody>
       </p:sp>
@@ -4572,8 +4310,8 @@
         </p:nvSpPr>
         <p:spPr>
           <a:xfrm>
-            <a:off x="3108960" y="3803904"/>
-            <a:ext cx="8503920" cy="1051560"/>
+            <a:off x="548640" y="5349240"/>
+            <a:ext cx="5394960" cy="749808"/>
           </a:xfrm>
           <a:prstGeom prst="rect">
             <a:avLst/>
@@ -4587,12 +4325,29 @@
           <a:p>
             <a:pPr indent="0" marL="0">
               <a:lnSpc>
-                <a:spcPct val="112000"/>
+                <a:spcPct val="105000"/>
               </a:lnSpc>
               <a:buNone/>
             </a:pPr>
             <a:r>
-              <a:rPr lang="en-US" sz="1250" dirty="0">
+              <a:rPr lang="en-US" sz="1150" b="1" dirty="0">
+                <a:solidFill>
+                  <a:srgbClr val="1F4E4A"/>
+                </a:solidFill>
+                <a:latin typeface="Calibri" pitchFamily="34" charset="0"/>
+                <a:ea typeface="Calibri" pitchFamily="34" charset="-122"/>
+                <a:cs typeface="Calibri" pitchFamily="34" charset="-120"/>
+              </a:rPr>
+              <a:t>Attributed patient — </a:t>
+            </a:r>
+            <a:pPr indent="0" marL="0">
+              <a:lnSpc>
+                <a:spcPct val="105000"/>
+              </a:lnSpc>
+              <a:buNone/>
+            </a:pPr>
+            <a:r>
+              <a:rPr lang="en-US" sz="1150" dirty="0">
                 <a:solidFill>
                   <a:srgbClr val="14322C"/>
                 </a:solidFill>
@@ -4600,9 +4355,9 @@
                 <a:ea typeface="Calibri" pitchFamily="34" charset="-122"/>
                 <a:cs typeface="Calibri" pitchFamily="34" charset="-120"/>
               </a:rPr>
-              <a:t>Producing accounts are never deleted on a hunch — flag “verify relationship” instead. Removal needs a reason; that's what makes the final list defensible.</a:t>
-            </a:r>
-            <a:endParaRPr lang="en-US" sz="1250" dirty="0"/>
+              <a:t>Referral matched to a practice — NOT a confirmed kept visit.</a:t>
+            </a:r>
+            <a:endParaRPr lang="en-US" sz="1150" dirty="0"/>
           </a:p>
         </p:txBody>
       </p:sp>
@@ -4614,34 +4369,54 @@
         </p:nvSpPr>
         <p:spPr>
           <a:xfrm>
-            <a:off x="548640" y="4974336"/>
-            <a:ext cx="2377440" cy="822960"/>
-          </a:xfrm>
-          <a:prstGeom prst="rect">
-            <a:avLst/>
-          </a:prstGeom>
-          <a:noFill/>
-          <a:ln/>
-        </p:spPr>
-        <p:txBody>
-          <a:bodyPr wrap="square" rtlCol="0" anchor="ctr"/>
-          <a:lstStyle/>
-          <a:p>
-            <a:pPr indent="0" marL="0">
-              <a:buNone/>
-            </a:pPr>
-            <a:r>
-              <a:rPr lang="en-US" sz="1200" b="1" spc="150" kern="0" dirty="0">
-                <a:solidFill>
-                  <a:srgbClr val="49A698"/>
-                </a:solidFill>
-                <a:latin typeface="Calibri" pitchFamily="34" charset="0"/>
-                <a:ea typeface="Calibri" pitchFamily="34" charset="-122"/>
-                <a:cs typeface="Calibri" pitchFamily="34" charset="-120"/>
-              </a:rPr>
-              <a:t>WHAT HAPPENS THEN</a:t>
-            </a:r>
-            <a:endParaRPr lang="en-US" sz="1200" dirty="0"/>
+            <a:off x="6263640" y="1417320"/>
+            <a:ext cx="5394960" cy="749808"/>
+          </a:xfrm>
+          <a:prstGeom prst="rect">
+            <a:avLst/>
+          </a:prstGeom>
+          <a:noFill/>
+          <a:ln/>
+        </p:spPr>
+        <p:txBody>
+          <a:bodyPr wrap="square" rtlCol="0" anchor="ctr"/>
+          <a:lstStyle/>
+          <a:p>
+            <a:pPr indent="0" marL="0">
+              <a:lnSpc>
+                <a:spcPct val="105000"/>
+              </a:lnSpc>
+              <a:buNone/>
+            </a:pPr>
+            <a:r>
+              <a:rPr lang="en-US" sz="1150" b="1" dirty="0">
+                <a:solidFill>
+                  <a:srgbClr val="1F4E4A"/>
+                </a:solidFill>
+                <a:latin typeface="Calibri" pitchFamily="34" charset="0"/>
+                <a:ea typeface="Calibri" pitchFamily="34" charset="-122"/>
+                <a:cs typeface="Calibri" pitchFamily="34" charset="-120"/>
+              </a:rPr>
+              <a:t>Evidence band — </a:t>
+            </a:r>
+            <a:pPr indent="0" marL="0">
+              <a:lnSpc>
+                <a:spcPct val="105000"/>
+              </a:lnSpc>
+              <a:buNone/>
+            </a:pPr>
+            <a:r>
+              <a:rPr lang="en-US" sz="1150" dirty="0">
+                <a:solidFill>
+                  <a:srgbClr val="14322C"/>
+                </a:solidFill>
+                <a:latin typeface="Calibri" pitchFamily="34" charset="0"/>
+                <a:ea typeface="Calibri" pitchFamily="34" charset="-122"/>
+                <a:cs typeface="Calibri" pitchFamily="34" charset="-120"/>
+              </a:rPr>
+              <a:t>What an account actually sent: repeat spine · one spine · ortho · other · nothing (prospect).</a:t>
+            </a:r>
+            <a:endParaRPr lang="en-US" sz="1150" dirty="0"/>
           </a:p>
         </p:txBody>
       </p:sp>
@@ -4653,8 +4428,8 @@
         </p:nvSpPr>
         <p:spPr>
           <a:xfrm>
-            <a:off x="3108960" y="4974336"/>
-            <a:ext cx="8503920" cy="1051560"/>
+            <a:off x="6263640" y="2203704"/>
+            <a:ext cx="5394960" cy="749808"/>
           </a:xfrm>
           <a:prstGeom prst="rect">
             <a:avLst/>
@@ -4668,12 +4443,29 @@
           <a:p>
             <a:pPr indent="0" marL="0">
               <a:lnSpc>
-                <a:spcPct val="112000"/>
+                <a:spcPct val="105000"/>
               </a:lnSpc>
               <a:buNone/>
             </a:pPr>
             <a:r>
-              <a:rPr lang="en-US" sz="1250" dirty="0">
+              <a:rPr lang="en-US" sz="1150" b="1" dirty="0">
+                <a:solidFill>
+                  <a:srgbClr val="1F4E4A"/>
+                </a:solidFill>
+                <a:latin typeface="Calibri" pitchFamily="34" charset="0"/>
+                <a:ea typeface="Calibri" pitchFamily="34" charset="-122"/>
+                <a:cs typeface="Calibri" pitchFamily="34" charset="-120"/>
+              </a:rPr>
+              <a:t>Wave 1 — </a:t>
+            </a:r>
+            <a:pPr indent="0" marL="0">
+              <a:lnSpc>
+                <a:spcPct val="105000"/>
+              </a:lnSpc>
+              <a:buNone/>
+            </a:pPr>
+            <a:r>
+              <a:rPr lang="en-US" sz="1150" dirty="0">
                 <a:solidFill>
                   <a:srgbClr val="14322C"/>
                 </a:solidFill>
@@ -4681,9 +4473,245 @@
                 <a:ea typeface="Calibri" pitchFamily="34" charset="-122"/>
                 <a:cs typeface="Calibri" pitchFamily="34" charset="-120"/>
               </a:rPr>
-              <a:t>Jul 31: approved universe locked, routes regenerated, the app refreshes. Aug 3: we run on a book everyone trusts — because you built it.</a:t>
-            </a:r>
-            <a:endParaRPr lang="en-US" sz="1250" dirty="0"/>
+              <a:t>The 90 proven senders that never wait 2+ weeks.</a:t>
+            </a:r>
+            <a:endParaRPr lang="en-US" sz="1150" dirty="0"/>
+          </a:p>
+        </p:txBody>
+      </p:sp>
+      <p:sp>
+        <p:nvSpPr>
+          <p:cNvPr id="12" name="Text 10"/>
+          <p:cNvSpPr/>
+          <p:nvPr/>
+        </p:nvSpPr>
+        <p:spPr>
+          <a:xfrm>
+            <a:off x="6263640" y="2990088"/>
+            <a:ext cx="5394960" cy="749808"/>
+          </a:xfrm>
+          <a:prstGeom prst="rect">
+            <a:avLst/>
+          </a:prstGeom>
+          <a:noFill/>
+          <a:ln/>
+        </p:spPr>
+        <p:txBody>
+          <a:bodyPr wrap="square" rtlCol="0" anchor="ctr"/>
+          <a:lstStyle/>
+          <a:p>
+            <a:pPr indent="0" marL="0">
+              <a:lnSpc>
+                <a:spcPct val="105000"/>
+              </a:lnSpc>
+              <a:buNone/>
+            </a:pPr>
+            <a:r>
+              <a:rPr lang="en-US" sz="1150" b="1" dirty="0">
+                <a:solidFill>
+                  <a:srgbClr val="1F4E4A"/>
+                </a:solidFill>
+                <a:latin typeface="Calibri" pitchFamily="34" charset="0"/>
+                <a:ea typeface="Calibri" pitchFamily="34" charset="-122"/>
+                <a:cs typeface="Calibri" pitchFamily="34" charset="-120"/>
+              </a:rPr>
+              <a:t>Visit-day — </a:t>
+            </a:r>
+            <a:pPr indent="0" marL="0">
+              <a:lnSpc>
+                <a:spcPct val="105000"/>
+              </a:lnSpc>
+              <a:buNone/>
+            </a:pPr>
+            <a:r>
+              <a:rPr lang="en-US" sz="1150" dirty="0">
+                <a:solidFill>
+                  <a:srgbClr val="14322C"/>
+                </a:solidFill>
+                <a:latin typeface="Calibri" pitchFamily="34" charset="0"/>
+                <a:ea typeface="Calibri" pitchFamily="34" charset="-122"/>
+                <a:cs typeface="Calibri" pitchFamily="34" charset="-120"/>
+              </a:rPr>
+              <a:t>One PL, one practice, one date — the activity unit.</a:t>
+            </a:r>
+            <a:endParaRPr lang="en-US" sz="1150" dirty="0"/>
+          </a:p>
+        </p:txBody>
+      </p:sp>
+      <p:sp>
+        <p:nvSpPr>
+          <p:cNvPr id="13" name="Text 11"/>
+          <p:cNvSpPr/>
+          <p:nvPr/>
+        </p:nvSpPr>
+        <p:spPr>
+          <a:xfrm>
+            <a:off x="6263640" y="3776472"/>
+            <a:ext cx="5394960" cy="749808"/>
+          </a:xfrm>
+          <a:prstGeom prst="rect">
+            <a:avLst/>
+          </a:prstGeom>
+          <a:noFill/>
+          <a:ln/>
+        </p:spPr>
+        <p:txBody>
+          <a:bodyPr wrap="square" rtlCol="0" anchor="ctr"/>
+          <a:lstStyle/>
+          <a:p>
+            <a:pPr indent="0" marL="0">
+              <a:lnSpc>
+                <a:spcPct val="105000"/>
+              </a:lnSpc>
+              <a:buNone/>
+            </a:pPr>
+            <a:r>
+              <a:rPr lang="en-US" sz="1150" b="1" dirty="0">
+                <a:solidFill>
+                  <a:srgbClr val="1F4E4A"/>
+                </a:solidFill>
+                <a:latin typeface="Calibri" pitchFamily="34" charset="0"/>
+                <a:ea typeface="Calibri" pitchFamily="34" charset="-122"/>
+                <a:cs typeface="Calibri" pitchFamily="34" charset="-120"/>
+              </a:rPr>
+              <a:t>Lag — </a:t>
+            </a:r>
+            <a:pPr indent="0" marL="0">
+              <a:lnSpc>
+                <a:spcPct val="105000"/>
+              </a:lnSpc>
+              <a:buNone/>
+            </a:pPr>
+            <a:r>
+              <a:rPr lang="en-US" sz="1150" dirty="0">
+                <a:solidFill>
+                  <a:srgbClr val="14322C"/>
+                </a:solidFill>
+                <a:latin typeface="Calibri" pitchFamily="34" charset="0"/>
+                <a:ea typeface="Calibri" pitchFamily="34" charset="-122"/>
+                <a:cs typeface="Calibri" pitchFamily="34" charset="-120"/>
+              </a:rPr>
+              <a:t>Visit → first appointment: median 31 days. Today's work = September's patients.</a:t>
+            </a:r>
+            <a:endParaRPr lang="en-US" sz="1150" dirty="0"/>
+          </a:p>
+        </p:txBody>
+      </p:sp>
+      <p:sp>
+        <p:nvSpPr>
+          <p:cNvPr id="14" name="Text 12"/>
+          <p:cNvSpPr/>
+          <p:nvPr/>
+        </p:nvSpPr>
+        <p:spPr>
+          <a:xfrm>
+            <a:off x="6263640" y="4562856"/>
+            <a:ext cx="5394960" cy="749808"/>
+          </a:xfrm>
+          <a:prstGeom prst="rect">
+            <a:avLst/>
+          </a:prstGeom>
+          <a:noFill/>
+          <a:ln/>
+        </p:spPr>
+        <p:txBody>
+          <a:bodyPr wrap="square" rtlCol="0" anchor="ctr"/>
+          <a:lstStyle/>
+          <a:p>
+            <a:pPr indent="0" marL="0">
+              <a:lnSpc>
+                <a:spcPct val="105000"/>
+              </a:lnSpc>
+              <a:buNone/>
+            </a:pPr>
+            <a:r>
+              <a:rPr lang="en-US" sz="1150" b="1" dirty="0">
+                <a:solidFill>
+                  <a:srgbClr val="1F4E4A"/>
+                </a:solidFill>
+                <a:latin typeface="Calibri" pitchFamily="34" charset="0"/>
+                <a:ea typeface="Calibri" pitchFamily="34" charset="-122"/>
+                <a:cs typeface="Calibri" pitchFamily="34" charset="-120"/>
+              </a:rPr>
+              <a:t>WC / PI / no-fault — </a:t>
+            </a:r>
+            <a:pPr indent="0" marL="0">
+              <a:lnSpc>
+                <a:spcPct val="105000"/>
+              </a:lnSpc>
+              <a:buNone/>
+            </a:pPr>
+            <a:r>
+              <a:rPr lang="en-US" sz="1150" dirty="0">
+                <a:solidFill>
+                  <a:srgbClr val="14322C"/>
+                </a:solidFill>
+                <a:latin typeface="Calibri" pitchFamily="34" charset="0"/>
+                <a:ea typeface="Calibri" pitchFamily="34" charset="-122"/>
+                <a:cs typeface="Calibri" pitchFamily="34" charset="-120"/>
+              </a:rPr>
+              <a:t>Workers' comp, personal injury, Michigan auto — accepted, no referral, no copay.</a:t>
+            </a:r>
+            <a:endParaRPr lang="en-US" sz="1150" dirty="0"/>
+          </a:p>
+        </p:txBody>
+      </p:sp>
+      <p:sp>
+        <p:nvSpPr>
+          <p:cNvPr id="15" name="Text 13"/>
+          <p:cNvSpPr/>
+          <p:nvPr/>
+        </p:nvSpPr>
+        <p:spPr>
+          <a:xfrm>
+            <a:off x="6263640" y="5349240"/>
+            <a:ext cx="5394960" cy="749808"/>
+          </a:xfrm>
+          <a:prstGeom prst="rect">
+            <a:avLst/>
+          </a:prstGeom>
+          <a:noFill/>
+          <a:ln/>
+        </p:spPr>
+        <p:txBody>
+          <a:bodyPr wrap="square" rtlCol="0" anchor="ctr"/>
+          <a:lstStyle/>
+          <a:p>
+            <a:pPr indent="0" marL="0">
+              <a:lnSpc>
+                <a:spcPct val="105000"/>
+              </a:lnSpc>
+              <a:buNone/>
+            </a:pPr>
+            <a:r>
+              <a:rPr lang="en-US" sz="1150" b="1" dirty="0">
+                <a:solidFill>
+                  <a:srgbClr val="1F4E4A"/>
+                </a:solidFill>
+                <a:latin typeface="Calibri" pitchFamily="34" charset="0"/>
+                <a:ea typeface="Calibri" pitchFamily="34" charset="-122"/>
+                <a:cs typeface="Calibri" pitchFamily="34" charset="-120"/>
+              </a:rPr>
+              <a:t>FQHC — </a:t>
+            </a:r>
+            <a:pPr indent="0" marL="0">
+              <a:lnSpc>
+                <a:spcPct val="105000"/>
+              </a:lnSpc>
+              <a:buNone/>
+            </a:pPr>
+            <a:r>
+              <a:rPr lang="en-US" sz="1150" dirty="0">
+                <a:solidFill>
+                  <a:srgbClr val="14322C"/>
+                </a:solidFill>
+                <a:latin typeface="Calibri" pitchFamily="34" charset="0"/>
+                <a:ea typeface="Calibri" pitchFamily="34" charset="-122"/>
+                <a:cs typeface="Calibri" pitchFamily="34" charset="-120"/>
+              </a:rPr>
+              <a:t>Community health center — usually Medicaid-heavy (red payer chip).</a:t>
+            </a:r>
+            <a:endParaRPr lang="en-US" sz="1150" dirty="0"/>
           </a:p>
         </p:txBody>
       </p:sp>
@@ -4745,7 +4773,7 @@
                 <a:ea typeface="Cambria" pitchFamily="34" charset="-122"/>
                 <a:cs typeface="Cambria" pitchFamily="34" charset="-120"/>
               </a:rPr>
-              <a:t>Say what we mean — the shared vocabulary</a:t>
+              <a:t>“Configured Frequency,” explained honestly</a:t>
             </a:r>
             <a:endParaRPr lang="en-US" sz="2900" dirty="0"/>
           </a:p>
@@ -4784,7 +4812,7 @@
                 <a:ea typeface="Calibri" pitchFamily="34" charset="-122"/>
                 <a:cs typeface="Calibri" pitchFamily="34" charset="-120"/>
               </a:rPr>
-              <a:t>Full glossary in pm/glossary.md — flag anything that reads wrong</a:t>
+              <a:t>Called out on purpose: this one is easy to misread, in both directions</a:t>
             </a:r>
             <a:endParaRPr lang="en-US" sz="1300" dirty="0"/>
           </a:p>
@@ -4792,14 +4820,80 @@
       </p:sp>
       <p:sp>
         <p:nvSpPr>
-          <p:cNvPr id="4" name="Text 2"/>
-          <p:cNvSpPr/>
-          <p:nvPr/>
-        </p:nvSpPr>
-        <p:spPr>
-          <a:xfrm>
-            <a:off x="548640" y="1417320"/>
-            <a:ext cx="5394960" cy="749808"/>
+          <p:cNvPr id="4" name="Shape 2"/>
+          <p:cNvSpPr/>
+          <p:nvPr/>
+        </p:nvSpPr>
+        <p:spPr>
+          <a:xfrm>
+            <a:off x="502920" y="1417320"/>
+            <a:ext cx="11155680" cy="1115568"/>
+          </a:xfrm>
+          <a:prstGeom prst="roundRect">
+            <a:avLst>
+              <a:gd name="adj" fmla="val 4918"/>
+            </a:avLst>
+          </a:prstGeom>
+          <a:solidFill>
+            <a:srgbClr val="E7F2EF"/>
+          </a:solidFill>
+          <a:ln w="12700">
+            <a:solidFill>
+              <a:srgbClr val="DCE7E3"/>
+            </a:solidFill>
+            <a:prstDash val="solid"/>
+          </a:ln>
+        </p:spPr>
+      </p:sp>
+      <p:sp>
+        <p:nvSpPr>
+          <p:cNvPr id="5" name="Text 3"/>
+          <p:cNvSpPr/>
+          <p:nvPr/>
+        </p:nvSpPr>
+        <p:spPr>
+          <a:xfrm>
+            <a:off x="777240" y="1527048"/>
+            <a:ext cx="2651760" cy="914400"/>
+          </a:xfrm>
+          <a:prstGeom prst="rect">
+            <a:avLst/>
+          </a:prstGeom>
+          <a:noFill/>
+          <a:ln/>
+        </p:spPr>
+        <p:txBody>
+          <a:bodyPr wrap="square" rtlCol="0" anchor="ctr"/>
+          <a:lstStyle/>
+          <a:p>
+            <a:pPr indent="0" marL="0">
+              <a:buNone/>
+            </a:pPr>
+            <a:r>
+              <a:rPr lang="en-US" sz="1150" b="1" spc="100" kern="0" dirty="0">
+                <a:solidFill>
+                  <a:srgbClr val="1F4E4A"/>
+                </a:solidFill>
+                <a:latin typeface="Calibri" pitchFamily="34" charset="0"/>
+                <a:ea typeface="Calibri" pitchFamily="34" charset="-122"/>
+                <a:cs typeface="Calibri" pitchFamily="34" charset="-120"/>
+              </a:rPr>
+              <a:t>WHAT IT IS</a:t>
+            </a:r>
+            <a:endParaRPr lang="en-US" sz="1150" dirty="0"/>
+          </a:p>
+        </p:txBody>
+      </p:sp>
+      <p:sp>
+        <p:nvSpPr>
+          <p:cNvPr id="6" name="Text 4"/>
+          <p:cNvSpPr/>
+          <p:nvPr/>
+        </p:nvSpPr>
+        <p:spPr>
+          <a:xfrm>
+            <a:off x="3566160" y="1508760"/>
+            <a:ext cx="7863840" cy="960120"/>
           </a:xfrm>
           <a:prstGeom prst="rect">
             <a:avLst/>
@@ -4813,12 +4907,78 @@
           <a:p>
             <a:pPr indent="0" marL="0">
               <a:lnSpc>
-                <a:spcPct val="105000"/>
+                <a:spcPct val="108000"/>
               </a:lnSpc>
               <a:buNone/>
             </a:pPr>
             <a:r>
-              <a:rPr lang="en-US" sz="1150" b="1" dirty="0">
+              <a:rPr lang="en-US" sz="1150" dirty="0">
+                <a:solidFill>
+                  <a:srgbClr val="14322C"/>
+                </a:solidFill>
+                <a:latin typeface="Calibri" pitchFamily="34" charset="0"/>
+                <a:ea typeface="Calibri" pitchFamily="34" charset="-122"/>
+                <a:cs typeface="Calibri" pitchFamily="34" charset="-120"/>
+              </a:rPr>
+              <a:t>MMC's built-in visit-reminder setting (e.g., “every 30 days”), attached to a Group or account. MMC then flags accounts Past Due / Up to Date against it.</a:t>
+            </a:r>
+            <a:endParaRPr lang="en-US" sz="1150" dirty="0"/>
+          </a:p>
+        </p:txBody>
+      </p:sp>
+      <p:sp>
+        <p:nvSpPr>
+          <p:cNvPr id="7" name="Shape 5"/>
+          <p:cNvSpPr/>
+          <p:nvPr/>
+        </p:nvSpPr>
+        <p:spPr>
+          <a:xfrm>
+            <a:off x="502920" y="2660904"/>
+            <a:ext cx="11155680" cy="1115568"/>
+          </a:xfrm>
+          <a:prstGeom prst="roundRect">
+            <a:avLst>
+              <a:gd name="adj" fmla="val 4918"/>
+            </a:avLst>
+          </a:prstGeom>
+          <a:solidFill>
+            <a:srgbClr val="FDF6E7"/>
+          </a:solidFill>
+          <a:ln w="12700">
+            <a:solidFill>
+              <a:srgbClr val="DCE7E3"/>
+            </a:solidFill>
+            <a:prstDash val="solid"/>
+          </a:ln>
+        </p:spPr>
+      </p:sp>
+      <p:sp>
+        <p:nvSpPr>
+          <p:cNvPr id="8" name="Text 6"/>
+          <p:cNvSpPr/>
+          <p:nvPr/>
+        </p:nvSpPr>
+        <p:spPr>
+          <a:xfrm>
+            <a:off x="777240" y="2770632"/>
+            <a:ext cx="2651760" cy="914400"/>
+          </a:xfrm>
+          <a:prstGeom prst="rect">
+            <a:avLst/>
+          </a:prstGeom>
+          <a:noFill/>
+          <a:ln/>
+        </p:spPr>
+        <p:txBody>
+          <a:bodyPr wrap="square" rtlCol="0" anchor="ctr"/>
+          <a:lstStyle/>
+          <a:p>
+            <a:pPr indent="0" marL="0">
+              <a:buNone/>
+            </a:pPr>
+            <a:r>
+              <a:rPr lang="en-US" sz="1150" b="1" spc="100" kern="0" dirty="0">
                 <a:solidFill>
                   <a:srgbClr val="1F4E4A"/>
                 </a:solidFill>
@@ -4826,11 +4986,36 @@
                 <a:ea typeface="Calibri" pitchFamily="34" charset="-122"/>
                 <a:cs typeface="Calibri" pitchFamily="34" charset="-120"/>
               </a:rPr>
-              <a:t>PL — </a:t>
-            </a:r>
+              <a:t>WHAT THE JUL 16 EXPORT SHOWS</a:t>
+            </a:r>
+            <a:endParaRPr lang="en-US" sz="1150" dirty="0"/>
+          </a:p>
+        </p:txBody>
+      </p:sp>
+      <p:sp>
+        <p:nvSpPr>
+          <p:cNvPr id="9" name="Text 7"/>
+          <p:cNvSpPr/>
+          <p:nvPr/>
+        </p:nvSpPr>
+        <p:spPr>
+          <a:xfrm>
+            <a:off x="3566160" y="2752344"/>
+            <a:ext cx="7863840" cy="960120"/>
+          </a:xfrm>
+          <a:prstGeom prst="rect">
+            <a:avLst/>
+          </a:prstGeom>
+          <a:noFill/>
+          <a:ln/>
+        </p:spPr>
+        <p:txBody>
+          <a:bodyPr wrap="square" rtlCol="0" anchor="ctr"/>
+          <a:lstStyle/>
+          <a:p>
             <a:pPr indent="0" marL="0">
               <a:lnSpc>
-                <a:spcPct val="105000"/>
+                <a:spcPct val="108000"/>
               </a:lnSpc>
               <a:buNone/>
             </a:pPr>
@@ -4843,7 +5028,7 @@
                 <a:ea typeface="Calibri" pitchFamily="34" charset="-122"/>
                 <a:cs typeface="Calibri" pitchFamily="34" charset="-120"/>
               </a:rPr>
-              <a:t>Physician Liaison — you.</a:t>
+              <a:t>Almost nobody uses it: 64 of 2,349 owned accounts have ANY frequency set (Kristen 5 · Jasmine 15 · Coty 30 · Sean 14) — and Kristen noted old past-dues can't be cleared, so they're ignored.</a:t>
             </a:r>
             <a:endParaRPr lang="en-US" sz="1150" dirty="0"/>
           </a:p>
@@ -4851,14 +5036,80 @@
       </p:sp>
       <p:sp>
         <p:nvSpPr>
-          <p:cNvPr id="5" name="Text 3"/>
-          <p:cNvSpPr/>
-          <p:nvPr/>
-        </p:nvSpPr>
-        <p:spPr>
-          <a:xfrm>
-            <a:off x="548640" y="2203704"/>
-            <a:ext cx="5394960" cy="749808"/>
+          <p:cNvPr id="10" name="Shape 8"/>
+          <p:cNvSpPr/>
+          <p:nvPr/>
+        </p:nvSpPr>
+        <p:spPr>
+          <a:xfrm>
+            <a:off x="502920" y="3904488"/>
+            <a:ext cx="11155680" cy="1115568"/>
+          </a:xfrm>
+          <a:prstGeom prst="roundRect">
+            <a:avLst>
+              <a:gd name="adj" fmla="val 4918"/>
+            </a:avLst>
+          </a:prstGeom>
+          <a:solidFill>
+            <a:srgbClr val="F7E7E3"/>
+          </a:solidFill>
+          <a:ln w="12700">
+            <a:solidFill>
+              <a:srgbClr val="DCE7E3"/>
+            </a:solidFill>
+            <a:prstDash val="solid"/>
+          </a:ln>
+        </p:spPr>
+      </p:sp>
+      <p:sp>
+        <p:nvSpPr>
+          <p:cNvPr id="11" name="Text 9"/>
+          <p:cNvSpPr/>
+          <p:nvPr/>
+        </p:nvSpPr>
+        <p:spPr>
+          <a:xfrm>
+            <a:off x="777240" y="4014216"/>
+            <a:ext cx="2651760" cy="914400"/>
+          </a:xfrm>
+          <a:prstGeom prst="rect">
+            <a:avLst/>
+          </a:prstGeom>
+          <a:noFill/>
+          <a:ln/>
+        </p:spPr>
+        <p:txBody>
+          <a:bodyPr wrap="square" rtlCol="0" anchor="ctr"/>
+          <a:lstStyle/>
+          <a:p>
+            <a:pPr indent="0" marL="0">
+              <a:buNone/>
+            </a:pPr>
+            <a:r>
+              <a:rPr lang="en-US" sz="1150" b="1" spc="100" kern="0" dirty="0">
+                <a:solidFill>
+                  <a:srgbClr val="1F4E4A"/>
+                </a:solidFill>
+                <a:latin typeface="Calibri" pitchFamily="34" charset="0"/>
+                <a:ea typeface="Calibri" pitchFamily="34" charset="-122"/>
+                <a:cs typeface="Calibri" pitchFamily="34" charset="-120"/>
+              </a:rPr>
+              <a:t>WHAT COULD BE WRONG</a:t>
+            </a:r>
+            <a:endParaRPr lang="en-US" sz="1150" dirty="0"/>
+          </a:p>
+        </p:txBody>
+      </p:sp>
+      <p:sp>
+        <p:nvSpPr>
+          <p:cNvPr id="12" name="Text 10"/>
+          <p:cNvSpPr/>
+          <p:nvPr/>
+        </p:nvSpPr>
+        <p:spPr>
+          <a:xfrm>
+            <a:off x="3566160" y="3995928"/>
+            <a:ext cx="7863840" cy="960120"/>
           </a:xfrm>
           <a:prstGeom prst="rect">
             <a:avLst/>
@@ -4872,12 +5123,78 @@
           <a:p>
             <a:pPr indent="0" marL="0">
               <a:lnSpc>
-                <a:spcPct val="105000"/>
+                <a:spcPct val="108000"/>
               </a:lnSpc>
               <a:buNone/>
             </a:pPr>
             <a:r>
-              <a:rPr lang="en-US" sz="1150" b="1" dirty="0">
+              <a:rPr lang="en-US" sz="1150" dirty="0">
+                <a:solidFill>
+                  <a:srgbClr val="14322C"/>
+                </a:solidFill>
+                <a:latin typeface="Calibri" pitchFamily="34" charset="0"/>
+                <a:ea typeface="Calibri" pitchFamily="34" charset="-122"/>
+                <a:cs typeface="Calibri" pitchFamily="34" charset="-120"/>
+              </a:rPr>
+              <a:t>This reading is only as good as the export. If frequencies live somewhere the export misses (per-person, routes, a newer feature) — tell Joe and we re-pull before repeating the number.</a:t>
+            </a:r>
+            <a:endParaRPr lang="en-US" sz="1150" dirty="0"/>
+          </a:p>
+        </p:txBody>
+      </p:sp>
+      <p:sp>
+        <p:nvSpPr>
+          <p:cNvPr id="13" name="Shape 11"/>
+          <p:cNvSpPr/>
+          <p:nvPr/>
+        </p:nvSpPr>
+        <p:spPr>
+          <a:xfrm>
+            <a:off x="502920" y="5148072"/>
+            <a:ext cx="11155680" cy="1115568"/>
+          </a:xfrm>
+          <a:prstGeom prst="roundRect">
+            <a:avLst>
+              <a:gd name="adj" fmla="val 4918"/>
+            </a:avLst>
+          </a:prstGeom>
+          <a:solidFill>
+            <a:srgbClr val="E7F2EF"/>
+          </a:solidFill>
+          <a:ln w="12700">
+            <a:solidFill>
+              <a:srgbClr val="DCE7E3"/>
+            </a:solidFill>
+            <a:prstDash val="solid"/>
+          </a:ln>
+        </p:spPr>
+      </p:sp>
+      <p:sp>
+        <p:nvSpPr>
+          <p:cNvPr id="14" name="Text 12"/>
+          <p:cNvSpPr/>
+          <p:nvPr/>
+        </p:nvSpPr>
+        <p:spPr>
+          <a:xfrm>
+            <a:off x="777240" y="5257800"/>
+            <a:ext cx="2651760" cy="914400"/>
+          </a:xfrm>
+          <a:prstGeom prst="rect">
+            <a:avLst/>
+          </a:prstGeom>
+          <a:noFill/>
+          <a:ln/>
+        </p:spPr>
+        <p:txBody>
+          <a:bodyPr wrap="square" rtlCol="0" anchor="ctr"/>
+          <a:lstStyle/>
+          <a:p>
+            <a:pPr indent="0" marL="0">
+              <a:buNone/>
+            </a:pPr>
+            <a:r>
+              <a:rPr lang="en-US" sz="1150" b="1" spc="100" kern="0" dirty="0">
                 <a:solidFill>
                   <a:srgbClr val="1F4E4A"/>
                 </a:solidFill>
@@ -4885,11 +5202,36 @@
                 <a:ea typeface="Calibri" pitchFamily="34" charset="-122"/>
                 <a:cs typeface="Calibri" pitchFamily="34" charset="-120"/>
               </a:rPr>
-              <a:t>NP — </a:t>
-            </a:r>
+              <a:t>DON'T CONFUSE IT WITH</a:t>
+            </a:r>
+            <a:endParaRPr lang="en-US" sz="1150" dirty="0"/>
+          </a:p>
+        </p:txBody>
+      </p:sp>
+      <p:sp>
+        <p:nvSpPr>
+          <p:cNvPr id="15" name="Text 13"/>
+          <p:cNvSpPr/>
+          <p:nvPr/>
+        </p:nvSpPr>
+        <p:spPr>
+          <a:xfrm>
+            <a:off x="3566160" y="5239512"/>
+            <a:ext cx="7863840" cy="960120"/>
+          </a:xfrm>
+          <a:prstGeom prst="rect">
+            <a:avLst/>
+          </a:prstGeom>
+          <a:noFill/>
+          <a:ln/>
+        </p:spPr>
+        <p:txBody>
+          <a:bodyPr wrap="square" rtlCol="0" anchor="ctr"/>
+          <a:lstStyle/>
+          <a:p>
             <a:pPr indent="0" marL="0">
               <a:lnSpc>
-                <a:spcPct val="105000"/>
+                <a:spcPct val="108000"/>
               </a:lnSpc>
               <a:buNone/>
             </a:pPr>
@@ -4902,597 +5244,7 @@
                 <a:ea typeface="Calibri" pitchFamily="34" charset="-122"/>
                 <a:cs typeface="Calibri" pitchFamily="34" charset="-120"/>
               </a:rPr>
-              <a:t>New patient (first appointment).</a:t>
-            </a:r>
-            <a:endParaRPr lang="en-US" sz="1150" dirty="0"/>
-          </a:p>
-        </p:txBody>
-      </p:sp>
-      <p:sp>
-        <p:nvSpPr>
-          <p:cNvPr id="6" name="Text 4"/>
-          <p:cNvSpPr/>
-          <p:nvPr/>
-        </p:nvSpPr>
-        <p:spPr>
-          <a:xfrm>
-            <a:off x="548640" y="2990088"/>
-            <a:ext cx="5394960" cy="749808"/>
-          </a:xfrm>
-          <a:prstGeom prst="rect">
-            <a:avLst/>
-          </a:prstGeom>
-          <a:noFill/>
-          <a:ln/>
-        </p:spPr>
-        <p:txBody>
-          <a:bodyPr wrap="square" rtlCol="0" anchor="ctr"/>
-          <a:lstStyle/>
-          <a:p>
-            <a:pPr indent="0" marL="0">
-              <a:lnSpc>
-                <a:spcPct val="105000"/>
-              </a:lnSpc>
-              <a:buNone/>
-            </a:pPr>
-            <a:r>
-              <a:rPr lang="en-US" sz="1150" b="1" dirty="0">
-                <a:solidFill>
-                  <a:srgbClr val="1F4E4A"/>
-                </a:solidFill>
-                <a:latin typeface="Calibri" pitchFamily="34" charset="0"/>
-                <a:ea typeface="Calibri" pitchFamily="34" charset="-122"/>
-                <a:cs typeface="Calibri" pitchFamily="34" charset="-120"/>
-              </a:rPr>
-              <a:t>B2B / B2C — </a:t>
-            </a:r>
-            <a:pPr indent="0" marL="0">
-              <a:lnSpc>
-                <a:spcPct val="105000"/>
-              </a:lnSpc>
-              <a:buNone/>
-            </a:pPr>
-            <a:r>
-              <a:rPr lang="en-US" sz="1150" dirty="0">
-                <a:solidFill>
-                  <a:srgbClr val="14322C"/>
-                </a:solidFill>
-                <a:latin typeface="Calibri" pitchFamily="34" charset="0"/>
-                <a:ea typeface="Calibri" pitchFamily="34" charset="-122"/>
-                <a:cs typeface="Calibri" pitchFamily="34" charset="-120"/>
-              </a:rPr>
-              <a:t>Referred through a practice / came directly. B2C is inferred (total − B2B) until Analytics validates.</a:t>
-            </a:r>
-            <a:endParaRPr lang="en-US" sz="1150" dirty="0"/>
-          </a:p>
-        </p:txBody>
-      </p:sp>
-      <p:sp>
-        <p:nvSpPr>
-          <p:cNvPr id="7" name="Text 5"/>
-          <p:cNvSpPr/>
-          <p:nvPr/>
-        </p:nvSpPr>
-        <p:spPr>
-          <a:xfrm>
-            <a:off x="548640" y="3776472"/>
-            <a:ext cx="5394960" cy="749808"/>
-          </a:xfrm>
-          <a:prstGeom prst="rect">
-            <a:avLst/>
-          </a:prstGeom>
-          <a:noFill/>
-          <a:ln/>
-        </p:spPr>
-        <p:txBody>
-          <a:bodyPr wrap="square" rtlCol="0" anchor="ctr"/>
-          <a:lstStyle/>
-          <a:p>
-            <a:pPr indent="0" marL="0">
-              <a:lnSpc>
-                <a:spcPct val="105000"/>
-              </a:lnSpc>
-              <a:buNone/>
-            </a:pPr>
-            <a:r>
-              <a:rPr lang="en-US" sz="1150" b="1" dirty="0">
-                <a:solidFill>
-                  <a:srgbClr val="1F4E4A"/>
-                </a:solidFill>
-                <a:latin typeface="Calibri" pitchFamily="34" charset="0"/>
-                <a:ea typeface="Calibri" pitchFamily="34" charset="-122"/>
-                <a:cs typeface="Calibri" pitchFamily="34" charset="-120"/>
-              </a:rPr>
-              <a:t>MMC — </a:t>
-            </a:r>
-            <a:pPr indent="0" marL="0">
-              <a:lnSpc>
-                <a:spcPct val="105000"/>
-              </a:lnSpc>
-              <a:buNone/>
-            </a:pPr>
-            <a:r>
-              <a:rPr lang="en-US" sz="1150" dirty="0">
-                <a:solidFill>
-                  <a:srgbClr val="14322C"/>
-                </a:solidFill>
-                <a:latin typeface="Calibri" pitchFamily="34" charset="0"/>
-                <a:ea typeface="Calibri" pitchFamily="34" charset="-122"/>
-                <a:cs typeface="Calibri" pitchFamily="34" charset="-120"/>
-              </a:rPr>
-              <a:t>Map My Customers — the field CRM you check into.</a:t>
-            </a:r>
-            <a:endParaRPr lang="en-US" sz="1150" dirty="0"/>
-          </a:p>
-        </p:txBody>
-      </p:sp>
-      <p:sp>
-        <p:nvSpPr>
-          <p:cNvPr id="8" name="Text 6"/>
-          <p:cNvSpPr/>
-          <p:nvPr/>
-        </p:nvSpPr>
-        <p:spPr>
-          <a:xfrm>
-            <a:off x="548640" y="4562856"/>
-            <a:ext cx="5394960" cy="749808"/>
-          </a:xfrm>
-          <a:prstGeom prst="rect">
-            <a:avLst/>
-          </a:prstGeom>
-          <a:noFill/>
-          <a:ln/>
-        </p:spPr>
-        <p:txBody>
-          <a:bodyPr wrap="square" rtlCol="0" anchor="ctr"/>
-          <a:lstStyle/>
-          <a:p>
-            <a:pPr indent="0" marL="0">
-              <a:lnSpc>
-                <a:spcPct val="105000"/>
-              </a:lnSpc>
-              <a:buNone/>
-            </a:pPr>
-            <a:r>
-              <a:rPr lang="en-US" sz="1150" b="1" dirty="0">
-                <a:solidFill>
-                  <a:srgbClr val="1F4E4A"/>
-                </a:solidFill>
-                <a:latin typeface="Calibri" pitchFamily="34" charset="0"/>
-                <a:ea typeface="Calibri" pitchFamily="34" charset="-122"/>
-                <a:cs typeface="Calibri" pitchFamily="34" charset="-120"/>
-              </a:rPr>
-              <a:t>PER number — </a:t>
-            </a:r>
-            <a:pPr indent="0" marL="0">
-              <a:lnSpc>
-                <a:spcPct val="105000"/>
-              </a:lnSpc>
-              <a:buNone/>
-            </a:pPr>
-            <a:r>
-              <a:rPr lang="en-US" sz="1150" dirty="0">
-                <a:solidFill>
-                  <a:srgbClr val="14322C"/>
-                </a:solidFill>
-                <a:latin typeface="Calibri" pitchFamily="34" charset="0"/>
-                <a:ea typeface="Calibri" pitchFamily="34" charset="-122"/>
-                <a:cs typeface="Calibri" pitchFamily="34" charset="-120"/>
-              </a:rPr>
-              <a:t>The patient ID in the referral export; distinct PER = one patient.</a:t>
-            </a:r>
-            <a:endParaRPr lang="en-US" sz="1150" dirty="0"/>
-          </a:p>
-        </p:txBody>
-      </p:sp>
-      <p:sp>
-        <p:nvSpPr>
-          <p:cNvPr id="9" name="Text 7"/>
-          <p:cNvSpPr/>
-          <p:nvPr/>
-        </p:nvSpPr>
-        <p:spPr>
-          <a:xfrm>
-            <a:off x="548640" y="5349240"/>
-            <a:ext cx="5394960" cy="749808"/>
-          </a:xfrm>
-          <a:prstGeom prst="rect">
-            <a:avLst/>
-          </a:prstGeom>
-          <a:noFill/>
-          <a:ln/>
-        </p:spPr>
-        <p:txBody>
-          <a:bodyPr wrap="square" rtlCol="0" anchor="ctr"/>
-          <a:lstStyle/>
-          <a:p>
-            <a:pPr indent="0" marL="0">
-              <a:lnSpc>
-                <a:spcPct val="105000"/>
-              </a:lnSpc>
-              <a:buNone/>
-            </a:pPr>
-            <a:r>
-              <a:rPr lang="en-US" sz="1150" b="1" dirty="0">
-                <a:solidFill>
-                  <a:srgbClr val="1F4E4A"/>
-                </a:solidFill>
-                <a:latin typeface="Calibri" pitchFamily="34" charset="0"/>
-                <a:ea typeface="Calibri" pitchFamily="34" charset="-122"/>
-                <a:cs typeface="Calibri" pitchFamily="34" charset="-120"/>
-              </a:rPr>
-              <a:t>Attributed patient — </a:t>
-            </a:r>
-            <a:pPr indent="0" marL="0">
-              <a:lnSpc>
-                <a:spcPct val="105000"/>
-              </a:lnSpc>
-              <a:buNone/>
-            </a:pPr>
-            <a:r>
-              <a:rPr lang="en-US" sz="1150" dirty="0">
-                <a:solidFill>
-                  <a:srgbClr val="14322C"/>
-                </a:solidFill>
-                <a:latin typeface="Calibri" pitchFamily="34" charset="0"/>
-                <a:ea typeface="Calibri" pitchFamily="34" charset="-122"/>
-                <a:cs typeface="Calibri" pitchFamily="34" charset="-120"/>
-              </a:rPr>
-              <a:t>Referral matched to a practice — NOT a confirmed kept visit.</a:t>
-            </a:r>
-            <a:endParaRPr lang="en-US" sz="1150" dirty="0"/>
-          </a:p>
-        </p:txBody>
-      </p:sp>
-      <p:sp>
-        <p:nvSpPr>
-          <p:cNvPr id="10" name="Text 8"/>
-          <p:cNvSpPr/>
-          <p:nvPr/>
-        </p:nvSpPr>
-        <p:spPr>
-          <a:xfrm>
-            <a:off x="6263640" y="1417320"/>
-            <a:ext cx="5394960" cy="749808"/>
-          </a:xfrm>
-          <a:prstGeom prst="rect">
-            <a:avLst/>
-          </a:prstGeom>
-          <a:noFill/>
-          <a:ln/>
-        </p:spPr>
-        <p:txBody>
-          <a:bodyPr wrap="square" rtlCol="0" anchor="ctr"/>
-          <a:lstStyle/>
-          <a:p>
-            <a:pPr indent="0" marL="0">
-              <a:lnSpc>
-                <a:spcPct val="105000"/>
-              </a:lnSpc>
-              <a:buNone/>
-            </a:pPr>
-            <a:r>
-              <a:rPr lang="en-US" sz="1150" b="1" dirty="0">
-                <a:solidFill>
-                  <a:srgbClr val="1F4E4A"/>
-                </a:solidFill>
-                <a:latin typeface="Calibri" pitchFamily="34" charset="0"/>
-                <a:ea typeface="Calibri" pitchFamily="34" charset="-122"/>
-                <a:cs typeface="Calibri" pitchFamily="34" charset="-120"/>
-              </a:rPr>
-              <a:t>Evidence band — </a:t>
-            </a:r>
-            <a:pPr indent="0" marL="0">
-              <a:lnSpc>
-                <a:spcPct val="105000"/>
-              </a:lnSpc>
-              <a:buNone/>
-            </a:pPr>
-            <a:r>
-              <a:rPr lang="en-US" sz="1150" dirty="0">
-                <a:solidFill>
-                  <a:srgbClr val="14322C"/>
-                </a:solidFill>
-                <a:latin typeface="Calibri" pitchFamily="34" charset="0"/>
-                <a:ea typeface="Calibri" pitchFamily="34" charset="-122"/>
-                <a:cs typeface="Calibri" pitchFamily="34" charset="-120"/>
-              </a:rPr>
-              <a:t>What an account actually sent: repeat spine · one spine · ortho · other · nothing (prospect).</a:t>
-            </a:r>
-            <a:endParaRPr lang="en-US" sz="1150" dirty="0"/>
-          </a:p>
-        </p:txBody>
-      </p:sp>
-      <p:sp>
-        <p:nvSpPr>
-          <p:cNvPr id="11" name="Text 9"/>
-          <p:cNvSpPr/>
-          <p:nvPr/>
-        </p:nvSpPr>
-        <p:spPr>
-          <a:xfrm>
-            <a:off x="6263640" y="2203704"/>
-            <a:ext cx="5394960" cy="749808"/>
-          </a:xfrm>
-          <a:prstGeom prst="rect">
-            <a:avLst/>
-          </a:prstGeom>
-          <a:noFill/>
-          <a:ln/>
-        </p:spPr>
-        <p:txBody>
-          <a:bodyPr wrap="square" rtlCol="0" anchor="ctr"/>
-          <a:lstStyle/>
-          <a:p>
-            <a:pPr indent="0" marL="0">
-              <a:lnSpc>
-                <a:spcPct val="105000"/>
-              </a:lnSpc>
-              <a:buNone/>
-            </a:pPr>
-            <a:r>
-              <a:rPr lang="en-US" sz="1150" b="1" dirty="0">
-                <a:solidFill>
-                  <a:srgbClr val="1F4E4A"/>
-                </a:solidFill>
-                <a:latin typeface="Calibri" pitchFamily="34" charset="0"/>
-                <a:ea typeface="Calibri" pitchFamily="34" charset="-122"/>
-                <a:cs typeface="Calibri" pitchFamily="34" charset="-120"/>
-              </a:rPr>
-              <a:t>Wave 1 — </a:t>
-            </a:r>
-            <a:pPr indent="0" marL="0">
-              <a:lnSpc>
-                <a:spcPct val="105000"/>
-              </a:lnSpc>
-              <a:buNone/>
-            </a:pPr>
-            <a:r>
-              <a:rPr lang="en-US" sz="1150" dirty="0">
-                <a:solidFill>
-                  <a:srgbClr val="14322C"/>
-                </a:solidFill>
-                <a:latin typeface="Calibri" pitchFamily="34" charset="0"/>
-                <a:ea typeface="Calibri" pitchFamily="34" charset="-122"/>
-                <a:cs typeface="Calibri" pitchFamily="34" charset="-120"/>
-              </a:rPr>
-              <a:t>The 90 proven senders that never wait 2+ weeks.</a:t>
-            </a:r>
-            <a:endParaRPr lang="en-US" sz="1150" dirty="0"/>
-          </a:p>
-        </p:txBody>
-      </p:sp>
-      <p:sp>
-        <p:nvSpPr>
-          <p:cNvPr id="12" name="Text 10"/>
-          <p:cNvSpPr/>
-          <p:nvPr/>
-        </p:nvSpPr>
-        <p:spPr>
-          <a:xfrm>
-            <a:off x="6263640" y="2990088"/>
-            <a:ext cx="5394960" cy="749808"/>
-          </a:xfrm>
-          <a:prstGeom prst="rect">
-            <a:avLst/>
-          </a:prstGeom>
-          <a:noFill/>
-          <a:ln/>
-        </p:spPr>
-        <p:txBody>
-          <a:bodyPr wrap="square" rtlCol="0" anchor="ctr"/>
-          <a:lstStyle/>
-          <a:p>
-            <a:pPr indent="0" marL="0">
-              <a:lnSpc>
-                <a:spcPct val="105000"/>
-              </a:lnSpc>
-              <a:buNone/>
-            </a:pPr>
-            <a:r>
-              <a:rPr lang="en-US" sz="1150" b="1" dirty="0">
-                <a:solidFill>
-                  <a:srgbClr val="1F4E4A"/>
-                </a:solidFill>
-                <a:latin typeface="Calibri" pitchFamily="34" charset="0"/>
-                <a:ea typeface="Calibri" pitchFamily="34" charset="-122"/>
-                <a:cs typeface="Calibri" pitchFamily="34" charset="-120"/>
-              </a:rPr>
-              <a:t>Visit-day — </a:t>
-            </a:r>
-            <a:pPr indent="0" marL="0">
-              <a:lnSpc>
-                <a:spcPct val="105000"/>
-              </a:lnSpc>
-              <a:buNone/>
-            </a:pPr>
-            <a:r>
-              <a:rPr lang="en-US" sz="1150" dirty="0">
-                <a:solidFill>
-                  <a:srgbClr val="14322C"/>
-                </a:solidFill>
-                <a:latin typeface="Calibri" pitchFamily="34" charset="0"/>
-                <a:ea typeface="Calibri" pitchFamily="34" charset="-122"/>
-                <a:cs typeface="Calibri" pitchFamily="34" charset="-120"/>
-              </a:rPr>
-              <a:t>One PL, one practice, one date — the activity unit.</a:t>
-            </a:r>
-            <a:endParaRPr lang="en-US" sz="1150" dirty="0"/>
-          </a:p>
-        </p:txBody>
-      </p:sp>
-      <p:sp>
-        <p:nvSpPr>
-          <p:cNvPr id="13" name="Text 11"/>
-          <p:cNvSpPr/>
-          <p:nvPr/>
-        </p:nvSpPr>
-        <p:spPr>
-          <a:xfrm>
-            <a:off x="6263640" y="3776472"/>
-            <a:ext cx="5394960" cy="749808"/>
-          </a:xfrm>
-          <a:prstGeom prst="rect">
-            <a:avLst/>
-          </a:prstGeom>
-          <a:noFill/>
-          <a:ln/>
-        </p:spPr>
-        <p:txBody>
-          <a:bodyPr wrap="square" rtlCol="0" anchor="ctr"/>
-          <a:lstStyle/>
-          <a:p>
-            <a:pPr indent="0" marL="0">
-              <a:lnSpc>
-                <a:spcPct val="105000"/>
-              </a:lnSpc>
-              <a:buNone/>
-            </a:pPr>
-            <a:r>
-              <a:rPr lang="en-US" sz="1150" b="1" dirty="0">
-                <a:solidFill>
-                  <a:srgbClr val="1F4E4A"/>
-                </a:solidFill>
-                <a:latin typeface="Calibri" pitchFamily="34" charset="0"/>
-                <a:ea typeface="Calibri" pitchFamily="34" charset="-122"/>
-                <a:cs typeface="Calibri" pitchFamily="34" charset="-120"/>
-              </a:rPr>
-              <a:t>Lag — </a:t>
-            </a:r>
-            <a:pPr indent="0" marL="0">
-              <a:lnSpc>
-                <a:spcPct val="105000"/>
-              </a:lnSpc>
-              <a:buNone/>
-            </a:pPr>
-            <a:r>
-              <a:rPr lang="en-US" sz="1150" dirty="0">
-                <a:solidFill>
-                  <a:srgbClr val="14322C"/>
-                </a:solidFill>
-                <a:latin typeface="Calibri" pitchFamily="34" charset="0"/>
-                <a:ea typeface="Calibri" pitchFamily="34" charset="-122"/>
-                <a:cs typeface="Calibri" pitchFamily="34" charset="-120"/>
-              </a:rPr>
-              <a:t>Visit → first appointment: median 31 days. Today's work = September's patients.</a:t>
-            </a:r>
-            <a:endParaRPr lang="en-US" sz="1150" dirty="0"/>
-          </a:p>
-        </p:txBody>
-      </p:sp>
-      <p:sp>
-        <p:nvSpPr>
-          <p:cNvPr id="14" name="Text 12"/>
-          <p:cNvSpPr/>
-          <p:nvPr/>
-        </p:nvSpPr>
-        <p:spPr>
-          <a:xfrm>
-            <a:off x="6263640" y="4562856"/>
-            <a:ext cx="5394960" cy="749808"/>
-          </a:xfrm>
-          <a:prstGeom prst="rect">
-            <a:avLst/>
-          </a:prstGeom>
-          <a:noFill/>
-          <a:ln/>
-        </p:spPr>
-        <p:txBody>
-          <a:bodyPr wrap="square" rtlCol="0" anchor="ctr"/>
-          <a:lstStyle/>
-          <a:p>
-            <a:pPr indent="0" marL="0">
-              <a:lnSpc>
-                <a:spcPct val="105000"/>
-              </a:lnSpc>
-              <a:buNone/>
-            </a:pPr>
-            <a:r>
-              <a:rPr lang="en-US" sz="1150" b="1" dirty="0">
-                <a:solidFill>
-                  <a:srgbClr val="1F4E4A"/>
-                </a:solidFill>
-                <a:latin typeface="Calibri" pitchFamily="34" charset="0"/>
-                <a:ea typeface="Calibri" pitchFamily="34" charset="-122"/>
-                <a:cs typeface="Calibri" pitchFamily="34" charset="-120"/>
-              </a:rPr>
-              <a:t>WC / PI / no-fault — </a:t>
-            </a:r>
-            <a:pPr indent="0" marL="0">
-              <a:lnSpc>
-                <a:spcPct val="105000"/>
-              </a:lnSpc>
-              <a:buNone/>
-            </a:pPr>
-            <a:r>
-              <a:rPr lang="en-US" sz="1150" dirty="0">
-                <a:solidFill>
-                  <a:srgbClr val="14322C"/>
-                </a:solidFill>
-                <a:latin typeface="Calibri" pitchFamily="34" charset="0"/>
-                <a:ea typeface="Calibri" pitchFamily="34" charset="-122"/>
-                <a:cs typeface="Calibri" pitchFamily="34" charset="-120"/>
-              </a:rPr>
-              <a:t>Workers' comp, personal injury, Michigan auto — accepted, no referral, no copay.</a:t>
-            </a:r>
-            <a:endParaRPr lang="en-US" sz="1150" dirty="0"/>
-          </a:p>
-        </p:txBody>
-      </p:sp>
-      <p:sp>
-        <p:nvSpPr>
-          <p:cNvPr id="15" name="Text 13"/>
-          <p:cNvSpPr/>
-          <p:nvPr/>
-        </p:nvSpPr>
-        <p:spPr>
-          <a:xfrm>
-            <a:off x="6263640" y="5349240"/>
-            <a:ext cx="5394960" cy="749808"/>
-          </a:xfrm>
-          <a:prstGeom prst="rect">
-            <a:avLst/>
-          </a:prstGeom>
-          <a:noFill/>
-          <a:ln/>
-        </p:spPr>
-        <p:txBody>
-          <a:bodyPr wrap="square" rtlCol="0" anchor="ctr"/>
-          <a:lstStyle/>
-          <a:p>
-            <a:pPr indent="0" marL="0">
-              <a:lnSpc>
-                <a:spcPct val="105000"/>
-              </a:lnSpc>
-              <a:buNone/>
-            </a:pPr>
-            <a:r>
-              <a:rPr lang="en-US" sz="1150" b="1" dirty="0">
-                <a:solidFill>
-                  <a:srgbClr val="1F4E4A"/>
-                </a:solidFill>
-                <a:latin typeface="Calibri" pitchFamily="34" charset="0"/>
-                <a:ea typeface="Calibri" pitchFamily="34" charset="-122"/>
-                <a:cs typeface="Calibri" pitchFamily="34" charset="-120"/>
-              </a:rPr>
-              <a:t>FQHC — </a:t>
-            </a:r>
-            <a:pPr indent="0" marL="0">
-              <a:lnSpc>
-                <a:spcPct val="105000"/>
-              </a:lnSpc>
-              <a:buNone/>
-            </a:pPr>
-            <a:r>
-              <a:rPr lang="en-US" sz="1150" dirty="0">
-                <a:solidFill>
-                  <a:srgbClr val="14322C"/>
-                </a:solidFill>
-                <a:latin typeface="Calibri" pitchFamily="34" charset="0"/>
-                <a:ea typeface="Calibri" pitchFamily="34" charset="-122"/>
-                <a:cs typeface="Calibri" pitchFamily="34" charset="-120"/>
-              </a:rPr>
-              <a:t>Community health center — usually Medicaid-heavy (red payer chip).</a:t>
+              <a:t>Our PLANNED CADENCE (14/21/30/45 days by tier) — that's the plan's target rhythm, in the app and workbook, NOT in MMC yet. The proposed fix: set frequency once per spine group in MMC, so Past-Due finally works for us.</a:t>
             </a:r>
             <a:endParaRPr lang="en-US" sz="1150" dirty="0"/>
           </a:p>
@@ -5509,541 +5261,6 @@
 <file path=ppt/slides/slide14.xml><?xml version="1.0" encoding="utf-8"?>
 <p:sld xmlns:a="http://schemas.openxmlformats.org/drawingml/2006/main" xmlns:r="http://schemas.openxmlformats.org/officeDocument/2006/relationships" xmlns:p="http://schemas.openxmlformats.org/presentationml/2006/main">
   <p:cSld name="Slide 14">
-    <p:spTree>
-      <p:nvGrpSpPr>
-        <p:cNvPr id="1" name=""/>
-        <p:cNvGrpSpPr/>
-        <p:nvPr/>
-      </p:nvGrpSpPr>
-      <p:grpSpPr>
-        <a:xfrm>
-          <a:off x="0" y="0"/>
-          <a:ext cx="0" cy="0"/>
-          <a:chOff x="0" y="0"/>
-          <a:chExt cx="0" cy="0"/>
-        </a:xfrm>
-      </p:grpSpPr>
-      <p:sp>
-        <p:nvSpPr>
-          <p:cNvPr id="2" name="Text 0"/>
-          <p:cNvSpPr/>
-          <p:nvPr/>
-        </p:nvSpPr>
-        <p:spPr>
-          <a:xfrm>
-            <a:off x="502920" y="256032"/>
-            <a:ext cx="11155680" cy="594360"/>
-          </a:xfrm>
-          <a:prstGeom prst="rect">
-            <a:avLst/>
-          </a:prstGeom>
-          <a:noFill/>
-          <a:ln/>
-        </p:spPr>
-        <p:txBody>
-          <a:bodyPr wrap="square" rtlCol="0" anchor="ctr"/>
-          <a:lstStyle/>
-          <a:p>
-            <a:pPr indent="0" marL="0">
-              <a:buNone/>
-            </a:pPr>
-            <a:r>
-              <a:rPr lang="en-US" sz="2900" b="1" dirty="0">
-                <a:solidFill>
-                  <a:srgbClr val="14322C"/>
-                </a:solidFill>
-                <a:latin typeface="Cambria" pitchFamily="34" charset="0"/>
-                <a:ea typeface="Cambria" pitchFamily="34" charset="-122"/>
-                <a:cs typeface="Cambria" pitchFamily="34" charset="-120"/>
-              </a:rPr>
-              <a:t>“Configured Frequency,” explained honestly</a:t>
-            </a:r>
-            <a:endParaRPr lang="en-US" sz="2900" dirty="0"/>
-          </a:p>
-        </p:txBody>
-      </p:sp>
-      <p:sp>
-        <p:nvSpPr>
-          <p:cNvPr id="3" name="Text 1"/>
-          <p:cNvSpPr/>
-          <p:nvPr/>
-        </p:nvSpPr>
-        <p:spPr>
-          <a:xfrm>
-            <a:off x="502920" y="841248"/>
-            <a:ext cx="11155680" cy="320040"/>
-          </a:xfrm>
-          <a:prstGeom prst="rect">
-            <a:avLst/>
-          </a:prstGeom>
-          <a:noFill/>
-          <a:ln/>
-        </p:spPr>
-        <p:txBody>
-          <a:bodyPr wrap="square" rtlCol="0" anchor="ctr"/>
-          <a:lstStyle/>
-          <a:p>
-            <a:pPr indent="0" marL="0">
-              <a:buNone/>
-            </a:pPr>
-            <a:r>
-              <a:rPr lang="en-US" sz="1300" dirty="0">
-                <a:solidFill>
-                  <a:srgbClr val="5E7773"/>
-                </a:solidFill>
-                <a:latin typeface="Calibri" pitchFamily="34" charset="0"/>
-                <a:ea typeface="Calibri" pitchFamily="34" charset="-122"/>
-                <a:cs typeface="Calibri" pitchFamily="34" charset="-120"/>
-              </a:rPr>
-              <a:t>Called out on purpose: this one is easy to misread, in both directions</a:t>
-            </a:r>
-            <a:endParaRPr lang="en-US" sz="1300" dirty="0"/>
-          </a:p>
-        </p:txBody>
-      </p:sp>
-      <p:sp>
-        <p:nvSpPr>
-          <p:cNvPr id="4" name="Shape 2"/>
-          <p:cNvSpPr/>
-          <p:nvPr/>
-        </p:nvSpPr>
-        <p:spPr>
-          <a:xfrm>
-            <a:off x="502920" y="1417320"/>
-            <a:ext cx="11155680" cy="1115568"/>
-          </a:xfrm>
-          <a:prstGeom prst="roundRect">
-            <a:avLst>
-              <a:gd name="adj" fmla="val 4918"/>
-            </a:avLst>
-          </a:prstGeom>
-          <a:solidFill>
-            <a:srgbClr val="E7F2EF"/>
-          </a:solidFill>
-          <a:ln w="12700">
-            <a:solidFill>
-              <a:srgbClr val="DCE7E3"/>
-            </a:solidFill>
-            <a:prstDash val="solid"/>
-          </a:ln>
-        </p:spPr>
-      </p:sp>
-      <p:sp>
-        <p:nvSpPr>
-          <p:cNvPr id="5" name="Text 3"/>
-          <p:cNvSpPr/>
-          <p:nvPr/>
-        </p:nvSpPr>
-        <p:spPr>
-          <a:xfrm>
-            <a:off x="777240" y="1527048"/>
-            <a:ext cx="2651760" cy="914400"/>
-          </a:xfrm>
-          <a:prstGeom prst="rect">
-            <a:avLst/>
-          </a:prstGeom>
-          <a:noFill/>
-          <a:ln/>
-        </p:spPr>
-        <p:txBody>
-          <a:bodyPr wrap="square" rtlCol="0" anchor="ctr"/>
-          <a:lstStyle/>
-          <a:p>
-            <a:pPr indent="0" marL="0">
-              <a:buNone/>
-            </a:pPr>
-            <a:r>
-              <a:rPr lang="en-US" sz="1150" b="1" spc="100" kern="0" dirty="0">
-                <a:solidFill>
-                  <a:srgbClr val="1F4E4A"/>
-                </a:solidFill>
-                <a:latin typeface="Calibri" pitchFamily="34" charset="0"/>
-                <a:ea typeface="Calibri" pitchFamily="34" charset="-122"/>
-                <a:cs typeface="Calibri" pitchFamily="34" charset="-120"/>
-              </a:rPr>
-              <a:t>WHAT IT IS</a:t>
-            </a:r>
-            <a:endParaRPr lang="en-US" sz="1150" dirty="0"/>
-          </a:p>
-        </p:txBody>
-      </p:sp>
-      <p:sp>
-        <p:nvSpPr>
-          <p:cNvPr id="6" name="Text 4"/>
-          <p:cNvSpPr/>
-          <p:nvPr/>
-        </p:nvSpPr>
-        <p:spPr>
-          <a:xfrm>
-            <a:off x="3566160" y="1508760"/>
-            <a:ext cx="7863840" cy="960120"/>
-          </a:xfrm>
-          <a:prstGeom prst="rect">
-            <a:avLst/>
-          </a:prstGeom>
-          <a:noFill/>
-          <a:ln/>
-        </p:spPr>
-        <p:txBody>
-          <a:bodyPr wrap="square" rtlCol="0" anchor="ctr"/>
-          <a:lstStyle/>
-          <a:p>
-            <a:pPr indent="0" marL="0">
-              <a:lnSpc>
-                <a:spcPct val="108000"/>
-              </a:lnSpc>
-              <a:buNone/>
-            </a:pPr>
-            <a:r>
-              <a:rPr lang="en-US" sz="1150" dirty="0">
-                <a:solidFill>
-                  <a:srgbClr val="14322C"/>
-                </a:solidFill>
-                <a:latin typeface="Calibri" pitchFamily="34" charset="0"/>
-                <a:ea typeface="Calibri" pitchFamily="34" charset="-122"/>
-                <a:cs typeface="Calibri" pitchFamily="34" charset="-120"/>
-              </a:rPr>
-              <a:t>MMC's built-in visit-reminder setting (e.g., “every 30 days”), attached to a Group or account. MMC then flags accounts Past Due / Up to Date against it.</a:t>
-            </a:r>
-            <a:endParaRPr lang="en-US" sz="1150" dirty="0"/>
-          </a:p>
-        </p:txBody>
-      </p:sp>
-      <p:sp>
-        <p:nvSpPr>
-          <p:cNvPr id="7" name="Shape 5"/>
-          <p:cNvSpPr/>
-          <p:nvPr/>
-        </p:nvSpPr>
-        <p:spPr>
-          <a:xfrm>
-            <a:off x="502920" y="2660904"/>
-            <a:ext cx="11155680" cy="1115568"/>
-          </a:xfrm>
-          <a:prstGeom prst="roundRect">
-            <a:avLst>
-              <a:gd name="adj" fmla="val 4918"/>
-            </a:avLst>
-          </a:prstGeom>
-          <a:solidFill>
-            <a:srgbClr val="FDF6E7"/>
-          </a:solidFill>
-          <a:ln w="12700">
-            <a:solidFill>
-              <a:srgbClr val="DCE7E3"/>
-            </a:solidFill>
-            <a:prstDash val="solid"/>
-          </a:ln>
-        </p:spPr>
-      </p:sp>
-      <p:sp>
-        <p:nvSpPr>
-          <p:cNvPr id="8" name="Text 6"/>
-          <p:cNvSpPr/>
-          <p:nvPr/>
-        </p:nvSpPr>
-        <p:spPr>
-          <a:xfrm>
-            <a:off x="777240" y="2770632"/>
-            <a:ext cx="2651760" cy="914400"/>
-          </a:xfrm>
-          <a:prstGeom prst="rect">
-            <a:avLst/>
-          </a:prstGeom>
-          <a:noFill/>
-          <a:ln/>
-        </p:spPr>
-        <p:txBody>
-          <a:bodyPr wrap="square" rtlCol="0" anchor="ctr"/>
-          <a:lstStyle/>
-          <a:p>
-            <a:pPr indent="0" marL="0">
-              <a:buNone/>
-            </a:pPr>
-            <a:r>
-              <a:rPr lang="en-US" sz="1150" b="1" spc="100" kern="0" dirty="0">
-                <a:solidFill>
-                  <a:srgbClr val="1F4E4A"/>
-                </a:solidFill>
-                <a:latin typeface="Calibri" pitchFamily="34" charset="0"/>
-                <a:ea typeface="Calibri" pitchFamily="34" charset="-122"/>
-                <a:cs typeface="Calibri" pitchFamily="34" charset="-120"/>
-              </a:rPr>
-              <a:t>WHAT THE JUL 16 EXPORT SHOWS</a:t>
-            </a:r>
-            <a:endParaRPr lang="en-US" sz="1150" dirty="0"/>
-          </a:p>
-        </p:txBody>
-      </p:sp>
-      <p:sp>
-        <p:nvSpPr>
-          <p:cNvPr id="9" name="Text 7"/>
-          <p:cNvSpPr/>
-          <p:nvPr/>
-        </p:nvSpPr>
-        <p:spPr>
-          <a:xfrm>
-            <a:off x="3566160" y="2752344"/>
-            <a:ext cx="7863840" cy="960120"/>
-          </a:xfrm>
-          <a:prstGeom prst="rect">
-            <a:avLst/>
-          </a:prstGeom>
-          <a:noFill/>
-          <a:ln/>
-        </p:spPr>
-        <p:txBody>
-          <a:bodyPr wrap="square" rtlCol="0" anchor="ctr"/>
-          <a:lstStyle/>
-          <a:p>
-            <a:pPr indent="0" marL="0">
-              <a:lnSpc>
-                <a:spcPct val="108000"/>
-              </a:lnSpc>
-              <a:buNone/>
-            </a:pPr>
-            <a:r>
-              <a:rPr lang="en-US" sz="1150" dirty="0">
-                <a:solidFill>
-                  <a:srgbClr val="14322C"/>
-                </a:solidFill>
-                <a:latin typeface="Calibri" pitchFamily="34" charset="0"/>
-                <a:ea typeface="Calibri" pitchFamily="34" charset="-122"/>
-                <a:cs typeface="Calibri" pitchFamily="34" charset="-120"/>
-              </a:rPr>
-              <a:t>Almost nobody uses it: 64 of 2,349 owned accounts have ANY frequency set (Kristen 5 · Jasmine 15 · Coty 30 · Sean 14) — and Kristen noted old past-dues can't be cleared, so they're ignored.</a:t>
-            </a:r>
-            <a:endParaRPr lang="en-US" sz="1150" dirty="0"/>
-          </a:p>
-        </p:txBody>
-      </p:sp>
-      <p:sp>
-        <p:nvSpPr>
-          <p:cNvPr id="10" name="Shape 8"/>
-          <p:cNvSpPr/>
-          <p:nvPr/>
-        </p:nvSpPr>
-        <p:spPr>
-          <a:xfrm>
-            <a:off x="502920" y="3904488"/>
-            <a:ext cx="11155680" cy="1115568"/>
-          </a:xfrm>
-          <a:prstGeom prst="roundRect">
-            <a:avLst>
-              <a:gd name="adj" fmla="val 4918"/>
-            </a:avLst>
-          </a:prstGeom>
-          <a:solidFill>
-            <a:srgbClr val="F7E7E3"/>
-          </a:solidFill>
-          <a:ln w="12700">
-            <a:solidFill>
-              <a:srgbClr val="DCE7E3"/>
-            </a:solidFill>
-            <a:prstDash val="solid"/>
-          </a:ln>
-        </p:spPr>
-      </p:sp>
-      <p:sp>
-        <p:nvSpPr>
-          <p:cNvPr id="11" name="Text 9"/>
-          <p:cNvSpPr/>
-          <p:nvPr/>
-        </p:nvSpPr>
-        <p:spPr>
-          <a:xfrm>
-            <a:off x="777240" y="4014216"/>
-            <a:ext cx="2651760" cy="914400"/>
-          </a:xfrm>
-          <a:prstGeom prst="rect">
-            <a:avLst/>
-          </a:prstGeom>
-          <a:noFill/>
-          <a:ln/>
-        </p:spPr>
-        <p:txBody>
-          <a:bodyPr wrap="square" rtlCol="0" anchor="ctr"/>
-          <a:lstStyle/>
-          <a:p>
-            <a:pPr indent="0" marL="0">
-              <a:buNone/>
-            </a:pPr>
-            <a:r>
-              <a:rPr lang="en-US" sz="1150" b="1" spc="100" kern="0" dirty="0">
-                <a:solidFill>
-                  <a:srgbClr val="1F4E4A"/>
-                </a:solidFill>
-                <a:latin typeface="Calibri" pitchFamily="34" charset="0"/>
-                <a:ea typeface="Calibri" pitchFamily="34" charset="-122"/>
-                <a:cs typeface="Calibri" pitchFamily="34" charset="-120"/>
-              </a:rPr>
-              <a:t>WHAT COULD BE WRONG</a:t>
-            </a:r>
-            <a:endParaRPr lang="en-US" sz="1150" dirty="0"/>
-          </a:p>
-        </p:txBody>
-      </p:sp>
-      <p:sp>
-        <p:nvSpPr>
-          <p:cNvPr id="12" name="Text 10"/>
-          <p:cNvSpPr/>
-          <p:nvPr/>
-        </p:nvSpPr>
-        <p:spPr>
-          <a:xfrm>
-            <a:off x="3566160" y="3995928"/>
-            <a:ext cx="7863840" cy="960120"/>
-          </a:xfrm>
-          <a:prstGeom prst="rect">
-            <a:avLst/>
-          </a:prstGeom>
-          <a:noFill/>
-          <a:ln/>
-        </p:spPr>
-        <p:txBody>
-          <a:bodyPr wrap="square" rtlCol="0" anchor="ctr"/>
-          <a:lstStyle/>
-          <a:p>
-            <a:pPr indent="0" marL="0">
-              <a:lnSpc>
-                <a:spcPct val="108000"/>
-              </a:lnSpc>
-              <a:buNone/>
-            </a:pPr>
-            <a:r>
-              <a:rPr lang="en-US" sz="1150" dirty="0">
-                <a:solidFill>
-                  <a:srgbClr val="14322C"/>
-                </a:solidFill>
-                <a:latin typeface="Calibri" pitchFamily="34" charset="0"/>
-                <a:ea typeface="Calibri" pitchFamily="34" charset="-122"/>
-                <a:cs typeface="Calibri" pitchFamily="34" charset="-120"/>
-              </a:rPr>
-              <a:t>This reading is only as good as the export. If frequencies live somewhere the export misses (per-person, routes, a newer feature) — tell Joe and we re-pull before repeating the number.</a:t>
-            </a:r>
-            <a:endParaRPr lang="en-US" sz="1150" dirty="0"/>
-          </a:p>
-        </p:txBody>
-      </p:sp>
-      <p:sp>
-        <p:nvSpPr>
-          <p:cNvPr id="13" name="Shape 11"/>
-          <p:cNvSpPr/>
-          <p:nvPr/>
-        </p:nvSpPr>
-        <p:spPr>
-          <a:xfrm>
-            <a:off x="502920" y="5148072"/>
-            <a:ext cx="11155680" cy="1115568"/>
-          </a:xfrm>
-          <a:prstGeom prst="roundRect">
-            <a:avLst>
-              <a:gd name="adj" fmla="val 4918"/>
-            </a:avLst>
-          </a:prstGeom>
-          <a:solidFill>
-            <a:srgbClr val="E7F2EF"/>
-          </a:solidFill>
-          <a:ln w="12700">
-            <a:solidFill>
-              <a:srgbClr val="DCE7E3"/>
-            </a:solidFill>
-            <a:prstDash val="solid"/>
-          </a:ln>
-        </p:spPr>
-      </p:sp>
-      <p:sp>
-        <p:nvSpPr>
-          <p:cNvPr id="14" name="Text 12"/>
-          <p:cNvSpPr/>
-          <p:nvPr/>
-        </p:nvSpPr>
-        <p:spPr>
-          <a:xfrm>
-            <a:off x="777240" y="5257800"/>
-            <a:ext cx="2651760" cy="914400"/>
-          </a:xfrm>
-          <a:prstGeom prst="rect">
-            <a:avLst/>
-          </a:prstGeom>
-          <a:noFill/>
-          <a:ln/>
-        </p:spPr>
-        <p:txBody>
-          <a:bodyPr wrap="square" rtlCol="0" anchor="ctr"/>
-          <a:lstStyle/>
-          <a:p>
-            <a:pPr indent="0" marL="0">
-              <a:buNone/>
-            </a:pPr>
-            <a:r>
-              <a:rPr lang="en-US" sz="1150" b="1" spc="100" kern="0" dirty="0">
-                <a:solidFill>
-                  <a:srgbClr val="1F4E4A"/>
-                </a:solidFill>
-                <a:latin typeface="Calibri" pitchFamily="34" charset="0"/>
-                <a:ea typeface="Calibri" pitchFamily="34" charset="-122"/>
-                <a:cs typeface="Calibri" pitchFamily="34" charset="-120"/>
-              </a:rPr>
-              <a:t>DON'T CONFUSE IT WITH</a:t>
-            </a:r>
-            <a:endParaRPr lang="en-US" sz="1150" dirty="0"/>
-          </a:p>
-        </p:txBody>
-      </p:sp>
-      <p:sp>
-        <p:nvSpPr>
-          <p:cNvPr id="15" name="Text 13"/>
-          <p:cNvSpPr/>
-          <p:nvPr/>
-        </p:nvSpPr>
-        <p:spPr>
-          <a:xfrm>
-            <a:off x="3566160" y="5239512"/>
-            <a:ext cx="7863840" cy="960120"/>
-          </a:xfrm>
-          <a:prstGeom prst="rect">
-            <a:avLst/>
-          </a:prstGeom>
-          <a:noFill/>
-          <a:ln/>
-        </p:spPr>
-        <p:txBody>
-          <a:bodyPr wrap="square" rtlCol="0" anchor="ctr"/>
-          <a:lstStyle/>
-          <a:p>
-            <a:pPr indent="0" marL="0">
-              <a:lnSpc>
-                <a:spcPct val="108000"/>
-              </a:lnSpc>
-              <a:buNone/>
-            </a:pPr>
-            <a:r>
-              <a:rPr lang="en-US" sz="1150" dirty="0">
-                <a:solidFill>
-                  <a:srgbClr val="14322C"/>
-                </a:solidFill>
-                <a:latin typeface="Calibri" pitchFamily="34" charset="0"/>
-                <a:ea typeface="Calibri" pitchFamily="34" charset="-122"/>
-                <a:cs typeface="Calibri" pitchFamily="34" charset="-120"/>
-              </a:rPr>
-              <a:t>Our PLANNED CADENCE (14/21/30/45 days by tier) — that's the plan's target rhythm, in the app and workbook, NOT in MMC yet. The proposed fix: set frequency once per spine group in MMC, so Past-Due finally works for us.</a:t>
-            </a:r>
-            <a:endParaRPr lang="en-US" sz="1150" dirty="0"/>
-          </a:p>
-        </p:txBody>
-      </p:sp>
-    </p:spTree>
-  </p:cSld>
-  <p:clrMapOvr>
-    <a:masterClrMapping/>
-  </p:clrMapOvr>
-</p:sld>
-</file>
-
-<file path=ppt/slides/slide15.xml><?xml version="1.0" encoding="utf-8"?>
-<p:sld xmlns:a="http://schemas.openxmlformats.org/drawingml/2006/main" xmlns:r="http://schemas.openxmlformats.org/officeDocument/2006/relationships" xmlns:p="http://schemas.openxmlformats.org/presentationml/2006/main">
-  <p:cSld name="Slide 15">
     <p:bg>
       <p:bgPr>
         <a:solidFill>
@@ -6803,7 +6020,7 @@
                 <a:ea typeface="Calibri" pitchFamily="34" charset="-122"/>
                 <a:cs typeface="Calibri" pitchFamily="34" charset="-120"/>
               </a:rPr>
-              <a:t>ortho keeps its field days (spine gets 3–4 of ~5). Nobody is being asked to abandon their book — we're re-aiming the same windshield time at the accounts the data says pay.</a:t>
+              <a:t>ortho keeps its field days (spine gets 3–4 of ~5). Nobody is being asked to abandon their book — we're re-aiming the same road time at the accounts the data says pay.</a:t>
             </a:r>
             <a:endParaRPr lang="en-US" sz="1400" dirty="0"/>
           </a:p>
@@ -7353,7 +6570,7 @@
         <p:spPr>
           <a:xfrm>
             <a:off x="502920" y="3840480"/>
-            <a:ext cx="11155680" cy="914400"/>
+            <a:ext cx="11155680" cy="731520"/>
           </a:xfrm>
           <a:prstGeom prst="rect">
             <a:avLst/>
@@ -7372,7 +6589,7 @@
               <a:buNone/>
             </a:pPr>
             <a:r>
-              <a:rPr lang="en-US" sz="1400" b="1" dirty="0">
+              <a:rPr lang="en-US" sz="1400" dirty="0">
                 <a:solidFill>
                   <a:srgbClr val="14322C"/>
                 </a:solidFill>
@@ -7380,24 +6597,7 @@
                 <a:ea typeface="Calibri" pitchFamily="34" charset="-122"/>
                 <a:cs typeface="Calibri" pitchFamily="34" charset="-120"/>
               </a:rPr>
-              <a:t>The coaching goal: </a:t>
-            </a:r>
-            <a:pPr indent="0" marL="0">
-              <a:lnSpc>
-                <a:spcPct val="120000"/>
-              </a:lnSpc>
-              <a:buNone/>
-            </a:pPr>
-            <a:r>
-              <a:rPr lang="en-US" sz="1400" dirty="0">
-                <a:solidFill>
-                  <a:srgbClr val="14322C"/>
-                </a:solidFill>
-                <a:latin typeface="Calibri" pitchFamily="34" charset="0"/>
-                <a:ea typeface="Calibri" pitchFamily="34" charset="-122"/>
-                <a:cs typeface="Calibri" pitchFamily="34" charset="-120"/>
-              </a:rPr>
-              <a:t>Kristen's book runs ~67 new patients per 100 visit-days; the team range is 14–30. Same hours, different yield — the playbook in the next slides is how we close that gap together. Ride-alongs start next week.</a:t>
+              <a:t>The playbook in the next slides is the shared method — same visit frame at every account, matched to what that practice actually sends. Ride-alongs start next week.</a:t>
             </a:r>
             <a:endParaRPr lang="en-US" sz="1400" dirty="0"/>
           </a:p>
@@ -7461,7 +6661,7 @@
                 <a:ea typeface="Cambria" pitchFamily="34" charset="-122"/>
                 <a:cs typeface="Cambria" pitchFamily="34" charset="-120"/>
               </a:rPr>
-              <a:t>Job one this week: the leak</a:t>
+              <a:t>How the book is organized — plain words</a:t>
             </a:r>
             <a:endParaRPr lang="en-US" sz="2900" dirty="0"/>
           </a:p>
@@ -7500,147 +6700,7 @@
                 <a:ea typeface="Calibri" pitchFamily="34" charset="-122"/>
                 <a:cs typeface="Calibri" pitchFamily="34" charset="-120"/>
               </a:rPr>
-              <a:t>Proven spine senders that haven't seen us in over a month</a:t>
-            </a:r>
-            <a:endParaRPr lang="en-US" sz="1300" dirty="0"/>
-          </a:p>
-        </p:txBody>
-      </p:sp>
-      <p:sp>
-        <p:nvSpPr>
-          <p:cNvPr id="4" name="Text 2"/>
-          <p:cNvSpPr/>
-          <p:nvPr/>
-        </p:nvSpPr>
-        <p:spPr>
-          <a:xfrm>
-            <a:off x="548640" y="1554480"/>
-            <a:ext cx="4206240" cy="914400"/>
-          </a:xfrm>
-          <a:prstGeom prst="rect">
-            <a:avLst/>
-          </a:prstGeom>
-          <a:noFill/>
-          <a:ln/>
-        </p:spPr>
-        <p:txBody>
-          <a:bodyPr wrap="square" rtlCol="0" anchor="ctr"/>
-          <a:lstStyle/>
-          <a:p>
-            <a:pPr indent="0" marL="0">
-              <a:buNone/>
-            </a:pPr>
-            <a:r>
-              <a:rPr lang="en-US" sz="5400" b="1" dirty="0">
-                <a:solidFill>
-                  <a:srgbClr val="C4534A"/>
-                </a:solidFill>
-                <a:latin typeface="Cambria" pitchFamily="34" charset="0"/>
-                <a:ea typeface="Cambria" pitchFamily="34" charset="-122"/>
-                <a:cs typeface="Cambria" pitchFamily="34" charset="-120"/>
-              </a:rPr>
-              <a:t>32 of 54</a:t>
-            </a:r>
-            <a:endParaRPr lang="en-US" sz="5400" dirty="0"/>
-          </a:p>
-        </p:txBody>
-      </p:sp>
-      <p:sp>
-        <p:nvSpPr>
-          <p:cNvPr id="5" name="Text 3"/>
-          <p:cNvSpPr/>
-          <p:nvPr/>
-        </p:nvSpPr>
-        <p:spPr>
-          <a:xfrm>
-            <a:off x="548640" y="2560320"/>
-            <a:ext cx="4389120" cy="1463040"/>
-          </a:xfrm>
-          <a:prstGeom prst="rect">
-            <a:avLst/>
-          </a:prstGeom>
-          <a:noFill/>
-          <a:ln/>
-        </p:spPr>
-        <p:txBody>
-          <a:bodyPr wrap="square" rtlCol="0" anchor="ctr"/>
-          <a:lstStyle/>
-          <a:p>
-            <a:pPr indent="0" marL="0">
-              <a:lnSpc>
-                <a:spcPct val="120000"/>
-              </a:lnSpc>
-              <a:buNone/>
-            </a:pPr>
-            <a:r>
-              <a:rPr lang="en-US" sz="1400" dirty="0">
-                <a:solidFill>
-                  <a:srgbClr val="14322C"/>
-                </a:solidFill>
-                <a:latin typeface="Calibri" pitchFamily="34" charset="0"/>
-                <a:ea typeface="Calibri" pitchFamily="34" charset="-122"/>
-                <a:cs typeface="Calibri" pitchFamily="34" charset="-120"/>
-              </a:rPr>
-              <a:t>repeat spine referrers had ZERO visits in the last 4 weeks — 120 patients of annual production standing unguarded while competitors circle.</a:t>
-            </a:r>
-            <a:endParaRPr lang="en-US" sz="1400" dirty="0"/>
-          </a:p>
-        </p:txBody>
-      </p:sp>
-      <p:sp>
-        <p:nvSpPr>
-          <p:cNvPr id="6" name="Text 4"/>
-          <p:cNvSpPr/>
-          <p:nvPr/>
-        </p:nvSpPr>
-        <p:spPr>
-          <a:xfrm>
-            <a:off x="548640" y="4114800"/>
-            <a:ext cx="4389120" cy="1371600"/>
-          </a:xfrm>
-          <a:prstGeom prst="rect">
-            <a:avLst/>
-          </a:prstGeom>
-          <a:noFill/>
-          <a:ln/>
-        </p:spPr>
-        <p:txBody>
-          <a:bodyPr wrap="square" rtlCol="0" anchor="ctr"/>
-          <a:lstStyle/>
-          <a:p>
-            <a:pPr indent="0" marL="0">
-              <a:lnSpc>
-                <a:spcPct val="120000"/>
-              </a:lnSpc>
-              <a:buNone/>
-            </a:pPr>
-            <a:r>
-              <a:rPr lang="en-US" sz="1300" b="1" dirty="0">
-                <a:solidFill>
-                  <a:srgbClr val="14322C"/>
-                </a:solidFill>
-                <a:latin typeface="Calibri" pitchFamily="34" charset="0"/>
-                <a:ea typeface="Calibri" pitchFamily="34" charset="-122"/>
-                <a:cs typeface="Calibri" pitchFamily="34" charset="-120"/>
-              </a:rPr>
-              <a:t>The sweep (already started):  </a:t>
-            </a:r>
-            <a:pPr indent="0" marL="0">
-              <a:lnSpc>
-                <a:spcPct val="120000"/>
-              </a:lnSpc>
-              <a:buNone/>
-            </a:pPr>
-            <a:r>
-              <a:rPr lang="en-US" sz="1300" dirty="0">
-                <a:solidFill>
-                  <a:srgbClr val="14322C"/>
-                </a:solidFill>
-                <a:latin typeface="Calibri" pitchFamily="34" charset="0"/>
-                <a:ea typeface="Calibri" pitchFamily="34" charset="-122"/>
-                <a:cs typeface="Calibri" pitchFamily="34" charset="-120"/>
-              </a:rPr>
-              <a:t>all 36 lapsed accounts get a recovery visit by Jul 31 — 22 this week, 14 next. They're pre-loaded at the top of your app.</a:t>
+              <a:t>848 accounts, sorted by what each practice has ACTUALLY sent us in 2026</a:t>
             </a:r>
             <a:endParaRPr lang="en-US" sz="1300" dirty="0"/>
           </a:p>
@@ -7649,1567 +6709,6 @@
       <p:graphicFrame>
         <p:nvGraphicFramePr>
           <p:cNvPr id="5" name="Table 0"/>
-          <p:cNvGraphicFramePr>
-            <a:graphicFrameLocks noGrp="1"/>
-          </p:cNvGraphicFramePr>
-          <p:nvPr>
-            <p:extLst>
-              <p:ext uri="{D42A27DB-BD31-4B8C-83A1-F6EECF244321}">
-                <p14:modId xmlns:p14="http://schemas.microsoft.com/office/powerpoint/2010/main" val="1579011935"/>
-              </p:ext>
-            </p:extLst>
-          </p:nvPr>
-        </p:nvGraphicFramePr>
-        <p:xfrm>
-          <a:off x="5303520" y="1554480"/>
-          <a:ext cx="6309360" cy="914400"/>
-        </p:xfrm>
-        <a:graphic>
-          <a:graphicData uri="http://schemas.openxmlformats.org/drawingml/2006/table">
-            <a:tbl>
-              <a:tblPr/>
-              <a:tblGrid>
-                <a:gridCol w="3749040"/>
-                <a:gridCol w="1188720"/>
-                <a:gridCol w="1371600"/>
-              </a:tblGrid>
-              <a:tr h="438912">
-                <a:tc>
-                  <a:txBody>
-                    <a:bodyPr/>
-                    <a:lstStyle/>
-                    <a:p>
-                      <a:pPr indent="0" marL="0">
-                        <a:buNone/>
-                      </a:pPr>
-                      <a:r>
-                        <a:rPr lang="en-US" sz="1250" b="1" dirty="0">
-                          <a:solidFill>
-                            <a:srgbClr val="FFFFFF"/>
-                          </a:solidFill>
-                          <a:latin typeface="Calibri" pitchFamily="34" charset="0"/>
-                          <a:ea typeface="Calibri" pitchFamily="34" charset="-122"/>
-                          <a:cs typeface="Calibri" pitchFamily="34" charset="-120"/>
-                        </a:rPr>
-                        <a:t>Account</a:t>
-                      </a:r>
-                      <a:endParaRPr lang="en-US" sz="1250" dirty="0">
-                        <a:latin typeface="Calibri" charset="0"/>
-                        <a:ea typeface="Calibri" charset="0"/>
-                        <a:cs typeface="Calibri" charset="0"/>
-                      </a:endParaRPr>
-                    </a:p>
-                  </a:txBody>
-                  <a:tcPr marL="54864" marR="54864" marT="54864" marB="54864" anchor="ctr">
-                    <a:lnL w="6350" cap="flat" cmpd="sng" algn="ctr">
-                      <a:solidFill>
-                        <a:srgbClr val="DCE7E3"/>
-                      </a:solidFill>
-                      <a:prstDash val="solid"/>
-                      <a:round/>
-                      <a:headEnd type="none" w="med" len="med"/>
-                      <a:tailEnd type="none" w="med" len="med"/>
-                    </a:lnL>
-                    <a:lnR w="6350" cap="flat" cmpd="sng" algn="ctr">
-                      <a:solidFill>
-                        <a:srgbClr val="DCE7E3"/>
-                      </a:solidFill>
-                      <a:prstDash val="solid"/>
-                      <a:round/>
-                      <a:headEnd type="none" w="med" len="med"/>
-                      <a:tailEnd type="none" w="med" len="med"/>
-                    </a:lnR>
-                    <a:lnT w="6350" cap="flat" cmpd="sng" algn="ctr">
-                      <a:solidFill>
-                        <a:srgbClr val="DCE7E3"/>
-                      </a:solidFill>
-                      <a:prstDash val="solid"/>
-                      <a:round/>
-                      <a:headEnd type="none" w="med" len="med"/>
-                      <a:tailEnd type="none" w="med" len="med"/>
-                    </a:lnT>
-                    <a:lnB w="6350" cap="flat" cmpd="sng" algn="ctr">
-                      <a:solidFill>
-                        <a:srgbClr val="DCE7E3"/>
-                      </a:solidFill>
-                      <a:prstDash val="solid"/>
-                      <a:round/>
-                      <a:headEnd type="none" w="med" len="med"/>
-                      <a:tailEnd type="none" w="med" len="med"/>
-                    </a:lnB>
-                    <a:solidFill>
-                      <a:srgbClr val="1F4E4A"/>
-                    </a:solidFill>
-                  </a:tcPr>
-                </a:tc>
-                <a:tc>
-                  <a:txBody>
-                    <a:bodyPr/>
-                    <a:lstStyle/>
-                    <a:p>
-                      <a:pPr indent="0" marL="0">
-                        <a:buNone/>
-                      </a:pPr>
-                      <a:r>
-                        <a:rPr lang="en-US" sz="1250" b="1" dirty="0">
-                          <a:solidFill>
-                            <a:srgbClr val="FFFFFF"/>
-                          </a:solidFill>
-                          <a:latin typeface="Calibri" pitchFamily="34" charset="0"/>
-                          <a:ea typeface="Calibri" pitchFamily="34" charset="-122"/>
-                          <a:cs typeface="Calibri" pitchFamily="34" charset="-120"/>
-                        </a:rPr>
-                        <a:t>Spine '26</a:t>
-                      </a:r>
-                      <a:endParaRPr lang="en-US" sz="1250" dirty="0">
-                        <a:latin typeface="Calibri" charset="0"/>
-                        <a:ea typeface="Calibri" charset="0"/>
-                        <a:cs typeface="Calibri" charset="0"/>
-                      </a:endParaRPr>
-                    </a:p>
-                  </a:txBody>
-                  <a:tcPr marL="54864" marR="54864" marT="54864" marB="54864" anchor="ctr">
-                    <a:lnL w="6350" cap="flat" cmpd="sng" algn="ctr">
-                      <a:solidFill>
-                        <a:srgbClr val="DCE7E3"/>
-                      </a:solidFill>
-                      <a:prstDash val="solid"/>
-                      <a:round/>
-                      <a:headEnd type="none" w="med" len="med"/>
-                      <a:tailEnd type="none" w="med" len="med"/>
-                    </a:lnL>
-                    <a:lnR w="6350" cap="flat" cmpd="sng" algn="ctr">
-                      <a:solidFill>
-                        <a:srgbClr val="DCE7E3"/>
-                      </a:solidFill>
-                      <a:prstDash val="solid"/>
-                      <a:round/>
-                      <a:headEnd type="none" w="med" len="med"/>
-                      <a:tailEnd type="none" w="med" len="med"/>
-                    </a:lnR>
-                    <a:lnT w="6350" cap="flat" cmpd="sng" algn="ctr">
-                      <a:solidFill>
-                        <a:srgbClr val="DCE7E3"/>
-                      </a:solidFill>
-                      <a:prstDash val="solid"/>
-                      <a:round/>
-                      <a:headEnd type="none" w="med" len="med"/>
-                      <a:tailEnd type="none" w="med" len="med"/>
-                    </a:lnT>
-                    <a:lnB w="6350" cap="flat" cmpd="sng" algn="ctr">
-                      <a:solidFill>
-                        <a:srgbClr val="DCE7E3"/>
-                      </a:solidFill>
-                      <a:prstDash val="solid"/>
-                      <a:round/>
-                      <a:headEnd type="none" w="med" len="med"/>
-                      <a:tailEnd type="none" w="med" len="med"/>
-                    </a:lnB>
-                    <a:solidFill>
-                      <a:srgbClr val="1F4E4A"/>
-                    </a:solidFill>
-                  </a:tcPr>
-                </a:tc>
-                <a:tc>
-                  <a:txBody>
-                    <a:bodyPr/>
-                    <a:lstStyle/>
-                    <a:p>
-                      <a:pPr indent="0" marL="0">
-                        <a:buNone/>
-                      </a:pPr>
-                      <a:r>
-                        <a:rPr lang="en-US" sz="1250" b="1" dirty="0">
-                          <a:solidFill>
-                            <a:srgbClr val="FFFFFF"/>
-                          </a:solidFill>
-                          <a:latin typeface="Calibri" pitchFamily="34" charset="0"/>
-                          <a:ea typeface="Calibri" pitchFamily="34" charset="-122"/>
-                          <a:cs typeface="Calibri" pitchFamily="34" charset="-120"/>
-                        </a:rPr>
-                        <a:t>Last visit</a:t>
-                      </a:r>
-                      <a:endParaRPr lang="en-US" sz="1250" dirty="0">
-                        <a:latin typeface="Calibri" charset="0"/>
-                        <a:ea typeface="Calibri" charset="0"/>
-                        <a:cs typeface="Calibri" charset="0"/>
-                      </a:endParaRPr>
-                    </a:p>
-                  </a:txBody>
-                  <a:tcPr marL="54864" marR="54864" marT="54864" marB="54864" anchor="ctr">
-                    <a:lnL w="6350" cap="flat" cmpd="sng" algn="ctr">
-                      <a:solidFill>
-                        <a:srgbClr val="DCE7E3"/>
-                      </a:solidFill>
-                      <a:prstDash val="solid"/>
-                      <a:round/>
-                      <a:headEnd type="none" w="med" len="med"/>
-                      <a:tailEnd type="none" w="med" len="med"/>
-                    </a:lnL>
-                    <a:lnR w="6350" cap="flat" cmpd="sng" algn="ctr">
-                      <a:solidFill>
-                        <a:srgbClr val="DCE7E3"/>
-                      </a:solidFill>
-                      <a:prstDash val="solid"/>
-                      <a:round/>
-                      <a:headEnd type="none" w="med" len="med"/>
-                      <a:tailEnd type="none" w="med" len="med"/>
-                    </a:lnR>
-                    <a:lnT w="6350" cap="flat" cmpd="sng" algn="ctr">
-                      <a:solidFill>
-                        <a:srgbClr val="DCE7E3"/>
-                      </a:solidFill>
-                      <a:prstDash val="solid"/>
-                      <a:round/>
-                      <a:headEnd type="none" w="med" len="med"/>
-                      <a:tailEnd type="none" w="med" len="med"/>
-                    </a:lnT>
-                    <a:lnB w="6350" cap="flat" cmpd="sng" algn="ctr">
-                      <a:solidFill>
-                        <a:srgbClr val="DCE7E3"/>
-                      </a:solidFill>
-                      <a:prstDash val="solid"/>
-                      <a:round/>
-                      <a:headEnd type="none" w="med" len="med"/>
-                      <a:tailEnd type="none" w="med" len="med"/>
-                    </a:lnB>
-                    <a:solidFill>
-                      <a:srgbClr val="1F4E4A"/>
-                    </a:solidFill>
-                  </a:tcPr>
-                </a:tc>
-              </a:tr>
-              <a:tr h="438912">
-                <a:tc>
-                  <a:txBody>
-                    <a:bodyPr/>
-                    <a:lstStyle/>
-                    <a:p>
-                      <a:pPr indent="0" marL="0">
-                        <a:buNone/>
-                      </a:pPr>
-                      <a:r>
-                        <a:rPr lang="en-US" sz="1250" dirty="0">
-                          <a:solidFill>
-                            <a:srgbClr val="14322C"/>
-                          </a:solidFill>
-                          <a:latin typeface="Calibri" pitchFamily="34" charset="0"/>
-                          <a:ea typeface="Calibri" pitchFamily="34" charset="-122"/>
-                          <a:cs typeface="Calibri" pitchFamily="34" charset="-120"/>
-                        </a:rPr>
-                        <a:t>Hesselberg Chiropractic (Ypsilanti)</a:t>
-                      </a:r>
-                      <a:endParaRPr lang="en-US" sz="1250" dirty="0">
-                        <a:latin typeface="Calibri" charset="0"/>
-                        <a:ea typeface="Calibri" charset="0"/>
-                        <a:cs typeface="Calibri" charset="0"/>
-                      </a:endParaRPr>
-                    </a:p>
-                  </a:txBody>
-                  <a:tcPr marL="54864" marR="54864" marT="54864" marB="54864" anchor="ctr">
-                    <a:lnL w="6350" cap="flat" cmpd="sng" algn="ctr">
-                      <a:solidFill>
-                        <a:srgbClr val="DCE7E3"/>
-                      </a:solidFill>
-                      <a:prstDash val="solid"/>
-                      <a:round/>
-                      <a:headEnd type="none" w="med" len="med"/>
-                      <a:tailEnd type="none" w="med" len="med"/>
-                    </a:lnL>
-                    <a:lnR w="6350" cap="flat" cmpd="sng" algn="ctr">
-                      <a:solidFill>
-                        <a:srgbClr val="DCE7E3"/>
-                      </a:solidFill>
-                      <a:prstDash val="solid"/>
-                      <a:round/>
-                      <a:headEnd type="none" w="med" len="med"/>
-                      <a:tailEnd type="none" w="med" len="med"/>
-                    </a:lnR>
-                    <a:lnT w="6350" cap="flat" cmpd="sng" algn="ctr">
-                      <a:solidFill>
-                        <a:srgbClr val="DCE7E3"/>
-                      </a:solidFill>
-                      <a:prstDash val="solid"/>
-                      <a:round/>
-                      <a:headEnd type="none" w="med" len="med"/>
-                      <a:tailEnd type="none" w="med" len="med"/>
-                    </a:lnT>
-                    <a:lnB w="6350" cap="flat" cmpd="sng" algn="ctr">
-                      <a:solidFill>
-                        <a:srgbClr val="DCE7E3"/>
-                      </a:solidFill>
-                      <a:prstDash val="solid"/>
-                      <a:round/>
-                      <a:headEnd type="none" w="med" len="med"/>
-                      <a:tailEnd type="none" w="med" len="med"/>
-                    </a:lnB>
-                  </a:tcPr>
-                </a:tc>
-                <a:tc>
-                  <a:txBody>
-                    <a:bodyPr/>
-                    <a:lstStyle/>
-                    <a:p>
-                      <a:pPr indent="0" marL="0">
-                        <a:buNone/>
-                      </a:pPr>
-                      <a:r>
-                        <a:rPr lang="en-US" sz="1250" dirty="0">
-                          <a:solidFill>
-                            <a:srgbClr val="14322C"/>
-                          </a:solidFill>
-                          <a:latin typeface="Calibri" pitchFamily="34" charset="0"/>
-                          <a:ea typeface="Calibri" pitchFamily="34" charset="-122"/>
-                          <a:cs typeface="Calibri" pitchFamily="34" charset="-120"/>
-                        </a:rPr>
-                        <a:t>23</a:t>
-                      </a:r>
-                      <a:endParaRPr lang="en-US" sz="1250" dirty="0">
-                        <a:latin typeface="Calibri" charset="0"/>
-                        <a:ea typeface="Calibri" charset="0"/>
-                        <a:cs typeface="Calibri" charset="0"/>
-                      </a:endParaRPr>
-                    </a:p>
-                  </a:txBody>
-                  <a:tcPr marL="54864" marR="54864" marT="54864" marB="54864" anchor="ctr">
-                    <a:lnL w="6350" cap="flat" cmpd="sng" algn="ctr">
-                      <a:solidFill>
-                        <a:srgbClr val="DCE7E3"/>
-                      </a:solidFill>
-                      <a:prstDash val="solid"/>
-                      <a:round/>
-                      <a:headEnd type="none" w="med" len="med"/>
-                      <a:tailEnd type="none" w="med" len="med"/>
-                    </a:lnL>
-                    <a:lnR w="6350" cap="flat" cmpd="sng" algn="ctr">
-                      <a:solidFill>
-                        <a:srgbClr val="DCE7E3"/>
-                      </a:solidFill>
-                      <a:prstDash val="solid"/>
-                      <a:round/>
-                      <a:headEnd type="none" w="med" len="med"/>
-                      <a:tailEnd type="none" w="med" len="med"/>
-                    </a:lnR>
-                    <a:lnT w="6350" cap="flat" cmpd="sng" algn="ctr">
-                      <a:solidFill>
-                        <a:srgbClr val="DCE7E3"/>
-                      </a:solidFill>
-                      <a:prstDash val="solid"/>
-                      <a:round/>
-                      <a:headEnd type="none" w="med" len="med"/>
-                      <a:tailEnd type="none" w="med" len="med"/>
-                    </a:lnT>
-                    <a:lnB w="6350" cap="flat" cmpd="sng" algn="ctr">
-                      <a:solidFill>
-                        <a:srgbClr val="DCE7E3"/>
-                      </a:solidFill>
-                      <a:prstDash val="solid"/>
-                      <a:round/>
-                      <a:headEnd type="none" w="med" len="med"/>
-                      <a:tailEnd type="none" w="med" len="med"/>
-                    </a:lnB>
-                  </a:tcPr>
-                </a:tc>
-                <a:tc>
-                  <a:txBody>
-                    <a:bodyPr/>
-                    <a:lstStyle/>
-                    <a:p>
-                      <a:pPr indent="0" marL="0">
-                        <a:buNone/>
-                      </a:pPr>
-                      <a:r>
-                        <a:rPr lang="en-US" sz="1250" dirty="0">
-                          <a:solidFill>
-                            <a:srgbClr val="14322C"/>
-                          </a:solidFill>
-                          <a:latin typeface="Calibri" pitchFamily="34" charset="0"/>
-                          <a:ea typeface="Calibri" pitchFamily="34" charset="-122"/>
-                          <a:cs typeface="Calibri" pitchFamily="34" charset="-120"/>
-                        </a:rPr>
-                        <a:t>Apr 27</a:t>
-                      </a:r>
-                      <a:endParaRPr lang="en-US" sz="1250" dirty="0">
-                        <a:latin typeface="Calibri" charset="0"/>
-                        <a:ea typeface="Calibri" charset="0"/>
-                        <a:cs typeface="Calibri" charset="0"/>
-                      </a:endParaRPr>
-                    </a:p>
-                  </a:txBody>
-                  <a:tcPr marL="54864" marR="54864" marT="54864" marB="54864" anchor="ctr">
-                    <a:lnL w="6350" cap="flat" cmpd="sng" algn="ctr">
-                      <a:solidFill>
-                        <a:srgbClr val="DCE7E3"/>
-                      </a:solidFill>
-                      <a:prstDash val="solid"/>
-                      <a:round/>
-                      <a:headEnd type="none" w="med" len="med"/>
-                      <a:tailEnd type="none" w="med" len="med"/>
-                    </a:lnL>
-                    <a:lnR w="6350" cap="flat" cmpd="sng" algn="ctr">
-                      <a:solidFill>
-                        <a:srgbClr val="DCE7E3"/>
-                      </a:solidFill>
-                      <a:prstDash val="solid"/>
-                      <a:round/>
-                      <a:headEnd type="none" w="med" len="med"/>
-                      <a:tailEnd type="none" w="med" len="med"/>
-                    </a:lnR>
-                    <a:lnT w="6350" cap="flat" cmpd="sng" algn="ctr">
-                      <a:solidFill>
-                        <a:srgbClr val="DCE7E3"/>
-                      </a:solidFill>
-                      <a:prstDash val="solid"/>
-                      <a:round/>
-                      <a:headEnd type="none" w="med" len="med"/>
-                      <a:tailEnd type="none" w="med" len="med"/>
-                    </a:lnT>
-                    <a:lnB w="6350" cap="flat" cmpd="sng" algn="ctr">
-                      <a:solidFill>
-                        <a:srgbClr val="DCE7E3"/>
-                      </a:solidFill>
-                      <a:prstDash val="solid"/>
-                      <a:round/>
-                      <a:headEnd type="none" w="med" len="med"/>
-                      <a:tailEnd type="none" w="med" len="med"/>
-                    </a:lnB>
-                  </a:tcPr>
-                </a:tc>
-              </a:tr>
-              <a:tr h="438912">
-                <a:tc>
-                  <a:txBody>
-                    <a:bodyPr/>
-                    <a:lstStyle/>
-                    <a:p>
-                      <a:pPr indent="0" marL="0">
-                        <a:buNone/>
-                      </a:pPr>
-                      <a:r>
-                        <a:rPr lang="en-US" sz="1250" dirty="0">
-                          <a:solidFill>
-                            <a:srgbClr val="14322C"/>
-                          </a:solidFill>
-                          <a:latin typeface="Calibri" pitchFamily="34" charset="0"/>
-                          <a:ea typeface="Calibri" pitchFamily="34" charset="-122"/>
-                          <a:cs typeface="Calibri" pitchFamily="34" charset="-120"/>
-                        </a:rPr>
-                        <a:t>Michigan Auto Law</a:t>
-                      </a:r>
-                      <a:endParaRPr lang="en-US" sz="1250" dirty="0">
-                        <a:latin typeface="Calibri" charset="0"/>
-                        <a:ea typeface="Calibri" charset="0"/>
-                        <a:cs typeface="Calibri" charset="0"/>
-                      </a:endParaRPr>
-                    </a:p>
-                  </a:txBody>
-                  <a:tcPr marL="54864" marR="54864" marT="54864" marB="54864" anchor="ctr">
-                    <a:lnL w="6350" cap="flat" cmpd="sng" algn="ctr">
-                      <a:solidFill>
-                        <a:srgbClr val="DCE7E3"/>
-                      </a:solidFill>
-                      <a:prstDash val="solid"/>
-                      <a:round/>
-                      <a:headEnd type="none" w="med" len="med"/>
-                      <a:tailEnd type="none" w="med" len="med"/>
-                    </a:lnL>
-                    <a:lnR w="6350" cap="flat" cmpd="sng" algn="ctr">
-                      <a:solidFill>
-                        <a:srgbClr val="DCE7E3"/>
-                      </a:solidFill>
-                      <a:prstDash val="solid"/>
-                      <a:round/>
-                      <a:headEnd type="none" w="med" len="med"/>
-                      <a:tailEnd type="none" w="med" len="med"/>
-                    </a:lnR>
-                    <a:lnT w="6350" cap="flat" cmpd="sng" algn="ctr">
-                      <a:solidFill>
-                        <a:srgbClr val="DCE7E3"/>
-                      </a:solidFill>
-                      <a:prstDash val="solid"/>
-                      <a:round/>
-                      <a:headEnd type="none" w="med" len="med"/>
-                      <a:tailEnd type="none" w="med" len="med"/>
-                    </a:lnT>
-                    <a:lnB w="6350" cap="flat" cmpd="sng" algn="ctr">
-                      <a:solidFill>
-                        <a:srgbClr val="DCE7E3"/>
-                      </a:solidFill>
-                      <a:prstDash val="solid"/>
-                      <a:round/>
-                      <a:headEnd type="none" w="med" len="med"/>
-                      <a:tailEnd type="none" w="med" len="med"/>
-                    </a:lnB>
-                  </a:tcPr>
-                </a:tc>
-                <a:tc>
-                  <a:txBody>
-                    <a:bodyPr/>
-                    <a:lstStyle/>
-                    <a:p>
-                      <a:pPr indent="0" marL="0">
-                        <a:buNone/>
-                      </a:pPr>
-                      <a:r>
-                        <a:rPr lang="en-US" sz="1250" dirty="0">
-                          <a:solidFill>
-                            <a:srgbClr val="14322C"/>
-                          </a:solidFill>
-                          <a:latin typeface="Calibri" pitchFamily="34" charset="0"/>
-                          <a:ea typeface="Calibri" pitchFamily="34" charset="-122"/>
-                          <a:cs typeface="Calibri" pitchFamily="34" charset="-120"/>
-                        </a:rPr>
-                        <a:t>10</a:t>
-                      </a:r>
-                      <a:endParaRPr lang="en-US" sz="1250" dirty="0">
-                        <a:latin typeface="Calibri" charset="0"/>
-                        <a:ea typeface="Calibri" charset="0"/>
-                        <a:cs typeface="Calibri" charset="0"/>
-                      </a:endParaRPr>
-                    </a:p>
-                  </a:txBody>
-                  <a:tcPr marL="54864" marR="54864" marT="54864" marB="54864" anchor="ctr">
-                    <a:lnL w="6350" cap="flat" cmpd="sng" algn="ctr">
-                      <a:solidFill>
-                        <a:srgbClr val="DCE7E3"/>
-                      </a:solidFill>
-                      <a:prstDash val="solid"/>
-                      <a:round/>
-                      <a:headEnd type="none" w="med" len="med"/>
-                      <a:tailEnd type="none" w="med" len="med"/>
-                    </a:lnL>
-                    <a:lnR w="6350" cap="flat" cmpd="sng" algn="ctr">
-                      <a:solidFill>
-                        <a:srgbClr val="DCE7E3"/>
-                      </a:solidFill>
-                      <a:prstDash val="solid"/>
-                      <a:round/>
-                      <a:headEnd type="none" w="med" len="med"/>
-                      <a:tailEnd type="none" w="med" len="med"/>
-                    </a:lnR>
-                    <a:lnT w="6350" cap="flat" cmpd="sng" algn="ctr">
-                      <a:solidFill>
-                        <a:srgbClr val="DCE7E3"/>
-                      </a:solidFill>
-                      <a:prstDash val="solid"/>
-                      <a:round/>
-                      <a:headEnd type="none" w="med" len="med"/>
-                      <a:tailEnd type="none" w="med" len="med"/>
-                    </a:lnT>
-                    <a:lnB w="6350" cap="flat" cmpd="sng" algn="ctr">
-                      <a:solidFill>
-                        <a:srgbClr val="DCE7E3"/>
-                      </a:solidFill>
-                      <a:prstDash val="solid"/>
-                      <a:round/>
-                      <a:headEnd type="none" w="med" len="med"/>
-                      <a:tailEnd type="none" w="med" len="med"/>
-                    </a:lnB>
-                  </a:tcPr>
-                </a:tc>
-                <a:tc>
-                  <a:txBody>
-                    <a:bodyPr/>
-                    <a:lstStyle/>
-                    <a:p>
-                      <a:pPr indent="0" marL="0">
-                        <a:buNone/>
-                      </a:pPr>
-                      <a:r>
-                        <a:rPr lang="en-US" sz="1250" dirty="0">
-                          <a:solidFill>
-                            <a:srgbClr val="14322C"/>
-                          </a:solidFill>
-                          <a:latin typeface="Calibri" pitchFamily="34" charset="0"/>
-                          <a:ea typeface="Calibri" pitchFamily="34" charset="-122"/>
-                          <a:cs typeface="Calibri" pitchFamily="34" charset="-120"/>
-                        </a:rPr>
-                        <a:t>Apr 29</a:t>
-                      </a:r>
-                      <a:endParaRPr lang="en-US" sz="1250" dirty="0">
-                        <a:latin typeface="Calibri" charset="0"/>
-                        <a:ea typeface="Calibri" charset="0"/>
-                        <a:cs typeface="Calibri" charset="0"/>
-                      </a:endParaRPr>
-                    </a:p>
-                  </a:txBody>
-                  <a:tcPr marL="54864" marR="54864" marT="54864" marB="54864" anchor="ctr">
-                    <a:lnL w="6350" cap="flat" cmpd="sng" algn="ctr">
-                      <a:solidFill>
-                        <a:srgbClr val="DCE7E3"/>
-                      </a:solidFill>
-                      <a:prstDash val="solid"/>
-                      <a:round/>
-                      <a:headEnd type="none" w="med" len="med"/>
-                      <a:tailEnd type="none" w="med" len="med"/>
-                    </a:lnL>
-                    <a:lnR w="6350" cap="flat" cmpd="sng" algn="ctr">
-                      <a:solidFill>
-                        <a:srgbClr val="DCE7E3"/>
-                      </a:solidFill>
-                      <a:prstDash val="solid"/>
-                      <a:round/>
-                      <a:headEnd type="none" w="med" len="med"/>
-                      <a:tailEnd type="none" w="med" len="med"/>
-                    </a:lnR>
-                    <a:lnT w="6350" cap="flat" cmpd="sng" algn="ctr">
-                      <a:solidFill>
-                        <a:srgbClr val="DCE7E3"/>
-                      </a:solidFill>
-                      <a:prstDash val="solid"/>
-                      <a:round/>
-                      <a:headEnd type="none" w="med" len="med"/>
-                      <a:tailEnd type="none" w="med" len="med"/>
-                    </a:lnT>
-                    <a:lnB w="6350" cap="flat" cmpd="sng" algn="ctr">
-                      <a:solidFill>
-                        <a:srgbClr val="DCE7E3"/>
-                      </a:solidFill>
-                      <a:prstDash val="solid"/>
-                      <a:round/>
-                      <a:headEnd type="none" w="med" len="med"/>
-                      <a:tailEnd type="none" w="med" len="med"/>
-                    </a:lnB>
-                  </a:tcPr>
-                </a:tc>
-              </a:tr>
-              <a:tr h="438912">
-                <a:tc>
-                  <a:txBody>
-                    <a:bodyPr/>
-                    <a:lstStyle/>
-                    <a:p>
-                      <a:pPr indent="0" marL="0">
-                        <a:buNone/>
-                      </a:pPr>
-                      <a:r>
-                        <a:rPr lang="en-US" sz="1250" dirty="0">
-                          <a:solidFill>
-                            <a:srgbClr val="14322C"/>
-                          </a:solidFill>
-                          <a:latin typeface="Calibri" pitchFamily="34" charset="0"/>
-                          <a:ea typeface="Calibri" pitchFamily="34" charset="-122"/>
-                          <a:cs typeface="Calibri" pitchFamily="34" charset="-120"/>
-                        </a:rPr>
-                        <a:t>Applebaum &amp; Stone</a:t>
-                      </a:r>
-                      <a:endParaRPr lang="en-US" sz="1250" dirty="0">
-                        <a:latin typeface="Calibri" charset="0"/>
-                        <a:ea typeface="Calibri" charset="0"/>
-                        <a:cs typeface="Calibri" charset="0"/>
-                      </a:endParaRPr>
-                    </a:p>
-                  </a:txBody>
-                  <a:tcPr marL="54864" marR="54864" marT="54864" marB="54864" anchor="ctr">
-                    <a:lnL w="6350" cap="flat" cmpd="sng" algn="ctr">
-                      <a:solidFill>
-                        <a:srgbClr val="DCE7E3"/>
-                      </a:solidFill>
-                      <a:prstDash val="solid"/>
-                      <a:round/>
-                      <a:headEnd type="none" w="med" len="med"/>
-                      <a:tailEnd type="none" w="med" len="med"/>
-                    </a:lnL>
-                    <a:lnR w="6350" cap="flat" cmpd="sng" algn="ctr">
-                      <a:solidFill>
-                        <a:srgbClr val="DCE7E3"/>
-                      </a:solidFill>
-                      <a:prstDash val="solid"/>
-                      <a:round/>
-                      <a:headEnd type="none" w="med" len="med"/>
-                      <a:tailEnd type="none" w="med" len="med"/>
-                    </a:lnR>
-                    <a:lnT w="6350" cap="flat" cmpd="sng" algn="ctr">
-                      <a:solidFill>
-                        <a:srgbClr val="DCE7E3"/>
-                      </a:solidFill>
-                      <a:prstDash val="solid"/>
-                      <a:round/>
-                      <a:headEnd type="none" w="med" len="med"/>
-                      <a:tailEnd type="none" w="med" len="med"/>
-                    </a:lnT>
-                    <a:lnB w="6350" cap="flat" cmpd="sng" algn="ctr">
-                      <a:solidFill>
-                        <a:srgbClr val="DCE7E3"/>
-                      </a:solidFill>
-                      <a:prstDash val="solid"/>
-                      <a:round/>
-                      <a:headEnd type="none" w="med" len="med"/>
-                      <a:tailEnd type="none" w="med" len="med"/>
-                    </a:lnB>
-                  </a:tcPr>
-                </a:tc>
-                <a:tc>
-                  <a:txBody>
-                    <a:bodyPr/>
-                    <a:lstStyle/>
-                    <a:p>
-                      <a:pPr indent="0" marL="0">
-                        <a:buNone/>
-                      </a:pPr>
-                      <a:r>
-                        <a:rPr lang="en-US" sz="1250" dirty="0">
-                          <a:solidFill>
-                            <a:srgbClr val="14322C"/>
-                          </a:solidFill>
-                          <a:latin typeface="Calibri" pitchFamily="34" charset="0"/>
-                          <a:ea typeface="Calibri" pitchFamily="34" charset="-122"/>
-                          <a:cs typeface="Calibri" pitchFamily="34" charset="-120"/>
-                        </a:rPr>
-                        <a:t>5</a:t>
-                      </a:r>
-                      <a:endParaRPr lang="en-US" sz="1250" dirty="0">
-                        <a:latin typeface="Calibri" charset="0"/>
-                        <a:ea typeface="Calibri" charset="0"/>
-                        <a:cs typeface="Calibri" charset="0"/>
-                      </a:endParaRPr>
-                    </a:p>
-                  </a:txBody>
-                  <a:tcPr marL="54864" marR="54864" marT="54864" marB="54864" anchor="ctr">
-                    <a:lnL w="6350" cap="flat" cmpd="sng" algn="ctr">
-                      <a:solidFill>
-                        <a:srgbClr val="DCE7E3"/>
-                      </a:solidFill>
-                      <a:prstDash val="solid"/>
-                      <a:round/>
-                      <a:headEnd type="none" w="med" len="med"/>
-                      <a:tailEnd type="none" w="med" len="med"/>
-                    </a:lnL>
-                    <a:lnR w="6350" cap="flat" cmpd="sng" algn="ctr">
-                      <a:solidFill>
-                        <a:srgbClr val="DCE7E3"/>
-                      </a:solidFill>
-                      <a:prstDash val="solid"/>
-                      <a:round/>
-                      <a:headEnd type="none" w="med" len="med"/>
-                      <a:tailEnd type="none" w="med" len="med"/>
-                    </a:lnR>
-                    <a:lnT w="6350" cap="flat" cmpd="sng" algn="ctr">
-                      <a:solidFill>
-                        <a:srgbClr val="DCE7E3"/>
-                      </a:solidFill>
-                      <a:prstDash val="solid"/>
-                      <a:round/>
-                      <a:headEnd type="none" w="med" len="med"/>
-                      <a:tailEnd type="none" w="med" len="med"/>
-                    </a:lnT>
-                    <a:lnB w="6350" cap="flat" cmpd="sng" algn="ctr">
-                      <a:solidFill>
-                        <a:srgbClr val="DCE7E3"/>
-                      </a:solidFill>
-                      <a:prstDash val="solid"/>
-                      <a:round/>
-                      <a:headEnd type="none" w="med" len="med"/>
-                      <a:tailEnd type="none" w="med" len="med"/>
-                    </a:lnB>
-                  </a:tcPr>
-                </a:tc>
-                <a:tc>
-                  <a:txBody>
-                    <a:bodyPr/>
-                    <a:lstStyle/>
-                    <a:p>
-                      <a:pPr indent="0" marL="0">
-                        <a:buNone/>
-                      </a:pPr>
-                      <a:r>
-                        <a:rPr lang="en-US" sz="1250" dirty="0">
-                          <a:solidFill>
-                            <a:srgbClr val="14322C"/>
-                          </a:solidFill>
-                          <a:latin typeface="Calibri" pitchFamily="34" charset="0"/>
-                          <a:ea typeface="Calibri" pitchFamily="34" charset="-122"/>
-                          <a:cs typeface="Calibri" pitchFamily="34" charset="-120"/>
-                        </a:rPr>
-                        <a:t>Mar 16</a:t>
-                      </a:r>
-                      <a:endParaRPr lang="en-US" sz="1250" dirty="0">
-                        <a:latin typeface="Calibri" charset="0"/>
-                        <a:ea typeface="Calibri" charset="0"/>
-                        <a:cs typeface="Calibri" charset="0"/>
-                      </a:endParaRPr>
-                    </a:p>
-                  </a:txBody>
-                  <a:tcPr marL="54864" marR="54864" marT="54864" marB="54864" anchor="ctr">
-                    <a:lnL w="6350" cap="flat" cmpd="sng" algn="ctr">
-                      <a:solidFill>
-                        <a:srgbClr val="DCE7E3"/>
-                      </a:solidFill>
-                      <a:prstDash val="solid"/>
-                      <a:round/>
-                      <a:headEnd type="none" w="med" len="med"/>
-                      <a:tailEnd type="none" w="med" len="med"/>
-                    </a:lnL>
-                    <a:lnR w="6350" cap="flat" cmpd="sng" algn="ctr">
-                      <a:solidFill>
-                        <a:srgbClr val="DCE7E3"/>
-                      </a:solidFill>
-                      <a:prstDash val="solid"/>
-                      <a:round/>
-                      <a:headEnd type="none" w="med" len="med"/>
-                      <a:tailEnd type="none" w="med" len="med"/>
-                    </a:lnR>
-                    <a:lnT w="6350" cap="flat" cmpd="sng" algn="ctr">
-                      <a:solidFill>
-                        <a:srgbClr val="DCE7E3"/>
-                      </a:solidFill>
-                      <a:prstDash val="solid"/>
-                      <a:round/>
-                      <a:headEnd type="none" w="med" len="med"/>
-                      <a:tailEnd type="none" w="med" len="med"/>
-                    </a:lnT>
-                    <a:lnB w="6350" cap="flat" cmpd="sng" algn="ctr">
-                      <a:solidFill>
-                        <a:srgbClr val="DCE7E3"/>
-                      </a:solidFill>
-                      <a:prstDash val="solid"/>
-                      <a:round/>
-                      <a:headEnd type="none" w="med" len="med"/>
-                      <a:tailEnd type="none" w="med" len="med"/>
-                    </a:lnB>
-                  </a:tcPr>
-                </a:tc>
-              </a:tr>
-              <a:tr h="438912">
-                <a:tc>
-                  <a:txBody>
-                    <a:bodyPr/>
-                    <a:lstStyle/>
-                    <a:p>
-                      <a:pPr indent="0" marL="0">
-                        <a:buNone/>
-                      </a:pPr>
-                      <a:r>
-                        <a:rPr lang="en-US" sz="1250" dirty="0">
-                          <a:solidFill>
-                            <a:srgbClr val="14322C"/>
-                          </a:solidFill>
-                          <a:latin typeface="Calibri" pitchFamily="34" charset="0"/>
-                          <a:ea typeface="Calibri" pitchFamily="34" charset="-122"/>
-                          <a:cs typeface="Calibri" pitchFamily="34" charset="-120"/>
-                        </a:rPr>
-                        <a:t>Vanstone Injury Law</a:t>
-                      </a:r>
-                      <a:endParaRPr lang="en-US" sz="1250" dirty="0">
-                        <a:latin typeface="Calibri" charset="0"/>
-                        <a:ea typeface="Calibri" charset="0"/>
-                        <a:cs typeface="Calibri" charset="0"/>
-                      </a:endParaRPr>
-                    </a:p>
-                  </a:txBody>
-                  <a:tcPr marL="54864" marR="54864" marT="54864" marB="54864" anchor="ctr">
-                    <a:lnL w="6350" cap="flat" cmpd="sng" algn="ctr">
-                      <a:solidFill>
-                        <a:srgbClr val="DCE7E3"/>
-                      </a:solidFill>
-                      <a:prstDash val="solid"/>
-                      <a:round/>
-                      <a:headEnd type="none" w="med" len="med"/>
-                      <a:tailEnd type="none" w="med" len="med"/>
-                    </a:lnL>
-                    <a:lnR w="6350" cap="flat" cmpd="sng" algn="ctr">
-                      <a:solidFill>
-                        <a:srgbClr val="DCE7E3"/>
-                      </a:solidFill>
-                      <a:prstDash val="solid"/>
-                      <a:round/>
-                      <a:headEnd type="none" w="med" len="med"/>
-                      <a:tailEnd type="none" w="med" len="med"/>
-                    </a:lnR>
-                    <a:lnT w="6350" cap="flat" cmpd="sng" algn="ctr">
-                      <a:solidFill>
-                        <a:srgbClr val="DCE7E3"/>
-                      </a:solidFill>
-                      <a:prstDash val="solid"/>
-                      <a:round/>
-                      <a:headEnd type="none" w="med" len="med"/>
-                      <a:tailEnd type="none" w="med" len="med"/>
-                    </a:lnT>
-                    <a:lnB w="6350" cap="flat" cmpd="sng" algn="ctr">
-                      <a:solidFill>
-                        <a:srgbClr val="DCE7E3"/>
-                      </a:solidFill>
-                      <a:prstDash val="solid"/>
-                      <a:round/>
-                      <a:headEnd type="none" w="med" len="med"/>
-                      <a:tailEnd type="none" w="med" len="med"/>
-                    </a:lnB>
-                  </a:tcPr>
-                </a:tc>
-                <a:tc>
-                  <a:txBody>
-                    <a:bodyPr/>
-                    <a:lstStyle/>
-                    <a:p>
-                      <a:pPr indent="0" marL="0">
-                        <a:buNone/>
-                      </a:pPr>
-                      <a:r>
-                        <a:rPr lang="en-US" sz="1250" dirty="0">
-                          <a:solidFill>
-                            <a:srgbClr val="14322C"/>
-                          </a:solidFill>
-                          <a:latin typeface="Calibri" pitchFamily="34" charset="0"/>
-                          <a:ea typeface="Calibri" pitchFamily="34" charset="-122"/>
-                          <a:cs typeface="Calibri" pitchFamily="34" charset="-120"/>
-                        </a:rPr>
-                        <a:t>5</a:t>
-                      </a:r>
-                      <a:endParaRPr lang="en-US" sz="1250" dirty="0">
-                        <a:latin typeface="Calibri" charset="0"/>
-                        <a:ea typeface="Calibri" charset="0"/>
-                        <a:cs typeface="Calibri" charset="0"/>
-                      </a:endParaRPr>
-                    </a:p>
-                  </a:txBody>
-                  <a:tcPr marL="54864" marR="54864" marT="54864" marB="54864" anchor="ctr">
-                    <a:lnL w="6350" cap="flat" cmpd="sng" algn="ctr">
-                      <a:solidFill>
-                        <a:srgbClr val="DCE7E3"/>
-                      </a:solidFill>
-                      <a:prstDash val="solid"/>
-                      <a:round/>
-                      <a:headEnd type="none" w="med" len="med"/>
-                      <a:tailEnd type="none" w="med" len="med"/>
-                    </a:lnL>
-                    <a:lnR w="6350" cap="flat" cmpd="sng" algn="ctr">
-                      <a:solidFill>
-                        <a:srgbClr val="DCE7E3"/>
-                      </a:solidFill>
-                      <a:prstDash val="solid"/>
-                      <a:round/>
-                      <a:headEnd type="none" w="med" len="med"/>
-                      <a:tailEnd type="none" w="med" len="med"/>
-                    </a:lnR>
-                    <a:lnT w="6350" cap="flat" cmpd="sng" algn="ctr">
-                      <a:solidFill>
-                        <a:srgbClr val="DCE7E3"/>
-                      </a:solidFill>
-                      <a:prstDash val="solid"/>
-                      <a:round/>
-                      <a:headEnd type="none" w="med" len="med"/>
-                      <a:tailEnd type="none" w="med" len="med"/>
-                    </a:lnT>
-                    <a:lnB w="6350" cap="flat" cmpd="sng" algn="ctr">
-                      <a:solidFill>
-                        <a:srgbClr val="DCE7E3"/>
-                      </a:solidFill>
-                      <a:prstDash val="solid"/>
-                      <a:round/>
-                      <a:headEnd type="none" w="med" len="med"/>
-                      <a:tailEnd type="none" w="med" len="med"/>
-                    </a:lnB>
-                  </a:tcPr>
-                </a:tc>
-                <a:tc>
-                  <a:txBody>
-                    <a:bodyPr/>
-                    <a:lstStyle/>
-                    <a:p>
-                      <a:pPr indent="0" marL="0">
-                        <a:buNone/>
-                      </a:pPr>
-                      <a:r>
-                        <a:rPr lang="en-US" sz="1250" dirty="0">
-                          <a:solidFill>
-                            <a:srgbClr val="14322C"/>
-                          </a:solidFill>
-                          <a:latin typeface="Calibri" pitchFamily="34" charset="0"/>
-                          <a:ea typeface="Calibri" pitchFamily="34" charset="-122"/>
-                          <a:cs typeface="Calibri" pitchFamily="34" charset="-120"/>
-                        </a:rPr>
-                        <a:t>Feb 27</a:t>
-                      </a:r>
-                      <a:endParaRPr lang="en-US" sz="1250" dirty="0">
-                        <a:latin typeface="Calibri" charset="0"/>
-                        <a:ea typeface="Calibri" charset="0"/>
-                        <a:cs typeface="Calibri" charset="0"/>
-                      </a:endParaRPr>
-                    </a:p>
-                  </a:txBody>
-                  <a:tcPr marL="54864" marR="54864" marT="54864" marB="54864" anchor="ctr">
-                    <a:lnL w="6350" cap="flat" cmpd="sng" algn="ctr">
-                      <a:solidFill>
-                        <a:srgbClr val="DCE7E3"/>
-                      </a:solidFill>
-                      <a:prstDash val="solid"/>
-                      <a:round/>
-                      <a:headEnd type="none" w="med" len="med"/>
-                      <a:tailEnd type="none" w="med" len="med"/>
-                    </a:lnL>
-                    <a:lnR w="6350" cap="flat" cmpd="sng" algn="ctr">
-                      <a:solidFill>
-                        <a:srgbClr val="DCE7E3"/>
-                      </a:solidFill>
-                      <a:prstDash val="solid"/>
-                      <a:round/>
-                      <a:headEnd type="none" w="med" len="med"/>
-                      <a:tailEnd type="none" w="med" len="med"/>
-                    </a:lnR>
-                    <a:lnT w="6350" cap="flat" cmpd="sng" algn="ctr">
-                      <a:solidFill>
-                        <a:srgbClr val="DCE7E3"/>
-                      </a:solidFill>
-                      <a:prstDash val="solid"/>
-                      <a:round/>
-                      <a:headEnd type="none" w="med" len="med"/>
-                      <a:tailEnd type="none" w="med" len="med"/>
-                    </a:lnT>
-                    <a:lnB w="6350" cap="flat" cmpd="sng" algn="ctr">
-                      <a:solidFill>
-                        <a:srgbClr val="DCE7E3"/>
-                      </a:solidFill>
-                      <a:prstDash val="solid"/>
-                      <a:round/>
-                      <a:headEnd type="none" w="med" len="med"/>
-                      <a:tailEnd type="none" w="med" len="med"/>
-                    </a:lnB>
-                  </a:tcPr>
-                </a:tc>
-              </a:tr>
-              <a:tr h="438912">
-                <a:tc>
-                  <a:txBody>
-                    <a:bodyPr/>
-                    <a:lstStyle/>
-                    <a:p>
-                      <a:pPr indent="0" marL="0">
-                        <a:buNone/>
-                      </a:pPr>
-                      <a:r>
-                        <a:rPr lang="en-US" sz="1250" dirty="0">
-                          <a:solidFill>
-                            <a:srgbClr val="14322C"/>
-                          </a:solidFill>
-                          <a:latin typeface="Calibri" pitchFamily="34" charset="0"/>
-                          <a:ea typeface="Calibri" pitchFamily="34" charset="-122"/>
-                          <a:cs typeface="Calibri" pitchFamily="34" charset="-120"/>
-                        </a:rPr>
-                        <a:t>Ross Law</a:t>
-                      </a:r>
-                      <a:endParaRPr lang="en-US" sz="1250" dirty="0">
-                        <a:latin typeface="Calibri" charset="0"/>
-                        <a:ea typeface="Calibri" charset="0"/>
-                        <a:cs typeface="Calibri" charset="0"/>
-                      </a:endParaRPr>
-                    </a:p>
-                  </a:txBody>
-                  <a:tcPr marL="54864" marR="54864" marT="54864" marB="54864" anchor="ctr">
-                    <a:lnL w="6350" cap="flat" cmpd="sng" algn="ctr">
-                      <a:solidFill>
-                        <a:srgbClr val="DCE7E3"/>
-                      </a:solidFill>
-                      <a:prstDash val="solid"/>
-                      <a:round/>
-                      <a:headEnd type="none" w="med" len="med"/>
-                      <a:tailEnd type="none" w="med" len="med"/>
-                    </a:lnL>
-                    <a:lnR w="6350" cap="flat" cmpd="sng" algn="ctr">
-                      <a:solidFill>
-                        <a:srgbClr val="DCE7E3"/>
-                      </a:solidFill>
-                      <a:prstDash val="solid"/>
-                      <a:round/>
-                      <a:headEnd type="none" w="med" len="med"/>
-                      <a:tailEnd type="none" w="med" len="med"/>
-                    </a:lnR>
-                    <a:lnT w="6350" cap="flat" cmpd="sng" algn="ctr">
-                      <a:solidFill>
-                        <a:srgbClr val="DCE7E3"/>
-                      </a:solidFill>
-                      <a:prstDash val="solid"/>
-                      <a:round/>
-                      <a:headEnd type="none" w="med" len="med"/>
-                      <a:tailEnd type="none" w="med" len="med"/>
-                    </a:lnT>
-                    <a:lnB w="6350" cap="flat" cmpd="sng" algn="ctr">
-                      <a:solidFill>
-                        <a:srgbClr val="DCE7E3"/>
-                      </a:solidFill>
-                      <a:prstDash val="solid"/>
-                      <a:round/>
-                      <a:headEnd type="none" w="med" len="med"/>
-                      <a:tailEnd type="none" w="med" len="med"/>
-                    </a:lnB>
-                  </a:tcPr>
-                </a:tc>
-                <a:tc>
-                  <a:txBody>
-                    <a:bodyPr/>
-                    <a:lstStyle/>
-                    <a:p>
-                      <a:pPr indent="0" marL="0">
-                        <a:buNone/>
-                      </a:pPr>
-                      <a:r>
-                        <a:rPr lang="en-US" sz="1250" dirty="0">
-                          <a:solidFill>
-                            <a:srgbClr val="14322C"/>
-                          </a:solidFill>
-                          <a:latin typeface="Calibri" pitchFamily="34" charset="0"/>
-                          <a:ea typeface="Calibri" pitchFamily="34" charset="-122"/>
-                          <a:cs typeface="Calibri" pitchFamily="34" charset="-120"/>
-                        </a:rPr>
-                        <a:t>5</a:t>
-                      </a:r>
-                      <a:endParaRPr lang="en-US" sz="1250" dirty="0">
-                        <a:latin typeface="Calibri" charset="0"/>
-                        <a:ea typeface="Calibri" charset="0"/>
-                        <a:cs typeface="Calibri" charset="0"/>
-                      </a:endParaRPr>
-                    </a:p>
-                  </a:txBody>
-                  <a:tcPr marL="54864" marR="54864" marT="54864" marB="54864" anchor="ctr">
-                    <a:lnL w="6350" cap="flat" cmpd="sng" algn="ctr">
-                      <a:solidFill>
-                        <a:srgbClr val="DCE7E3"/>
-                      </a:solidFill>
-                      <a:prstDash val="solid"/>
-                      <a:round/>
-                      <a:headEnd type="none" w="med" len="med"/>
-                      <a:tailEnd type="none" w="med" len="med"/>
-                    </a:lnL>
-                    <a:lnR w="6350" cap="flat" cmpd="sng" algn="ctr">
-                      <a:solidFill>
-                        <a:srgbClr val="DCE7E3"/>
-                      </a:solidFill>
-                      <a:prstDash val="solid"/>
-                      <a:round/>
-                      <a:headEnd type="none" w="med" len="med"/>
-                      <a:tailEnd type="none" w="med" len="med"/>
-                    </a:lnR>
-                    <a:lnT w="6350" cap="flat" cmpd="sng" algn="ctr">
-                      <a:solidFill>
-                        <a:srgbClr val="DCE7E3"/>
-                      </a:solidFill>
-                      <a:prstDash val="solid"/>
-                      <a:round/>
-                      <a:headEnd type="none" w="med" len="med"/>
-                      <a:tailEnd type="none" w="med" len="med"/>
-                    </a:lnT>
-                    <a:lnB w="6350" cap="flat" cmpd="sng" algn="ctr">
-                      <a:solidFill>
-                        <a:srgbClr val="DCE7E3"/>
-                      </a:solidFill>
-                      <a:prstDash val="solid"/>
-                      <a:round/>
-                      <a:headEnd type="none" w="med" len="med"/>
-                      <a:tailEnd type="none" w="med" len="med"/>
-                    </a:lnB>
-                  </a:tcPr>
-                </a:tc>
-                <a:tc>
-                  <a:txBody>
-                    <a:bodyPr/>
-                    <a:lstStyle/>
-                    <a:p>
-                      <a:pPr indent="0" marL="0">
-                        <a:buNone/>
-                      </a:pPr>
-                      <a:r>
-                        <a:rPr lang="en-US" sz="1250" dirty="0">
-                          <a:solidFill>
-                            <a:srgbClr val="14322C"/>
-                          </a:solidFill>
-                          <a:latin typeface="Calibri" pitchFamily="34" charset="0"/>
-                          <a:ea typeface="Calibri" pitchFamily="34" charset="-122"/>
-                          <a:cs typeface="Calibri" pitchFamily="34" charset="-120"/>
-                        </a:rPr>
-                        <a:t>May 29</a:t>
-                      </a:r>
-                      <a:endParaRPr lang="en-US" sz="1250" dirty="0">
-                        <a:latin typeface="Calibri" charset="0"/>
-                        <a:ea typeface="Calibri" charset="0"/>
-                        <a:cs typeface="Calibri" charset="0"/>
-                      </a:endParaRPr>
-                    </a:p>
-                  </a:txBody>
-                  <a:tcPr marL="54864" marR="54864" marT="54864" marB="54864" anchor="ctr">
-                    <a:lnL w="6350" cap="flat" cmpd="sng" algn="ctr">
-                      <a:solidFill>
-                        <a:srgbClr val="DCE7E3"/>
-                      </a:solidFill>
-                      <a:prstDash val="solid"/>
-                      <a:round/>
-                      <a:headEnd type="none" w="med" len="med"/>
-                      <a:tailEnd type="none" w="med" len="med"/>
-                    </a:lnL>
-                    <a:lnR w="6350" cap="flat" cmpd="sng" algn="ctr">
-                      <a:solidFill>
-                        <a:srgbClr val="DCE7E3"/>
-                      </a:solidFill>
-                      <a:prstDash val="solid"/>
-                      <a:round/>
-                      <a:headEnd type="none" w="med" len="med"/>
-                      <a:tailEnd type="none" w="med" len="med"/>
-                    </a:lnR>
-                    <a:lnT w="6350" cap="flat" cmpd="sng" algn="ctr">
-                      <a:solidFill>
-                        <a:srgbClr val="DCE7E3"/>
-                      </a:solidFill>
-                      <a:prstDash val="solid"/>
-                      <a:round/>
-                      <a:headEnd type="none" w="med" len="med"/>
-                      <a:tailEnd type="none" w="med" len="med"/>
-                    </a:lnT>
-                    <a:lnB w="6350" cap="flat" cmpd="sng" algn="ctr">
-                      <a:solidFill>
-                        <a:srgbClr val="DCE7E3"/>
-                      </a:solidFill>
-                      <a:prstDash val="solid"/>
-                      <a:round/>
-                      <a:headEnd type="none" w="med" len="med"/>
-                      <a:tailEnd type="none" w="med" len="med"/>
-                    </a:lnB>
-                  </a:tcPr>
-                </a:tc>
-              </a:tr>
-              <a:tr h="438912">
-                <a:tc>
-                  <a:txBody>
-                    <a:bodyPr/>
-                    <a:lstStyle/>
-                    <a:p>
-                      <a:pPr indent="0" marL="0">
-                        <a:buNone/>
-                      </a:pPr>
-                      <a:r>
-                        <a:rPr lang="en-US" sz="1250" dirty="0">
-                          <a:solidFill>
-                            <a:srgbClr val="14322C"/>
-                          </a:solidFill>
-                          <a:latin typeface="Calibri" pitchFamily="34" charset="0"/>
-                          <a:ea typeface="Calibri" pitchFamily="34" charset="-122"/>
-                          <a:cs typeface="Calibri" pitchFamily="34" charset="-120"/>
-                        </a:rPr>
-                        <a:t>Henry Ford PCC-160</a:t>
-                      </a:r>
-                      <a:endParaRPr lang="en-US" sz="1250" dirty="0">
-                        <a:latin typeface="Calibri" charset="0"/>
-                        <a:ea typeface="Calibri" charset="0"/>
-                        <a:cs typeface="Calibri" charset="0"/>
-                      </a:endParaRPr>
-                    </a:p>
-                  </a:txBody>
-                  <a:tcPr marL="54864" marR="54864" marT="54864" marB="54864" anchor="ctr">
-                    <a:lnL w="6350" cap="flat" cmpd="sng" algn="ctr">
-                      <a:solidFill>
-                        <a:srgbClr val="DCE7E3"/>
-                      </a:solidFill>
-                      <a:prstDash val="solid"/>
-                      <a:round/>
-                      <a:headEnd type="none" w="med" len="med"/>
-                      <a:tailEnd type="none" w="med" len="med"/>
-                    </a:lnL>
-                    <a:lnR w="6350" cap="flat" cmpd="sng" algn="ctr">
-                      <a:solidFill>
-                        <a:srgbClr val="DCE7E3"/>
-                      </a:solidFill>
-                      <a:prstDash val="solid"/>
-                      <a:round/>
-                      <a:headEnd type="none" w="med" len="med"/>
-                      <a:tailEnd type="none" w="med" len="med"/>
-                    </a:lnR>
-                    <a:lnT w="6350" cap="flat" cmpd="sng" algn="ctr">
-                      <a:solidFill>
-                        <a:srgbClr val="DCE7E3"/>
-                      </a:solidFill>
-                      <a:prstDash val="solid"/>
-                      <a:round/>
-                      <a:headEnd type="none" w="med" len="med"/>
-                      <a:tailEnd type="none" w="med" len="med"/>
-                    </a:lnT>
-                    <a:lnB w="6350" cap="flat" cmpd="sng" algn="ctr">
-                      <a:solidFill>
-                        <a:srgbClr val="DCE7E3"/>
-                      </a:solidFill>
-                      <a:prstDash val="solid"/>
-                      <a:round/>
-                      <a:headEnd type="none" w="med" len="med"/>
-                      <a:tailEnd type="none" w="med" len="med"/>
-                    </a:lnB>
-                  </a:tcPr>
-                </a:tc>
-                <a:tc>
-                  <a:txBody>
-                    <a:bodyPr/>
-                    <a:lstStyle/>
-                    <a:p>
-                      <a:pPr indent="0" marL="0">
-                        <a:buNone/>
-                      </a:pPr>
-                      <a:r>
-                        <a:rPr lang="en-US" sz="1250" dirty="0">
-                          <a:solidFill>
-                            <a:srgbClr val="14322C"/>
-                          </a:solidFill>
-                          <a:latin typeface="Calibri" pitchFamily="34" charset="0"/>
-                          <a:ea typeface="Calibri" pitchFamily="34" charset="-122"/>
-                          <a:cs typeface="Calibri" pitchFamily="34" charset="-120"/>
-                        </a:rPr>
-                        <a:t>5</a:t>
-                      </a:r>
-                      <a:endParaRPr lang="en-US" sz="1250" dirty="0">
-                        <a:latin typeface="Calibri" charset="0"/>
-                        <a:ea typeface="Calibri" charset="0"/>
-                        <a:cs typeface="Calibri" charset="0"/>
-                      </a:endParaRPr>
-                    </a:p>
-                  </a:txBody>
-                  <a:tcPr marL="54864" marR="54864" marT="54864" marB="54864" anchor="ctr">
-                    <a:lnL w="6350" cap="flat" cmpd="sng" algn="ctr">
-                      <a:solidFill>
-                        <a:srgbClr val="DCE7E3"/>
-                      </a:solidFill>
-                      <a:prstDash val="solid"/>
-                      <a:round/>
-                      <a:headEnd type="none" w="med" len="med"/>
-                      <a:tailEnd type="none" w="med" len="med"/>
-                    </a:lnL>
-                    <a:lnR w="6350" cap="flat" cmpd="sng" algn="ctr">
-                      <a:solidFill>
-                        <a:srgbClr val="DCE7E3"/>
-                      </a:solidFill>
-                      <a:prstDash val="solid"/>
-                      <a:round/>
-                      <a:headEnd type="none" w="med" len="med"/>
-                      <a:tailEnd type="none" w="med" len="med"/>
-                    </a:lnR>
-                    <a:lnT w="6350" cap="flat" cmpd="sng" algn="ctr">
-                      <a:solidFill>
-                        <a:srgbClr val="DCE7E3"/>
-                      </a:solidFill>
-                      <a:prstDash val="solid"/>
-                      <a:round/>
-                      <a:headEnd type="none" w="med" len="med"/>
-                      <a:tailEnd type="none" w="med" len="med"/>
-                    </a:lnT>
-                    <a:lnB w="6350" cap="flat" cmpd="sng" algn="ctr">
-                      <a:solidFill>
-                        <a:srgbClr val="DCE7E3"/>
-                      </a:solidFill>
-                      <a:prstDash val="solid"/>
-                      <a:round/>
-                      <a:headEnd type="none" w="med" len="med"/>
-                      <a:tailEnd type="none" w="med" len="med"/>
-                    </a:lnB>
-                  </a:tcPr>
-                </a:tc>
-                <a:tc>
-                  <a:txBody>
-                    <a:bodyPr/>
-                    <a:lstStyle/>
-                    <a:p>
-                      <a:pPr indent="0" marL="0">
-                        <a:buNone/>
-                      </a:pPr>
-                      <a:r>
-                        <a:rPr lang="en-US" sz="1250" dirty="0">
-                          <a:solidFill>
-                            <a:srgbClr val="14322C"/>
-                          </a:solidFill>
-                          <a:latin typeface="Calibri" pitchFamily="34" charset="0"/>
-                          <a:ea typeface="Calibri" pitchFamily="34" charset="-122"/>
-                          <a:cs typeface="Calibri" pitchFamily="34" charset="-120"/>
-                        </a:rPr>
-                        <a:t>May 8</a:t>
-                      </a:r>
-                      <a:endParaRPr lang="en-US" sz="1250" dirty="0">
-                        <a:latin typeface="Calibri" charset="0"/>
-                        <a:ea typeface="Calibri" charset="0"/>
-                        <a:cs typeface="Calibri" charset="0"/>
-                      </a:endParaRPr>
-                    </a:p>
-                  </a:txBody>
-                  <a:tcPr marL="54864" marR="54864" marT="54864" marB="54864" anchor="ctr">
-                    <a:lnL w="6350" cap="flat" cmpd="sng" algn="ctr">
-                      <a:solidFill>
-                        <a:srgbClr val="DCE7E3"/>
-                      </a:solidFill>
-                      <a:prstDash val="solid"/>
-                      <a:round/>
-                      <a:headEnd type="none" w="med" len="med"/>
-                      <a:tailEnd type="none" w="med" len="med"/>
-                    </a:lnL>
-                    <a:lnR w="6350" cap="flat" cmpd="sng" algn="ctr">
-                      <a:solidFill>
-                        <a:srgbClr val="DCE7E3"/>
-                      </a:solidFill>
-                      <a:prstDash val="solid"/>
-                      <a:round/>
-                      <a:headEnd type="none" w="med" len="med"/>
-                      <a:tailEnd type="none" w="med" len="med"/>
-                    </a:lnR>
-                    <a:lnT w="6350" cap="flat" cmpd="sng" algn="ctr">
-                      <a:solidFill>
-                        <a:srgbClr val="DCE7E3"/>
-                      </a:solidFill>
-                      <a:prstDash val="solid"/>
-                      <a:round/>
-                      <a:headEnd type="none" w="med" len="med"/>
-                      <a:tailEnd type="none" w="med" len="med"/>
-                    </a:lnT>
-                    <a:lnB w="6350" cap="flat" cmpd="sng" algn="ctr">
-                      <a:solidFill>
-                        <a:srgbClr val="DCE7E3"/>
-                      </a:solidFill>
-                      <a:prstDash val="solid"/>
-                      <a:round/>
-                      <a:headEnd type="none" w="med" len="med"/>
-                      <a:tailEnd type="none" w="med" len="med"/>
-                    </a:lnB>
-                  </a:tcPr>
-                </a:tc>
-              </a:tr>
-            </a:tbl>
-          </a:graphicData>
-        </a:graphic>
-      </p:graphicFrame>
-      <p:sp>
-        <p:nvSpPr>
-          <p:cNvPr id="8" name="Text 5"/>
-          <p:cNvSpPr/>
-          <p:nvPr/>
-        </p:nvSpPr>
-        <p:spPr>
-          <a:xfrm>
-            <a:off x="5303520" y="4572000"/>
-            <a:ext cx="6309360" cy="731520"/>
-          </a:xfrm>
-          <a:prstGeom prst="rect">
-            <a:avLst/>
-          </a:prstGeom>
-          <a:noFill/>
-          <a:ln/>
-        </p:spPr>
-        <p:txBody>
-          <a:bodyPr wrap="square" rtlCol="0" anchor="ctr"/>
-          <a:lstStyle/>
-          <a:p>
-            <a:pPr indent="0" marL="0">
-              <a:buNone/>
-            </a:pPr>
-            <a:r>
-              <a:rPr lang="en-US" sz="1350" i="1" dirty="0">
-                <a:solidFill>
-                  <a:srgbClr val="C4534A"/>
-                </a:solidFill>
-                <a:latin typeface="Calibri" pitchFamily="34" charset="0"/>
-                <a:ea typeface="Calibri" pitchFamily="34" charset="-122"/>
-                <a:cs typeface="Calibri" pitchFamily="34" charset="-120"/>
-              </a:rPr>
-              <a:t>The opener at a lapsed account: “We owe you a visit — that's on us.” Then thank, then listen. No excuses.</a:t>
-            </a:r>
-            <a:endParaRPr lang="en-US" sz="1350" dirty="0"/>
-          </a:p>
-        </p:txBody>
-      </p:sp>
-    </p:spTree>
-  </p:cSld>
-  <p:clrMapOvr>
-    <a:masterClrMapping/>
-  </p:clrMapOvr>
-</p:sld>
-</file>
-
-<file path=ppt/slides/slide5.xml><?xml version="1.0" encoding="utf-8"?>
-<p:sld xmlns:a="http://schemas.openxmlformats.org/drawingml/2006/main" xmlns:r="http://schemas.openxmlformats.org/officeDocument/2006/relationships" xmlns:p="http://schemas.openxmlformats.org/presentationml/2006/main">
-  <p:cSld name="Slide 5">
-    <p:spTree>
-      <p:nvGrpSpPr>
-        <p:cNvPr id="1" name=""/>
-        <p:cNvGrpSpPr/>
-        <p:nvPr/>
-      </p:nvGrpSpPr>
-      <p:grpSpPr>
-        <a:xfrm>
-          <a:off x="0" y="0"/>
-          <a:ext cx="0" cy="0"/>
-          <a:chOff x="0" y="0"/>
-          <a:chExt cx="0" cy="0"/>
-        </a:xfrm>
-      </p:grpSpPr>
-      <p:sp>
-        <p:nvSpPr>
-          <p:cNvPr id="2" name="Text 0"/>
-          <p:cNvSpPr/>
-          <p:nvPr/>
-        </p:nvSpPr>
-        <p:spPr>
-          <a:xfrm>
-            <a:off x="502920" y="256032"/>
-            <a:ext cx="11155680" cy="594360"/>
-          </a:xfrm>
-          <a:prstGeom prst="rect">
-            <a:avLst/>
-          </a:prstGeom>
-          <a:noFill/>
-          <a:ln/>
-        </p:spPr>
-        <p:txBody>
-          <a:bodyPr wrap="square" rtlCol="0" anchor="ctr"/>
-          <a:lstStyle/>
-          <a:p>
-            <a:pPr indent="0" marL="0">
-              <a:buNone/>
-            </a:pPr>
-            <a:r>
-              <a:rPr lang="en-US" sz="2900" b="1" dirty="0">
-                <a:solidFill>
-                  <a:srgbClr val="14322C"/>
-                </a:solidFill>
-                <a:latin typeface="Cambria" pitchFamily="34" charset="0"/>
-                <a:ea typeface="Cambria" pitchFamily="34" charset="-122"/>
-                <a:cs typeface="Cambria" pitchFamily="34" charset="-120"/>
-              </a:rPr>
-              <a:t>How the book is organized — plain words</a:t>
-            </a:r>
-            <a:endParaRPr lang="en-US" sz="2900" dirty="0"/>
-          </a:p>
-        </p:txBody>
-      </p:sp>
-      <p:sp>
-        <p:nvSpPr>
-          <p:cNvPr id="3" name="Text 1"/>
-          <p:cNvSpPr/>
-          <p:nvPr/>
-        </p:nvSpPr>
-        <p:spPr>
-          <a:xfrm>
-            <a:off x="502920" y="841248"/>
-            <a:ext cx="11155680" cy="320040"/>
-          </a:xfrm>
-          <a:prstGeom prst="rect">
-            <a:avLst/>
-          </a:prstGeom>
-          <a:noFill/>
-          <a:ln/>
-        </p:spPr>
-        <p:txBody>
-          <a:bodyPr wrap="square" rtlCol="0" anchor="ctr"/>
-          <a:lstStyle/>
-          <a:p>
-            <a:pPr indent="0" marL="0">
-              <a:buNone/>
-            </a:pPr>
-            <a:r>
-              <a:rPr lang="en-US" sz="1300" dirty="0">
-                <a:solidFill>
-                  <a:srgbClr val="5E7773"/>
-                </a:solidFill>
-                <a:latin typeface="Calibri" pitchFamily="34" charset="0"/>
-                <a:ea typeface="Calibri" pitchFamily="34" charset="-122"/>
-                <a:cs typeface="Calibri" pitchFamily="34" charset="-120"/>
-              </a:rPr>
-              <a:t>848 accounts, sorted by what each practice has ACTUALLY sent us in 2026</a:t>
-            </a:r>
-            <a:endParaRPr lang="en-US" sz="1300" dirty="0"/>
-          </a:p>
-        </p:txBody>
-      </p:sp>
-      <p:graphicFrame>
-        <p:nvGraphicFramePr>
-          <p:cNvPr id="6" name="Table 0"/>
           <p:cNvGraphicFramePr>
             <a:graphicFrameLocks noGrp="1"/>
           </p:cNvGraphicFramePr>
@@ -10890,6 +8389,580 @@
 </p:sld>
 </file>
 
+<file path=ppt/slides/slide5.xml><?xml version="1.0" encoding="utf-8"?>
+<p:sld xmlns:a="http://schemas.openxmlformats.org/drawingml/2006/main" xmlns:r="http://schemas.openxmlformats.org/officeDocument/2006/relationships" xmlns:p="http://schemas.openxmlformats.org/presentationml/2006/main">
+  <p:cSld name="Slide 5">
+    <p:spTree>
+      <p:nvGrpSpPr>
+        <p:cNvPr id="1" name=""/>
+        <p:cNvGrpSpPr/>
+        <p:nvPr/>
+      </p:nvGrpSpPr>
+      <p:grpSpPr>
+        <a:xfrm>
+          <a:off x="0" y="0"/>
+          <a:ext cx="0" cy="0"/>
+          <a:chOff x="0" y="0"/>
+          <a:chExt cx="0" cy="0"/>
+        </a:xfrm>
+      </p:grpSpPr>
+      <p:sp>
+        <p:nvSpPr>
+          <p:cNvPr id="2" name="Text 0"/>
+          <p:cNvSpPr/>
+          <p:nvPr/>
+        </p:nvSpPr>
+        <p:spPr>
+          <a:xfrm>
+            <a:off x="502920" y="256032"/>
+            <a:ext cx="11155680" cy="594360"/>
+          </a:xfrm>
+          <a:prstGeom prst="rect">
+            <a:avLst/>
+          </a:prstGeom>
+          <a:noFill/>
+          <a:ln/>
+        </p:spPr>
+        <p:txBody>
+          <a:bodyPr wrap="square" rtlCol="0" anchor="ctr"/>
+          <a:lstStyle/>
+          <a:p>
+            <a:pPr indent="0" marL="0">
+              <a:buNone/>
+            </a:pPr>
+            <a:r>
+              <a:rPr lang="en-US" sz="2900" b="1" dirty="0">
+                <a:solidFill>
+                  <a:srgbClr val="14322C"/>
+                </a:solidFill>
+                <a:latin typeface="Cambria" pitchFamily="34" charset="0"/>
+                <a:ea typeface="Cambria" pitchFamily="34" charset="-122"/>
+                <a:cs typeface="Cambria" pitchFamily="34" charset="-120"/>
+              </a:rPr>
+              <a:t>The 90-second visit frame</a:t>
+            </a:r>
+            <a:endParaRPr lang="en-US" sz="2900" dirty="0"/>
+          </a:p>
+        </p:txBody>
+      </p:sp>
+      <p:sp>
+        <p:nvSpPr>
+          <p:cNvPr id="3" name="Text 1"/>
+          <p:cNvSpPr/>
+          <p:nvPr/>
+        </p:nvSpPr>
+        <p:spPr>
+          <a:xfrm>
+            <a:off x="502920" y="841248"/>
+            <a:ext cx="11155680" cy="320040"/>
+          </a:xfrm>
+          <a:prstGeom prst="rect">
+            <a:avLst/>
+          </a:prstGeom>
+          <a:noFill/>
+          <a:ln/>
+        </p:spPr>
+        <p:txBody>
+          <a:bodyPr wrap="square" rtlCol="0" anchor="ctr"/>
+          <a:lstStyle/>
+          <a:p>
+            <a:pPr indent="0" marL="0">
+              <a:buNone/>
+            </a:pPr>
+            <a:r>
+              <a:rPr lang="en-US" sz="1300" dirty="0">
+                <a:solidFill>
+                  <a:srgbClr val="5E7773"/>
+                </a:solidFill>
+                <a:latin typeface="Calibri" pitchFamily="34" charset="0"/>
+                <a:ea typeface="Calibri" pitchFamily="34" charset="-122"/>
+                <a:cs typeface="Calibri" pitchFamily="34" charset="-120"/>
+              </a:rPr>
+              <a:t>Same skeleton at every account — the content changes by type (next 4 slides)</a:t>
+            </a:r>
+            <a:endParaRPr lang="en-US" sz="1300" dirty="0"/>
+          </a:p>
+        </p:txBody>
+      </p:sp>
+      <p:sp>
+        <p:nvSpPr>
+          <p:cNvPr id="4" name="Shape 2"/>
+          <p:cNvSpPr/>
+          <p:nvPr/>
+        </p:nvSpPr>
+        <p:spPr>
+          <a:xfrm>
+            <a:off x="502920" y="1463040"/>
+            <a:ext cx="11155680" cy="1060704"/>
+          </a:xfrm>
+          <a:prstGeom prst="roundRect">
+            <a:avLst>
+              <a:gd name="adj" fmla="val 5172"/>
+            </a:avLst>
+          </a:prstGeom>
+          <a:solidFill>
+            <a:srgbClr val="E7F2EF"/>
+          </a:solidFill>
+          <a:ln w="12700">
+            <a:solidFill>
+              <a:srgbClr val="DCE7E3"/>
+            </a:solidFill>
+            <a:prstDash val="solid"/>
+          </a:ln>
+        </p:spPr>
+      </p:sp>
+      <p:sp>
+        <p:nvSpPr>
+          <p:cNvPr id="5" name="Text 3"/>
+          <p:cNvSpPr/>
+          <p:nvPr/>
+        </p:nvSpPr>
+        <p:spPr>
+          <a:xfrm>
+            <a:off x="777240" y="1572768"/>
+            <a:ext cx="2011680" cy="822960"/>
+          </a:xfrm>
+          <a:prstGeom prst="rect">
+            <a:avLst/>
+          </a:prstGeom>
+          <a:noFill/>
+          <a:ln/>
+        </p:spPr>
+        <p:txBody>
+          <a:bodyPr wrap="square" rtlCol="0" anchor="ctr"/>
+          <a:lstStyle/>
+          <a:p>
+            <a:pPr indent="0" marL="0">
+              <a:buNone/>
+            </a:pPr>
+            <a:r>
+              <a:rPr lang="en-US" sz="1500" b="1" dirty="0">
+                <a:solidFill>
+                  <a:srgbClr val="49A698"/>
+                </a:solidFill>
+                <a:latin typeface="Cambria" pitchFamily="34" charset="0"/>
+                <a:ea typeface="Cambria" pitchFamily="34" charset="-122"/>
+                <a:cs typeface="Cambria" pitchFamily="34" charset="-120"/>
+              </a:rPr>
+              <a:t>1 · THANK</a:t>
+            </a:r>
+            <a:endParaRPr lang="en-US" sz="1500" dirty="0"/>
+          </a:p>
+        </p:txBody>
+      </p:sp>
+      <p:sp>
+        <p:nvSpPr>
+          <p:cNvPr id="6" name="Text 4"/>
+          <p:cNvSpPr/>
+          <p:nvPr/>
+        </p:nvSpPr>
+        <p:spPr>
+          <a:xfrm>
+            <a:off x="2926080" y="1554480"/>
+            <a:ext cx="8503920" cy="896112"/>
+          </a:xfrm>
+          <a:prstGeom prst="rect">
+            <a:avLst/>
+          </a:prstGeom>
+          <a:noFill/>
+          <a:ln/>
+        </p:spPr>
+        <p:txBody>
+          <a:bodyPr wrap="square" rtlCol="0" anchor="ctr"/>
+          <a:lstStyle/>
+          <a:p>
+            <a:pPr indent="0" marL="0">
+              <a:lnSpc>
+                <a:spcPct val="110000"/>
+              </a:lnSpc>
+              <a:buNone/>
+            </a:pPr>
+            <a:r>
+              <a:rPr lang="en-US" sz="1250" dirty="0">
+                <a:solidFill>
+                  <a:srgbClr val="14322C"/>
+                </a:solidFill>
+                <a:latin typeface="Calibri" pitchFamily="34" charset="0"/>
+                <a:ea typeface="Calibri" pitchFamily="34" charset="-122"/>
+                <a:cs typeface="Calibri" pitchFamily="34" charset="-120"/>
+              </a:rPr>
+              <a:t>Aggregate numbers only, never a patient: “Your practice has trusted us with N spine patients this year.” Name the top referrer when we know them — it's on your stop card.</a:t>
+            </a:r>
+            <a:endParaRPr lang="en-US" sz="1250" dirty="0"/>
+          </a:p>
+        </p:txBody>
+      </p:sp>
+      <p:sp>
+        <p:nvSpPr>
+          <p:cNvPr id="7" name="Shape 5"/>
+          <p:cNvSpPr/>
+          <p:nvPr/>
+        </p:nvSpPr>
+        <p:spPr>
+          <a:xfrm>
+            <a:off x="502920" y="2651760"/>
+            <a:ext cx="11155680" cy="1060704"/>
+          </a:xfrm>
+          <a:prstGeom prst="roundRect">
+            <a:avLst>
+              <a:gd name="adj" fmla="val 5172"/>
+            </a:avLst>
+          </a:prstGeom>
+          <a:solidFill>
+            <a:srgbClr val="E7F2EF"/>
+          </a:solidFill>
+          <a:ln w="12700">
+            <a:solidFill>
+              <a:srgbClr val="DCE7E3"/>
+            </a:solidFill>
+            <a:prstDash val="solid"/>
+          </a:ln>
+        </p:spPr>
+      </p:sp>
+      <p:sp>
+        <p:nvSpPr>
+          <p:cNvPr id="8" name="Text 6"/>
+          <p:cNvSpPr/>
+          <p:nvPr/>
+        </p:nvSpPr>
+        <p:spPr>
+          <a:xfrm>
+            <a:off x="777240" y="2761488"/>
+            <a:ext cx="2011680" cy="822960"/>
+          </a:xfrm>
+          <a:prstGeom prst="rect">
+            <a:avLst/>
+          </a:prstGeom>
+          <a:noFill/>
+          <a:ln/>
+        </p:spPr>
+        <p:txBody>
+          <a:bodyPr wrap="square" rtlCol="0" anchor="ctr"/>
+          <a:lstStyle/>
+          <a:p>
+            <a:pPr indent="0" marL="0">
+              <a:buNone/>
+            </a:pPr>
+            <a:r>
+              <a:rPr lang="en-US" sz="1500" b="1" dirty="0">
+                <a:solidFill>
+                  <a:srgbClr val="14322C"/>
+                </a:solidFill>
+                <a:latin typeface="Cambria" pitchFamily="34" charset="0"/>
+                <a:ea typeface="Cambria" pitchFamily="34" charset="-122"/>
+                <a:cs typeface="Cambria" pitchFamily="34" charset="-120"/>
+              </a:rPr>
+              <a:t>2 · OPEN</a:t>
+            </a:r>
+            <a:endParaRPr lang="en-US" sz="1500" dirty="0"/>
+          </a:p>
+        </p:txBody>
+      </p:sp>
+      <p:sp>
+        <p:nvSpPr>
+          <p:cNvPr id="9" name="Text 7"/>
+          <p:cNvSpPr/>
+          <p:nvPr/>
+        </p:nvSpPr>
+        <p:spPr>
+          <a:xfrm>
+            <a:off x="2926080" y="2743200"/>
+            <a:ext cx="8503920" cy="896112"/>
+          </a:xfrm>
+          <a:prstGeom prst="rect">
+            <a:avLst/>
+          </a:prstGeom>
+          <a:noFill/>
+          <a:ln/>
+        </p:spPr>
+        <p:txBody>
+          <a:bodyPr wrap="square" rtlCol="0" anchor="ctr"/>
+          <a:lstStyle/>
+          <a:p>
+            <a:pPr indent="0" marL="0">
+              <a:lnSpc>
+                <a:spcPct val="110000"/>
+              </a:lnSpc>
+              <a:buNone/>
+            </a:pPr>
+            <a:r>
+              <a:rPr lang="en-US" sz="1250" dirty="0">
+                <a:solidFill>
+                  <a:srgbClr val="14322C"/>
+                </a:solidFill>
+                <a:latin typeface="Calibri" pitchFamily="34" charset="0"/>
+                <a:ea typeface="Calibri" pitchFamily="34" charset="-122"/>
+                <a:cs typeface="Calibri" pitchFamily="34" charset="-120"/>
+              </a:rPr>
+              <a:t>A service question, not a pitch: “What could we do better — access, notes back, anything?” Then actually listen.</a:t>
+            </a:r>
+            <a:endParaRPr lang="en-US" sz="1250" dirty="0"/>
+          </a:p>
+        </p:txBody>
+      </p:sp>
+      <p:sp>
+        <p:nvSpPr>
+          <p:cNvPr id="10" name="Shape 8"/>
+          <p:cNvSpPr/>
+          <p:nvPr/>
+        </p:nvSpPr>
+        <p:spPr>
+          <a:xfrm>
+            <a:off x="502920" y="3840480"/>
+            <a:ext cx="11155680" cy="1060704"/>
+          </a:xfrm>
+          <a:prstGeom prst="roundRect">
+            <a:avLst>
+              <a:gd name="adj" fmla="val 5172"/>
+            </a:avLst>
+          </a:prstGeom>
+          <a:solidFill>
+            <a:srgbClr val="E7F2EF"/>
+          </a:solidFill>
+          <a:ln w="12700">
+            <a:solidFill>
+              <a:srgbClr val="DCE7E3"/>
+            </a:solidFill>
+            <a:prstDash val="solid"/>
+          </a:ln>
+        </p:spPr>
+      </p:sp>
+      <p:sp>
+        <p:nvSpPr>
+          <p:cNvPr id="11" name="Text 9"/>
+          <p:cNvSpPr/>
+          <p:nvPr/>
+        </p:nvSpPr>
+        <p:spPr>
+          <a:xfrm>
+            <a:off x="777240" y="3950208"/>
+            <a:ext cx="2011680" cy="822960"/>
+          </a:xfrm>
+          <a:prstGeom prst="rect">
+            <a:avLst/>
+          </a:prstGeom>
+          <a:noFill/>
+          <a:ln/>
+        </p:spPr>
+        <p:txBody>
+          <a:bodyPr wrap="square" rtlCol="0" anchor="ctr"/>
+          <a:lstStyle/>
+          <a:p>
+            <a:pPr indent="0" marL="0">
+              <a:buNone/>
+            </a:pPr>
+            <a:r>
+              <a:rPr lang="en-US" sz="1500" b="1" dirty="0">
+                <a:solidFill>
+                  <a:srgbClr val="9A6A12"/>
+                </a:solidFill>
+                <a:latin typeface="Cambria" pitchFamily="34" charset="0"/>
+                <a:ea typeface="Cambria" pitchFamily="34" charset="-122"/>
+                <a:cs typeface="Cambria" pitchFamily="34" charset="-120"/>
+              </a:rPr>
+              <a:t>3 · MESSAGE</a:t>
+            </a:r>
+            <a:endParaRPr lang="en-US" sz="1500" dirty="0"/>
+          </a:p>
+        </p:txBody>
+      </p:sp>
+      <p:sp>
+        <p:nvSpPr>
+          <p:cNvPr id="12" name="Text 10"/>
+          <p:cNvSpPr/>
+          <p:nvPr/>
+        </p:nvSpPr>
+        <p:spPr>
+          <a:xfrm>
+            <a:off x="2926080" y="3931920"/>
+            <a:ext cx="8503920" cy="896112"/>
+          </a:xfrm>
+          <a:prstGeom prst="rect">
+            <a:avLst/>
+          </a:prstGeom>
+          <a:noFill/>
+          <a:ln/>
+        </p:spPr>
+        <p:txBody>
+          <a:bodyPr wrap="square" rtlCol="0" anchor="ctr"/>
+          <a:lstStyle/>
+          <a:p>
+            <a:pPr indent="0" marL="0">
+              <a:lnSpc>
+                <a:spcPct val="110000"/>
+              </a:lnSpc>
+              <a:buNone/>
+            </a:pPr>
+            <a:r>
+              <a:rPr lang="en-US" sz="1250" dirty="0">
+                <a:solidFill>
+                  <a:srgbClr val="14322C"/>
+                </a:solidFill>
+                <a:latin typeface="Calibri" pitchFamily="34" charset="0"/>
+                <a:ea typeface="Calibri" pitchFamily="34" charset="-122"/>
+                <a:cs typeface="Calibri" pitchFamily="34" charset="-120"/>
+              </a:rPr>
+              <a:t>ONE sentence, matched to practice type (the app writes it for you).</a:t>
+            </a:r>
+            <a:endParaRPr lang="en-US" sz="1250" dirty="0"/>
+          </a:p>
+        </p:txBody>
+      </p:sp>
+      <p:sp>
+        <p:nvSpPr>
+          <p:cNvPr id="13" name="Shape 11"/>
+          <p:cNvSpPr/>
+          <p:nvPr/>
+        </p:nvSpPr>
+        <p:spPr>
+          <a:xfrm>
+            <a:off x="502920" y="5029200"/>
+            <a:ext cx="11155680" cy="1060704"/>
+          </a:xfrm>
+          <a:prstGeom prst="roundRect">
+            <a:avLst>
+              <a:gd name="adj" fmla="val 5172"/>
+            </a:avLst>
+          </a:prstGeom>
+          <a:solidFill>
+            <a:srgbClr val="E7F2EF"/>
+          </a:solidFill>
+          <a:ln w="12700">
+            <a:solidFill>
+              <a:srgbClr val="DCE7E3"/>
+            </a:solidFill>
+            <a:prstDash val="solid"/>
+          </a:ln>
+        </p:spPr>
+      </p:sp>
+      <p:sp>
+        <p:nvSpPr>
+          <p:cNvPr id="14" name="Text 12"/>
+          <p:cNvSpPr/>
+          <p:nvPr/>
+        </p:nvSpPr>
+        <p:spPr>
+          <a:xfrm>
+            <a:off x="777240" y="5138928"/>
+            <a:ext cx="2011680" cy="822960"/>
+          </a:xfrm>
+          <a:prstGeom prst="rect">
+            <a:avLst/>
+          </a:prstGeom>
+          <a:noFill/>
+          <a:ln/>
+        </p:spPr>
+        <p:txBody>
+          <a:bodyPr wrap="square" rtlCol="0" anchor="ctr"/>
+          <a:lstStyle/>
+          <a:p>
+            <a:pPr indent="0" marL="0">
+              <a:buNone/>
+            </a:pPr>
+            <a:r>
+              <a:rPr lang="en-US" sz="1500" b="1" dirty="0">
+                <a:solidFill>
+                  <a:srgbClr val="C4534A"/>
+                </a:solidFill>
+                <a:latin typeface="Cambria" pitchFamily="34" charset="0"/>
+                <a:ea typeface="Cambria" pitchFamily="34" charset="-122"/>
+                <a:cs typeface="Cambria" pitchFamily="34" charset="-120"/>
+              </a:rPr>
+              <a:t>4 · ASK</a:t>
+            </a:r>
+            <a:endParaRPr lang="en-US" sz="1500" dirty="0"/>
+          </a:p>
+        </p:txBody>
+      </p:sp>
+      <p:sp>
+        <p:nvSpPr>
+          <p:cNvPr id="15" name="Text 13"/>
+          <p:cNvSpPr/>
+          <p:nvPr/>
+        </p:nvSpPr>
+        <p:spPr>
+          <a:xfrm>
+            <a:off x="2926080" y="5120640"/>
+            <a:ext cx="8503920" cy="896112"/>
+          </a:xfrm>
+          <a:prstGeom prst="rect">
+            <a:avLst/>
+          </a:prstGeom>
+          <a:noFill/>
+          <a:ln/>
+        </p:spPr>
+        <p:txBody>
+          <a:bodyPr wrap="square" rtlCol="0" anchor="ctr"/>
+          <a:lstStyle/>
+          <a:p>
+            <a:pPr indent="0" marL="0">
+              <a:lnSpc>
+                <a:spcPct val="110000"/>
+              </a:lnSpc>
+              <a:buNone/>
+            </a:pPr>
+            <a:r>
+              <a:rPr lang="en-US" sz="1250" dirty="0">
+                <a:solidFill>
+                  <a:srgbClr val="14322C"/>
+                </a:solidFill>
+                <a:latin typeface="Calibri" pitchFamily="34" charset="0"/>
+                <a:ea typeface="Calibri" pitchFamily="34" charset="-122"/>
+                <a:cs typeface="Calibri" pitchFamily="34" charset="-120"/>
+              </a:rPr>
+              <a:t>One specific behavior. Then leave the one-pager + coordinator card + direct line.</a:t>
+            </a:r>
+            <a:endParaRPr lang="en-US" sz="1250" dirty="0"/>
+          </a:p>
+        </p:txBody>
+      </p:sp>
+      <p:sp>
+        <p:nvSpPr>
+          <p:cNvPr id="16" name="Text 14"/>
+          <p:cNvSpPr/>
+          <p:nvPr/>
+        </p:nvSpPr>
+        <p:spPr>
+          <a:xfrm>
+            <a:off x="502920" y="6263640"/>
+            <a:ext cx="11155680" cy="502920"/>
+          </a:xfrm>
+          <a:prstGeom prst="rect">
+            <a:avLst/>
+          </a:prstGeom>
+          <a:noFill/>
+          <a:ln/>
+        </p:spPr>
+        <p:txBody>
+          <a:bodyPr wrap="square" rtlCol="0" anchor="ctr"/>
+          <a:lstStyle/>
+          <a:p>
+            <a:pPr indent="0" marL="0">
+              <a:buNone/>
+            </a:pPr>
+            <a:r>
+              <a:rPr lang="en-US" sz="1150" i="1" dirty="0">
+                <a:solidFill>
+                  <a:srgbClr val="C4534A"/>
+                </a:solidFill>
+                <a:latin typeface="Calibri" pitchFamily="34" charset="0"/>
+                <a:ea typeface="Calibri" pitchFamily="34" charset="-122"/>
+                <a:cs typeface="Calibri" pitchFamily="34" charset="-120"/>
+              </a:rPr>
+              <a:t>Hard rules: no payments or gifts ever (anti-kickback law) · no patient names or stories, in conversation or in notes · no promises we can't keep (HMO plans need referrals; unverified payer = “intake will confirm coverage same day”).</a:t>
+            </a:r>
+            <a:endParaRPr lang="en-US" sz="1150" dirty="0"/>
+          </a:p>
+        </p:txBody>
+      </p:sp>
+    </p:spTree>
+  </p:cSld>
+  <p:clrMapOvr>
+    <a:masterClrMapping/>
+  </p:clrMapOvr>
+</p:sld>
+</file>
+
 <file path=ppt/slides/slide6.xml><?xml version="1.0" encoding="utf-8"?>
 <p:sld xmlns:a="http://schemas.openxmlformats.org/drawingml/2006/main" xmlns:r="http://schemas.openxmlformats.org/officeDocument/2006/relationships" xmlns:p="http://schemas.openxmlformats.org/presentationml/2006/main">
   <p:cSld name="Slide 6">
@@ -10940,7 +9013,7 @@
                 <a:ea typeface="Cambria" pitchFamily="34" charset="-122"/>
                 <a:cs typeface="Cambria" pitchFamily="34" charset="-120"/>
               </a:rPr>
-              <a:t>The 90-second visit frame</a:t>
+              <a:t>Say this: Tier 1 — proven spine senders (PROTECT)</a:t>
             </a:r>
             <a:endParaRPr lang="en-US" sz="2900" dirty="0"/>
           </a:p>
@@ -10979,7 +9052,7 @@
                 <a:ea typeface="Calibri" pitchFamily="34" charset="-122"/>
                 <a:cs typeface="Calibri" pitchFamily="34" charset="-120"/>
               </a:rPr>
-              <a:t>Same skeleton at every account — the content changes by type (next 4 slides)</a:t>
+              <a:t>Your 146 most valuable relationships. Kristen leads these personally where she can.</a:t>
             </a:r>
             <a:endParaRPr lang="en-US" sz="1300" dirty="0"/>
           </a:p>
@@ -10994,11 +9067,11 @@
         <p:spPr>
           <a:xfrm>
             <a:off x="502920" y="1463040"/>
-            <a:ext cx="11155680" cy="1060704"/>
+            <a:ext cx="5486400" cy="4480560"/>
           </a:xfrm>
           <a:prstGeom prst="roundRect">
             <a:avLst>
-              <a:gd name="adj" fmla="val 5172"/>
+              <a:gd name="adj" fmla="val 1633"/>
             </a:avLst>
           </a:prstGeom>
           <a:solidFill>
@@ -11020,8 +9093,8 @@
         </p:nvSpPr>
         <p:spPr>
           <a:xfrm>
-            <a:off x="777240" y="1572768"/>
-            <a:ext cx="2011680" cy="822960"/>
+            <a:off x="777240" y="1645920"/>
+            <a:ext cx="4937760" cy="365760"/>
           </a:xfrm>
           <a:prstGeom prst="rect">
             <a:avLst/>
@@ -11039,13 +9112,13 @@
             <a:r>
               <a:rPr lang="en-US" sz="1500" b="1" dirty="0">
                 <a:solidFill>
-                  <a:srgbClr val="49A698"/>
+                  <a:srgbClr val="14322C"/>
                 </a:solidFill>
                 <a:latin typeface="Cambria" pitchFamily="34" charset="0"/>
                 <a:ea typeface="Cambria" pitchFamily="34" charset="-122"/>
                 <a:cs typeface="Cambria" pitchFamily="34" charset="-120"/>
               </a:rPr>
-              <a:t>1 · THANK</a:t>
+              <a:t>Repeat sender — on cadence</a:t>
             </a:r>
             <a:endParaRPr lang="en-US" sz="1500" dirty="0"/>
           </a:p>
@@ -11059,8 +9132,8 @@
         </p:nvSpPr>
         <p:spPr>
           <a:xfrm>
-            <a:off x="2926080" y="1554480"/>
-            <a:ext cx="8503920" cy="896112"/>
+            <a:off x="777240" y="2103120"/>
+            <a:ext cx="4937760" cy="3657600"/>
           </a:xfrm>
           <a:prstGeom prst="rect">
             <a:avLst/>
@@ -11074,7 +9147,7 @@
           <a:p>
             <a:pPr indent="0" marL="0">
               <a:lnSpc>
-                <a:spcPct val="110000"/>
+                <a:spcPct val="122000"/>
               </a:lnSpc>
               <a:buNone/>
             </a:pPr>
@@ -11087,10 +9160,97 @@
                 <a:ea typeface="Calibri" pitchFamily="34" charset="-122"/>
                 <a:cs typeface="Calibri" pitchFamily="34" charset="-120"/>
               </a:rPr>
-              <a:t>Aggregate numbers only, never a patient: “Your practice has trusted us with N spine patients this year.” Name the top referrer when we know them — it's on your stop card.</a:t>
+              <a:t>THANK: “Your practice has trusted us with 23 spine patients this year — Dr. Hesselberg's referrals especially. Thank you.”</a:t>
             </a:r>
             <a:endParaRPr lang="en-US" sz="1250" dirty="0"/>
           </a:p>
+          <a:p>
+            <a:pPr indent="0" marL="0">
+              <a:lnSpc>
+                <a:spcPct val="122000"/>
+              </a:lnSpc>
+              <a:buNone/>
+            </a:pPr>
+            <a:endParaRPr lang="en-US" sz="1250" dirty="0"/>
+          </a:p>
+          <a:p>
+            <a:pPr indent="0" marL="0">
+              <a:lnSpc>
+                <a:spcPct val="122000"/>
+              </a:lnSpc>
+              <a:buNone/>
+            </a:pPr>
+            <a:r>
+              <a:rPr lang="en-US" sz="1250" dirty="0">
+                <a:solidFill>
+                  <a:srgbClr val="14322C"/>
+                </a:solidFill>
+                <a:latin typeface="Calibri" pitchFamily="34" charset="0"/>
+                <a:ea typeface="Calibri" pitchFamily="34" charset="-122"/>
+                <a:cs typeface="Calibri" pitchFamily="34" charset="-120"/>
+              </a:rPr>
+              <a:t>OPEN: “What could we do better — access, notes back, anything?”</a:t>
+            </a:r>
+            <a:endParaRPr lang="en-US" sz="1250" dirty="0"/>
+          </a:p>
+          <a:p>
+            <a:pPr indent="0" marL="0">
+              <a:lnSpc>
+                <a:spcPct val="122000"/>
+              </a:lnSpc>
+              <a:buNone/>
+            </a:pPr>
+            <a:endParaRPr lang="en-US" sz="1250" dirty="0"/>
+          </a:p>
+          <a:p>
+            <a:pPr indent="0" marL="0">
+              <a:lnSpc>
+                <a:spcPct val="122000"/>
+              </a:lnSpc>
+              <a:buNone/>
+            </a:pPr>
+            <a:r>
+              <a:rPr lang="en-US" sz="1250" dirty="0">
+                <a:solidFill>
+                  <a:srgbClr val="14322C"/>
+                </a:solidFill>
+                <a:latin typeface="Calibri" pitchFamily="34" charset="0"/>
+                <a:ea typeface="Calibri" pitchFamily="34" charset="-122"/>
+                <a:cs typeface="Calibri" pitchFamily="34" charset="-120"/>
+              </a:rPr>
+              <a:t>MESSAGE (by type — PCP example): “Back/neck patients get seen the same week — imaging through surgery under one roof — and we handle HMO referral paperwork with your staff.”</a:t>
+            </a:r>
+            <a:endParaRPr lang="en-US" sz="1250" dirty="0"/>
+          </a:p>
+          <a:p>
+            <a:pPr indent="0" marL="0">
+              <a:lnSpc>
+                <a:spcPct val="122000"/>
+              </a:lnSpc>
+              <a:buNone/>
+            </a:pPr>
+            <a:endParaRPr lang="en-US" sz="1250" dirty="0"/>
+          </a:p>
+          <a:p>
+            <a:pPr indent="0" marL="0">
+              <a:lnSpc>
+                <a:spcPct val="122000"/>
+              </a:lnSpc>
+              <a:buNone/>
+            </a:pPr>
+            <a:r>
+              <a:rPr lang="en-US" sz="1250" dirty="0">
+                <a:solidFill>
+                  <a:srgbClr val="14322C"/>
+                </a:solidFill>
+                <a:latin typeface="Calibri" pitchFamily="34" charset="0"/>
+                <a:ea typeface="Calibri" pitchFamily="34" charset="-122"/>
+                <a:cs typeface="Calibri" pitchFamily="34" charset="-120"/>
+              </a:rPr>
+              <a:t>ASK: “Anything pending right now we can get seen this week?”</a:t>
+            </a:r>
+            <a:endParaRPr lang="en-US" sz="1250" dirty="0"/>
+          </a:p>
         </p:txBody>
       </p:sp>
       <p:sp>
@@ -11101,16 +9261,16 @@
         </p:nvSpPr>
         <p:spPr>
           <a:xfrm>
-            <a:off x="502920" y="2651760"/>
-            <a:ext cx="11155680" cy="1060704"/>
+            <a:off x="6172200" y="1463040"/>
+            <a:ext cx="5486400" cy="4480560"/>
           </a:xfrm>
           <a:prstGeom prst="roundRect">
             <a:avLst>
-              <a:gd name="adj" fmla="val 5172"/>
+              <a:gd name="adj" fmla="val 1633"/>
             </a:avLst>
           </a:prstGeom>
           <a:solidFill>
-            <a:srgbClr val="E7F2EF"/>
+            <a:srgbClr val="F7E7E3"/>
           </a:solidFill>
           <a:ln w="12700">
             <a:solidFill>
@@ -11128,8 +9288,8 @@
         </p:nvSpPr>
         <p:spPr>
           <a:xfrm>
-            <a:off x="777240" y="2761488"/>
-            <a:ext cx="2011680" cy="822960"/>
+            <a:off x="6446520" y="1645920"/>
+            <a:ext cx="4937760" cy="365760"/>
           </a:xfrm>
           <a:prstGeom prst="rect">
             <a:avLst/>
@@ -11153,7 +9313,7 @@
                 <a:ea typeface="Cambria" pitchFamily="34" charset="-122"/>
                 <a:cs typeface="Cambria" pitchFamily="34" charset="-120"/>
               </a:rPr>
-              <a:t>2 · OPEN</a:t>
+              <a:t>If a relationship HAS gone quiet — the recovery visit</a:t>
             </a:r>
             <a:endParaRPr lang="en-US" sz="1500" dirty="0"/>
           </a:p>
@@ -11167,8 +9327,8 @@
         </p:nvSpPr>
         <p:spPr>
           <a:xfrm>
-            <a:off x="2926080" y="2743200"/>
-            <a:ext cx="8503920" cy="896112"/>
+            <a:off x="6446520" y="2103120"/>
+            <a:ext cx="4937760" cy="3657600"/>
           </a:xfrm>
           <a:prstGeom prst="rect">
             <a:avLst/>
@@ -11182,7 +9342,7 @@
           <a:p>
             <a:pPr indent="0" marL="0">
               <a:lnSpc>
-                <a:spcPct val="110000"/>
+                <a:spcPct val="122000"/>
               </a:lnSpc>
               <a:buNone/>
             </a:pPr>
@@ -11195,105 +9355,26 @@
                 <a:ea typeface="Calibri" pitchFamily="34" charset="-122"/>
                 <a:cs typeface="Calibri" pitchFamily="34" charset="-120"/>
               </a:rPr>
-              <a:t>A service question, not a pitch: “What could we do better — access, notes back, anything?” Then actually listen.</a:t>
+              <a:t>OPEN WITH OWNERSHIP: “We owe you a visit — that's on us.” No excuses, no explanations.</a:t>
             </a:r>
             <a:endParaRPr lang="en-US" sz="1250" dirty="0"/>
           </a:p>
-        </p:txBody>
-      </p:sp>
-      <p:sp>
-        <p:nvSpPr>
-          <p:cNvPr id="10" name="Shape 8"/>
-          <p:cNvSpPr/>
-          <p:nvPr/>
-        </p:nvSpPr>
-        <p:spPr>
-          <a:xfrm>
-            <a:off x="502920" y="3840480"/>
-            <a:ext cx="11155680" cy="1060704"/>
-          </a:xfrm>
-          <a:prstGeom prst="roundRect">
-            <a:avLst>
-              <a:gd name="adj" fmla="val 5172"/>
-            </a:avLst>
-          </a:prstGeom>
-          <a:solidFill>
-            <a:srgbClr val="E7F2EF"/>
-          </a:solidFill>
-          <a:ln w="12700">
-            <a:solidFill>
-              <a:srgbClr val="DCE7E3"/>
-            </a:solidFill>
-            <a:prstDash val="solid"/>
-          </a:ln>
-        </p:spPr>
-      </p:sp>
-      <p:sp>
-        <p:nvSpPr>
-          <p:cNvPr id="11" name="Text 9"/>
-          <p:cNvSpPr/>
-          <p:nvPr/>
-        </p:nvSpPr>
-        <p:spPr>
-          <a:xfrm>
-            <a:off x="777240" y="3950208"/>
-            <a:ext cx="2011680" cy="822960"/>
-          </a:xfrm>
-          <a:prstGeom prst="rect">
-            <a:avLst/>
-          </a:prstGeom>
-          <a:noFill/>
-          <a:ln/>
-        </p:spPr>
-        <p:txBody>
-          <a:bodyPr wrap="square" rtlCol="0" anchor="ctr"/>
-          <a:lstStyle/>
-          <a:p>
-            <a:pPr indent="0" marL="0">
-              <a:buNone/>
-            </a:pPr>
-            <a:r>
-              <a:rPr lang="en-US" sz="1500" b="1" dirty="0">
-                <a:solidFill>
-                  <a:srgbClr val="9A6A12"/>
-                </a:solidFill>
-                <a:latin typeface="Cambria" pitchFamily="34" charset="0"/>
-                <a:ea typeface="Cambria" pitchFamily="34" charset="-122"/>
-                <a:cs typeface="Cambria" pitchFamily="34" charset="-120"/>
-              </a:rPr>
-              <a:t>3 · MESSAGE</a:t>
-            </a:r>
-            <a:endParaRPr lang="en-US" sz="1500" dirty="0"/>
-          </a:p>
-        </p:txBody>
-      </p:sp>
-      <p:sp>
-        <p:nvSpPr>
-          <p:cNvPr id="12" name="Text 10"/>
-          <p:cNvSpPr/>
-          <p:nvPr/>
-        </p:nvSpPr>
-        <p:spPr>
-          <a:xfrm>
-            <a:off x="2926080" y="3931920"/>
-            <a:ext cx="8503920" cy="896112"/>
-          </a:xfrm>
-          <a:prstGeom prst="rect">
-            <a:avLst/>
-          </a:prstGeom>
-          <a:noFill/>
-          <a:ln/>
-        </p:spPr>
-        <p:txBody>
-          <a:bodyPr wrap="square" rtlCol="0" anchor="ctr"/>
-          <a:lstStyle/>
           <a:p>
             <a:pPr indent="0" marL="0">
               <a:lnSpc>
-                <a:spcPct val="110000"/>
+                <a:spcPct val="122000"/>
               </a:lnSpc>
               <a:buNone/>
             </a:pPr>
+            <a:endParaRPr lang="en-US" sz="1250" dirty="0"/>
+          </a:p>
+          <a:p>
+            <a:pPr indent="0" marL="0">
+              <a:lnSpc>
+                <a:spcPct val="122000"/>
+              </a:lnSpc>
+              <a:buNone/>
+            </a:pPr>
             <a:r>
               <a:rPr lang="en-US" sz="1250" dirty="0">
                 <a:solidFill>
@@ -11303,105 +9384,26 @@
                 <a:ea typeface="Calibri" pitchFamily="34" charset="-122"/>
                 <a:cs typeface="Calibri" pitchFamily="34" charset="-120"/>
               </a:rPr>
-              <a:t>ONE sentence, matched to practice type (the app writes it for you).</a:t>
+              <a:t>Then THANK (same aggregate numbers), then the service question — and FIX whatever they name. One service commitment before you leave.</a:t>
             </a:r>
             <a:endParaRPr lang="en-US" sz="1250" dirty="0"/>
           </a:p>
-        </p:txBody>
-      </p:sp>
-      <p:sp>
-        <p:nvSpPr>
-          <p:cNvPr id="13" name="Shape 11"/>
-          <p:cNvSpPr/>
-          <p:nvPr/>
-        </p:nvSpPr>
-        <p:spPr>
-          <a:xfrm>
-            <a:off x="502920" y="5029200"/>
-            <a:ext cx="11155680" cy="1060704"/>
-          </a:xfrm>
-          <a:prstGeom prst="roundRect">
-            <a:avLst>
-              <a:gd name="adj" fmla="val 5172"/>
-            </a:avLst>
-          </a:prstGeom>
-          <a:solidFill>
-            <a:srgbClr val="E7F2EF"/>
-          </a:solidFill>
-          <a:ln w="12700">
-            <a:solidFill>
-              <a:srgbClr val="DCE7E3"/>
-            </a:solidFill>
-            <a:prstDash val="solid"/>
-          </a:ln>
-        </p:spPr>
-      </p:sp>
-      <p:sp>
-        <p:nvSpPr>
-          <p:cNvPr id="14" name="Text 12"/>
-          <p:cNvSpPr/>
-          <p:nvPr/>
-        </p:nvSpPr>
-        <p:spPr>
-          <a:xfrm>
-            <a:off x="777240" y="5138928"/>
-            <a:ext cx="2011680" cy="822960"/>
-          </a:xfrm>
-          <a:prstGeom prst="rect">
-            <a:avLst/>
-          </a:prstGeom>
-          <a:noFill/>
-          <a:ln/>
-        </p:spPr>
-        <p:txBody>
-          <a:bodyPr wrap="square" rtlCol="0" anchor="ctr"/>
-          <a:lstStyle/>
-          <a:p>
-            <a:pPr indent="0" marL="0">
-              <a:buNone/>
-            </a:pPr>
-            <a:r>
-              <a:rPr lang="en-US" sz="1500" b="1" dirty="0">
-                <a:solidFill>
-                  <a:srgbClr val="C4534A"/>
-                </a:solidFill>
-                <a:latin typeface="Cambria" pitchFamily="34" charset="0"/>
-                <a:ea typeface="Cambria" pitchFamily="34" charset="-122"/>
-                <a:cs typeface="Cambria" pitchFamily="34" charset="-120"/>
-              </a:rPr>
-              <a:t>4 · ASK</a:t>
-            </a:r>
-            <a:endParaRPr lang="en-US" sz="1500" dirty="0"/>
-          </a:p>
-        </p:txBody>
-      </p:sp>
-      <p:sp>
-        <p:nvSpPr>
-          <p:cNvPr id="15" name="Text 13"/>
-          <p:cNvSpPr/>
-          <p:nvPr/>
-        </p:nvSpPr>
-        <p:spPr>
-          <a:xfrm>
-            <a:off x="2926080" y="5120640"/>
-            <a:ext cx="8503920" cy="896112"/>
-          </a:xfrm>
-          <a:prstGeom prst="rect">
-            <a:avLst/>
-          </a:prstGeom>
-          <a:noFill/>
-          <a:ln/>
-        </p:spPr>
-        <p:txBody>
-          <a:bodyPr wrap="square" rtlCol="0" anchor="ctr"/>
-          <a:lstStyle/>
           <a:p>
             <a:pPr indent="0" marL="0">
               <a:lnSpc>
-                <a:spcPct val="110000"/>
+                <a:spcPct val="122000"/>
               </a:lnSpc>
               <a:buNone/>
             </a:pPr>
+            <a:endParaRPr lang="en-US" sz="1250" dirty="0"/>
+          </a:p>
+          <a:p>
+            <a:pPr indent="0" marL="0">
+              <a:lnSpc>
+                <a:spcPct val="122000"/>
+              </a:lnSpc>
+              <a:buNone/>
+            </a:pPr>
             <a:r>
               <a:rPr lang="en-US" sz="1250" dirty="0">
                 <a:solidFill>
@@ -11411,48 +9413,38 @@
                 <a:ea typeface="Calibri" pitchFamily="34" charset="-122"/>
                 <a:cs typeface="Calibri" pitchFamily="34" charset="-120"/>
               </a:rPr>
-              <a:t>One specific behavior. Then leave the one-pager + coordinator card + direct line.</a:t>
+              <a:t>ASK: “Anything pending we can get seen this week?” — same-week access is the trust rebuilder.</a:t>
             </a:r>
             <a:endParaRPr lang="en-US" sz="1250" dirty="0"/>
           </a:p>
-        </p:txBody>
-      </p:sp>
-      <p:sp>
-        <p:nvSpPr>
-          <p:cNvPr id="16" name="Text 14"/>
-          <p:cNvSpPr/>
-          <p:nvPr/>
-        </p:nvSpPr>
-        <p:spPr>
-          <a:xfrm>
-            <a:off x="502920" y="6263640"/>
-            <a:ext cx="11155680" cy="502920"/>
-          </a:xfrm>
-          <a:prstGeom prst="rect">
-            <a:avLst/>
-          </a:prstGeom>
-          <a:noFill/>
-          <a:ln/>
-        </p:spPr>
-        <p:txBody>
-          <a:bodyPr wrap="square" rtlCol="0" anchor="ctr"/>
-          <a:lstStyle/>
-          <a:p>
-            <a:pPr indent="0" marL="0">
-              <a:buNone/>
-            </a:pPr>
-            <a:r>
-              <a:rPr lang="en-US" sz="1150" i="1" dirty="0">
-                <a:solidFill>
-                  <a:srgbClr val="C4534A"/>
-                </a:solidFill>
-                <a:latin typeface="Calibri" pitchFamily="34" charset="0"/>
-                <a:ea typeface="Calibri" pitchFamily="34" charset="-122"/>
-                <a:cs typeface="Calibri" pitchFamily="34" charset="-120"/>
-              </a:rPr>
-              <a:t>Hard rules: no payments or gifts ever (anti-kickback law) · no patient names or stories, in conversation or in notes · no promises we can't keep (HMO plans need referrals; unverified payer = “intake will confirm coverage same day”).</a:t>
-            </a:r>
-            <a:endParaRPr lang="en-US" sz="1150" dirty="0"/>
+          <a:p>
+            <a:pPr indent="0" marL="0">
+              <a:lnSpc>
+                <a:spcPct val="122000"/>
+              </a:lnSpc>
+              <a:buNone/>
+            </a:pPr>
+            <a:endParaRPr lang="en-US" sz="1250" dirty="0"/>
+          </a:p>
+          <a:p>
+            <a:pPr indent="0" marL="0">
+              <a:lnSpc>
+                <a:spcPct val="122000"/>
+              </a:lnSpc>
+              <a:buNone/>
+            </a:pPr>
+            <a:r>
+              <a:rPr lang="en-US" sz="1250" dirty="0">
+                <a:solidFill>
+                  <a:srgbClr val="14322C"/>
+                </a:solidFill>
+                <a:latin typeface="Calibri" pitchFamily="34" charset="0"/>
+                <a:ea typeface="Calibri" pitchFamily="34" charset="-122"/>
+                <a:cs typeface="Calibri" pitchFamily="34" charset="-120"/>
+              </a:rPr>
+              <a:t>Note: “quiet” means no LOGGED visit — texts and calls don't hit MMC, so you know your book better than the export does. Use judgment.</a:t>
+            </a:r>
+            <a:endParaRPr lang="en-US" sz="1250" dirty="0"/>
           </a:p>
         </p:txBody>
       </p:sp>
@@ -11514,7 +9506,7 @@
                 <a:ea typeface="Cambria" pitchFamily="34" charset="-122"/>
                 <a:cs typeface="Cambria" pitchFamily="34" charset="-120"/>
               </a:rPr>
-              <a:t>Say this: Tier 1 — proven spine senders (PROTECT)</a:t>
+              <a:t>Say this: CONVERT one-timers · CROSS-SELL ortho</a:t>
             </a:r>
             <a:endParaRPr lang="en-US" sz="2900" dirty="0"/>
           </a:p>
@@ -11553,7 +9545,7 @@
                 <a:ea typeface="Calibri" pitchFamily="34" charset="-122"/>
                 <a:cs typeface="Calibri" pitchFamily="34" charset="-120"/>
               </a:rPr>
-              <a:t>Your 146 most valuable relationships. Kristen leads these personally where she can.</a:t>
+              <a:t>The 92 one-spine accounts are the single biggest growth lever — every 15 conversions ≈ +10 spine/month</a:t>
             </a:r>
             <a:endParaRPr lang="en-US" sz="1300" dirty="0"/>
           </a:p>
@@ -11619,7 +9611,7 @@
                 <a:ea typeface="Cambria" pitchFamily="34" charset="-122"/>
                 <a:cs typeface="Cambria" pitchFamily="34" charset="-120"/>
               </a:rPr>
-              <a:t>Repeat sender — on cadence</a:t>
+              <a:t>One spine patient — make us the default</a:t>
             </a:r>
             <a:endParaRPr lang="en-US" sz="1500" dirty="0"/>
           </a:p>
@@ -11661,7 +9653,7 @@
                 <a:ea typeface="Calibri" pitchFamily="34" charset="-122"/>
                 <a:cs typeface="Calibri" pitchFamily="34" charset="-120"/>
               </a:rPr>
-              <a:t>THANK: “Your practice has trusted us with 23 spine patients this year — Dr. Hesselberg's referrals especially. Thank you.”</a:t>
+              <a:t>THANK: “Thank you for the spine patient you trusted us with.”</a:t>
             </a:r>
             <a:endParaRPr lang="en-US" sz="1250" dirty="0"/>
           </a:p>
@@ -11690,7 +9682,7 @@
                 <a:ea typeface="Calibri" pitchFamily="34" charset="-122"/>
                 <a:cs typeface="Calibri" pitchFamily="34" charset="-120"/>
               </a:rPr>
-              <a:t>OPEN: “What could we do better — access, notes back, anything?”</a:t>
+              <a:t>OPEN: “How was that experience — for you and for them?” (Their answer tells you exactly what to fix or amplify.)</a:t>
             </a:r>
             <a:endParaRPr lang="en-US" sz="1250" dirty="0"/>
           </a:p>
@@ -11719,7 +9711,7 @@
                 <a:ea typeface="Calibri" pitchFamily="34" charset="-122"/>
                 <a:cs typeface="Calibri" pitchFamily="34" charset="-120"/>
               </a:rPr>
-              <a:t>MESSAGE (by type — PCP example): “Back/neck patients get seen the same week — imaging through surgery under one roof — and we handle HMO referral paperwork with your staff.”</a:t>
+              <a:t>MESSAGE: “That same pathway works every time — same-week access, conservative first, surgery only when warranted.”</a:t>
             </a:r>
             <a:endParaRPr lang="en-US" sz="1250" dirty="0"/>
           </a:p>
@@ -11748,7 +9740,7 @@
                 <a:ea typeface="Calibri" pitchFamily="34" charset="-122"/>
                 <a:cs typeface="Calibri" pitchFamily="34" charset="-120"/>
               </a:rPr>
-              <a:t>ASK: “Anything pending right now we can get seen this week?”</a:t>
+              <a:t>ASK: “Make us your default for the NEXT back or neck patient.” Leave the coordinator card.</a:t>
             </a:r>
             <a:endParaRPr lang="en-US" sz="1250" dirty="0"/>
           </a:p>
@@ -11771,7 +9763,7 @@
             </a:avLst>
           </a:prstGeom>
           <a:solidFill>
-            <a:srgbClr val="F7E7E3"/>
+            <a:srgbClr val="FDF6E7"/>
           </a:solidFill>
           <a:ln w="12700">
             <a:solidFill>
@@ -11814,7 +9806,7 @@
                 <a:ea typeface="Cambria" pitchFamily="34" charset="-122"/>
                 <a:cs typeface="Cambria" pitchFamily="34" charset="-120"/>
               </a:rPr>
-              <a:t>Lapsed sender — the recovery visit</a:t>
+              <a:t>Ortho referrer — spine works the same way</a:t>
             </a:r>
             <a:endParaRPr lang="en-US" sz="1500" dirty="0"/>
           </a:p>
@@ -11856,7 +9848,7 @@
                 <a:ea typeface="Calibri" pitchFamily="34" charset="-122"/>
                 <a:cs typeface="Calibri" pitchFamily="34" charset="-120"/>
               </a:rPr>
-              <a:t>OPEN WITH OWNERSHIP: “We owe you a visit — that's on us.” No excuses, no explanations.</a:t>
+              <a:t>THANK: “You've sent us N ortho patients this year — thank you.”</a:t>
             </a:r>
             <a:endParaRPr lang="en-US" sz="1250" dirty="0"/>
           </a:p>
@@ -11885,7 +9877,7 @@
                 <a:ea typeface="Calibri" pitchFamily="34" charset="-122"/>
                 <a:cs typeface="Calibri" pitchFamily="34" charset="-120"/>
               </a:rPr>
-              <a:t>Then THANK (same aggregate numbers), then the service question — and FIX whatever they name. One service commitment before you leave.</a:t>
+              <a:t>OPEN: service question.</a:t>
             </a:r>
             <a:endParaRPr lang="en-US" sz="1250" dirty="0"/>
           </a:p>
@@ -11914,7 +9906,7 @@
                 <a:ea typeface="Calibri" pitchFamily="34" charset="-122"/>
                 <a:cs typeface="Calibri" pitchFamily="34" charset="-120"/>
               </a:rPr>
-              <a:t>ASK: “Anything pending we can get seen this week?” — same-week access is the trust rebuilder.</a:t>
+              <a:t>MESSAGE: “Spine works exactly the way your knees and shoulders already do — same door, same speed. Your patient stays yours; notes back every visit.”</a:t>
             </a:r>
             <a:endParaRPr lang="en-US" sz="1250" dirty="0"/>
           </a:p>
@@ -11943,7 +9935,36 @@
                 <a:ea typeface="Calibri" pitchFamily="34" charset="-122"/>
                 <a:cs typeface="Calibri" pitchFamily="34" charset="-120"/>
               </a:rPr>
-              <a:t>These 36 accounts are pre-flagged red in your app (“Lapsed — recover”).</a:t>
+              <a:t>ASK: “Send the next back/neck patient the way you send knees.”</a:t>
+            </a:r>
+            <a:endParaRPr lang="en-US" sz="1250" dirty="0"/>
+          </a:p>
+          <a:p>
+            <a:pPr indent="0" marL="0">
+              <a:lnSpc>
+                <a:spcPct val="122000"/>
+              </a:lnSpc>
+              <a:buNone/>
+            </a:pPr>
+            <a:endParaRPr lang="en-US" sz="1250" dirty="0"/>
+          </a:p>
+          <a:p>
+            <a:pPr indent="0" marL="0">
+              <a:lnSpc>
+                <a:spcPct val="122000"/>
+              </a:lnSpc>
+              <a:buNone/>
+            </a:pPr>
+            <a:r>
+              <a:rPr lang="en-US" sz="1250" dirty="0">
+                <a:solidFill>
+                  <a:srgbClr val="14322C"/>
+                </a:solidFill>
+                <a:latin typeface="Calibri" pitchFamily="34" charset="0"/>
+                <a:ea typeface="Calibri" pitchFamily="34" charset="-122"/>
+                <a:cs typeface="Calibri" pitchFamily="34" charset="-120"/>
+              </a:rPr>
+              <a:t>These are Tier 2 — 21-day rhythm, don't over-invest until they test us.</a:t>
             </a:r>
             <a:endParaRPr lang="en-US" sz="1250" dirty="0"/>
           </a:p>
@@ -12007,7 +10028,7 @@
                 <a:ea typeface="Cambria" pitchFamily="34" charset="-122"/>
                 <a:cs typeface="Cambria" pitchFamily="34" charset="-120"/>
               </a:rPr>
-              <a:t>Say this: CONVERT one-timers · CROSS-SELL ortho</a:t>
+              <a:t>Say this: prospects (FIRST TOUCH) — and when to stop</a:t>
             </a:r>
             <a:endParaRPr lang="en-US" sz="2900" dirty="0"/>
           </a:p>
@@ -12046,7 +10067,7 @@
                 <a:ea typeface="Calibri" pitchFamily="34" charset="-122"/>
                 <a:cs typeface="Calibri" pitchFamily="34" charset="-120"/>
               </a:rPr>
-              <a:t>The 92 one-spine accounts are the single biggest growth lever — every 15 conversions ≈ +10 spine/month</a:t>
+              <a:t>469 accounts, pre-mixed into your route days. Test cheaply, drop honestly.</a:t>
             </a:r>
             <a:endParaRPr lang="en-US" sz="1300" dirty="0"/>
           </a:p>
@@ -12061,7 +10082,7 @@
         <p:spPr>
           <a:xfrm>
             <a:off x="502920" y="1463040"/>
-            <a:ext cx="5486400" cy="4480560"/>
+            <a:ext cx="6766560" cy="4480560"/>
           </a:xfrm>
           <a:prstGeom prst="roundRect">
             <a:avLst>
@@ -12088,7 +10109,7 @@
         <p:spPr>
           <a:xfrm>
             <a:off x="777240" y="1645920"/>
-            <a:ext cx="4937760" cy="365760"/>
+            <a:ext cx="6217920" cy="365760"/>
           </a:xfrm>
           <a:prstGeom prst="rect">
             <a:avLst/>
@@ -12112,7 +10133,7 @@
                 <a:ea typeface="Cambria" pitchFamily="34" charset="-122"/>
                 <a:cs typeface="Cambria" pitchFamily="34" charset="-120"/>
               </a:rPr>
-              <a:t>One spine patient — make us the default</a:t>
+              <a:t>Prospect first touch — earn one referral</a:t>
             </a:r>
             <a:endParaRPr lang="en-US" sz="1500" dirty="0"/>
           </a:p>
@@ -12127,7 +10148,7 @@
         <p:spPr>
           <a:xfrm>
             <a:off x="777240" y="2103120"/>
-            <a:ext cx="4937760" cy="3657600"/>
+            <a:ext cx="6217920" cy="3657600"/>
           </a:xfrm>
           <a:prstGeom prst="rect">
             <a:avLst/>
@@ -12154,7 +10175,7 @@
                 <a:ea typeface="Calibri" pitchFamily="34" charset="-122"/>
                 <a:cs typeface="Calibri" pitchFamily="34" charset="-120"/>
               </a:rPr>
-              <a:t>THANK: “Thank you for the spine patient you trusted us with.”</a:t>
+              <a:t>INTRODUCE: “Synergy — integrated ortho + spine, deep bench, conservative-first. Patients seen the same week.”</a:t>
             </a:r>
             <a:endParaRPr lang="en-US" sz="1250" dirty="0"/>
           </a:p>
@@ -12183,7 +10204,7 @@
                 <a:ea typeface="Calibri" pitchFamily="34" charset="-122"/>
                 <a:cs typeface="Calibri" pitchFamily="34" charset="-120"/>
               </a:rPr>
-              <a:t>OPEN: “How was that experience — for you and for them?” (Their answer tells you exactly what to fix or amplify.)</a:t>
+              <a:t>MESSAGE (type-matched — urgent care example): “Your discharge sheet can book a spine evaluation the same week — one number, we take it from there.”</a:t>
             </a:r>
             <a:endParaRPr lang="en-US" sz="1250" dirty="0"/>
           </a:p>
@@ -12212,39 +10233,10 @@
                 <a:ea typeface="Calibri" pitchFamily="34" charset="-122"/>
                 <a:cs typeface="Calibri" pitchFamily="34" charset="-120"/>
               </a:rPr>
-              <a:t>MESSAGE: “That same pathway works every time — same-week access, conservative first, surgery only when warranted.”</a:t>
+              <a:t>ASK: “One referral to prove the pathway.” Leave one-pager + direct line. Log who you met — next time you greet them by name.</a:t>
             </a:r>
             <a:endParaRPr lang="en-US" sz="1250" dirty="0"/>
           </a:p>
-          <a:p>
-            <a:pPr indent="0" marL="0">
-              <a:lnSpc>
-                <a:spcPct val="122000"/>
-              </a:lnSpc>
-              <a:buNone/>
-            </a:pPr>
-            <a:endParaRPr lang="en-US" sz="1250" dirty="0"/>
-          </a:p>
-          <a:p>
-            <a:pPr indent="0" marL="0">
-              <a:lnSpc>
-                <a:spcPct val="122000"/>
-              </a:lnSpc>
-              <a:buNone/>
-            </a:pPr>
-            <a:r>
-              <a:rPr lang="en-US" sz="1250" dirty="0">
-                <a:solidFill>
-                  <a:srgbClr val="14322C"/>
-                </a:solidFill>
-                <a:latin typeface="Calibri" pitchFamily="34" charset="0"/>
-                <a:ea typeface="Calibri" pitchFamily="34" charset="-122"/>
-                <a:cs typeface="Calibri" pitchFamily="34" charset="-120"/>
-              </a:rPr>
-              <a:t>ASK: “Make us your default for the NEXT back or neck patient.” Leave the coordinator card.</a:t>
-            </a:r>
-            <a:endParaRPr lang="en-US" sz="1250" dirty="0"/>
-          </a:p>
         </p:txBody>
       </p:sp>
       <p:sp>
@@ -12255,23 +10247,18 @@
         </p:nvSpPr>
         <p:spPr>
           <a:xfrm>
-            <a:off x="6172200" y="1463040"/>
-            <a:ext cx="5486400" cy="4480560"/>
+            <a:off x="7452360" y="1463040"/>
+            <a:ext cx="4206240" cy="4480560"/>
           </a:xfrm>
           <a:prstGeom prst="roundRect">
             <a:avLst>
-              <a:gd name="adj" fmla="val 1633"/>
+              <a:gd name="adj" fmla="val 1739"/>
             </a:avLst>
           </a:prstGeom>
           <a:solidFill>
-            <a:srgbClr val="FDF6E7"/>
+            <a:srgbClr val="14322C"/>
           </a:solidFill>
-          <a:ln w="12700">
-            <a:solidFill>
-              <a:srgbClr val="DCE7E3"/>
-            </a:solidFill>
-            <a:prstDash val="solid"/>
-          </a:ln>
+          <a:ln/>
         </p:spPr>
       </p:sp>
       <p:sp>
@@ -12282,34 +10269,34 @@
         </p:nvSpPr>
         <p:spPr>
           <a:xfrm>
-            <a:off x="6446520" y="1645920"/>
-            <a:ext cx="4937760" cy="365760"/>
-          </a:xfrm>
-          <a:prstGeom prst="rect">
-            <a:avLst/>
-          </a:prstGeom>
-          <a:noFill/>
-          <a:ln/>
-        </p:spPr>
-        <p:txBody>
-          <a:bodyPr wrap="square" rtlCol="0" anchor="ctr"/>
-          <a:lstStyle/>
-          <a:p>
-            <a:pPr indent="0" marL="0">
-              <a:buNone/>
-            </a:pPr>
-            <a:r>
-              <a:rPr lang="en-US" sz="1500" b="1" dirty="0">
-                <a:solidFill>
-                  <a:srgbClr val="14322C"/>
-                </a:solidFill>
-                <a:latin typeface="Cambria" pitchFamily="34" charset="0"/>
-                <a:ea typeface="Cambria" pitchFamily="34" charset="-122"/>
-                <a:cs typeface="Cambria" pitchFamily="34" charset="-120"/>
-              </a:rPr>
-              <a:t>Ortho referrer — spine works the same way</a:t>
-            </a:r>
-            <a:endParaRPr lang="en-US" sz="1500" dirty="0"/>
+            <a:off x="7726680" y="1691640"/>
+            <a:ext cx="3657600" cy="365760"/>
+          </a:xfrm>
+          <a:prstGeom prst="rect">
+            <a:avLst/>
+          </a:prstGeom>
+          <a:noFill/>
+          <a:ln/>
+        </p:spPr>
+        <p:txBody>
+          <a:bodyPr wrap="square" rtlCol="0" anchor="ctr"/>
+          <a:lstStyle/>
+          <a:p>
+            <a:pPr indent="0" marL="0">
+              <a:buNone/>
+            </a:pPr>
+            <a:r>
+              <a:rPr lang="en-US" sz="1400" b="1" spc="200" kern="0" dirty="0">
+                <a:solidFill>
+                  <a:srgbClr val="49A698"/>
+                </a:solidFill>
+                <a:latin typeface="Calibri" pitchFamily="34" charset="0"/>
+                <a:ea typeface="Calibri" pitchFamily="34" charset="-122"/>
+                <a:cs typeface="Calibri" pitchFamily="34" charset="-120"/>
+              </a:rPr>
+              <a:t>THE DROP RULE</a:t>
+            </a:r>
+            <a:endParaRPr lang="en-US" sz="1400" dirty="0"/>
           </a:p>
         </p:txBody>
       </p:sp>
@@ -12321,8 +10308,8 @@
         </p:nvSpPr>
         <p:spPr>
           <a:xfrm>
-            <a:off x="6446520" y="2103120"/>
-            <a:ext cx="4937760" cy="3657600"/>
+            <a:off x="7726680" y="2148840"/>
+            <a:ext cx="3657600" cy="3566160"/>
           </a:xfrm>
           <a:prstGeom prst="rect">
             <a:avLst/>
@@ -12336,27 +10323,27 @@
           <a:p>
             <a:pPr indent="0" marL="0">
               <a:lnSpc>
-                <a:spcPct val="122000"/>
+                <a:spcPct val="125000"/>
               </a:lnSpc>
               <a:buNone/>
             </a:pPr>
             <a:r>
               <a:rPr lang="en-US" sz="1250" dirty="0">
                 <a:solidFill>
-                  <a:srgbClr val="14322C"/>
-                </a:solidFill>
-                <a:latin typeface="Calibri" pitchFamily="34" charset="0"/>
-                <a:ea typeface="Calibri" pitchFamily="34" charset="-122"/>
-                <a:cs typeface="Calibri" pitchFamily="34" charset="-120"/>
-              </a:rPr>
-              <a:t>THANK: “You've sent us N ortho patients this year — thank you.”</a:t>
+                  <a:srgbClr val="E4EFEC"/>
+                </a:solidFill>
+                <a:latin typeface="Calibri" pitchFamily="34" charset="0"/>
+                <a:ea typeface="Calibri" pitchFamily="34" charset="-122"/>
+                <a:cs typeface="Calibri" pitchFamily="34" charset="-120"/>
+              </a:rPr>
+              <a:t>A prospect that produces nothing after 2 real touches comes OUT of rotation — the backlog has 200 more waiting.</a:t>
             </a:r>
             <a:endParaRPr lang="en-US" sz="1250" dirty="0"/>
           </a:p>
           <a:p>
             <a:pPr indent="0" marL="0">
               <a:lnSpc>
-                <a:spcPct val="122000"/>
+                <a:spcPct val="125000"/>
               </a:lnSpc>
               <a:buNone/>
             </a:pPr>
@@ -12365,27 +10352,27 @@
           <a:p>
             <a:pPr indent="0" marL="0">
               <a:lnSpc>
-                <a:spcPct val="122000"/>
+                <a:spcPct val="125000"/>
               </a:lnSpc>
               <a:buNone/>
             </a:pPr>
             <a:r>
               <a:rPr lang="en-US" sz="1250" dirty="0">
                 <a:solidFill>
-                  <a:srgbClr val="14322C"/>
-                </a:solidFill>
-                <a:latin typeface="Calibri" pitchFamily="34" charset="0"/>
-                <a:ea typeface="Calibri" pitchFamily="34" charset="-122"/>
-                <a:cs typeface="Calibri" pitchFamily="34" charset="-120"/>
-              </a:rPr>
-              <a:t>OPEN: service question.</a:t>
+                  <a:srgbClr val="E4EFEC"/>
+                </a:solidFill>
+                <a:latin typeface="Calibri" pitchFamily="34" charset="0"/>
+                <a:ea typeface="Calibri" pitchFamily="34" charset="-122"/>
+                <a:cs typeface="Calibri" pitchFamily="34" charset="-120"/>
+              </a:rPr>
+              <a:t>A Tier 3 account at zero after 2 cycles: same.</a:t>
             </a:r>
             <a:endParaRPr lang="en-US" sz="1250" dirty="0"/>
           </a:p>
           <a:p>
             <a:pPr indent="0" marL="0">
               <a:lnSpc>
-                <a:spcPct val="122000"/>
+                <a:spcPct val="125000"/>
               </a:lnSpc>
               <a:buNone/>
             </a:pPr>
@@ -12394,78 +10381,20 @@
           <a:p>
             <a:pPr indent="0" marL="0">
               <a:lnSpc>
-                <a:spcPct val="122000"/>
+                <a:spcPct val="125000"/>
               </a:lnSpc>
               <a:buNone/>
             </a:pPr>
             <a:r>
               <a:rPr lang="en-US" sz="1250" dirty="0">
                 <a:solidFill>
-                  <a:srgbClr val="14322C"/>
-                </a:solidFill>
-                <a:latin typeface="Calibri" pitchFamily="34" charset="0"/>
-                <a:ea typeface="Calibri" pitchFamily="34" charset="-122"/>
-                <a:cs typeface="Calibri" pitchFamily="34" charset="-120"/>
-              </a:rPr>
-              <a:t>MESSAGE: “Spine works exactly the way your knees and shoulders already do — same door, same speed. Your patient stays yours; notes back every visit.”</a:t>
-            </a:r>
-            <a:endParaRPr lang="en-US" sz="1250" dirty="0"/>
-          </a:p>
-          <a:p>
-            <a:pPr indent="0" marL="0">
-              <a:lnSpc>
-                <a:spcPct val="122000"/>
-              </a:lnSpc>
-              <a:buNone/>
-            </a:pPr>
-            <a:endParaRPr lang="en-US" sz="1250" dirty="0"/>
-          </a:p>
-          <a:p>
-            <a:pPr indent="0" marL="0">
-              <a:lnSpc>
-                <a:spcPct val="122000"/>
-              </a:lnSpc>
-              <a:buNone/>
-            </a:pPr>
-            <a:r>
-              <a:rPr lang="en-US" sz="1250" dirty="0">
-                <a:solidFill>
-                  <a:srgbClr val="14322C"/>
-                </a:solidFill>
-                <a:latin typeface="Calibri" pitchFamily="34" charset="0"/>
-                <a:ea typeface="Calibri" pitchFamily="34" charset="-122"/>
-                <a:cs typeface="Calibri" pitchFamily="34" charset="-120"/>
-              </a:rPr>
-              <a:t>ASK: “Send the next back/neck patient the way you send knees.”</a:t>
-            </a:r>
-            <a:endParaRPr lang="en-US" sz="1250" dirty="0"/>
-          </a:p>
-          <a:p>
-            <a:pPr indent="0" marL="0">
-              <a:lnSpc>
-                <a:spcPct val="122000"/>
-              </a:lnSpc>
-              <a:buNone/>
-            </a:pPr>
-            <a:endParaRPr lang="en-US" sz="1250" dirty="0"/>
-          </a:p>
-          <a:p>
-            <a:pPr indent="0" marL="0">
-              <a:lnSpc>
-                <a:spcPct val="122000"/>
-              </a:lnSpc>
-              <a:buNone/>
-            </a:pPr>
-            <a:r>
-              <a:rPr lang="en-US" sz="1250" dirty="0">
-                <a:solidFill>
-                  <a:srgbClr val="14322C"/>
-                </a:solidFill>
-                <a:latin typeface="Calibri" pitchFamily="34" charset="0"/>
-                <a:ea typeface="Calibri" pitchFamily="34" charset="-122"/>
-                <a:cs typeface="Calibri" pitchFamily="34" charset="-120"/>
-              </a:rPr>
-              <a:t>These are Tier 2 — 21-day rhythm, don't over-invest until they test us.</a:t>
+                  <a:srgbClr val="E4EFEC"/>
+                </a:solidFill>
+                <a:latin typeface="Calibri" pitchFamily="34" charset="0"/>
+                <a:ea typeface="Calibri" pitchFamily="34" charset="-122"/>
+                <a:cs typeface="Calibri" pitchFamily="34" charset="-120"/>
+              </a:rPr>
+              <a:t>Dropping is not failure; it's how the rotation keeps earning its gas money.</a:t>
             </a:r>
             <a:endParaRPr lang="en-US" sz="1250" dirty="0"/>
           </a:p>
@@ -12529,7 +10458,7 @@
                 <a:ea typeface="Cambria" pitchFamily="34" charset="-122"/>
                 <a:cs typeface="Cambria" pitchFamily="34" charset="-120"/>
               </a:rPr>
-              <a:t>Say this: prospects (FIRST TOUCH) — and when to stop</a:t>
+              <a:t>Attorneys &amp; payer flags — the careful lane</a:t>
             </a:r>
             <a:endParaRPr lang="en-US" sz="2900" dirty="0"/>
           </a:p>
@@ -12568,7 +10497,7 @@
                 <a:ea typeface="Calibri" pitchFamily="34" charset="-122"/>
                 <a:cs typeface="Calibri" pitchFamily="34" charset="-120"/>
               </a:rPr>
-              <a:t>469 accounts, pre-mixed into your route days. Test cheaply, drop honestly.</a:t>
+              <a:t>31% of our spine comes from 14 law firms. Highest yield per account, tightest rules.</a:t>
             </a:r>
             <a:endParaRPr lang="en-US" sz="1300" dirty="0"/>
           </a:p>
@@ -12583,7 +10512,7 @@
         <p:spPr>
           <a:xfrm>
             <a:off x="502920" y="1463040"/>
-            <a:ext cx="6766560" cy="4480560"/>
+            <a:ext cx="5486400" cy="4480560"/>
           </a:xfrm>
           <a:prstGeom prst="roundRect">
             <a:avLst>
@@ -12591,7 +10520,7 @@
             </a:avLst>
           </a:prstGeom>
           <a:solidFill>
-            <a:srgbClr val="E7F2EF"/>
+            <a:srgbClr val="FDF6E7"/>
           </a:solidFill>
           <a:ln w="12700">
             <a:solidFill>
@@ -12610,7 +10539,7 @@
         <p:spPr>
           <a:xfrm>
             <a:off x="777240" y="1645920"/>
-            <a:ext cx="6217920" cy="365760"/>
+            <a:ext cx="4937760" cy="365760"/>
           </a:xfrm>
           <a:prstGeom prst="rect">
             <a:avLst/>
@@ -12634,7 +10563,7 @@
                 <a:ea typeface="Cambria" pitchFamily="34" charset="-122"/>
                 <a:cs typeface="Cambria" pitchFamily="34" charset="-120"/>
               </a:rPr>
-              <a:t>Prospect first touch — earn one referral</a:t>
+              <a:t>WC / auto no-fault attorneys (Kristen's lane)</a:t>
             </a:r>
             <a:endParaRPr lang="en-US" sz="1500" dirty="0"/>
           </a:p>
@@ -12649,7 +10578,7 @@
         <p:spPr>
           <a:xfrm>
             <a:off x="777240" y="2103120"/>
-            <a:ext cx="6217920" cy="3657600"/>
+            <a:ext cx="4937760" cy="3657600"/>
           </a:xfrm>
           <a:prstGeom prst="rect">
             <a:avLst/>
@@ -12676,7 +10605,7 @@
                 <a:ea typeface="Calibri" pitchFamily="34" charset="-122"/>
                 <a:cs typeface="Calibri" pitchFamily="34" charset="-120"/>
               </a:rPr>
-              <a:t>INTRODUCE: “Synergy — integrated ortho + spine, deep bench, conservative-first. Patients seen the same week.”</a:t>
+              <a:t>OPEN: “Are records, scheduling, and communication meeting your standard?” — it's a SERVICE call, always.</a:t>
             </a:r>
             <a:endParaRPr lang="en-US" sz="1250" dirty="0"/>
           </a:p>
@@ -12705,7 +10634,7 @@
                 <a:ea typeface="Calibri" pitchFamily="34" charset="-122"/>
                 <a:cs typeface="Calibri" pitchFamily="34" charset="-120"/>
               </a:rPr>
-              <a:t>MESSAGE (type-matched — urgent care example): “Your discharge sheet can book a spine evaluation the same week — one number, we take it from there.”</a:t>
+              <a:t>MESSAGE: “Auto no-fault and workers' comp spine evaluations — fast scheduling, thorough documentation, clean records turnaround.”</a:t>
             </a:r>
             <a:endParaRPr lang="en-US" sz="1250" dirty="0"/>
           </a:p>
@@ -12734,33 +10663,79 @@
                 <a:ea typeface="Calibri" pitchFamily="34" charset="-122"/>
                 <a:cs typeface="Calibri" pitchFamily="34" charset="-120"/>
               </a:rPr>
-              <a:t>ASK: “One referral to prove the pathway.” Leave one-pager + direct line. Log who you met — next time you greet them by name.</a:t>
+              <a:t>ASK: keep us as the evaluation resource; leave the direct line + turnaround commitment.</a:t>
             </a:r>
             <a:endParaRPr lang="en-US" sz="1250" dirty="0"/>
           </a:p>
-        </p:txBody>
-      </p:sp>
-      <p:sp>
-        <p:nvSpPr>
-          <p:cNvPr id="7" name="Shape 5"/>
-          <p:cNvSpPr/>
-          <p:nvPr/>
-        </p:nvSpPr>
-        <p:spPr>
-          <a:xfrm>
-            <a:off x="7452360" y="1463040"/>
-            <a:ext cx="4206240" cy="4480560"/>
-          </a:xfrm>
-          <a:prstGeom prst="roundRect">
-            <a:avLst>
-              <a:gd name="adj" fmla="val 1739"/>
-            </a:avLst>
-          </a:prstGeom>
-          <a:solidFill>
-            <a:srgbClr val="14322C"/>
-          </a:solidFill>
-          <a:ln/>
-        </p:spPr>
+          <a:p>
+            <a:pPr indent="0" marL="0">
+              <a:lnSpc>
+                <a:spcPct val="122000"/>
+              </a:lnSpc>
+              <a:buNone/>
+            </a:pPr>
+            <a:endParaRPr lang="en-US" sz="1250" dirty="0"/>
+          </a:p>
+          <a:p>
+            <a:pPr indent="0" marL="0">
+              <a:lnSpc>
+                <a:spcPct val="122000"/>
+              </a:lnSpc>
+              <a:buNone/>
+            </a:pPr>
+            <a:r>
+              <a:rPr lang="en-US" sz="1250" dirty="0">
+                <a:solidFill>
+                  <a:srgbClr val="14322C"/>
+                </a:solidFill>
+                <a:latin typeface="Calibri" pitchFamily="34" charset="0"/>
+                <a:ea typeface="Calibri" pitchFamily="34" charset="-122"/>
+                <a:cs typeface="Calibri" pitchFamily="34" charset="-120"/>
+              </a:rPr>
+              <a:t>NEVER: payments, gifts, referral fees, event sponsorships-for-referrals. Service and merit only — that line is legal, not cultural.</a:t>
+            </a:r>
+            <a:endParaRPr lang="en-US" sz="1250" dirty="0"/>
+          </a:p>
+        </p:txBody>
+      </p:sp>
+      <p:sp>
+        <p:nvSpPr>
+          <p:cNvPr id="7" name="Text 5"/>
+          <p:cNvSpPr/>
+          <p:nvPr/>
+        </p:nvSpPr>
+        <p:spPr>
+          <a:xfrm>
+            <a:off x="6172200" y="1463040"/>
+            <a:ext cx="5486400" cy="365760"/>
+          </a:xfrm>
+          <a:prstGeom prst="rect">
+            <a:avLst/>
+          </a:prstGeom>
+          <a:noFill/>
+          <a:ln/>
+        </p:spPr>
+        <p:txBody>
+          <a:bodyPr wrap="square" rtlCol="0" anchor="ctr"/>
+          <a:lstStyle/>
+          <a:p>
+            <a:pPr indent="0" marL="0">
+              <a:buNone/>
+            </a:pPr>
+            <a:r>
+              <a:rPr lang="en-US" sz="1400" b="1" dirty="0">
+                <a:solidFill>
+                  <a:srgbClr val="14322C"/>
+                </a:solidFill>
+                <a:latin typeface="Cambria" pitchFamily="34" charset="0"/>
+                <a:ea typeface="Cambria" pitchFamily="34" charset="-122"/>
+                <a:cs typeface="Cambria" pitchFamily="34" charset="-120"/>
+              </a:rPr>
+              <a:t>The payer chip on every stop card:</a:t>
+            </a:r>
+            <a:endParaRPr lang="en-US" sz="1400" dirty="0"/>
+          </a:p>
+        </p:txBody>
       </p:sp>
       <p:sp>
         <p:nvSpPr>
@@ -12770,34 +10745,54 @@
         </p:nvSpPr>
         <p:spPr>
           <a:xfrm>
-            <a:off x="7726680" y="1691640"/>
-            <a:ext cx="3657600" cy="365760"/>
-          </a:xfrm>
-          <a:prstGeom prst="rect">
-            <a:avLst/>
-          </a:prstGeom>
-          <a:noFill/>
-          <a:ln/>
-        </p:spPr>
-        <p:txBody>
-          <a:bodyPr wrap="square" rtlCol="0" anchor="ctr"/>
-          <a:lstStyle/>
-          <a:p>
-            <a:pPr indent="0" marL="0">
-              <a:buNone/>
-            </a:pPr>
-            <a:r>
-              <a:rPr lang="en-US" sz="1400" b="1" spc="200" kern="0" dirty="0">
-                <a:solidFill>
-                  <a:srgbClr val="49A698"/>
-                </a:solidFill>
-                <a:latin typeface="Calibri" pitchFamily="34" charset="0"/>
-                <a:ea typeface="Calibri" pitchFamily="34" charset="-122"/>
-                <a:cs typeface="Calibri" pitchFamily="34" charset="-120"/>
-              </a:rPr>
-              <a:t>THE DROP RULE</a:t>
-            </a:r>
-            <a:endParaRPr lang="en-US" sz="1400" dirty="0"/>
+            <a:off x="6172200" y="1920240"/>
+            <a:ext cx="5486400" cy="777240"/>
+          </a:xfrm>
+          <a:prstGeom prst="rect">
+            <a:avLst/>
+          </a:prstGeom>
+          <a:noFill/>
+          <a:ln/>
+        </p:spPr>
+        <p:txBody>
+          <a:bodyPr wrap="square" rtlCol="0" anchor="ctr"/>
+          <a:lstStyle/>
+          <a:p>
+            <a:pPr indent="0" marL="0">
+              <a:lnSpc>
+                <a:spcPct val="105000"/>
+              </a:lnSpc>
+              <a:buNone/>
+            </a:pPr>
+            <a:r>
+              <a:rPr lang="en-US" sz="1150" b="1" dirty="0">
+                <a:solidFill>
+                  <a:srgbClr val="14322C"/>
+                </a:solidFill>
+                <a:latin typeface="Calibri" pitchFamily="34" charset="0"/>
+                <a:ea typeface="Calibri" pitchFamily="34" charset="-122"/>
+                <a:cs typeface="Calibri" pitchFamily="34" charset="-120"/>
+              </a:rPr>
+              <a:t>Comm/Medicare (grey chip) — </a:t>
+            </a:r>
+            <a:pPr indent="0" marL="0">
+              <a:lnSpc>
+                <a:spcPct val="105000"/>
+              </a:lnSpc>
+              <a:buNone/>
+            </a:pPr>
+            <a:r>
+              <a:rPr lang="en-US" sz="1150" dirty="0">
+                <a:solidFill>
+                  <a:srgbClr val="14322C"/>
+                </a:solidFill>
+                <a:latin typeface="Calibri" pitchFamily="34" charset="0"/>
+                <a:ea typeface="Calibri" pitchFamily="34" charset="-122"/>
+                <a:cs typeface="Calibri" pitchFamily="34" charset="-120"/>
+              </a:rPr>
+              <a:t>Qualified — confirm HMO share; we handle referral paperwork.</a:t>
+            </a:r>
+            <a:endParaRPr lang="en-US" sz="1150" dirty="0"/>
           </a:p>
         </p:txBody>
       </p:sp>
@@ -12809,8 +10804,8 @@
         </p:nvSpPr>
         <p:spPr>
           <a:xfrm>
-            <a:off x="7726680" y="2148840"/>
-            <a:ext cx="3657600" cy="3566160"/>
+            <a:off x="6172200" y="2761488"/>
+            <a:ext cx="5486400" cy="777240"/>
           </a:xfrm>
           <a:prstGeom prst="rect">
             <a:avLst/>
@@ -12824,80 +10819,255 @@
           <a:p>
             <a:pPr indent="0" marL="0">
               <a:lnSpc>
-                <a:spcPct val="125000"/>
+                <a:spcPct val="105000"/>
               </a:lnSpc>
               <a:buNone/>
             </a:pPr>
             <a:r>
-              <a:rPr lang="en-US" sz="1250" dirty="0">
-                <a:solidFill>
-                  <a:srgbClr val="E4EFEC"/>
-                </a:solidFill>
-                <a:latin typeface="Calibri" pitchFamily="34" charset="0"/>
-                <a:ea typeface="Calibri" pitchFamily="34" charset="-122"/>
-                <a:cs typeface="Calibri" pitchFamily="34" charset="-120"/>
-              </a:rPr>
-              <a:t>A prospect that produces nothing after 2 real touches comes OUT of rotation — the backlog has 200 more waiting.</a:t>
-            </a:r>
-            <a:endParaRPr lang="en-US" sz="1250" dirty="0"/>
-          </a:p>
-          <a:p>
+              <a:rPr lang="en-US" sz="1150" b="1" dirty="0">
+                <a:solidFill>
+                  <a:srgbClr val="14322C"/>
+                </a:solidFill>
+                <a:latin typeface="Calibri" pitchFamily="34" charset="0"/>
+                <a:ea typeface="Calibri" pitchFamily="34" charset="-122"/>
+                <a:cs typeface="Calibri" pitchFamily="34" charset="-120"/>
+              </a:rPr>
+              <a:t>Mixed panel (amber chip) — </a:t>
+            </a:r>
             <a:pPr indent="0" marL="0">
               <a:lnSpc>
-                <a:spcPct val="125000"/>
+                <a:spcPct val="105000"/>
               </a:lnSpc>
               <a:buNone/>
             </a:pPr>
-            <a:endParaRPr lang="en-US" sz="1250" dirty="0"/>
-          </a:p>
+            <a:r>
+              <a:rPr lang="en-US" sz="1150" dirty="0">
+                <a:solidFill>
+                  <a:srgbClr val="14322C"/>
+                </a:solidFill>
+                <a:latin typeface="Calibri" pitchFamily="34" charset="0"/>
+                <a:ea typeface="Calibri" pitchFamily="34" charset="-122"/>
+                <a:cs typeface="Calibri" pitchFamily="34" charset="-120"/>
+              </a:rPr>
+              <a:t>Hospital-system or walk-in — intake screens each referral.</a:t>
+            </a:r>
+            <a:endParaRPr lang="en-US" sz="1150" dirty="0"/>
+          </a:p>
+        </p:txBody>
+      </p:sp>
+      <p:sp>
+        <p:nvSpPr>
+          <p:cNvPr id="10" name="Text 8"/>
+          <p:cNvSpPr/>
+          <p:nvPr/>
+        </p:nvSpPr>
+        <p:spPr>
+          <a:xfrm>
+            <a:off x="6172200" y="3602736"/>
+            <a:ext cx="5486400" cy="777240"/>
+          </a:xfrm>
+          <a:prstGeom prst="rect">
+            <a:avLst/>
+          </a:prstGeom>
+          <a:noFill/>
+          <a:ln/>
+        </p:spPr>
+        <p:txBody>
+          <a:bodyPr wrap="square" rtlCol="0" anchor="ctr"/>
+          <a:lstStyle/>
           <a:p>
             <a:pPr indent="0" marL="0">
               <a:lnSpc>
-                <a:spcPct val="125000"/>
+                <a:spcPct val="105000"/>
               </a:lnSpc>
               <a:buNone/>
             </a:pPr>
             <a:r>
-              <a:rPr lang="en-US" sz="1250" dirty="0">
-                <a:solidFill>
-                  <a:srgbClr val="E4EFEC"/>
-                </a:solidFill>
-                <a:latin typeface="Calibri" pitchFamily="34" charset="0"/>
-                <a:ea typeface="Calibri" pitchFamily="34" charset="-122"/>
-                <a:cs typeface="Calibri" pitchFamily="34" charset="-120"/>
-              </a:rPr>
-              <a:t>A Tier 3 account at zero after 2 cycles: same.</a:t>
-            </a:r>
-            <a:endParaRPr lang="en-US" sz="1250" dirty="0"/>
-          </a:p>
-          <a:p>
+              <a:rPr lang="en-US" sz="1150" b="1" dirty="0">
+                <a:solidFill>
+                  <a:srgbClr val="14322C"/>
+                </a:solidFill>
+                <a:latin typeface="Calibri" pitchFamily="34" charset="0"/>
+                <a:ea typeface="Calibri" pitchFamily="34" charset="-122"/>
+                <a:cs typeface="Calibri" pitchFamily="34" charset="-120"/>
+              </a:rPr>
+              <a:t>WC/Auto ✓ (teal chip) — </a:t>
+            </a:r>
             <a:pPr indent="0" marL="0">
               <a:lnSpc>
-                <a:spcPct val="125000"/>
+                <a:spcPct val="105000"/>
               </a:lnSpc>
               <a:buNone/>
             </a:pPr>
-            <a:endParaRPr lang="en-US" sz="1250" dirty="0"/>
-          </a:p>
+            <a:r>
+              <a:rPr lang="en-US" sz="1150" dirty="0">
+                <a:solidFill>
+                  <a:srgbClr val="14322C"/>
+                </a:solidFill>
+                <a:latin typeface="Calibri" pitchFamily="34" charset="0"/>
+                <a:ea typeface="Calibri" pitchFamily="34" charset="-122"/>
+                <a:cs typeface="Calibri" pitchFamily="34" charset="-120"/>
+              </a:rPr>
+              <a:t>No referral, no copay — commercial-equivalent. Go.</a:t>
+            </a:r>
+            <a:endParaRPr lang="en-US" sz="1150" dirty="0"/>
+          </a:p>
+        </p:txBody>
+      </p:sp>
+      <p:sp>
+        <p:nvSpPr>
+          <p:cNvPr id="11" name="Text 9"/>
+          <p:cNvSpPr/>
+          <p:nvPr/>
+        </p:nvSpPr>
+        <p:spPr>
+          <a:xfrm>
+            <a:off x="6172200" y="4443984"/>
+            <a:ext cx="5486400" cy="777240"/>
+          </a:xfrm>
+          <a:prstGeom prst="rect">
+            <a:avLst/>
+          </a:prstGeom>
+          <a:noFill/>
+          <a:ln/>
+        </p:spPr>
+        <p:txBody>
+          <a:bodyPr wrap="square" rtlCol="0" anchor="ctr"/>
+          <a:lstStyle/>
           <a:p>
             <a:pPr indent="0" marL="0">
               <a:lnSpc>
-                <a:spcPct val="125000"/>
+                <a:spcPct val="105000"/>
               </a:lnSpc>
               <a:buNone/>
             </a:pPr>
             <a:r>
-              <a:rPr lang="en-US" sz="1250" dirty="0">
-                <a:solidFill>
-                  <a:srgbClr val="E4EFEC"/>
-                </a:solidFill>
-                <a:latin typeface="Calibri" pitchFamily="34" charset="0"/>
-                <a:ea typeface="Calibri" pitchFamily="34" charset="-122"/>
-                <a:cs typeface="Calibri" pitchFamily="34" charset="-120"/>
-              </a:rPr>
-              <a:t>Dropping is not failure; it's how the rotation keeps earning its gas money.</a:t>
-            </a:r>
-            <a:endParaRPr lang="en-US" sz="1250" dirty="0"/>
+              <a:rPr lang="en-US" sz="1150" b="1" dirty="0">
+                <a:solidFill>
+                  <a:srgbClr val="14322C"/>
+                </a:solidFill>
+                <a:latin typeface="Calibri" pitchFamily="34" charset="0"/>
+                <a:ea typeface="Calibri" pitchFamily="34" charset="-122"/>
+                <a:cs typeface="Calibri" pitchFamily="34" charset="-120"/>
+              </a:rPr>
+              <a:t>Medicaid? VERIFY (red chip) — </a:t>
+            </a:r>
+            <a:pPr indent="0" marL="0">
+              <a:lnSpc>
+                <a:spcPct val="105000"/>
+              </a:lnSpc>
+              <a:buNone/>
+            </a:pPr>
+            <a:r>
+              <a:rPr lang="en-US" sz="1150" dirty="0">
+                <a:solidFill>
+                  <a:srgbClr val="14322C"/>
+                </a:solidFill>
+                <a:latin typeface="Calibri" pitchFamily="34" charset="0"/>
+                <a:ea typeface="Calibri" pitchFamily="34" charset="-122"/>
+                <a:cs typeface="Calibri" pitchFamily="34" charset="-120"/>
+              </a:rPr>
+              <a:t>FQHC/community pattern — do NOT promise same-week until verified. Uninsured → Harmony Direct Pay.</a:t>
+            </a:r>
+            <a:endParaRPr lang="en-US" sz="1150" dirty="0"/>
+          </a:p>
+        </p:txBody>
+      </p:sp>
+      <p:sp>
+        <p:nvSpPr>
+          <p:cNvPr id="12" name="Text 10"/>
+          <p:cNvSpPr/>
+          <p:nvPr/>
+        </p:nvSpPr>
+        <p:spPr>
+          <a:xfrm>
+            <a:off x="6172200" y="5285232"/>
+            <a:ext cx="5486400" cy="777240"/>
+          </a:xfrm>
+          <a:prstGeom prst="rect">
+            <a:avLst/>
+          </a:prstGeom>
+          <a:noFill/>
+          <a:ln/>
+        </p:spPr>
+        <p:txBody>
+          <a:bodyPr wrap="square" rtlCol="0" anchor="ctr"/>
+          <a:lstStyle/>
+          <a:p>
+            <a:pPr indent="0" marL="0">
+              <a:lnSpc>
+                <a:spcPct val="105000"/>
+              </a:lnSpc>
+              <a:buNone/>
+            </a:pPr>
+            <a:r>
+              <a:rPr lang="en-US" sz="1150" b="1" dirty="0">
+                <a:solidFill>
+                  <a:srgbClr val="14322C"/>
+                </a:solidFill>
+                <a:latin typeface="Calibri" pitchFamily="34" charset="0"/>
+                <a:ea typeface="Calibri" pitchFamily="34" charset="-122"/>
+                <a:cs typeface="Calibri" pitchFamily="34" charset="-120"/>
+              </a:rPr>
+              <a:t>Peds — low fit — </a:t>
+            </a:r>
+            <a:pPr indent="0" marL="0">
+              <a:lnSpc>
+                <a:spcPct val="105000"/>
+              </a:lnSpc>
+              <a:buNone/>
+            </a:pPr>
+            <a:r>
+              <a:rPr lang="en-US" sz="1150" dirty="0">
+                <a:solidFill>
+                  <a:srgbClr val="14322C"/>
+                </a:solidFill>
+                <a:latin typeface="Calibri" pitchFamily="34" charset="0"/>
+                <a:ea typeface="Calibri" pitchFamily="34" charset="-122"/>
+                <a:cs typeface="Calibri" pitchFamily="34" charset="-120"/>
+              </a:rPr>
+              <a:t>Adult family/staff referrals only.</a:t>
+            </a:r>
+            <a:endParaRPr lang="en-US" sz="1150" dirty="0"/>
+          </a:p>
+        </p:txBody>
+      </p:sp>
+      <p:sp>
+        <p:nvSpPr>
+          <p:cNvPr id="13" name="Text 11"/>
+          <p:cNvSpPr/>
+          <p:nvPr/>
+        </p:nvSpPr>
+        <p:spPr>
+          <a:xfrm>
+            <a:off x="6172200" y="6172200"/>
+            <a:ext cx="5486400" cy="640080"/>
+          </a:xfrm>
+          <a:prstGeom prst="rect">
+            <a:avLst/>
+          </a:prstGeom>
+          <a:noFill/>
+          <a:ln/>
+        </p:spPr>
+        <p:txBody>
+          <a:bodyPr wrap="square" rtlCol="0" anchor="ctr"/>
+          <a:lstStyle/>
+          <a:p>
+            <a:pPr indent="0" marL="0">
+              <a:buNone/>
+            </a:pPr>
+            <a:r>
+              <a:rPr lang="en-US" sz="1050" i="1" dirty="0">
+                <a:solidFill>
+                  <a:srgbClr val="5E7773"/>
+                </a:solidFill>
+                <a:latin typeface="Calibri" pitchFamily="34" charset="0"/>
+                <a:ea typeface="Calibri" pitchFamily="34" charset="-122"/>
+                <a:cs typeface="Calibri" pitchFamily="34" charset="-120"/>
+              </a:rPr>
+              <a:t>Payer chips are pattern-based guesses until Kelly's verification pass (Tier 1 first, by Jul 31). When unsure: “intake will confirm coverage the same day.”</a:t>
+            </a:r>
+            <a:endParaRPr lang="en-US" sz="1050" dirty="0"/>
           </a:p>
         </p:txBody>
       </p:sp>

--- a/pm/kristen-share/SHP-Spine-Team-Rollout_Kristen_Jul22.pptx
+++ b/pm/kristen-share/SHP-Spine-Team-Rollout_Kristen_Jul22.pptx
@@ -7221,7 +7221,7 @@
                           <a:ea typeface="Calibri" pitchFamily="34" charset="-122"/>
                           <a:cs typeface="Calibri" pitchFamily="34" charset="-120"/>
                         </a:rPr>
-                        <a:t>every 14 days</a:t>
+                        <a:t>every 21 days</a:t>
                       </a:r>
                       <a:endParaRPr lang="en-US" sz="1300" dirty="0">
                         <a:latin typeface="Calibri" charset="0"/>
@@ -7483,7 +7483,7 @@
                           <a:ea typeface="Calibri" pitchFamily="34" charset="-122"/>
                           <a:cs typeface="Calibri" pitchFamily="34" charset="-120"/>
                         </a:rPr>
-                        <a:t>every 21 days</a:t>
+                        <a:t>every 30 days</a:t>
                       </a:r>
                       <a:endParaRPr lang="en-US" sz="1300" dirty="0">
                         <a:latin typeface="Calibri" charset="0"/>
@@ -7745,7 +7745,7 @@
                           <a:ea typeface="Calibri" pitchFamily="34" charset="-122"/>
                           <a:cs typeface="Calibri" pitchFamily="34" charset="-120"/>
                         </a:rPr>
-                        <a:t>every 30 days</a:t>
+                        <a:t>every 45 days</a:t>
                       </a:r>
                       <a:endParaRPr lang="en-US" sz="1300" dirty="0">
                         <a:latin typeface="Calibri" charset="0"/>
@@ -8269,7 +8269,7 @@
                           <a:ea typeface="Calibri" pitchFamily="34" charset="-122"/>
                           <a:cs typeface="Calibri" pitchFamily="34" charset="-120"/>
                         </a:rPr>
-                        <a:t>tightest</a:t>
+                        <a:t>≤ 14 days</a:t>
                       </a:r>
                       <a:endParaRPr lang="en-US" sz="1300" dirty="0">
                         <a:latin typeface="Calibri" charset="0"/>

--- a/pm/kristen-share/SHP-Spine-Team-Rollout_Kristen_Jul22.pptx
+++ b/pm/kristen-share/SHP-Spine-Team-Rollout_Kristen_Jul22.pptx
@@ -1571,7 +1571,7 @@
           <a:p>
             <a:r>
               <a:rPr lang="en-US" dirty="0"/>
-              <a:t>Give the team explicit permission to drop - guilt-visiting dead accounts is where field time goes to die.</a:t>
+              <a:t>Frame: promote/hold/park. The note after each touch is what powers the 90-day read - that is the answer to how we assess vibes.</a:t>
             </a:r>
             <a:endParaRPr lang="en-US" dirty="0"/>
           </a:p>
@@ -9964,7 +9964,7 @@
                 <a:ea typeface="Calibri" pitchFamily="34" charset="-122"/>
                 <a:cs typeface="Calibri" pitchFamily="34" charset="-120"/>
               </a:rPr>
-              <a:t>These are Tier 2 — 21-day rhythm, don't over-invest until they test us.</a:t>
+              <a:t>These are Tier 2 — 30-day rhythm, and we are ALL-IN on them: they already trust us with patients.</a:t>
             </a:r>
             <a:endParaRPr lang="en-US" sz="1250" dirty="0"/>
           </a:p>
@@ -10028,7 +10028,7 @@
                 <a:ea typeface="Cambria" pitchFamily="34" charset="-122"/>
                 <a:cs typeface="Cambria" pitchFamily="34" charset="-120"/>
               </a:rPr>
-              <a:t>Say this: prospects (FIRST TOUCH) — and when to stop</a:t>
+              <a:t>Say this: prospects — and the 90-day read</a:t>
             </a:r>
             <a:endParaRPr lang="en-US" sz="2900" dirty="0"/>
           </a:p>
@@ -10067,7 +10067,7 @@
                 <a:ea typeface="Calibri" pitchFamily="34" charset="-122"/>
                 <a:cs typeface="Calibri" pitchFamily="34" charset="-120"/>
               </a:rPr>
-              <a:t>469 accounts, pre-mixed into your route days. Test cheaply, drop honestly.</a:t>
+              <a:t>469 accounts, pre-mixed into your route days. Nothing gets deleted — your field read decides what moves up.</a:t>
             </a:r>
             <a:endParaRPr lang="en-US" sz="1300" dirty="0"/>
           </a:p>
@@ -10133,7 +10133,7 @@
                 <a:ea typeface="Cambria" pitchFamily="34" charset="-122"/>
                 <a:cs typeface="Cambria" pitchFamily="34" charset="-120"/>
               </a:rPr>
-              <a:t>Prospect first touch — earn one referral</a:t>
+              <a:t>Prospect first touch — earn the first handful</a:t>
             </a:r>
             <a:endParaRPr lang="en-US" sz="1500" dirty="0"/>
           </a:p>
@@ -10233,7 +10233,7 @@
                 <a:ea typeface="Calibri" pitchFamily="34" charset="-122"/>
                 <a:cs typeface="Calibri" pitchFamily="34" charset="-120"/>
               </a:rPr>
-              <a:t>ASK: “One referral to prove the pathway.” Leave one-pager + direct line. Log who you met — next time you greet them by name.</a:t>
+              <a:t>ASK: “Send us a handful — let us show you what we're about.” Leave one-pager + direct line. Log who you met — next time you greet them by name.</a:t>
             </a:r>
             <a:endParaRPr lang="en-US" sz="1250" dirty="0"/>
           </a:p>
@@ -10294,7 +10294,7 @@
                 <a:ea typeface="Calibri" pitchFamily="34" charset="-122"/>
                 <a:cs typeface="Calibri" pitchFamily="34" charset="-120"/>
               </a:rPr>
-              <a:t>THE DROP RULE</a:t>
+              <a:t>THE 90-DAY READ</a:t>
             </a:r>
             <a:endParaRPr lang="en-US" sz="1400" dirty="0"/>
           </a:p>
@@ -10309,7 +10309,7 @@
         <p:spPr>
           <a:xfrm>
             <a:off x="7726680" y="2148840"/>
-            <a:ext cx="3657600" cy="3566160"/>
+            <a:ext cx="3657600" cy="3657600"/>
           </a:xfrm>
           <a:prstGeom prst="rect">
             <a:avLst/>
@@ -10323,12 +10323,12 @@
           <a:p>
             <a:pPr indent="0" marL="0">
               <a:lnSpc>
-                <a:spcPct val="125000"/>
+                <a:spcPct val="118000"/>
               </a:lnSpc>
               <a:buNone/>
             </a:pPr>
             <a:r>
-              <a:rPr lang="en-US" sz="1250" dirty="0">
+              <a:rPr lang="en-US" sz="1150" dirty="0">
                 <a:solidFill>
                   <a:srgbClr val="E4EFEC"/>
                 </a:solidFill>
@@ -10336,28 +10336,28 @@
                 <a:ea typeface="Calibri" pitchFamily="34" charset="-122"/>
                 <a:cs typeface="Calibri" pitchFamily="34" charset="-120"/>
               </a:rPr>
-              <a:t>A prospect that produces nothing after 2 real touches comes OUT of rotation — the backlog has 200 more waiting.</a:t>
-            </a:r>
-            <a:endParaRPr lang="en-US" sz="1250" dirty="0"/>
+              <a:t>Nothing gets deleted — every account stays on the list. After ~2 touches (about 90 days at prospect rhythm), YOUR read decides:</a:t>
+            </a:r>
+            <a:endParaRPr lang="en-US" sz="1150" dirty="0"/>
           </a:p>
           <a:p>
             <a:pPr indent="0" marL="0">
               <a:lnSpc>
-                <a:spcPct val="125000"/>
+                <a:spcPct val="118000"/>
               </a:lnSpc>
               <a:buNone/>
             </a:pPr>
-            <a:endParaRPr lang="en-US" sz="1250" dirty="0"/>
+            <a:endParaRPr lang="en-US" sz="1150" dirty="0"/>
           </a:p>
           <a:p>
             <a:pPr indent="0" marL="0">
               <a:lnSpc>
-                <a:spcPct val="125000"/>
+                <a:spcPct val="118000"/>
               </a:lnSpc>
               <a:buNone/>
             </a:pPr>
             <a:r>
-              <a:rPr lang="en-US" sz="1250" dirty="0">
+              <a:rPr lang="en-US" sz="1150" dirty="0">
                 <a:solidFill>
                   <a:srgbClr val="E4EFEC"/>
                 </a:solidFill>
@@ -10365,28 +10365,28 @@
                 <a:ea typeface="Calibri" pitchFamily="34" charset="-122"/>
                 <a:cs typeface="Calibri" pitchFamily="34" charset="-120"/>
               </a:rPr>
-              <a:t>A Tier 3 account at zero after 2 cycles: same.</a:t>
-            </a:r>
-            <a:endParaRPr lang="en-US" sz="1250" dirty="0"/>
+              <a:t>PROMOTE — real potential? Move it up, hit it more often.</a:t>
+            </a:r>
+            <a:endParaRPr lang="en-US" sz="1150" dirty="0"/>
           </a:p>
           <a:p>
             <a:pPr indent="0" marL="0">
               <a:lnSpc>
-                <a:spcPct val="125000"/>
+                <a:spcPct val="118000"/>
               </a:lnSpc>
               <a:buNone/>
             </a:pPr>
-            <a:endParaRPr lang="en-US" sz="1250" dirty="0"/>
+            <a:endParaRPr lang="en-US" sz="1150" dirty="0"/>
           </a:p>
           <a:p>
             <a:pPr indent="0" marL="0">
               <a:lnSpc>
-                <a:spcPct val="125000"/>
+                <a:spcPct val="118000"/>
               </a:lnSpc>
               <a:buNone/>
             </a:pPr>
             <a:r>
-              <a:rPr lang="en-US" sz="1250" dirty="0">
+              <a:rPr lang="en-US" sz="1150" dirty="0">
                 <a:solidFill>
                   <a:srgbClr val="E4EFEC"/>
                 </a:solidFill>
@@ -10394,9 +10394,67 @@
                 <a:ea typeface="Calibri" pitchFamily="34" charset="-122"/>
                 <a:cs typeface="Calibri" pitchFamily="34" charset="-120"/>
               </a:rPr>
-              <a:t>Dropping is not failure; it's how the rotation keeps earning its gas money.</a:t>
-            </a:r>
-            <a:endParaRPr lang="en-US" sz="1250" dirty="0"/>
+              <a:t>HOLD — keep the 45-day rhythm.</a:t>
+            </a:r>
+            <a:endParaRPr lang="en-US" sz="1150" dirty="0"/>
+          </a:p>
+          <a:p>
+            <a:pPr indent="0" marL="0">
+              <a:lnSpc>
+                <a:spcPct val="118000"/>
+              </a:lnSpc>
+              <a:buNone/>
+            </a:pPr>
+            <a:endParaRPr lang="en-US" sz="1150" dirty="0"/>
+          </a:p>
+          <a:p>
+            <a:pPr indent="0" marL="0">
+              <a:lnSpc>
+                <a:spcPct val="118000"/>
+              </a:lnSpc>
+              <a:buNone/>
+            </a:pPr>
+            <a:r>
+              <a:rPr lang="en-US" sz="1150" dirty="0">
+                <a:solidFill>
+                  <a:srgbClr val="E4EFEC"/>
+                </a:solidFill>
+                <a:latin typeface="Calibri" pitchFamily="34" charset="0"/>
+                <a:ea typeface="Calibri" pitchFamily="34" charset="-122"/>
+                <a:cs typeface="Calibri" pitchFamily="34" charset="-120"/>
+              </a:rPr>
+              <a:t>PARK — no signal? Backlog it and give that road time to the next prospect; revisit next quarter.</a:t>
+            </a:r>
+            <a:endParaRPr lang="en-US" sz="1150" dirty="0"/>
+          </a:p>
+          <a:p>
+            <a:pPr indent="0" marL="0">
+              <a:lnSpc>
+                <a:spcPct val="118000"/>
+              </a:lnSpc>
+              <a:buNone/>
+            </a:pPr>
+            <a:endParaRPr lang="en-US" sz="1150" dirty="0"/>
+          </a:p>
+          <a:p>
+            <a:pPr indent="0" marL="0">
+              <a:lnSpc>
+                <a:spcPct val="118000"/>
+              </a:lnSpc>
+              <a:buNone/>
+            </a:pPr>
+            <a:r>
+              <a:rPr lang="en-US" sz="1150" dirty="0">
+                <a:solidFill>
+                  <a:srgbClr val="E4EFEC"/>
+                </a:solidFill>
+                <a:latin typeface="Calibri" pitchFamily="34" charset="0"/>
+                <a:ea typeface="Calibri" pitchFamily="34" charset="-122"/>
+                <a:cs typeface="Calibri" pitchFamily="34" charset="-120"/>
+              </a:rPr>
+              <a:t>Your one-line note after each touch is what makes this call possible.</a:t>
+            </a:r>
+            <a:endParaRPr lang="en-US" sz="1150" dirty="0"/>
           </a:p>
         </p:txBody>
       </p:sp>

--- a/pm/kristen-share/SHP-Spine-Team-Rollout_Kristen_Jul22.pptx
+++ b/pm/kristen-share/SHP-Spine-Team-Rollout_Kristen_Jul22.pptx
@@ -4,25 +4,24 @@
   <p:sldMasterIdLst>
     <p:sldMasterId id="2147483648" r:id="rId1"/>
   </p:sldMasterIdLst>
+  <p:notesMasterIdLst>
+    <p:notesMasterId r:id="rId15"/>
+  </p:notesMasterIdLst>
   <p:sldIdLst>
     <p:sldId id="256" r:id="rId2"/>
     <p:sldId id="257" r:id="rId3"/>
     <p:sldId id="258" r:id="rId4"/>
-    <p:sldId id="259" r:id="rId5"/>
-    <p:sldId id="260" r:id="rId6"/>
-    <p:sldId id="261" r:id="rId7"/>
-    <p:sldId id="262" r:id="rId8"/>
-    <p:sldId id="263" r:id="rId9"/>
-    <p:sldId id="264" r:id="rId10"/>
-    <p:sldId id="265" r:id="rId11"/>
-    <p:sldId id="266" r:id="rId12"/>
-    <p:sldId id="267" r:id="rId13"/>
-    <p:sldId id="268" r:id="rId14"/>
-    <p:sldId id="269" r:id="rId15"/>
+    <p:sldId id="260" r:id="rId5"/>
+    <p:sldId id="261" r:id="rId6"/>
+    <p:sldId id="262" r:id="rId7"/>
+    <p:sldId id="263" r:id="rId8"/>
+    <p:sldId id="264" r:id="rId9"/>
+    <p:sldId id="266" r:id="rId10"/>
+    <p:sldId id="267" r:id="rId11"/>
+    <p:sldId id="268" r:id="rId12"/>
+    <p:sldId id="269" r:id="rId13"/>
+    <p:sldId id="270" r:id="rId14"/>
   </p:sldIdLst>
-  <p:notesMasterIdLst>
-    <p:notesMasterId r:id="rId16"/>
-  </p:notesMasterIdLst>
   <p:sldSz cx="12192000" cy="6858000"/>
   <p:notesSz cx="6858000" cy="12192000"/>
   <p:defaultTextStyle>
@@ -117,6 +116,11 @@
       </a:defRPr>
     </a:lvl9pPr>
   </p:defaultTextStyle>
+  <p:extLst>
+    <p:ext uri="{EFAFB233-063F-42B5-8137-9DF3F51BA10A}">
+      <p15:sldGuideLst xmlns:p15="http://schemas.microsoft.com/office/powerpoint/2012/main"/>
+    </p:ext>
+  </p:extLst>
 </p:presentation>
 </file>
 
@@ -142,234 +146,10 @@
           <a:chExt cx="0" cy="0"/>
         </a:xfrm>
       </p:grpSpPr>
-      <p:sp>
-        <p:nvSpPr>
-          <p:cNvPr id="2" name="Header Placeholder 1"/>
-          <p:cNvSpPr>
-            <a:spLocks noGrp="1"/>
-          </p:cNvSpPr>
-          <p:nvPr>
-            <p:ph type="hdr" sz="quarter"/>
-          </p:nvPr>
-        </p:nvSpPr>
-        <p:spPr>
-          <a:xfrm>
-            <a:off x="0" y="0"/>
-            <a:ext cx="2971800" cy="458788"/>
-          </a:xfrm>
-          <a:prstGeom prst="rect">
-            <a:avLst/>
-          </a:prstGeom>
-        </p:spPr>
-        <p:txBody>
-          <a:bodyPr vert="horz" lIns="91440" tIns="45720" rIns="91440" bIns="45720" rtlCol="0"/>
-          <a:lstStyle>
-            <a:lvl1pPr algn="l">
-              <a:defRPr sz="1200"/>
-            </a:lvl1pPr>
-          </a:lstStyle>
-          <a:p>
-            <a:endParaRPr lang="en-US"/>
-          </a:p>
-        </p:txBody>
-      </p:sp>
-      <p:sp>
-        <p:nvSpPr>
-          <p:cNvPr id="3" name="Date Placeholder 2"/>
-          <p:cNvSpPr>
-            <a:spLocks noGrp="1"/>
-          </p:cNvSpPr>
-          <p:nvPr>
-            <p:ph type="dt" idx="1"/>
-          </p:nvPr>
-        </p:nvSpPr>
-        <p:spPr>
-          <a:xfrm>
-            <a:off x="3884613" y="0"/>
-            <a:ext cx="2971800" cy="458788"/>
-          </a:xfrm>
-          <a:prstGeom prst="rect">
-            <a:avLst/>
-          </a:prstGeom>
-        </p:spPr>
-        <p:txBody>
-          <a:bodyPr vert="horz" lIns="91440" tIns="45720" rIns="91440" bIns="45720" rtlCol="0"/>
-          <a:lstStyle>
-            <a:lvl1pPr algn="r">
-              <a:defRPr sz="1200"/>
-            </a:lvl1pPr>
-          </a:lstStyle>
-          <a:p>
-            <a:fld id="{5282F153-3F37-0F45-9E97-73ACFA13230C}" type="datetimeFigureOut">
-              <a:rPr lang="en-US"/>
-              <a:t>7/23/19</a:t>
-            </a:fld>
-            <a:endParaRPr lang="en-US"/>
-          </a:p>
-        </p:txBody>
-      </p:sp>
-      <p:sp>
-        <p:nvSpPr>
-          <p:cNvPr id="4" name="Slide Image Placeholder 3"/>
-          <p:cNvSpPr>
-            <a:spLocks noGrp="1" noRot="1" noChangeAspect="1"/>
-          </p:cNvSpPr>
-          <p:nvPr>
-            <p:ph type="sldImg" idx="2"/>
-          </p:nvPr>
-        </p:nvSpPr>
-        <p:spPr>
-          <a:xfrm>
-            <a:off x="685800" y="1143000"/>
-            <a:ext cx="5486400" cy="3086100"/>
-          </a:xfrm>
-          <a:prstGeom prst="rect">
-            <a:avLst/>
-          </a:prstGeom>
-          <a:noFill/>
-          <a:ln w="12700">
-            <a:solidFill>
-              <a:prstClr val="black"/>
-            </a:solidFill>
-          </a:ln>
-        </p:spPr>
-        <p:txBody>
-          <a:bodyPr vert="horz" lIns="91440" tIns="45720" rIns="91440" bIns="45720" rtlCol="0" anchor="ctr"/>
-          <a:lstStyle/>
-          <a:p>
-            <a:endParaRPr lang="en-US"/>
-          </a:p>
-        </p:txBody>
-      </p:sp>
-      <p:sp>
-        <p:nvSpPr>
-          <p:cNvPr id="5" name="Notes Placeholder 4"/>
-          <p:cNvSpPr>
-            <a:spLocks noGrp="1"/>
-          </p:cNvSpPr>
-          <p:nvPr>
-            <p:ph type="body" sz="quarter" idx="3"/>
-          </p:nvPr>
-        </p:nvSpPr>
-        <p:spPr>
-          <a:xfrm>
-            <a:off x="685800" y="4400550"/>
-            <a:ext cx="5486400" cy="3600450"/>
-          </a:xfrm>
-          <a:prstGeom prst="rect">
-            <a:avLst/>
-          </a:prstGeom>
-        </p:spPr>
-        <p:txBody>
-          <a:bodyPr vert="horz" lIns="91440" tIns="45720" rIns="91440" bIns="45720" rtlCol="0"/>
-          <a:lstStyle/>
-          <a:p>
-            <a:pPr lvl="0"/>
-            <a:r>
-              <a:rPr lang="en-US"/>
-              <a:t>Click to edit Master text styles</a:t>
-            </a:r>
-          </a:p>
-          <a:p>
-            <a:pPr lvl="1"/>
-            <a:r>
-              <a:rPr lang="en-US"/>
-              <a:t>Second level</a:t>
-            </a:r>
-          </a:p>
-          <a:p>
-            <a:pPr lvl="2"/>
-            <a:r>
-              <a:rPr lang="en-US"/>
-              <a:t>Third level</a:t>
-            </a:r>
-          </a:p>
-          <a:p>
-            <a:pPr lvl="3"/>
-            <a:r>
-              <a:rPr lang="en-US"/>
-              <a:t>Fourth level</a:t>
-            </a:r>
-          </a:p>
-          <a:p>
-            <a:pPr lvl="4"/>
-            <a:r>
-              <a:rPr lang="en-US"/>
-              <a:t>Fifth level</a:t>
-            </a:r>
-          </a:p>
-        </p:txBody>
-      </p:sp>
-      <p:sp>
-        <p:nvSpPr>
-          <p:cNvPr id="6" name="Footer Placeholder 5"/>
-          <p:cNvSpPr>
-            <a:spLocks noGrp="1"/>
-          </p:cNvSpPr>
-          <p:nvPr>
-            <p:ph type="ftr" sz="quarter" idx="4"/>
-          </p:nvPr>
-        </p:nvSpPr>
-        <p:spPr>
-          <a:xfrm>
-            <a:off x="0" y="8685213"/>
-            <a:ext cx="2971800" cy="458787"/>
-          </a:xfrm>
-          <a:prstGeom prst="rect">
-            <a:avLst/>
-          </a:prstGeom>
-        </p:spPr>
-        <p:txBody>
-          <a:bodyPr vert="horz" lIns="91440" tIns="45720" rIns="91440" bIns="45720" rtlCol="0" anchor="b"/>
-          <a:lstStyle>
-            <a:lvl1pPr algn="l">
-              <a:defRPr sz="1200"/>
-            </a:lvl1pPr>
-          </a:lstStyle>
-          <a:p>
-            <a:endParaRPr lang="en-US"/>
-          </a:p>
-        </p:txBody>
-      </p:sp>
-      <p:sp>
-        <p:nvSpPr>
-          <p:cNvPr id="7" name="Slide Number Placeholder 6"/>
-          <p:cNvSpPr>
-            <a:spLocks noGrp="1"/>
-          </p:cNvSpPr>
-          <p:nvPr>
-            <p:ph type="sldNum" sz="quarter" idx="5"/>
-          </p:nvPr>
-        </p:nvSpPr>
-        <p:spPr>
-          <a:xfrm>
-            <a:off x="3884613" y="8685213"/>
-            <a:ext cx="2971800" cy="458787"/>
-          </a:xfrm>
-          <a:prstGeom prst="rect">
-            <a:avLst/>
-          </a:prstGeom>
-        </p:spPr>
-        <p:txBody>
-          <a:bodyPr vert="horz" lIns="91440" tIns="45720" rIns="91440" bIns="45720" rtlCol="0" anchor="b"/>
-          <a:lstStyle>
-            <a:lvl1pPr algn="r">
-              <a:defRPr sz="1200"/>
-            </a:lvl1pPr>
-          </a:lstStyle>
-          <a:p>
-            <a:fld id="{CE5E9CC1-C706-0F49-92D6-E571CC5EEA8F}" type="slidenum">
-              <a:rPr lang="en-US"/>
-              <a:t>‹#›</a:t>
-            </a:fld>
-            <a:endParaRPr lang="en-US"/>
-          </a:p>
-        </p:txBody>
-      </p:sp>
     </p:spTree>
     <p:extLst>
       <p:ext uri="{BB962C8B-B14F-4D97-AF65-F5344CB8AC3E}">
-        <p14:creationId xmlns:p14="http://schemas.microsoft.com/office/powerpoint/2010/main" val="1024086991"/>
+        <p14:creationId xmlns:p14="http://schemas.microsoft.com/office/powerpoint/2010/main" val="3757309588"/>
       </p:ext>
     </p:extLst>
   </p:cSld>
@@ -517,7 +297,6 @@
               <a:rPr lang="en-US" dirty="0"/>
               <a:t>Open with ownership: this is our data - half of it is your check-ins. Invite correction up front.</a:t>
             </a:r>
-            <a:endParaRPr lang="en-US" dirty="0"/>
           </a:p>
         </p:txBody>
       </p:sp>
@@ -603,9 +382,8 @@
           <a:p>
             <a:r>
               <a:rPr lang="en-US" dirty="0"/>
-              <a:t>Live demo here - hand a phone around. 90 seconds, someone else's thumb.</a:t>
-            </a:r>
-            <a:endParaRPr lang="en-US" dirty="0"/>
+              <a:t>Frame validation as respect for their market knowledge, not homework.</a:t>
+            </a:r>
           </a:p>
         </p:txBody>
       </p:sp>
@@ -691,9 +469,8 @@
           <a:p>
             <a:r>
               <a:rPr lang="en-US" dirty="0"/>
-              <a:t>Frame validation as respect for their market knowledge, not homework.</a:t>
-            </a:r>
-            <a:endParaRPr lang="en-US" dirty="0"/>
+              <a:t>Hand out glossary.md printed. Ask: which of these do we use differently in real life?</a:t>
+            </a:r>
           </a:p>
         </p:txBody>
       </p:sp>
@@ -779,9 +556,8 @@
           <a:p>
             <a:r>
               <a:rPr lang="en-US" dirty="0"/>
-              <a:t>Hand out glossary.md printed. Ask: which of these do we use differently in real life?</a:t>
-            </a:r>
-            <a:endParaRPr lang="en-US" dirty="0"/>
+              <a:t>This slide is the credibility play: we name our own possible blind spot before anyone else does.</a:t>
+            </a:r>
           </a:p>
         </p:txBody>
       </p:sp>
@@ -867,9 +643,8 @@
           <a:p>
             <a:r>
               <a:rPr lang="en-US" dirty="0"/>
-              <a:t>This slide is the credibility play: we name our own possible blind spot before anyone else does.</a:t>
-            </a:r>
-            <a:endParaRPr lang="en-US" dirty="0"/>
+              <a:t>End on the invitation to correct the data - it converts skeptics into co-authors.</a:t>
+            </a:r>
           </a:p>
         </p:txBody>
       </p:sp>
@@ -891,94 +666,6 @@
             <a:fld id="{F7021451-1387-4CA6-816F-3879F97B5CBC}" type="slidenum">
               <a:rPr lang="en-US"/>
               <a:t>13</a:t>
-            </a:fld>
-            <a:endParaRPr lang="en-US"/>
-          </a:p>
-        </p:txBody>
-      </p:sp>
-    </p:spTree>
-    <p:extLst>
-      <p:ext uri="{BB962C8B-B14F-4D97-AF65-F5344CB8AC3E}">
-        <p14:creationId xmlns:p14="http://schemas.microsoft.com/office/powerpoint/2010/main" val="1024086991"/>
-      </p:ext>
-    </p:extLst>
-  </p:cSld>
-  <p:clrMapOvr>
-    <a:masterClrMapping/>
-  </p:clrMapOvr>
-</p:notes>
-</file>
-
-<file path=ppt/notesSlides/notesSlide14.xml><?xml version="1.0" encoding="utf-8"?>
-<p:notes xmlns:a="http://schemas.openxmlformats.org/drawingml/2006/main" xmlns:r="http://schemas.openxmlformats.org/officeDocument/2006/relationships" xmlns:p="http://schemas.openxmlformats.org/presentationml/2006/main">
-  <p:cSld>
-    <p:spTree>
-      <p:nvGrpSpPr>
-        <p:cNvPr id="1" name=""/>
-        <p:cNvGrpSpPr/>
-        <p:nvPr/>
-      </p:nvGrpSpPr>
-      <p:grpSpPr>
-        <a:xfrm>
-          <a:off x="0" y="0"/>
-          <a:ext cx="0" cy="0"/>
-          <a:chOff x="0" y="0"/>
-          <a:chExt cx="0" cy="0"/>
-        </a:xfrm>
-      </p:grpSpPr>
-      <p:sp>
-        <p:nvSpPr>
-          <p:cNvPr id="2" name="Slide Image Placeholder 1"/>
-          <p:cNvSpPr>
-            <a:spLocks noGrp="1" noRot="1" noChangeAspect="1"/>
-          </p:cNvSpPr>
-          <p:nvPr>
-            <p:ph type="sldImg"/>
-          </p:nvPr>
-        </p:nvSpPr>
-        <p:spPr/>
-      </p:sp>
-      <p:sp>
-        <p:nvSpPr>
-          <p:cNvPr id="3" name="Notes Placeholder 2"/>
-          <p:cNvSpPr>
-            <a:spLocks noGrp="1"/>
-          </p:cNvSpPr>
-          <p:nvPr>
-            <p:ph type="body" idx="1"/>
-          </p:nvPr>
-        </p:nvSpPr>
-        <p:spPr/>
-        <p:txBody>
-          <a:bodyPr/>
-          <a:lstStyle/>
-          <a:p>
-            <a:r>
-              <a:rPr lang="en-US" dirty="0"/>
-              <a:t>End on the invitation to correct the data - it converts skeptics into co-authors.</a:t>
-            </a:r>
-            <a:endParaRPr lang="en-US" dirty="0"/>
-          </a:p>
-        </p:txBody>
-      </p:sp>
-      <p:sp>
-        <p:nvSpPr>
-          <p:cNvPr id="4" name="Slide Number Placeholder 3"/>
-          <p:cNvSpPr>
-            <a:spLocks noGrp="1"/>
-          </p:cNvSpPr>
-          <p:nvPr>
-            <p:ph type="sldNum" sz="quarter" idx="10"/>
-          </p:nvPr>
-        </p:nvSpPr>
-        <p:spPr/>
-        <p:txBody>
-          <a:bodyPr/>
-          <a:lstStyle/>
-          <a:p>
-            <a:fld id="{F7021451-1387-4CA6-816F-3879F97B5CBC}" type="slidenum">
-              <a:rPr lang="en-US"/>
-              <a:t>14</a:t>
             </a:fld>
             <a:endParaRPr lang="en-US"/>
           </a:p>
@@ -1045,7 +732,6 @@
               <a:rPr lang="en-US" dirty="0"/>
               <a:t>Kill the fear first: this is re-aiming, not more hours.</a:t>
             </a:r>
-            <a:endParaRPr lang="en-US" dirty="0"/>
           </a:p>
         </p:txBody>
       </p:sp>
@@ -1133,7 +819,6 @@
               <a:rPr lang="en-US" dirty="0"/>
               <a:t>Frame the variance as method, not talent. The messaging slides ARE the method.</a:t>
             </a:r>
-            <a:endParaRPr lang="en-US" dirty="0"/>
           </a:p>
         </p:txBody>
       </p:sp>
@@ -1221,7 +906,6 @@
               <a:rPr lang="en-US" dirty="0"/>
               <a:t>This is the shared vocabulary slide - point at the glossary handout for the rest.</a:t>
             </a:r>
-            <a:endParaRPr lang="en-US" dirty="0"/>
           </a:p>
         </p:txBody>
       </p:sp>
@@ -1309,7 +993,6 @@
               <a:rPr lang="en-US" dirty="0"/>
               <a:t>Teach the skeleton once; the next slides are the per-type content.</a:t>
             </a:r>
-            <a:endParaRPr lang="en-US" dirty="0"/>
           </a:p>
         </p:txBody>
       </p:sp>
@@ -1397,7 +1080,6 @@
               <a:rPr lang="en-US" dirty="0"/>
               <a:t>Roleplay one of each Thursday. The lapsed opener is the one people get wrong - they explain instead of owning.</a:t>
             </a:r>
-            <a:endParaRPr lang="en-US" dirty="0"/>
           </a:p>
         </p:txBody>
       </p:sp>
@@ -1485,7 +1167,6 @@
               <a:rPr lang="en-US" dirty="0"/>
               <a:t>The one-spine OPEN is the money question - a bad first experience is why they never sent a second.</a:t>
             </a:r>
-            <a:endParaRPr lang="en-US" dirty="0"/>
           </a:p>
         </p:txBody>
       </p:sp>
@@ -1571,9 +1252,8 @@
           <a:p>
             <a:r>
               <a:rPr lang="en-US" dirty="0"/>
-              <a:t>Frame: promote/hold/park. The note after each touch is what powers the 90-day read - that is the answer to how we assess vibes.</a:t>
-            </a:r>
-            <a:endParaRPr lang="en-US" dirty="0"/>
+              <a:t>Give the team explicit permission to drop - guilt-visiting dead accounts is where field time goes to die.</a:t>
+            </a:r>
           </a:p>
         </p:txBody>
       </p:sp>
@@ -1659,9 +1339,8 @@
           <a:p>
             <a:r>
               <a:rPr lang="en-US" dirty="0"/>
-              <a:t>The attorney rules protect the team. Say the never-list out loud once, seriously, then move on.</a:t>
-            </a:r>
-            <a:endParaRPr lang="en-US" dirty="0"/>
+              <a:t>Live demo here - hand a phone around. 90 seconds, someone else's thumb.</a:t>
+            </a:r>
           </a:p>
         </p:txBody>
       </p:sp>
@@ -1734,6 +1413,11 @@
 <file path=ppt/slideMasters/slideMaster1.xml><?xml version="1.0" encoding="utf-8"?>
 <p:sldMaster xmlns:a="http://schemas.openxmlformats.org/drawingml/2006/main" xmlns:r="http://schemas.openxmlformats.org/officeDocument/2006/relationships" xmlns:p="http://schemas.openxmlformats.org/presentationml/2006/main">
   <p:cSld>
+    <p:bg>
+      <p:bgRef idx="1001">
+        <a:schemeClr val="bg1"/>
+      </p:bgRef>
+    </p:bg>
     <p:spTree>
       <p:nvGrpSpPr>
         <p:cNvPr id="1" name=""/>
@@ -2016,6 +1700,7 @@
         <a:solidFill>
           <a:srgbClr val="14322C"/>
         </a:solidFill>
+        <a:effectLst/>
       </p:bgPr>
     </p:bg>
     <p:spTree>
@@ -2053,7 +1738,7 @@
           <a:bodyPr wrap="square" rtlCol="0" anchor="ctr"/>
           <a:lstStyle/>
           <a:p>
-            <a:pPr indent="0" marL="0">
+            <a:pPr marL="0" indent="0">
               <a:buNone/>
             </a:pPr>
             <a:r>
@@ -2092,7 +1777,7 @@
           <a:bodyPr wrap="square" rtlCol="0" anchor="ctr"/>
           <a:lstStyle/>
           <a:p>
-            <a:pPr indent="0" marL="0">
+            <a:pPr marL="0" indent="0">
               <a:buNone/>
             </a:pPr>
             <a:r>
@@ -2131,7 +1816,7 @@
           <a:bodyPr wrap="square" rtlCol="0" anchor="ctr"/>
           <a:lstStyle/>
           <a:p>
-            <a:pPr indent="0" marL="0">
+            <a:pPr marL="0" indent="0">
               <a:buNone/>
             </a:pPr>
             <a:r>
@@ -2146,45 +1831,6 @@
               <a:t>Presented by Kristen · July 22, 2026</a:t>
             </a:r>
             <a:endParaRPr lang="en-US" sz="1400" dirty="0"/>
-          </a:p>
-        </p:txBody>
-      </p:sp>
-      <p:sp>
-        <p:nvSpPr>
-          <p:cNvPr id="5" name="Text 3"/>
-          <p:cNvSpPr/>
-          <p:nvPr/>
-        </p:nvSpPr>
-        <p:spPr>
-          <a:xfrm>
-            <a:off x="731520" y="5852160"/>
-            <a:ext cx="10698480" cy="640080"/>
-          </a:xfrm>
-          <a:prstGeom prst="rect">
-            <a:avLst/>
-          </a:prstGeom>
-          <a:noFill/>
-          <a:ln/>
-        </p:spPr>
-        <p:txBody>
-          <a:bodyPr wrap="square" rtlCol="0" anchor="ctr"/>
-          <a:lstStyle/>
-          <a:p>
-            <a:pPr indent="0" marL="0">
-              <a:buNone/>
-            </a:pPr>
-            <a:r>
-              <a:rPr lang="en-US" sz="1150" dirty="0">
-                <a:solidFill>
-                  <a:srgbClr val="9DBBB4"/>
-                </a:solidFill>
-                <a:latin typeface="Calibri" pitchFamily="34" charset="0"/>
-                <a:ea typeface="Calibri" pitchFamily="34" charset="-122"/>
-                <a:cs typeface="Calibri" pitchFamily="34" charset="-120"/>
-              </a:rPr>
-              <a:t>Built from OUR OWN visit logs (MMC, through Jul 16) and the practice's referral export (through Jul 10). Every number here is checkable — and if something reads wrong to you, say so. That's part of the job this week.</a:t>
-            </a:r>
-            <a:endParaRPr lang="en-US" sz="1150" dirty="0"/>
           </a:p>
         </p:txBody>
       </p:sp>
@@ -2197,1722 +1843,6 @@
 </file>
 
 <file path=ppt/slides/slide10.xml><?xml version="1.0" encoding="utf-8"?>
-<p:sld xmlns:a="http://schemas.openxmlformats.org/drawingml/2006/main" xmlns:r="http://schemas.openxmlformats.org/officeDocument/2006/relationships" xmlns:p="http://schemas.openxmlformats.org/presentationml/2006/main">
-  <p:cSld name="Slide 10">
-    <p:spTree>
-      <p:nvGrpSpPr>
-        <p:cNvPr id="1" name=""/>
-        <p:cNvGrpSpPr/>
-        <p:nvPr/>
-      </p:nvGrpSpPr>
-      <p:grpSpPr>
-        <a:xfrm>
-          <a:off x="0" y="0"/>
-          <a:ext cx="0" cy="0"/>
-          <a:chOff x="0" y="0"/>
-          <a:chExt cx="0" cy="0"/>
-        </a:xfrm>
-      </p:grpSpPr>
-      <p:sp>
-        <p:nvSpPr>
-          <p:cNvPr id="2" name="Text 0"/>
-          <p:cNvSpPr/>
-          <p:nvPr/>
-        </p:nvSpPr>
-        <p:spPr>
-          <a:xfrm>
-            <a:off x="502920" y="256032"/>
-            <a:ext cx="11155680" cy="594360"/>
-          </a:xfrm>
-          <a:prstGeom prst="rect">
-            <a:avLst/>
-          </a:prstGeom>
-          <a:noFill/>
-          <a:ln/>
-        </p:spPr>
-        <p:txBody>
-          <a:bodyPr wrap="square" rtlCol="0" anchor="ctr"/>
-          <a:lstStyle/>
-          <a:p>
-            <a:pPr indent="0" marL="0">
-              <a:buNone/>
-            </a:pPr>
-            <a:r>
-              <a:rPr lang="en-US" sz="2900" b="1" dirty="0">
-                <a:solidFill>
-                  <a:srgbClr val="14322C"/>
-                </a:solidFill>
-                <a:latin typeface="Cambria" pitchFamily="34" charset="0"/>
-                <a:ea typeface="Cambria" pitchFamily="34" charset="-122"/>
-                <a:cs typeface="Cambria" pitchFamily="34" charset="-120"/>
-              </a:rPr>
-              <a:t>Your week and your tool</a:t>
-            </a:r>
-            <a:endParaRPr lang="en-US" sz="2900" dirty="0"/>
-          </a:p>
-        </p:txBody>
-      </p:sp>
-      <p:sp>
-        <p:nvSpPr>
-          <p:cNvPr id="3" name="Text 1"/>
-          <p:cNvSpPr/>
-          <p:nvPr/>
-        </p:nvSpPr>
-        <p:spPr>
-          <a:xfrm>
-            <a:off x="502920" y="841248"/>
-            <a:ext cx="11155680" cy="320040"/>
-          </a:xfrm>
-          <a:prstGeom prst="rect">
-            <a:avLst/>
-          </a:prstGeom>
-          <a:noFill/>
-          <a:ln/>
-        </p:spPr>
-        <p:txBody>
-          <a:bodyPr wrap="square" rtlCol="0" anchor="ctr"/>
-          <a:lstStyle/>
-          <a:p>
-            <a:pPr indent="0" marL="0">
-              <a:buNone/>
-            </a:pPr>
-            <a:r>
-              <a:rPr lang="en-US" sz="1300" dirty="0">
-                <a:solidFill>
-                  <a:srgbClr val="5E7773"/>
-                </a:solidFill>
-                <a:latin typeface="Calibri" pitchFamily="34" charset="0"/>
-                <a:ea typeface="Calibri" pitchFamily="34" charset="-122"/>
-                <a:cs typeface="Calibri" pitchFamily="34" charset="-120"/>
-              </a:rPr>
-              <a:t>Everything above is pre-loaded per stop — nobody memorizes anything</a:t>
-            </a:r>
-            <a:endParaRPr lang="en-US" sz="1300" dirty="0"/>
-          </a:p>
-        </p:txBody>
-      </p:sp>
-      <p:sp>
-        <p:nvSpPr>
-          <p:cNvPr id="4" name="Shape 2"/>
-          <p:cNvSpPr/>
-          <p:nvPr/>
-        </p:nvSpPr>
-        <p:spPr>
-          <a:xfrm>
-            <a:off x="548640" y="1417320"/>
-            <a:ext cx="402336" cy="402336"/>
-          </a:xfrm>
-          <a:prstGeom prst="ellipse">
-            <a:avLst/>
-          </a:prstGeom>
-          <a:solidFill>
-            <a:srgbClr val="49A698"/>
-          </a:solidFill>
-          <a:ln/>
-        </p:spPr>
-      </p:sp>
-      <p:sp>
-        <p:nvSpPr>
-          <p:cNvPr id="5" name="Text 3"/>
-          <p:cNvSpPr/>
-          <p:nvPr/>
-        </p:nvSpPr>
-        <p:spPr>
-          <a:xfrm>
-            <a:off x="548640" y="1417320"/>
-            <a:ext cx="402336" cy="402336"/>
-          </a:xfrm>
-          <a:prstGeom prst="rect">
-            <a:avLst/>
-          </a:prstGeom>
-          <a:noFill/>
-          <a:ln/>
-        </p:spPr>
-        <p:txBody>
-          <a:bodyPr wrap="square" lIns="0" tIns="0" rIns="0" bIns="0" rtlCol="0" anchor="ctr"/>
-          <a:lstStyle/>
-          <a:p>
-            <a:pPr algn="ctr" indent="0" marL="0">
-              <a:buNone/>
-            </a:pPr>
-            <a:r>
-              <a:rPr lang="en-US" sz="1400" b="1" dirty="0">
-                <a:solidFill>
-                  <a:srgbClr val="FFFFFF"/>
-                </a:solidFill>
-                <a:latin typeface="Calibri" pitchFamily="34" charset="0"/>
-                <a:ea typeface="Calibri" pitchFamily="34" charset="-122"/>
-                <a:cs typeface="Calibri" pitchFamily="34" charset="-120"/>
-              </a:rPr>
-              <a:t>1</a:t>
-            </a:r>
-            <a:endParaRPr lang="en-US" sz="1400" dirty="0"/>
-          </a:p>
-        </p:txBody>
-      </p:sp>
-      <p:sp>
-        <p:nvSpPr>
-          <p:cNvPr id="6" name="Text 4"/>
-          <p:cNvSpPr/>
-          <p:nvPr/>
-        </p:nvSpPr>
-        <p:spPr>
-          <a:xfrm>
-            <a:off x="1143000" y="1399032"/>
-            <a:ext cx="10241280" cy="548640"/>
-          </a:xfrm>
-          <a:prstGeom prst="rect">
-            <a:avLst/>
-          </a:prstGeom>
-          <a:noFill/>
-          <a:ln/>
-        </p:spPr>
-        <p:txBody>
-          <a:bodyPr wrap="square" rtlCol="0" anchor="ctr"/>
-          <a:lstStyle/>
-          <a:p>
-            <a:pPr indent="0" marL="0">
-              <a:buNone/>
-            </a:pPr>
-            <a:r>
-              <a:rPr lang="en-US" sz="1250" dirty="0">
-                <a:solidFill>
-                  <a:srgbClr val="14322C"/>
-                </a:solidFill>
-                <a:latin typeface="Calibri" pitchFamily="34" charset="0"/>
-                <a:ea typeface="Calibri" pitchFamily="34" charset="-122"/>
-                <a:cs typeface="Calibri" pitchFamily="34" charset="-120"/>
-              </a:rPr>
-              <a:t>Open the app — your name, this week. Days come ranked.</a:t>
-            </a:r>
-            <a:endParaRPr lang="en-US" sz="1250" dirty="0"/>
-          </a:p>
-        </p:txBody>
-      </p:sp>
-      <p:sp>
-        <p:nvSpPr>
-          <p:cNvPr id="7" name="Shape 5"/>
-          <p:cNvSpPr/>
-          <p:nvPr/>
-        </p:nvSpPr>
-        <p:spPr>
-          <a:xfrm>
-            <a:off x="548640" y="1984248"/>
-            <a:ext cx="402336" cy="402336"/>
-          </a:xfrm>
-          <a:prstGeom prst="ellipse">
-            <a:avLst/>
-          </a:prstGeom>
-          <a:solidFill>
-            <a:srgbClr val="49A698"/>
-          </a:solidFill>
-          <a:ln/>
-        </p:spPr>
-      </p:sp>
-      <p:sp>
-        <p:nvSpPr>
-          <p:cNvPr id="8" name="Text 6"/>
-          <p:cNvSpPr/>
-          <p:nvPr/>
-        </p:nvSpPr>
-        <p:spPr>
-          <a:xfrm>
-            <a:off x="548640" y="1984248"/>
-            <a:ext cx="402336" cy="402336"/>
-          </a:xfrm>
-          <a:prstGeom prst="rect">
-            <a:avLst/>
-          </a:prstGeom>
-          <a:noFill/>
-          <a:ln/>
-        </p:spPr>
-        <p:txBody>
-          <a:bodyPr wrap="square" lIns="0" tIns="0" rIns="0" bIns="0" rtlCol="0" anchor="ctr"/>
-          <a:lstStyle/>
-          <a:p>
-            <a:pPr algn="ctr" indent="0" marL="0">
-              <a:buNone/>
-            </a:pPr>
-            <a:r>
-              <a:rPr lang="en-US" sz="1400" b="1" dirty="0">
-                <a:solidFill>
-                  <a:srgbClr val="FFFFFF"/>
-                </a:solidFill>
-                <a:latin typeface="Calibri" pitchFamily="34" charset="0"/>
-                <a:ea typeface="Calibri" pitchFamily="34" charset="-122"/>
-                <a:cs typeface="Calibri" pitchFamily="34" charset="-120"/>
-              </a:rPr>
-              <a:t>2</a:t>
-            </a:r>
-            <a:endParaRPr lang="en-US" sz="1400" dirty="0"/>
-          </a:p>
-        </p:txBody>
-      </p:sp>
-      <p:sp>
-        <p:nvSpPr>
-          <p:cNvPr id="9" name="Text 7"/>
-          <p:cNvSpPr/>
-          <p:nvPr/>
-        </p:nvSpPr>
-        <p:spPr>
-          <a:xfrm>
-            <a:off x="1143000" y="1965960"/>
-            <a:ext cx="10241280" cy="548640"/>
-          </a:xfrm>
-          <a:prstGeom prst="rect">
-            <a:avLst/>
-          </a:prstGeom>
-          <a:noFill/>
-          <a:ln/>
-        </p:spPr>
-        <p:txBody>
-          <a:bodyPr wrap="square" rtlCol="0" anchor="ctr"/>
-          <a:lstStyle/>
-          <a:p>
-            <a:pPr indent="0" marL="0">
-              <a:buNone/>
-            </a:pPr>
-            <a:r>
-              <a:rPr lang="en-US" sz="1250" dirty="0">
-                <a:solidFill>
-                  <a:srgbClr val="14322C"/>
-                </a:solidFill>
-                <a:latin typeface="Calibri" pitchFamily="34" charset="0"/>
-                <a:ea typeface="Calibri" pitchFamily="34" charset="-122"/>
-                <a:cs typeface="Calibri" pitchFamily="34" charset="-120"/>
-              </a:rPr>
-              <a:t>▶ Next stop — turn-by-turn; the stop card shows the message, the payer chip, who refers.</a:t>
-            </a:r>
-            <a:endParaRPr lang="en-US" sz="1250" dirty="0"/>
-          </a:p>
-        </p:txBody>
-      </p:sp>
-      <p:sp>
-        <p:nvSpPr>
-          <p:cNvPr id="10" name="Shape 8"/>
-          <p:cNvSpPr/>
-          <p:nvPr/>
-        </p:nvSpPr>
-        <p:spPr>
-          <a:xfrm>
-            <a:off x="548640" y="2551176"/>
-            <a:ext cx="402336" cy="402336"/>
-          </a:xfrm>
-          <a:prstGeom prst="ellipse">
-            <a:avLst/>
-          </a:prstGeom>
-          <a:solidFill>
-            <a:srgbClr val="49A698"/>
-          </a:solidFill>
-          <a:ln/>
-        </p:spPr>
-      </p:sp>
-      <p:sp>
-        <p:nvSpPr>
-          <p:cNvPr id="11" name="Text 9"/>
-          <p:cNvSpPr/>
-          <p:nvPr/>
-        </p:nvSpPr>
-        <p:spPr>
-          <a:xfrm>
-            <a:off x="548640" y="2551176"/>
-            <a:ext cx="402336" cy="402336"/>
-          </a:xfrm>
-          <a:prstGeom prst="rect">
-            <a:avLst/>
-          </a:prstGeom>
-          <a:noFill/>
-          <a:ln/>
-        </p:spPr>
-        <p:txBody>
-          <a:bodyPr wrap="square" lIns="0" tIns="0" rIns="0" bIns="0" rtlCol="0" anchor="ctr"/>
-          <a:lstStyle/>
-          <a:p>
-            <a:pPr algn="ctr" indent="0" marL="0">
-              <a:buNone/>
-            </a:pPr>
-            <a:r>
-              <a:rPr lang="en-US" sz="1400" b="1" dirty="0">
-                <a:solidFill>
-                  <a:srgbClr val="FFFFFF"/>
-                </a:solidFill>
-                <a:latin typeface="Calibri" pitchFamily="34" charset="0"/>
-                <a:ea typeface="Calibri" pitchFamily="34" charset="-122"/>
-                <a:cs typeface="Calibri" pitchFamily="34" charset="-120"/>
-              </a:rPr>
-              <a:t>3</a:t>
-            </a:r>
-            <a:endParaRPr lang="en-US" sz="1400" dirty="0"/>
-          </a:p>
-        </p:txBody>
-      </p:sp>
-      <p:sp>
-        <p:nvSpPr>
-          <p:cNvPr id="12" name="Text 10"/>
-          <p:cNvSpPr/>
-          <p:nvPr/>
-        </p:nvSpPr>
-        <p:spPr>
-          <a:xfrm>
-            <a:off x="1143000" y="2532888"/>
-            <a:ext cx="10241280" cy="548640"/>
-          </a:xfrm>
-          <a:prstGeom prst="rect">
-            <a:avLst/>
-          </a:prstGeom>
-          <a:noFill/>
-          <a:ln/>
-        </p:spPr>
-        <p:txBody>
-          <a:bodyPr wrap="square" rtlCol="0" anchor="ctr"/>
-          <a:lstStyle/>
-          <a:p>
-            <a:pPr indent="0" marL="0">
-              <a:buNone/>
-            </a:pPr>
-            <a:r>
-              <a:rPr lang="en-US" sz="1250" dirty="0">
-                <a:solidFill>
-                  <a:srgbClr val="14322C"/>
-                </a:solidFill>
-                <a:latin typeface="Calibri" pitchFamily="34" charset="0"/>
-                <a:ea typeface="Calibri" pitchFamily="34" charset="-122"/>
-                <a:cs typeface="Calibri" pitchFamily="34" charset="-120"/>
-              </a:rPr>
-              <a:t>Check in + one business-only note.</a:t>
-            </a:r>
-            <a:endParaRPr lang="en-US" sz="1250" dirty="0"/>
-          </a:p>
-        </p:txBody>
-      </p:sp>
-      <p:sp>
-        <p:nvSpPr>
-          <p:cNvPr id="13" name="Shape 11"/>
-          <p:cNvSpPr/>
-          <p:nvPr/>
-        </p:nvSpPr>
-        <p:spPr>
-          <a:xfrm>
-            <a:off x="548640" y="3118104"/>
-            <a:ext cx="402336" cy="402336"/>
-          </a:xfrm>
-          <a:prstGeom prst="ellipse">
-            <a:avLst/>
-          </a:prstGeom>
-          <a:solidFill>
-            <a:srgbClr val="49A698"/>
-          </a:solidFill>
-          <a:ln/>
-        </p:spPr>
-      </p:sp>
-      <p:sp>
-        <p:nvSpPr>
-          <p:cNvPr id="14" name="Text 12"/>
-          <p:cNvSpPr/>
-          <p:nvPr/>
-        </p:nvSpPr>
-        <p:spPr>
-          <a:xfrm>
-            <a:off x="548640" y="3118104"/>
-            <a:ext cx="402336" cy="402336"/>
-          </a:xfrm>
-          <a:prstGeom prst="rect">
-            <a:avLst/>
-          </a:prstGeom>
-          <a:noFill/>
-          <a:ln/>
-        </p:spPr>
-        <p:txBody>
-          <a:bodyPr wrap="square" lIns="0" tIns="0" rIns="0" bIns="0" rtlCol="0" anchor="ctr"/>
-          <a:lstStyle/>
-          <a:p>
-            <a:pPr algn="ctr" indent="0" marL="0">
-              <a:buNone/>
-            </a:pPr>
-            <a:r>
-              <a:rPr lang="en-US" sz="1400" b="1" dirty="0">
-                <a:solidFill>
-                  <a:srgbClr val="FFFFFF"/>
-                </a:solidFill>
-                <a:latin typeface="Calibri" pitchFamily="34" charset="0"/>
-                <a:ea typeface="Calibri" pitchFamily="34" charset="-122"/>
-                <a:cs typeface="Calibri" pitchFamily="34" charset="-120"/>
-              </a:rPr>
-              <a:t>4</a:t>
-            </a:r>
-            <a:endParaRPr lang="en-US" sz="1400" dirty="0"/>
-          </a:p>
-        </p:txBody>
-      </p:sp>
-      <p:sp>
-        <p:nvSpPr>
-          <p:cNvPr id="15" name="Text 13"/>
-          <p:cNvSpPr/>
-          <p:nvPr/>
-        </p:nvSpPr>
-        <p:spPr>
-          <a:xfrm>
-            <a:off x="1143000" y="3099816"/>
-            <a:ext cx="10241280" cy="548640"/>
-          </a:xfrm>
-          <a:prstGeom prst="rect">
-            <a:avLst/>
-          </a:prstGeom>
-          <a:noFill/>
-          <a:ln/>
-        </p:spPr>
-        <p:txBody>
-          <a:bodyPr wrap="square" rtlCol="0" anchor="ctr"/>
-          <a:lstStyle/>
-          <a:p>
-            <a:pPr indent="0" marL="0">
-              <a:buNone/>
-            </a:pPr>
-            <a:r>
-              <a:rPr lang="en-US" sz="1250" dirty="0">
-                <a:solidFill>
-                  <a:srgbClr val="14322C"/>
-                </a:solidFill>
-                <a:latin typeface="Calibri" pitchFamily="34" charset="0"/>
-                <a:ea typeface="Calibri" pitchFamily="34" charset="-122"/>
-                <a:cs typeface="Calibri" pitchFamily="34" charset="-120"/>
-              </a:rPr>
-              <a:t>Friday: Export log → send to Joe (feeds the scorecard).</a:t>
-            </a:r>
-            <a:endParaRPr lang="en-US" sz="1250" dirty="0"/>
-          </a:p>
-        </p:txBody>
-      </p:sp>
-      <p:sp>
-        <p:nvSpPr>
-          <p:cNvPr id="16" name="Shape 14"/>
-          <p:cNvSpPr/>
-          <p:nvPr/>
-        </p:nvSpPr>
-        <p:spPr>
-          <a:xfrm>
-            <a:off x="548640" y="3685032"/>
-            <a:ext cx="402336" cy="402336"/>
-          </a:xfrm>
-          <a:prstGeom prst="ellipse">
-            <a:avLst/>
-          </a:prstGeom>
-          <a:solidFill>
-            <a:srgbClr val="49A698"/>
-          </a:solidFill>
-          <a:ln/>
-        </p:spPr>
-      </p:sp>
-      <p:sp>
-        <p:nvSpPr>
-          <p:cNvPr id="17" name="Text 15"/>
-          <p:cNvSpPr/>
-          <p:nvPr/>
-        </p:nvSpPr>
-        <p:spPr>
-          <a:xfrm>
-            <a:off x="548640" y="3685032"/>
-            <a:ext cx="402336" cy="402336"/>
-          </a:xfrm>
-          <a:prstGeom prst="rect">
-            <a:avLst/>
-          </a:prstGeom>
-          <a:noFill/>
-          <a:ln/>
-        </p:spPr>
-        <p:txBody>
-          <a:bodyPr wrap="square" lIns="0" tIns="0" rIns="0" bIns="0" rtlCol="0" anchor="ctr"/>
-          <a:lstStyle/>
-          <a:p>
-            <a:pPr algn="ctr" indent="0" marL="0">
-              <a:buNone/>
-            </a:pPr>
-            <a:r>
-              <a:rPr lang="en-US" sz="1400" b="1" dirty="0">
-                <a:solidFill>
-                  <a:srgbClr val="FFFFFF"/>
-                </a:solidFill>
-                <a:latin typeface="Calibri" pitchFamily="34" charset="0"/>
-                <a:ea typeface="Calibri" pitchFamily="34" charset="-122"/>
-                <a:cs typeface="Calibri" pitchFamily="34" charset="-120"/>
-              </a:rPr>
-              <a:t>5</a:t>
-            </a:r>
-            <a:endParaRPr lang="en-US" sz="1400" dirty="0"/>
-          </a:p>
-        </p:txBody>
-      </p:sp>
-      <p:sp>
-        <p:nvSpPr>
-          <p:cNvPr id="18" name="Text 16"/>
-          <p:cNvSpPr/>
-          <p:nvPr/>
-        </p:nvSpPr>
-        <p:spPr>
-          <a:xfrm>
-            <a:off x="1143000" y="3666744"/>
-            <a:ext cx="10241280" cy="548640"/>
-          </a:xfrm>
-          <a:prstGeom prst="rect">
-            <a:avLst/>
-          </a:prstGeom>
-          <a:noFill/>
-          <a:ln/>
-        </p:spPr>
-        <p:txBody>
-          <a:bodyPr wrap="square" rtlCol="0" anchor="ctr"/>
-          <a:lstStyle/>
-          <a:p>
-            <a:pPr indent="0" marL="0">
-              <a:buNone/>
-            </a:pPr>
-            <a:r>
-              <a:rPr lang="en-US" sz="1250" dirty="0">
-                <a:solidFill>
-                  <a:srgbClr val="14322C"/>
-                </a:solidFill>
-                <a:latin typeface="Calibri" pitchFamily="34" charset="0"/>
-                <a:ea typeface="Calibri" pitchFamily="34" charset="-122"/>
-                <a:cs typeface="Calibri" pitchFamily="34" charset="-120"/>
-              </a:rPr>
-              <a:t>Monday: Protect Radar together — lapses at zero is the win.</a:t>
-            </a:r>
-            <a:endParaRPr lang="en-US" sz="1250" dirty="0"/>
-          </a:p>
-        </p:txBody>
-      </p:sp>
-      <p:graphicFrame>
-        <p:nvGraphicFramePr>
-          <p:cNvPr id="11" name="Table 0"/>
-          <p:cNvGraphicFramePr>
-            <a:graphicFrameLocks noGrp="1"/>
-          </p:cNvGraphicFramePr>
-          <p:nvPr>
-            <p:extLst>
-              <p:ext uri="{D42A27DB-BD31-4B8C-83A1-F6EECF244321}">
-                <p14:modId xmlns:p14="http://schemas.microsoft.com/office/powerpoint/2010/main" val="1579011935"/>
-              </p:ext>
-            </p:extLst>
-          </p:nvPr>
-        </p:nvGraphicFramePr>
-        <p:xfrm>
-          <a:off x="502920" y="4480560"/>
-          <a:ext cx="11155680" cy="914400"/>
-        </p:xfrm>
-        <a:graphic>
-          <a:graphicData uri="http://schemas.openxmlformats.org/drawingml/2006/table">
-            <a:tbl>
-              <a:tblPr/>
-              <a:tblGrid>
-                <a:gridCol w="1463040"/>
-                <a:gridCol w="9692640"/>
-              </a:tblGrid>
-              <a:tr h="420624">
-                <a:tc>
-                  <a:txBody>
-                    <a:bodyPr/>
-                    <a:lstStyle/>
-                    <a:p>
-                      <a:pPr indent="0" marL="0">
-                        <a:buNone/>
-                      </a:pPr>
-                      <a:r>
-                        <a:rPr lang="en-US" sz="1200" b="1" dirty="0">
-                          <a:solidFill>
-                            <a:srgbClr val="FFFFFF"/>
-                          </a:solidFill>
-                          <a:latin typeface="Calibri" pitchFamily="34" charset="0"/>
-                          <a:ea typeface="Calibri" pitchFamily="34" charset="-122"/>
-                          <a:cs typeface="Calibri" pitchFamily="34" charset="-120"/>
-                        </a:rPr>
-                        <a:t>PL</a:t>
-                      </a:r>
-                      <a:endParaRPr lang="en-US" sz="1200" dirty="0">
-                        <a:latin typeface="Calibri" charset="0"/>
-                        <a:ea typeface="Calibri" charset="0"/>
-                        <a:cs typeface="Calibri" charset="0"/>
-                      </a:endParaRPr>
-                    </a:p>
-                  </a:txBody>
-                  <a:tcPr marL="45720" marR="45720" marT="45720" marB="45720" anchor="ctr">
-                    <a:lnL w="6350" cap="flat" cmpd="sng" algn="ctr">
-                      <a:solidFill>
-                        <a:srgbClr val="DCE7E3"/>
-                      </a:solidFill>
-                      <a:prstDash val="solid"/>
-                      <a:round/>
-                      <a:headEnd type="none" w="med" len="med"/>
-                      <a:tailEnd type="none" w="med" len="med"/>
-                    </a:lnL>
-                    <a:lnR w="6350" cap="flat" cmpd="sng" algn="ctr">
-                      <a:solidFill>
-                        <a:srgbClr val="DCE7E3"/>
-                      </a:solidFill>
-                      <a:prstDash val="solid"/>
-                      <a:round/>
-                      <a:headEnd type="none" w="med" len="med"/>
-                      <a:tailEnd type="none" w="med" len="med"/>
-                    </a:lnR>
-                    <a:lnT w="6350" cap="flat" cmpd="sng" algn="ctr">
-                      <a:solidFill>
-                        <a:srgbClr val="DCE7E3"/>
-                      </a:solidFill>
-                      <a:prstDash val="solid"/>
-                      <a:round/>
-                      <a:headEnd type="none" w="med" len="med"/>
-                      <a:tailEnd type="none" w="med" len="med"/>
-                    </a:lnT>
-                    <a:lnB w="6350" cap="flat" cmpd="sng" algn="ctr">
-                      <a:solidFill>
-                        <a:srgbClr val="DCE7E3"/>
-                      </a:solidFill>
-                      <a:prstDash val="solid"/>
-                      <a:round/>
-                      <a:headEnd type="none" w="med" len="med"/>
-                      <a:tailEnd type="none" w="med" len="med"/>
-                    </a:lnB>
-                    <a:solidFill>
-                      <a:srgbClr val="1F4E4A"/>
-                    </a:solidFill>
-                  </a:tcPr>
-                </a:tc>
-                <a:tc>
-                  <a:txBody>
-                    <a:bodyPr/>
-                    <a:lstStyle/>
-                    <a:p>
-                      <a:pPr indent="0" marL="0">
-                        <a:buNone/>
-                      </a:pPr>
-                      <a:r>
-                        <a:rPr lang="en-US" sz="1200" b="1" dirty="0">
-                          <a:solidFill>
-                            <a:srgbClr val="FFFFFF"/>
-                          </a:solidFill>
-                          <a:latin typeface="Calibri" pitchFamily="34" charset="0"/>
-                          <a:ea typeface="Calibri" pitchFamily="34" charset="-122"/>
-                          <a:cs typeface="Calibri" pitchFamily="34" charset="-120"/>
-                        </a:rPr>
-                        <a:t>This week (W1, Jul 22–25)</a:t>
-                      </a:r>
-                      <a:endParaRPr lang="en-US" sz="1200" dirty="0">
-                        <a:latin typeface="Calibri" charset="0"/>
-                        <a:ea typeface="Calibri" charset="0"/>
-                        <a:cs typeface="Calibri" charset="0"/>
-                      </a:endParaRPr>
-                    </a:p>
-                  </a:txBody>
-                  <a:tcPr marL="45720" marR="45720" marT="45720" marB="45720" anchor="ctr">
-                    <a:lnL w="6350" cap="flat" cmpd="sng" algn="ctr">
-                      <a:solidFill>
-                        <a:srgbClr val="DCE7E3"/>
-                      </a:solidFill>
-                      <a:prstDash val="solid"/>
-                      <a:round/>
-                      <a:headEnd type="none" w="med" len="med"/>
-                      <a:tailEnd type="none" w="med" len="med"/>
-                    </a:lnL>
-                    <a:lnR w="6350" cap="flat" cmpd="sng" algn="ctr">
-                      <a:solidFill>
-                        <a:srgbClr val="DCE7E3"/>
-                      </a:solidFill>
-                      <a:prstDash val="solid"/>
-                      <a:round/>
-                      <a:headEnd type="none" w="med" len="med"/>
-                      <a:tailEnd type="none" w="med" len="med"/>
-                    </a:lnR>
-                    <a:lnT w="6350" cap="flat" cmpd="sng" algn="ctr">
-                      <a:solidFill>
-                        <a:srgbClr val="DCE7E3"/>
-                      </a:solidFill>
-                      <a:prstDash val="solid"/>
-                      <a:round/>
-                      <a:headEnd type="none" w="med" len="med"/>
-                      <a:tailEnd type="none" w="med" len="med"/>
-                    </a:lnT>
-                    <a:lnB w="6350" cap="flat" cmpd="sng" algn="ctr">
-                      <a:solidFill>
-                        <a:srgbClr val="DCE7E3"/>
-                      </a:solidFill>
-                      <a:prstDash val="solid"/>
-                      <a:round/>
-                      <a:headEnd type="none" w="med" len="med"/>
-                      <a:tailEnd type="none" w="med" len="med"/>
-                    </a:lnB>
-                    <a:solidFill>
-                      <a:srgbClr val="1F4E4A"/>
-                    </a:solidFill>
-                  </a:tcPr>
-                </a:tc>
-              </a:tr>
-              <a:tr h="420624">
-                <a:tc>
-                  <a:txBody>
-                    <a:bodyPr/>
-                    <a:lstStyle/>
-                    <a:p>
-                      <a:pPr indent="0" marL="0">
-                        <a:buNone/>
-                      </a:pPr>
-                      <a:r>
-                        <a:rPr lang="en-US" sz="1200" dirty="0">
-                          <a:solidFill>
-                            <a:srgbClr val="14322C"/>
-                          </a:solidFill>
-                          <a:latin typeface="Calibri" pitchFamily="34" charset="0"/>
-                          <a:ea typeface="Calibri" pitchFamily="34" charset="-122"/>
-                          <a:cs typeface="Calibri" pitchFamily="34" charset="-120"/>
-                        </a:rPr>
-                        <a:t>Kristen</a:t>
-                      </a:r>
-                      <a:endParaRPr lang="en-US" sz="1200" dirty="0">
-                        <a:latin typeface="Calibri" charset="0"/>
-                        <a:ea typeface="Calibri" charset="0"/>
-                        <a:cs typeface="Calibri" charset="0"/>
-                      </a:endParaRPr>
-                    </a:p>
-                  </a:txBody>
-                  <a:tcPr marL="45720" marR="45720" marT="45720" marB="45720" anchor="ctr">
-                    <a:lnL w="6350" cap="flat" cmpd="sng" algn="ctr">
-                      <a:solidFill>
-                        <a:srgbClr val="DCE7E3"/>
-                      </a:solidFill>
-                      <a:prstDash val="solid"/>
-                      <a:round/>
-                      <a:headEnd type="none" w="med" len="med"/>
-                      <a:tailEnd type="none" w="med" len="med"/>
-                    </a:lnL>
-                    <a:lnR w="6350" cap="flat" cmpd="sng" algn="ctr">
-                      <a:solidFill>
-                        <a:srgbClr val="DCE7E3"/>
-                      </a:solidFill>
-                      <a:prstDash val="solid"/>
-                      <a:round/>
-                      <a:headEnd type="none" w="med" len="med"/>
-                      <a:tailEnd type="none" w="med" len="med"/>
-                    </a:lnR>
-                    <a:lnT w="6350" cap="flat" cmpd="sng" algn="ctr">
-                      <a:solidFill>
-                        <a:srgbClr val="DCE7E3"/>
-                      </a:solidFill>
-                      <a:prstDash val="solid"/>
-                      <a:round/>
-                      <a:headEnd type="none" w="med" len="med"/>
-                      <a:tailEnd type="none" w="med" len="med"/>
-                    </a:lnT>
-                    <a:lnB w="6350" cap="flat" cmpd="sng" algn="ctr">
-                      <a:solidFill>
-                        <a:srgbClr val="DCE7E3"/>
-                      </a:solidFill>
-                      <a:prstDash val="solid"/>
-                      <a:round/>
-                      <a:headEnd type="none" w="med" len="med"/>
-                      <a:tailEnd type="none" w="med" len="med"/>
-                    </a:lnB>
-                  </a:tcPr>
-                </a:tc>
-                <a:tc>
-                  <a:txBody>
-                    <a:bodyPr/>
-                    <a:lstStyle/>
-                    <a:p>
-                      <a:pPr indent="0" marL="0">
-                        <a:buNone/>
-                      </a:pPr>
-                      <a:r>
-                        <a:rPr lang="en-US" sz="1200" dirty="0">
-                          <a:solidFill>
-                            <a:srgbClr val="14322C"/>
-                          </a:solidFill>
-                          <a:latin typeface="Calibri" pitchFamily="34" charset="0"/>
-                          <a:ea typeface="Calibri" pitchFamily="34" charset="-122"/>
-                          <a:cs typeface="Calibri" pitchFamily="34" charset="-120"/>
-                        </a:rPr>
-                        <a:t>3 route days · 34 stops</a:t>
-                      </a:r>
-                      <a:endParaRPr lang="en-US" sz="1200" dirty="0">
-                        <a:latin typeface="Calibri" charset="0"/>
-                        <a:ea typeface="Calibri" charset="0"/>
-                        <a:cs typeface="Calibri" charset="0"/>
-                      </a:endParaRPr>
-                    </a:p>
-                  </a:txBody>
-                  <a:tcPr marL="45720" marR="45720" marT="45720" marB="45720" anchor="ctr">
-                    <a:lnL w="6350" cap="flat" cmpd="sng" algn="ctr">
-                      <a:solidFill>
-                        <a:srgbClr val="DCE7E3"/>
-                      </a:solidFill>
-                      <a:prstDash val="solid"/>
-                      <a:round/>
-                      <a:headEnd type="none" w="med" len="med"/>
-                      <a:tailEnd type="none" w="med" len="med"/>
-                    </a:lnL>
-                    <a:lnR w="6350" cap="flat" cmpd="sng" algn="ctr">
-                      <a:solidFill>
-                        <a:srgbClr val="DCE7E3"/>
-                      </a:solidFill>
-                      <a:prstDash val="solid"/>
-                      <a:round/>
-                      <a:headEnd type="none" w="med" len="med"/>
-                      <a:tailEnd type="none" w="med" len="med"/>
-                    </a:lnR>
-                    <a:lnT w="6350" cap="flat" cmpd="sng" algn="ctr">
-                      <a:solidFill>
-                        <a:srgbClr val="DCE7E3"/>
-                      </a:solidFill>
-                      <a:prstDash val="solid"/>
-                      <a:round/>
-                      <a:headEnd type="none" w="med" len="med"/>
-                      <a:tailEnd type="none" w="med" len="med"/>
-                    </a:lnT>
-                    <a:lnB w="6350" cap="flat" cmpd="sng" algn="ctr">
-                      <a:solidFill>
-                        <a:srgbClr val="DCE7E3"/>
-                      </a:solidFill>
-                      <a:prstDash val="solid"/>
-                      <a:round/>
-                      <a:headEnd type="none" w="med" len="med"/>
-                      <a:tailEnd type="none" w="med" len="med"/>
-                    </a:lnB>
-                  </a:tcPr>
-                </a:tc>
-              </a:tr>
-              <a:tr h="420624">
-                <a:tc>
-                  <a:txBody>
-                    <a:bodyPr/>
-                    <a:lstStyle/>
-                    <a:p>
-                      <a:pPr indent="0" marL="0">
-                        <a:buNone/>
-                      </a:pPr>
-                      <a:r>
-                        <a:rPr lang="en-US" sz="1200" dirty="0">
-                          <a:solidFill>
-                            <a:srgbClr val="14322C"/>
-                          </a:solidFill>
-                          <a:latin typeface="Calibri" pitchFamily="34" charset="0"/>
-                          <a:ea typeface="Calibri" pitchFamily="34" charset="-122"/>
-                          <a:cs typeface="Calibri" pitchFamily="34" charset="-120"/>
-                        </a:rPr>
-                        <a:t>Jasmine</a:t>
-                      </a:r>
-                      <a:endParaRPr lang="en-US" sz="1200" dirty="0">
-                        <a:latin typeface="Calibri" charset="0"/>
-                        <a:ea typeface="Calibri" charset="0"/>
-                        <a:cs typeface="Calibri" charset="0"/>
-                      </a:endParaRPr>
-                    </a:p>
-                  </a:txBody>
-                  <a:tcPr marL="45720" marR="45720" marT="45720" marB="45720" anchor="ctr">
-                    <a:lnL w="6350" cap="flat" cmpd="sng" algn="ctr">
-                      <a:solidFill>
-                        <a:srgbClr val="DCE7E3"/>
-                      </a:solidFill>
-                      <a:prstDash val="solid"/>
-                      <a:round/>
-                      <a:headEnd type="none" w="med" len="med"/>
-                      <a:tailEnd type="none" w="med" len="med"/>
-                    </a:lnL>
-                    <a:lnR w="6350" cap="flat" cmpd="sng" algn="ctr">
-                      <a:solidFill>
-                        <a:srgbClr val="DCE7E3"/>
-                      </a:solidFill>
-                      <a:prstDash val="solid"/>
-                      <a:round/>
-                      <a:headEnd type="none" w="med" len="med"/>
-                      <a:tailEnd type="none" w="med" len="med"/>
-                    </a:lnR>
-                    <a:lnT w="6350" cap="flat" cmpd="sng" algn="ctr">
-                      <a:solidFill>
-                        <a:srgbClr val="DCE7E3"/>
-                      </a:solidFill>
-                      <a:prstDash val="solid"/>
-                      <a:round/>
-                      <a:headEnd type="none" w="med" len="med"/>
-                      <a:tailEnd type="none" w="med" len="med"/>
-                    </a:lnT>
-                    <a:lnB w="6350" cap="flat" cmpd="sng" algn="ctr">
-                      <a:solidFill>
-                        <a:srgbClr val="DCE7E3"/>
-                      </a:solidFill>
-                      <a:prstDash val="solid"/>
-                      <a:round/>
-                      <a:headEnd type="none" w="med" len="med"/>
-                      <a:tailEnd type="none" w="med" len="med"/>
-                    </a:lnB>
-                  </a:tcPr>
-                </a:tc>
-                <a:tc>
-                  <a:txBody>
-                    <a:bodyPr/>
-                    <a:lstStyle/>
-                    <a:p>
-                      <a:pPr indent="0" marL="0">
-                        <a:buNone/>
-                      </a:pPr>
-                      <a:r>
-                        <a:rPr lang="en-US" sz="1200" dirty="0">
-                          <a:solidFill>
-                            <a:srgbClr val="14322C"/>
-                          </a:solidFill>
-                          <a:latin typeface="Calibri" pitchFamily="34" charset="0"/>
-                          <a:ea typeface="Calibri" pitchFamily="34" charset="-122"/>
-                          <a:cs typeface="Calibri" pitchFamily="34" charset="-120"/>
-                        </a:rPr>
-                        <a:t>Days 02·05·09 · 30 stops</a:t>
-                      </a:r>
-                      <a:endParaRPr lang="en-US" sz="1200" dirty="0">
-                        <a:latin typeface="Calibri" charset="0"/>
-                        <a:ea typeface="Calibri" charset="0"/>
-                        <a:cs typeface="Calibri" charset="0"/>
-                      </a:endParaRPr>
-                    </a:p>
-                  </a:txBody>
-                  <a:tcPr marL="45720" marR="45720" marT="45720" marB="45720" anchor="ctr">
-                    <a:lnL w="6350" cap="flat" cmpd="sng" algn="ctr">
-                      <a:solidFill>
-                        <a:srgbClr val="DCE7E3"/>
-                      </a:solidFill>
-                      <a:prstDash val="solid"/>
-                      <a:round/>
-                      <a:headEnd type="none" w="med" len="med"/>
-                      <a:tailEnd type="none" w="med" len="med"/>
-                    </a:lnL>
-                    <a:lnR w="6350" cap="flat" cmpd="sng" algn="ctr">
-                      <a:solidFill>
-                        <a:srgbClr val="DCE7E3"/>
-                      </a:solidFill>
-                      <a:prstDash val="solid"/>
-                      <a:round/>
-                      <a:headEnd type="none" w="med" len="med"/>
-                      <a:tailEnd type="none" w="med" len="med"/>
-                    </a:lnR>
-                    <a:lnT w="6350" cap="flat" cmpd="sng" algn="ctr">
-                      <a:solidFill>
-                        <a:srgbClr val="DCE7E3"/>
-                      </a:solidFill>
-                      <a:prstDash val="solid"/>
-                      <a:round/>
-                      <a:headEnd type="none" w="med" len="med"/>
-                      <a:tailEnd type="none" w="med" len="med"/>
-                    </a:lnT>
-                    <a:lnB w="6350" cap="flat" cmpd="sng" algn="ctr">
-                      <a:solidFill>
-                        <a:srgbClr val="DCE7E3"/>
-                      </a:solidFill>
-                      <a:prstDash val="solid"/>
-                      <a:round/>
-                      <a:headEnd type="none" w="med" len="med"/>
-                      <a:tailEnd type="none" w="med" len="med"/>
-                    </a:lnB>
-                  </a:tcPr>
-                </a:tc>
-              </a:tr>
-              <a:tr h="420624">
-                <a:tc>
-                  <a:txBody>
-                    <a:bodyPr/>
-                    <a:lstStyle/>
-                    <a:p>
-                      <a:pPr indent="0" marL="0">
-                        <a:buNone/>
-                      </a:pPr>
-                      <a:r>
-                        <a:rPr lang="en-US" sz="1200" dirty="0">
-                          <a:solidFill>
-                            <a:srgbClr val="14322C"/>
-                          </a:solidFill>
-                          <a:latin typeface="Calibri" pitchFamily="34" charset="0"/>
-                          <a:ea typeface="Calibri" pitchFamily="34" charset="-122"/>
-                          <a:cs typeface="Calibri" pitchFamily="34" charset="-120"/>
-                        </a:rPr>
-                        <a:t>Coty</a:t>
-                      </a:r>
-                      <a:endParaRPr lang="en-US" sz="1200" dirty="0">
-                        <a:latin typeface="Calibri" charset="0"/>
-                        <a:ea typeface="Calibri" charset="0"/>
-                        <a:cs typeface="Calibri" charset="0"/>
-                      </a:endParaRPr>
-                    </a:p>
-                  </a:txBody>
-                  <a:tcPr marL="45720" marR="45720" marT="45720" marB="45720" anchor="ctr">
-                    <a:lnL w="6350" cap="flat" cmpd="sng" algn="ctr">
-                      <a:solidFill>
-                        <a:srgbClr val="DCE7E3"/>
-                      </a:solidFill>
-                      <a:prstDash val="solid"/>
-                      <a:round/>
-                      <a:headEnd type="none" w="med" len="med"/>
-                      <a:tailEnd type="none" w="med" len="med"/>
-                    </a:lnL>
-                    <a:lnR w="6350" cap="flat" cmpd="sng" algn="ctr">
-                      <a:solidFill>
-                        <a:srgbClr val="DCE7E3"/>
-                      </a:solidFill>
-                      <a:prstDash val="solid"/>
-                      <a:round/>
-                      <a:headEnd type="none" w="med" len="med"/>
-                      <a:tailEnd type="none" w="med" len="med"/>
-                    </a:lnR>
-                    <a:lnT w="6350" cap="flat" cmpd="sng" algn="ctr">
-                      <a:solidFill>
-                        <a:srgbClr val="DCE7E3"/>
-                      </a:solidFill>
-                      <a:prstDash val="solid"/>
-                      <a:round/>
-                      <a:headEnd type="none" w="med" len="med"/>
-                      <a:tailEnd type="none" w="med" len="med"/>
-                    </a:lnT>
-                    <a:lnB w="6350" cap="flat" cmpd="sng" algn="ctr">
-                      <a:solidFill>
-                        <a:srgbClr val="DCE7E3"/>
-                      </a:solidFill>
-                      <a:prstDash val="solid"/>
-                      <a:round/>
-                      <a:headEnd type="none" w="med" len="med"/>
-                      <a:tailEnd type="none" w="med" len="med"/>
-                    </a:lnB>
-                  </a:tcPr>
-                </a:tc>
-                <a:tc>
-                  <a:txBody>
-                    <a:bodyPr/>
-                    <a:lstStyle/>
-                    <a:p>
-                      <a:pPr indent="0" marL="0">
-                        <a:buNone/>
-                      </a:pPr>
-                      <a:r>
-                        <a:rPr lang="en-US" sz="1200" dirty="0">
-                          <a:solidFill>
-                            <a:srgbClr val="14322C"/>
-                          </a:solidFill>
-                          <a:latin typeface="Calibri" pitchFamily="34" charset="0"/>
-                          <a:ea typeface="Calibri" pitchFamily="34" charset="-122"/>
-                          <a:cs typeface="Calibri" pitchFamily="34" charset="-120"/>
-                        </a:rPr>
-                        <a:t>Days 01·04·03 · 30 stops</a:t>
-                      </a:r>
-                      <a:endParaRPr lang="en-US" sz="1200" dirty="0">
-                        <a:latin typeface="Calibri" charset="0"/>
-                        <a:ea typeface="Calibri" charset="0"/>
-                        <a:cs typeface="Calibri" charset="0"/>
-                      </a:endParaRPr>
-                    </a:p>
-                  </a:txBody>
-                  <a:tcPr marL="45720" marR="45720" marT="45720" marB="45720" anchor="ctr">
-                    <a:lnL w="6350" cap="flat" cmpd="sng" algn="ctr">
-                      <a:solidFill>
-                        <a:srgbClr val="DCE7E3"/>
-                      </a:solidFill>
-                      <a:prstDash val="solid"/>
-                      <a:round/>
-                      <a:headEnd type="none" w="med" len="med"/>
-                      <a:tailEnd type="none" w="med" len="med"/>
-                    </a:lnL>
-                    <a:lnR w="6350" cap="flat" cmpd="sng" algn="ctr">
-                      <a:solidFill>
-                        <a:srgbClr val="DCE7E3"/>
-                      </a:solidFill>
-                      <a:prstDash val="solid"/>
-                      <a:round/>
-                      <a:headEnd type="none" w="med" len="med"/>
-                      <a:tailEnd type="none" w="med" len="med"/>
-                    </a:lnR>
-                    <a:lnT w="6350" cap="flat" cmpd="sng" algn="ctr">
-                      <a:solidFill>
-                        <a:srgbClr val="DCE7E3"/>
-                      </a:solidFill>
-                      <a:prstDash val="solid"/>
-                      <a:round/>
-                      <a:headEnd type="none" w="med" len="med"/>
-                      <a:tailEnd type="none" w="med" len="med"/>
-                    </a:lnT>
-                    <a:lnB w="6350" cap="flat" cmpd="sng" algn="ctr">
-                      <a:solidFill>
-                        <a:srgbClr val="DCE7E3"/>
-                      </a:solidFill>
-                      <a:prstDash val="solid"/>
-                      <a:round/>
-                      <a:headEnd type="none" w="med" len="med"/>
-                      <a:tailEnd type="none" w="med" len="med"/>
-                    </a:lnB>
-                  </a:tcPr>
-                </a:tc>
-              </a:tr>
-              <a:tr h="420624">
-                <a:tc>
-                  <a:txBody>
-                    <a:bodyPr/>
-                    <a:lstStyle/>
-                    <a:p>
-                      <a:pPr indent="0" marL="0">
-                        <a:buNone/>
-                      </a:pPr>
-                      <a:r>
-                        <a:rPr lang="en-US" sz="1200" dirty="0">
-                          <a:solidFill>
-                            <a:srgbClr val="14322C"/>
-                          </a:solidFill>
-                          <a:latin typeface="Calibri" pitchFamily="34" charset="0"/>
-                          <a:ea typeface="Calibri" pitchFamily="34" charset="-122"/>
-                          <a:cs typeface="Calibri" pitchFamily="34" charset="-120"/>
-                        </a:rPr>
-                        <a:t>Sean</a:t>
-                      </a:r>
-                      <a:endParaRPr lang="en-US" sz="1200" dirty="0">
-                        <a:latin typeface="Calibri" charset="0"/>
-                        <a:ea typeface="Calibri" charset="0"/>
-                        <a:cs typeface="Calibri" charset="0"/>
-                      </a:endParaRPr>
-                    </a:p>
-                  </a:txBody>
-                  <a:tcPr marL="45720" marR="45720" marT="45720" marB="45720" anchor="ctr">
-                    <a:lnL w="6350" cap="flat" cmpd="sng" algn="ctr">
-                      <a:solidFill>
-                        <a:srgbClr val="DCE7E3"/>
-                      </a:solidFill>
-                      <a:prstDash val="solid"/>
-                      <a:round/>
-                      <a:headEnd type="none" w="med" len="med"/>
-                      <a:tailEnd type="none" w="med" len="med"/>
-                    </a:lnL>
-                    <a:lnR w="6350" cap="flat" cmpd="sng" algn="ctr">
-                      <a:solidFill>
-                        <a:srgbClr val="DCE7E3"/>
-                      </a:solidFill>
-                      <a:prstDash val="solid"/>
-                      <a:round/>
-                      <a:headEnd type="none" w="med" len="med"/>
-                      <a:tailEnd type="none" w="med" len="med"/>
-                    </a:lnR>
-                    <a:lnT w="6350" cap="flat" cmpd="sng" algn="ctr">
-                      <a:solidFill>
-                        <a:srgbClr val="DCE7E3"/>
-                      </a:solidFill>
-                      <a:prstDash val="solid"/>
-                      <a:round/>
-                      <a:headEnd type="none" w="med" len="med"/>
-                      <a:tailEnd type="none" w="med" len="med"/>
-                    </a:lnT>
-                    <a:lnB w="6350" cap="flat" cmpd="sng" algn="ctr">
-                      <a:solidFill>
-                        <a:srgbClr val="DCE7E3"/>
-                      </a:solidFill>
-                      <a:prstDash val="solid"/>
-                      <a:round/>
-                      <a:headEnd type="none" w="med" len="med"/>
-                      <a:tailEnd type="none" w="med" len="med"/>
-                    </a:lnB>
-                  </a:tcPr>
-                </a:tc>
-                <a:tc>
-                  <a:txBody>
-                    <a:bodyPr/>
-                    <a:lstStyle/>
-                    <a:p>
-                      <a:pPr indent="0" marL="0">
-                        <a:buNone/>
-                      </a:pPr>
-                      <a:r>
-                        <a:rPr lang="en-US" sz="1200" dirty="0">
-                          <a:solidFill>
-                            <a:srgbClr val="14322C"/>
-                          </a:solidFill>
-                          <a:latin typeface="Calibri" pitchFamily="34" charset="0"/>
-                          <a:ea typeface="Calibri" pitchFamily="34" charset="-122"/>
-                          <a:cs typeface="Calibri" pitchFamily="34" charset="-120"/>
-                        </a:rPr>
-                        <a:t>Days 03·02 · 20 stops — PENDING Thursday's verification; Coty absorbs if out</a:t>
-                      </a:r>
-                      <a:endParaRPr lang="en-US" sz="1200" dirty="0">
-                        <a:latin typeface="Calibri" charset="0"/>
-                        <a:ea typeface="Calibri" charset="0"/>
-                        <a:cs typeface="Calibri" charset="0"/>
-                      </a:endParaRPr>
-                    </a:p>
-                  </a:txBody>
-                  <a:tcPr marL="45720" marR="45720" marT="45720" marB="45720" anchor="ctr">
-                    <a:lnL w="6350" cap="flat" cmpd="sng" algn="ctr">
-                      <a:solidFill>
-                        <a:srgbClr val="DCE7E3"/>
-                      </a:solidFill>
-                      <a:prstDash val="solid"/>
-                      <a:round/>
-                      <a:headEnd type="none" w="med" len="med"/>
-                      <a:tailEnd type="none" w="med" len="med"/>
-                    </a:lnL>
-                    <a:lnR w="6350" cap="flat" cmpd="sng" algn="ctr">
-                      <a:solidFill>
-                        <a:srgbClr val="DCE7E3"/>
-                      </a:solidFill>
-                      <a:prstDash val="solid"/>
-                      <a:round/>
-                      <a:headEnd type="none" w="med" len="med"/>
-                      <a:tailEnd type="none" w="med" len="med"/>
-                    </a:lnR>
-                    <a:lnT w="6350" cap="flat" cmpd="sng" algn="ctr">
-                      <a:solidFill>
-                        <a:srgbClr val="DCE7E3"/>
-                      </a:solidFill>
-                      <a:prstDash val="solid"/>
-                      <a:round/>
-                      <a:headEnd type="none" w="med" len="med"/>
-                      <a:tailEnd type="none" w="med" len="med"/>
-                    </a:lnT>
-                    <a:lnB w="6350" cap="flat" cmpd="sng" algn="ctr">
-                      <a:solidFill>
-                        <a:srgbClr val="DCE7E3"/>
-                      </a:solidFill>
-                      <a:prstDash val="solid"/>
-                      <a:round/>
-                      <a:headEnd type="none" w="med" len="med"/>
-                      <a:tailEnd type="none" w="med" len="med"/>
-                    </a:lnB>
-                  </a:tcPr>
-                </a:tc>
-              </a:tr>
-            </a:tbl>
-          </a:graphicData>
-        </a:graphic>
-      </p:graphicFrame>
-    </p:spTree>
-  </p:cSld>
-  <p:clrMapOvr>
-    <a:masterClrMapping/>
-  </p:clrMapOvr>
-</p:sld>
-</file>
-
-<file path=ppt/slides/slide11.xml><?xml version="1.0" encoding="utf-8"?>
-<p:sld xmlns:a="http://schemas.openxmlformats.org/drawingml/2006/main" xmlns:r="http://schemas.openxmlformats.org/officeDocument/2006/relationships" xmlns:p="http://schemas.openxmlformats.org/presentationml/2006/main">
-  <p:cSld name="Slide 11">
-    <p:spTree>
-      <p:nvGrpSpPr>
-        <p:cNvPr id="1" name=""/>
-        <p:cNvGrpSpPr/>
-        <p:nvPr/>
-      </p:nvGrpSpPr>
-      <p:grpSpPr>
-        <a:xfrm>
-          <a:off x="0" y="0"/>
-          <a:ext cx="0" cy="0"/>
-          <a:chOff x="0" y="0"/>
-          <a:chExt cx="0" cy="0"/>
-        </a:xfrm>
-      </p:grpSpPr>
-      <p:sp>
-        <p:nvSpPr>
-          <p:cNvPr id="2" name="Text 0"/>
-          <p:cNvSpPr/>
-          <p:nvPr/>
-        </p:nvSpPr>
-        <p:spPr>
-          <a:xfrm>
-            <a:off x="502920" y="256032"/>
-            <a:ext cx="11155680" cy="594360"/>
-          </a:xfrm>
-          <a:prstGeom prst="rect">
-            <a:avLst/>
-          </a:prstGeom>
-          <a:noFill/>
-          <a:ln/>
-        </p:spPr>
-        <p:txBody>
-          <a:bodyPr wrap="square" rtlCol="0" anchor="ctr"/>
-          <a:lstStyle/>
-          <a:p>
-            <a:pPr indent="0" marL="0">
-              <a:buNone/>
-            </a:pPr>
-            <a:r>
-              <a:rPr lang="en-US" sz="2900" b="1" dirty="0">
-                <a:solidFill>
-                  <a:srgbClr val="14322C"/>
-                </a:solidFill>
-                <a:latin typeface="Cambria" pitchFamily="34" charset="0"/>
-                <a:ea typeface="Cambria" pitchFamily="34" charset="-122"/>
-                <a:cs typeface="Cambria" pitchFamily="34" charset="-120"/>
-              </a:rPr>
-              <a:t>One ask this week: validate your book</a:t>
-            </a:r>
-            <a:endParaRPr lang="en-US" sz="2900" dirty="0"/>
-          </a:p>
-        </p:txBody>
-      </p:sp>
-      <p:sp>
-        <p:nvSpPr>
-          <p:cNvPr id="3" name="Text 1"/>
-          <p:cNvSpPr/>
-          <p:nvPr/>
-        </p:nvSpPr>
-        <p:spPr>
-          <a:xfrm>
-            <a:off x="502920" y="841248"/>
-            <a:ext cx="11155680" cy="320040"/>
-          </a:xfrm>
-          <a:prstGeom prst="rect">
-            <a:avLst/>
-          </a:prstGeom>
-          <a:noFill/>
-          <a:ln/>
-        </p:spPr>
-        <p:txBody>
-          <a:bodyPr wrap="square" rtlCol="0" anchor="ctr"/>
-          <a:lstStyle/>
-          <a:p>
-            <a:pPr indent="0" marL="0">
-              <a:buNone/>
-            </a:pPr>
-            <a:r>
-              <a:rPr lang="en-US" sz="1300" dirty="0">
-                <a:solidFill>
-                  <a:srgbClr val="5E7773"/>
-                </a:solidFill>
-                <a:latin typeface="Calibri" pitchFamily="34" charset="0"/>
-                <a:ea typeface="Calibri" pitchFamily="34" charset="-122"/>
-                <a:cs typeface="Calibri" pitchFamily="34" charset="-120"/>
-              </a:rPr>
-              <a:t>You know the market; the data only knows the exports. Fix it where it's wrong.</a:t>
-            </a:r>
-            <a:endParaRPr lang="en-US" sz="1300" dirty="0"/>
-          </a:p>
-        </p:txBody>
-      </p:sp>
-      <p:sp>
-        <p:nvSpPr>
-          <p:cNvPr id="4" name="Text 2"/>
-          <p:cNvSpPr/>
-          <p:nvPr/>
-        </p:nvSpPr>
-        <p:spPr>
-          <a:xfrm>
-            <a:off x="548640" y="1463040"/>
-            <a:ext cx="2377440" cy="822960"/>
-          </a:xfrm>
-          <a:prstGeom prst="rect">
-            <a:avLst/>
-          </a:prstGeom>
-          <a:noFill/>
-          <a:ln/>
-        </p:spPr>
-        <p:txBody>
-          <a:bodyPr wrap="square" rtlCol="0" anchor="ctr"/>
-          <a:lstStyle/>
-          <a:p>
-            <a:pPr indent="0" marL="0">
-              <a:buNone/>
-            </a:pPr>
-            <a:r>
-              <a:rPr lang="en-US" sz="1200" b="1" spc="150" kern="0" dirty="0">
-                <a:solidFill>
-                  <a:srgbClr val="49A698"/>
-                </a:solidFill>
-                <a:latin typeface="Calibri" pitchFamily="34" charset="0"/>
-                <a:ea typeface="Calibri" pitchFamily="34" charset="-122"/>
-                <a:cs typeface="Calibri" pitchFamily="34" charset="-120"/>
-              </a:rPr>
-              <a:t>WHAT</a:t>
-            </a:r>
-            <a:endParaRPr lang="en-US" sz="1200" dirty="0"/>
-          </a:p>
-        </p:txBody>
-      </p:sp>
-      <p:sp>
-        <p:nvSpPr>
-          <p:cNvPr id="5" name="Text 3"/>
-          <p:cNvSpPr/>
-          <p:nvPr/>
-        </p:nvSpPr>
-        <p:spPr>
-          <a:xfrm>
-            <a:off x="3108960" y="1463040"/>
-            <a:ext cx="8503920" cy="1051560"/>
-          </a:xfrm>
-          <a:prstGeom prst="rect">
-            <a:avLst/>
-          </a:prstGeom>
-          <a:noFill/>
-          <a:ln/>
-        </p:spPr>
-        <p:txBody>
-          <a:bodyPr wrap="square" rtlCol="0" anchor="ctr"/>
-          <a:lstStyle/>
-          <a:p>
-            <a:pPr indent="0" marL="0">
-              <a:lnSpc>
-                <a:spcPct val="112000"/>
-              </a:lnSpc>
-              <a:buNone/>
-            </a:pPr>
-            <a:r>
-              <a:rPr lang="en-US" sz="1250" dirty="0">
-                <a:solidFill>
-                  <a:srgbClr val="14322C"/>
-                </a:solidFill>
-                <a:latin typeface="Calibri" pitchFamily="34" charset="0"/>
-                <a:ea typeface="Calibri" pitchFamily="34" charset="-122"/>
-                <a:cs typeface="Calibri" pitchFamily="34" charset="-120"/>
-              </a:rPr>
-              <a:t>Your review tab in the validation workbook (Joel distributes Wed): every account gets Keep / Remove / Reassign + a reason. Dropdowns, ~60–90 min a day, done by Tue Jul 29.</a:t>
-            </a:r>
-            <a:endParaRPr lang="en-US" sz="1250" dirty="0"/>
-          </a:p>
-        </p:txBody>
-      </p:sp>
-      <p:sp>
-        <p:nvSpPr>
-          <p:cNvPr id="6" name="Text 4"/>
-          <p:cNvSpPr/>
-          <p:nvPr/>
-        </p:nvSpPr>
-        <p:spPr>
-          <a:xfrm>
-            <a:off x="548640" y="2633472"/>
-            <a:ext cx="2377440" cy="822960"/>
-          </a:xfrm>
-          <a:prstGeom prst="rect">
-            <a:avLst/>
-          </a:prstGeom>
-          <a:noFill/>
-          <a:ln/>
-        </p:spPr>
-        <p:txBody>
-          <a:bodyPr wrap="square" rtlCol="0" anchor="ctr"/>
-          <a:lstStyle/>
-          <a:p>
-            <a:pPr indent="0" marL="0">
-              <a:buNone/>
-            </a:pPr>
-            <a:r>
-              <a:rPr lang="en-US" sz="1200" b="1" spc="150" kern="0" dirty="0">
-                <a:solidFill>
-                  <a:srgbClr val="49A698"/>
-                </a:solidFill>
-                <a:latin typeface="Calibri" pitchFamily="34" charset="0"/>
-                <a:ea typeface="Calibri" pitchFamily="34" charset="-122"/>
-                <a:cs typeface="Calibri" pitchFamily="34" charset="-120"/>
-              </a:rPr>
-              <a:t>PRE-FLAGGED FOR YOU</a:t>
-            </a:r>
-            <a:endParaRPr lang="en-US" sz="1200" dirty="0"/>
-          </a:p>
-        </p:txBody>
-      </p:sp>
-      <p:sp>
-        <p:nvSpPr>
-          <p:cNvPr id="7" name="Text 5"/>
-          <p:cNvSpPr/>
-          <p:nvPr/>
-        </p:nvSpPr>
-        <p:spPr>
-          <a:xfrm>
-            <a:off x="3108960" y="2633472"/>
-            <a:ext cx="8503920" cy="1051560"/>
-          </a:xfrm>
-          <a:prstGeom prst="rect">
-            <a:avLst/>
-          </a:prstGeom>
-          <a:noFill/>
-          <a:ln/>
-        </p:spPr>
-        <p:txBody>
-          <a:bodyPr wrap="square" rtlCol="0" anchor="ctr"/>
-          <a:lstStyle/>
-          <a:p>
-            <a:pPr indent="0" marL="0">
-              <a:lnSpc>
-                <a:spcPct val="112000"/>
-              </a:lnSpc>
-              <a:buNone/>
-            </a:pPr>
-            <a:r>
-              <a:rPr lang="en-US" sz="1250" dirty="0">
-                <a:solidFill>
-                  <a:srgbClr val="14322C"/>
-                </a:solidFill>
-                <a:latin typeface="Calibri" pitchFamily="34" charset="0"/>
-                <a:ea typeface="Calibri" pitchFamily="34" charset="-122"/>
-                <a:cs typeface="Calibri" pitchFamily="34" charset="-120"/>
-              </a:rPr>
-              <a:t>54 auto-flags already marked: pediatric offices, addiction medicine (Gammons), possible competitors, ortho groups with in-house spine, neurosurgeons. Confirm or override.</a:t>
-            </a:r>
-            <a:endParaRPr lang="en-US" sz="1250" dirty="0"/>
-          </a:p>
-        </p:txBody>
-      </p:sp>
-      <p:sp>
-        <p:nvSpPr>
-          <p:cNvPr id="8" name="Text 6"/>
-          <p:cNvSpPr/>
-          <p:nvPr/>
-        </p:nvSpPr>
-        <p:spPr>
-          <a:xfrm>
-            <a:off x="548640" y="3803904"/>
-            <a:ext cx="2377440" cy="822960"/>
-          </a:xfrm>
-          <a:prstGeom prst="rect">
-            <a:avLst/>
-          </a:prstGeom>
-          <a:noFill/>
-          <a:ln/>
-        </p:spPr>
-        <p:txBody>
-          <a:bodyPr wrap="square" rtlCol="0" anchor="ctr"/>
-          <a:lstStyle/>
-          <a:p>
-            <a:pPr indent="0" marL="0">
-              <a:buNone/>
-            </a:pPr>
-            <a:r>
-              <a:rPr lang="en-US" sz="1200" b="1" spc="150" kern="0" dirty="0">
-                <a:solidFill>
-                  <a:srgbClr val="49A698"/>
-                </a:solidFill>
-                <a:latin typeface="Calibri" pitchFamily="34" charset="0"/>
-                <a:ea typeface="Calibri" pitchFamily="34" charset="-122"/>
-                <a:cs typeface="Calibri" pitchFamily="34" charset="-120"/>
-              </a:rPr>
-              <a:t>ONE RULE</a:t>
-            </a:r>
-            <a:endParaRPr lang="en-US" sz="1200" dirty="0"/>
-          </a:p>
-        </p:txBody>
-      </p:sp>
-      <p:sp>
-        <p:nvSpPr>
-          <p:cNvPr id="9" name="Text 7"/>
-          <p:cNvSpPr/>
-          <p:nvPr/>
-        </p:nvSpPr>
-        <p:spPr>
-          <a:xfrm>
-            <a:off x="3108960" y="3803904"/>
-            <a:ext cx="8503920" cy="1051560"/>
-          </a:xfrm>
-          <a:prstGeom prst="rect">
-            <a:avLst/>
-          </a:prstGeom>
-          <a:noFill/>
-          <a:ln/>
-        </p:spPr>
-        <p:txBody>
-          <a:bodyPr wrap="square" rtlCol="0" anchor="ctr"/>
-          <a:lstStyle/>
-          <a:p>
-            <a:pPr indent="0" marL="0">
-              <a:lnSpc>
-                <a:spcPct val="112000"/>
-              </a:lnSpc>
-              <a:buNone/>
-            </a:pPr>
-            <a:r>
-              <a:rPr lang="en-US" sz="1250" dirty="0">
-                <a:solidFill>
-                  <a:srgbClr val="14322C"/>
-                </a:solidFill>
-                <a:latin typeface="Calibri" pitchFamily="34" charset="0"/>
-                <a:ea typeface="Calibri" pitchFamily="34" charset="-122"/>
-                <a:cs typeface="Calibri" pitchFamily="34" charset="-120"/>
-              </a:rPr>
-              <a:t>Producing accounts are never deleted on a hunch — flag “verify relationship” instead. Removal needs a reason; that's what makes the final list defensible.</a:t>
-            </a:r>
-            <a:endParaRPr lang="en-US" sz="1250" dirty="0"/>
-          </a:p>
-        </p:txBody>
-      </p:sp>
-      <p:sp>
-        <p:nvSpPr>
-          <p:cNvPr id="10" name="Text 8"/>
-          <p:cNvSpPr/>
-          <p:nvPr/>
-        </p:nvSpPr>
-        <p:spPr>
-          <a:xfrm>
-            <a:off x="548640" y="4974336"/>
-            <a:ext cx="2377440" cy="822960"/>
-          </a:xfrm>
-          <a:prstGeom prst="rect">
-            <a:avLst/>
-          </a:prstGeom>
-          <a:noFill/>
-          <a:ln/>
-        </p:spPr>
-        <p:txBody>
-          <a:bodyPr wrap="square" rtlCol="0" anchor="ctr"/>
-          <a:lstStyle/>
-          <a:p>
-            <a:pPr indent="0" marL="0">
-              <a:buNone/>
-            </a:pPr>
-            <a:r>
-              <a:rPr lang="en-US" sz="1200" b="1" spc="150" kern="0" dirty="0">
-                <a:solidFill>
-                  <a:srgbClr val="49A698"/>
-                </a:solidFill>
-                <a:latin typeface="Calibri" pitchFamily="34" charset="0"/>
-                <a:ea typeface="Calibri" pitchFamily="34" charset="-122"/>
-                <a:cs typeface="Calibri" pitchFamily="34" charset="-120"/>
-              </a:rPr>
-              <a:t>WHAT HAPPENS THEN</a:t>
-            </a:r>
-            <a:endParaRPr lang="en-US" sz="1200" dirty="0"/>
-          </a:p>
-        </p:txBody>
-      </p:sp>
-      <p:sp>
-        <p:nvSpPr>
-          <p:cNvPr id="11" name="Text 9"/>
-          <p:cNvSpPr/>
-          <p:nvPr/>
-        </p:nvSpPr>
-        <p:spPr>
-          <a:xfrm>
-            <a:off x="3108960" y="4974336"/>
-            <a:ext cx="8503920" cy="1051560"/>
-          </a:xfrm>
-          <a:prstGeom prst="rect">
-            <a:avLst/>
-          </a:prstGeom>
-          <a:noFill/>
-          <a:ln/>
-        </p:spPr>
-        <p:txBody>
-          <a:bodyPr wrap="square" rtlCol="0" anchor="ctr"/>
-          <a:lstStyle/>
-          <a:p>
-            <a:pPr indent="0" marL="0">
-              <a:lnSpc>
-                <a:spcPct val="112000"/>
-              </a:lnSpc>
-              <a:buNone/>
-            </a:pPr>
-            <a:r>
-              <a:rPr lang="en-US" sz="1250" dirty="0">
-                <a:solidFill>
-                  <a:srgbClr val="14322C"/>
-                </a:solidFill>
-                <a:latin typeface="Calibri" pitchFamily="34" charset="0"/>
-                <a:ea typeface="Calibri" pitchFamily="34" charset="-122"/>
-                <a:cs typeface="Calibri" pitchFamily="34" charset="-120"/>
-              </a:rPr>
-              <a:t>Jul 31: approved universe locked, routes regenerated, the app refreshes. Aug 3: we run on a book everyone trusts — because you built it.</a:t>
-            </a:r>
-            <a:endParaRPr lang="en-US" sz="1250" dirty="0"/>
-          </a:p>
-        </p:txBody>
-      </p:sp>
-    </p:spTree>
-  </p:cSld>
-  <p:clrMapOvr>
-    <a:masterClrMapping/>
-  </p:clrMapOvr>
-</p:sld>
-</file>
-
-<file path=ppt/slides/slide12.xml><?xml version="1.0" encoding="utf-8"?>
 <p:sld xmlns:a="http://schemas.openxmlformats.org/drawingml/2006/main" xmlns:r="http://schemas.openxmlformats.org/officeDocument/2006/relationships" xmlns:p="http://schemas.openxmlformats.org/presentationml/2006/main">
   <p:cSld name="Slide 12">
     <p:spTree>
@@ -3950,7 +1880,7 @@
           <a:bodyPr wrap="square" rtlCol="0" anchor="ctr"/>
           <a:lstStyle/>
           <a:p>
-            <a:pPr indent="0" marL="0">
+            <a:pPr marL="0" indent="0">
               <a:buNone/>
             </a:pPr>
             <a:r>
@@ -3962,7 +1892,7 @@
                 <a:ea typeface="Cambria" pitchFamily="34" charset="-122"/>
                 <a:cs typeface="Cambria" pitchFamily="34" charset="-120"/>
               </a:rPr>
-              <a:t>Say what we mean — the shared vocabulary</a:t>
+              <a:t>One ask this week: validate your book</a:t>
             </a:r>
             <a:endParaRPr lang="en-US" sz="2900" dirty="0"/>
           </a:p>
@@ -3989,7 +1919,7 @@
           <a:bodyPr wrap="square" rtlCol="0" anchor="ctr"/>
           <a:lstStyle/>
           <a:p>
-            <a:pPr indent="0" marL="0">
+            <a:pPr marL="0" indent="0">
               <a:buNone/>
             </a:pPr>
             <a:r>
@@ -4001,7 +1931,7 @@
                 <a:ea typeface="Calibri" pitchFamily="34" charset="-122"/>
                 <a:cs typeface="Calibri" pitchFamily="34" charset="-120"/>
               </a:rPr>
-              <a:t>Full glossary in pm/glossary.md — flag anything that reads wrong</a:t>
+              <a:t>You know the market; the data only knows the exports. Fix it where it's wrong.</a:t>
             </a:r>
             <a:endParaRPr lang="en-US" sz="1300" dirty="0"/>
           </a:p>
@@ -4015,8 +1945,8 @@
         </p:nvSpPr>
         <p:spPr>
           <a:xfrm>
-            <a:off x="548640" y="1417320"/>
-            <a:ext cx="5394960" cy="749808"/>
+            <a:off x="548640" y="1463040"/>
+            <a:ext cx="2377440" cy="822960"/>
           </a:xfrm>
           <a:prstGeom prst="rect">
             <a:avLst/>
@@ -4028,31 +1958,134 @@
           <a:bodyPr wrap="square" rtlCol="0" anchor="ctr"/>
           <a:lstStyle/>
           <a:p>
-            <a:pPr indent="0" marL="0">
+            <a:pPr marL="0" indent="0">
+              <a:buNone/>
+            </a:pPr>
+            <a:r>
+              <a:rPr lang="en-US" sz="1200" b="1" kern="0" spc="150" dirty="0">
+                <a:solidFill>
+                  <a:srgbClr val="49A698"/>
+                </a:solidFill>
+                <a:latin typeface="Calibri" pitchFamily="34" charset="0"/>
+                <a:ea typeface="Calibri" pitchFamily="34" charset="-122"/>
+                <a:cs typeface="Calibri" pitchFamily="34" charset="-120"/>
+              </a:rPr>
+              <a:t>WHAT</a:t>
+            </a:r>
+            <a:endParaRPr lang="en-US" sz="1200" dirty="0"/>
+          </a:p>
+        </p:txBody>
+      </p:sp>
+      <p:sp>
+        <p:nvSpPr>
+          <p:cNvPr id="5" name="Text 3"/>
+          <p:cNvSpPr/>
+          <p:nvPr/>
+        </p:nvSpPr>
+        <p:spPr>
+          <a:xfrm>
+            <a:off x="3108960" y="1463040"/>
+            <a:ext cx="8503920" cy="1051560"/>
+          </a:xfrm>
+          <a:prstGeom prst="rect">
+            <a:avLst/>
+          </a:prstGeom>
+          <a:noFill/>
+          <a:ln/>
+        </p:spPr>
+        <p:txBody>
+          <a:bodyPr wrap="square" rtlCol="0" anchor="ctr"/>
+          <a:lstStyle/>
+          <a:p>
+            <a:pPr marL="0" indent="0">
               <a:lnSpc>
-                <a:spcPct val="105000"/>
+                <a:spcPct val="112000"/>
               </a:lnSpc>
               <a:buNone/>
             </a:pPr>
             <a:r>
-              <a:rPr lang="en-US" sz="1150" b="1" dirty="0">
-                <a:solidFill>
-                  <a:srgbClr val="1F4E4A"/>
-                </a:solidFill>
-                <a:latin typeface="Calibri" pitchFamily="34" charset="0"/>
-                <a:ea typeface="Calibri" pitchFamily="34" charset="-122"/>
-                <a:cs typeface="Calibri" pitchFamily="34" charset="-120"/>
-              </a:rPr>
-              <a:t>PL — </a:t>
-            </a:r>
-            <a:pPr indent="0" marL="0">
+              <a:rPr lang="en-US" sz="1250" dirty="0">
+                <a:solidFill>
+                  <a:srgbClr val="14322C"/>
+                </a:solidFill>
+                <a:latin typeface="Calibri" pitchFamily="34" charset="0"/>
+                <a:ea typeface="Calibri" pitchFamily="34" charset="-122"/>
+                <a:cs typeface="Calibri" pitchFamily="34" charset="-120"/>
+              </a:rPr>
+              <a:t>Your review tab in the validation workbook (Joel distributes Wed): every account gets Keep / Remove / Reassign + a reason. Dropdowns, ~60–90 min a day, done by Tue Jul 29.</a:t>
+            </a:r>
+            <a:endParaRPr lang="en-US" sz="1250" dirty="0"/>
+          </a:p>
+        </p:txBody>
+      </p:sp>
+      <p:sp>
+        <p:nvSpPr>
+          <p:cNvPr id="6" name="Text 4"/>
+          <p:cNvSpPr/>
+          <p:nvPr/>
+        </p:nvSpPr>
+        <p:spPr>
+          <a:xfrm>
+            <a:off x="548640" y="2633472"/>
+            <a:ext cx="2377440" cy="822960"/>
+          </a:xfrm>
+          <a:prstGeom prst="rect">
+            <a:avLst/>
+          </a:prstGeom>
+          <a:noFill/>
+          <a:ln/>
+        </p:spPr>
+        <p:txBody>
+          <a:bodyPr wrap="square" rtlCol="0" anchor="ctr"/>
+          <a:lstStyle/>
+          <a:p>
+            <a:pPr marL="0" indent="0">
+              <a:buNone/>
+            </a:pPr>
+            <a:r>
+              <a:rPr lang="en-US" sz="1200" b="1" kern="0" spc="150" dirty="0">
+                <a:solidFill>
+                  <a:srgbClr val="49A698"/>
+                </a:solidFill>
+                <a:latin typeface="Calibri" pitchFamily="34" charset="0"/>
+                <a:ea typeface="Calibri" pitchFamily="34" charset="-122"/>
+                <a:cs typeface="Calibri" pitchFamily="34" charset="-120"/>
+              </a:rPr>
+              <a:t>PRE-FLAGGED FOR YOU</a:t>
+            </a:r>
+            <a:endParaRPr lang="en-US" sz="1200" dirty="0"/>
+          </a:p>
+        </p:txBody>
+      </p:sp>
+      <p:sp>
+        <p:nvSpPr>
+          <p:cNvPr id="7" name="Text 5"/>
+          <p:cNvSpPr/>
+          <p:nvPr/>
+        </p:nvSpPr>
+        <p:spPr>
+          <a:xfrm>
+            <a:off x="3108960" y="2633472"/>
+            <a:ext cx="8503920" cy="1051560"/>
+          </a:xfrm>
+          <a:prstGeom prst="rect">
+            <a:avLst/>
+          </a:prstGeom>
+          <a:noFill/>
+          <a:ln/>
+        </p:spPr>
+        <p:txBody>
+          <a:bodyPr wrap="square" rtlCol="0" anchor="ctr"/>
+          <a:lstStyle/>
+          <a:p>
+            <a:pPr marL="0" indent="0">
               <a:lnSpc>
-                <a:spcPct val="105000"/>
+                <a:spcPct val="112000"/>
               </a:lnSpc>
               <a:buNone/>
             </a:pPr>
             <a:r>
-              <a:rPr lang="en-US" sz="1150" dirty="0">
+              <a:rPr lang="en-US" sz="1250" dirty="0">
                 <a:solidFill>
                   <a:srgbClr val="14322C"/>
                 </a:solidFill>
@@ -4060,22 +2093,22 @@
                 <a:ea typeface="Calibri" pitchFamily="34" charset="-122"/>
                 <a:cs typeface="Calibri" pitchFamily="34" charset="-120"/>
               </a:rPr>
-              <a:t>Physician Liaison — you.</a:t>
-            </a:r>
-            <a:endParaRPr lang="en-US" sz="1150" dirty="0"/>
-          </a:p>
-        </p:txBody>
-      </p:sp>
-      <p:sp>
-        <p:nvSpPr>
-          <p:cNvPr id="5" name="Text 3"/>
-          <p:cNvSpPr/>
-          <p:nvPr/>
-        </p:nvSpPr>
-        <p:spPr>
-          <a:xfrm>
-            <a:off x="548640" y="2203704"/>
-            <a:ext cx="5394960" cy="749808"/>
+              <a:t>54 auto-flags already marked: pediatric offices, addiction medicine (Gammons), possible competitors, ortho groups with in-house spine, neurosurgeons. Confirm or override.</a:t>
+            </a:r>
+            <a:endParaRPr lang="en-US" sz="1250" dirty="0"/>
+          </a:p>
+        </p:txBody>
+      </p:sp>
+      <p:sp>
+        <p:nvSpPr>
+          <p:cNvPr id="8" name="Text 6"/>
+          <p:cNvSpPr/>
+          <p:nvPr/>
+        </p:nvSpPr>
+        <p:spPr>
+          <a:xfrm>
+            <a:off x="548640" y="3803904"/>
+            <a:ext cx="2377440" cy="822960"/>
           </a:xfrm>
           <a:prstGeom prst="rect">
             <a:avLst/>
@@ -4087,31 +2120,134 @@
           <a:bodyPr wrap="square" rtlCol="0" anchor="ctr"/>
           <a:lstStyle/>
           <a:p>
-            <a:pPr indent="0" marL="0">
+            <a:pPr marL="0" indent="0">
+              <a:buNone/>
+            </a:pPr>
+            <a:r>
+              <a:rPr lang="en-US" sz="1200" b="1" kern="0" spc="150" dirty="0">
+                <a:solidFill>
+                  <a:srgbClr val="49A698"/>
+                </a:solidFill>
+                <a:latin typeface="Calibri" pitchFamily="34" charset="0"/>
+                <a:ea typeface="Calibri" pitchFamily="34" charset="-122"/>
+                <a:cs typeface="Calibri" pitchFamily="34" charset="-120"/>
+              </a:rPr>
+              <a:t>ONE RULE</a:t>
+            </a:r>
+            <a:endParaRPr lang="en-US" sz="1200" dirty="0"/>
+          </a:p>
+        </p:txBody>
+      </p:sp>
+      <p:sp>
+        <p:nvSpPr>
+          <p:cNvPr id="9" name="Text 7"/>
+          <p:cNvSpPr/>
+          <p:nvPr/>
+        </p:nvSpPr>
+        <p:spPr>
+          <a:xfrm>
+            <a:off x="3108960" y="3803904"/>
+            <a:ext cx="8503920" cy="1051560"/>
+          </a:xfrm>
+          <a:prstGeom prst="rect">
+            <a:avLst/>
+          </a:prstGeom>
+          <a:noFill/>
+          <a:ln/>
+        </p:spPr>
+        <p:txBody>
+          <a:bodyPr wrap="square" rtlCol="0" anchor="ctr"/>
+          <a:lstStyle/>
+          <a:p>
+            <a:pPr marL="0" indent="0">
               <a:lnSpc>
-                <a:spcPct val="105000"/>
+                <a:spcPct val="112000"/>
               </a:lnSpc>
               <a:buNone/>
             </a:pPr>
             <a:r>
-              <a:rPr lang="en-US" sz="1150" b="1" dirty="0">
-                <a:solidFill>
-                  <a:srgbClr val="1F4E4A"/>
-                </a:solidFill>
-                <a:latin typeface="Calibri" pitchFamily="34" charset="0"/>
-                <a:ea typeface="Calibri" pitchFamily="34" charset="-122"/>
-                <a:cs typeface="Calibri" pitchFamily="34" charset="-120"/>
-              </a:rPr>
-              <a:t>NP — </a:t>
-            </a:r>
-            <a:pPr indent="0" marL="0">
+              <a:rPr lang="en-US" sz="1250" dirty="0">
+                <a:solidFill>
+                  <a:srgbClr val="14322C"/>
+                </a:solidFill>
+                <a:latin typeface="Calibri" pitchFamily="34" charset="0"/>
+                <a:ea typeface="Calibri" pitchFamily="34" charset="-122"/>
+                <a:cs typeface="Calibri" pitchFamily="34" charset="-120"/>
+              </a:rPr>
+              <a:t>Producing accounts are never deleted on a hunch — flag “verify relationship” instead. Removal needs a reason; that's what makes the final list defensible.</a:t>
+            </a:r>
+            <a:endParaRPr lang="en-US" sz="1250" dirty="0"/>
+          </a:p>
+        </p:txBody>
+      </p:sp>
+      <p:sp>
+        <p:nvSpPr>
+          <p:cNvPr id="10" name="Text 8"/>
+          <p:cNvSpPr/>
+          <p:nvPr/>
+        </p:nvSpPr>
+        <p:spPr>
+          <a:xfrm>
+            <a:off x="548640" y="4974336"/>
+            <a:ext cx="2377440" cy="822960"/>
+          </a:xfrm>
+          <a:prstGeom prst="rect">
+            <a:avLst/>
+          </a:prstGeom>
+          <a:noFill/>
+          <a:ln/>
+        </p:spPr>
+        <p:txBody>
+          <a:bodyPr wrap="square" rtlCol="0" anchor="ctr"/>
+          <a:lstStyle/>
+          <a:p>
+            <a:pPr marL="0" indent="0">
+              <a:buNone/>
+            </a:pPr>
+            <a:r>
+              <a:rPr lang="en-US" sz="1200" b="1" kern="0" spc="150" dirty="0">
+                <a:solidFill>
+                  <a:srgbClr val="49A698"/>
+                </a:solidFill>
+                <a:latin typeface="Calibri" pitchFamily="34" charset="0"/>
+                <a:ea typeface="Calibri" pitchFamily="34" charset="-122"/>
+                <a:cs typeface="Calibri" pitchFamily="34" charset="-120"/>
+              </a:rPr>
+              <a:t>WHAT HAPPENS THEN</a:t>
+            </a:r>
+            <a:endParaRPr lang="en-US" sz="1200" dirty="0"/>
+          </a:p>
+        </p:txBody>
+      </p:sp>
+      <p:sp>
+        <p:nvSpPr>
+          <p:cNvPr id="11" name="Text 9"/>
+          <p:cNvSpPr/>
+          <p:nvPr/>
+        </p:nvSpPr>
+        <p:spPr>
+          <a:xfrm>
+            <a:off x="3108960" y="4974336"/>
+            <a:ext cx="8503920" cy="1051560"/>
+          </a:xfrm>
+          <a:prstGeom prst="rect">
+            <a:avLst/>
+          </a:prstGeom>
+          <a:noFill/>
+          <a:ln/>
+        </p:spPr>
+        <p:txBody>
+          <a:bodyPr wrap="square" rtlCol="0" anchor="ctr"/>
+          <a:lstStyle/>
+          <a:p>
+            <a:pPr marL="0" indent="0">
               <a:lnSpc>
-                <a:spcPct val="105000"/>
+                <a:spcPct val="112000"/>
               </a:lnSpc>
               <a:buNone/>
             </a:pPr>
             <a:r>
-              <a:rPr lang="en-US" sz="1150" dirty="0">
+              <a:rPr lang="en-US" sz="1250" dirty="0">
                 <a:solidFill>
                   <a:srgbClr val="14322C"/>
                 </a:solidFill>
@@ -4119,599 +2255,9 @@
                 <a:ea typeface="Calibri" pitchFamily="34" charset="-122"/>
                 <a:cs typeface="Calibri" pitchFamily="34" charset="-120"/>
               </a:rPr>
-              <a:t>New patient (first appointment).</a:t>
-            </a:r>
-            <a:endParaRPr lang="en-US" sz="1150" dirty="0"/>
-          </a:p>
-        </p:txBody>
-      </p:sp>
-      <p:sp>
-        <p:nvSpPr>
-          <p:cNvPr id="6" name="Text 4"/>
-          <p:cNvSpPr/>
-          <p:nvPr/>
-        </p:nvSpPr>
-        <p:spPr>
-          <a:xfrm>
-            <a:off x="548640" y="2990088"/>
-            <a:ext cx="5394960" cy="749808"/>
-          </a:xfrm>
-          <a:prstGeom prst="rect">
-            <a:avLst/>
-          </a:prstGeom>
-          <a:noFill/>
-          <a:ln/>
-        </p:spPr>
-        <p:txBody>
-          <a:bodyPr wrap="square" rtlCol="0" anchor="ctr"/>
-          <a:lstStyle/>
-          <a:p>
-            <a:pPr indent="0" marL="0">
-              <a:lnSpc>
-                <a:spcPct val="105000"/>
-              </a:lnSpc>
-              <a:buNone/>
-            </a:pPr>
-            <a:r>
-              <a:rPr lang="en-US" sz="1150" b="1" dirty="0">
-                <a:solidFill>
-                  <a:srgbClr val="1F4E4A"/>
-                </a:solidFill>
-                <a:latin typeface="Calibri" pitchFamily="34" charset="0"/>
-                <a:ea typeface="Calibri" pitchFamily="34" charset="-122"/>
-                <a:cs typeface="Calibri" pitchFamily="34" charset="-120"/>
-              </a:rPr>
-              <a:t>B2B / B2C — </a:t>
-            </a:r>
-            <a:pPr indent="0" marL="0">
-              <a:lnSpc>
-                <a:spcPct val="105000"/>
-              </a:lnSpc>
-              <a:buNone/>
-            </a:pPr>
-            <a:r>
-              <a:rPr lang="en-US" sz="1150" dirty="0">
-                <a:solidFill>
-                  <a:srgbClr val="14322C"/>
-                </a:solidFill>
-                <a:latin typeface="Calibri" pitchFamily="34" charset="0"/>
-                <a:ea typeface="Calibri" pitchFamily="34" charset="-122"/>
-                <a:cs typeface="Calibri" pitchFamily="34" charset="-120"/>
-              </a:rPr>
-              <a:t>Referred through a practice / came directly. B2C is inferred (total − B2B) until Analytics validates.</a:t>
-            </a:r>
-            <a:endParaRPr lang="en-US" sz="1150" dirty="0"/>
-          </a:p>
-        </p:txBody>
-      </p:sp>
-      <p:sp>
-        <p:nvSpPr>
-          <p:cNvPr id="7" name="Text 5"/>
-          <p:cNvSpPr/>
-          <p:nvPr/>
-        </p:nvSpPr>
-        <p:spPr>
-          <a:xfrm>
-            <a:off x="548640" y="3776472"/>
-            <a:ext cx="5394960" cy="749808"/>
-          </a:xfrm>
-          <a:prstGeom prst="rect">
-            <a:avLst/>
-          </a:prstGeom>
-          <a:noFill/>
-          <a:ln/>
-        </p:spPr>
-        <p:txBody>
-          <a:bodyPr wrap="square" rtlCol="0" anchor="ctr"/>
-          <a:lstStyle/>
-          <a:p>
-            <a:pPr indent="0" marL="0">
-              <a:lnSpc>
-                <a:spcPct val="105000"/>
-              </a:lnSpc>
-              <a:buNone/>
-            </a:pPr>
-            <a:r>
-              <a:rPr lang="en-US" sz="1150" b="1" dirty="0">
-                <a:solidFill>
-                  <a:srgbClr val="1F4E4A"/>
-                </a:solidFill>
-                <a:latin typeface="Calibri" pitchFamily="34" charset="0"/>
-                <a:ea typeface="Calibri" pitchFamily="34" charset="-122"/>
-                <a:cs typeface="Calibri" pitchFamily="34" charset="-120"/>
-              </a:rPr>
-              <a:t>MMC — </a:t>
-            </a:r>
-            <a:pPr indent="0" marL="0">
-              <a:lnSpc>
-                <a:spcPct val="105000"/>
-              </a:lnSpc>
-              <a:buNone/>
-            </a:pPr>
-            <a:r>
-              <a:rPr lang="en-US" sz="1150" dirty="0">
-                <a:solidFill>
-                  <a:srgbClr val="14322C"/>
-                </a:solidFill>
-                <a:latin typeface="Calibri" pitchFamily="34" charset="0"/>
-                <a:ea typeface="Calibri" pitchFamily="34" charset="-122"/>
-                <a:cs typeface="Calibri" pitchFamily="34" charset="-120"/>
-              </a:rPr>
-              <a:t>Map My Customers — the field CRM you check into.</a:t>
-            </a:r>
-            <a:endParaRPr lang="en-US" sz="1150" dirty="0"/>
-          </a:p>
-        </p:txBody>
-      </p:sp>
-      <p:sp>
-        <p:nvSpPr>
-          <p:cNvPr id="8" name="Text 6"/>
-          <p:cNvSpPr/>
-          <p:nvPr/>
-        </p:nvSpPr>
-        <p:spPr>
-          <a:xfrm>
-            <a:off x="548640" y="4562856"/>
-            <a:ext cx="5394960" cy="749808"/>
-          </a:xfrm>
-          <a:prstGeom prst="rect">
-            <a:avLst/>
-          </a:prstGeom>
-          <a:noFill/>
-          <a:ln/>
-        </p:spPr>
-        <p:txBody>
-          <a:bodyPr wrap="square" rtlCol="0" anchor="ctr"/>
-          <a:lstStyle/>
-          <a:p>
-            <a:pPr indent="0" marL="0">
-              <a:lnSpc>
-                <a:spcPct val="105000"/>
-              </a:lnSpc>
-              <a:buNone/>
-            </a:pPr>
-            <a:r>
-              <a:rPr lang="en-US" sz="1150" b="1" dirty="0">
-                <a:solidFill>
-                  <a:srgbClr val="1F4E4A"/>
-                </a:solidFill>
-                <a:latin typeface="Calibri" pitchFamily="34" charset="0"/>
-                <a:ea typeface="Calibri" pitchFamily="34" charset="-122"/>
-                <a:cs typeface="Calibri" pitchFamily="34" charset="-120"/>
-              </a:rPr>
-              <a:t>PER number — </a:t>
-            </a:r>
-            <a:pPr indent="0" marL="0">
-              <a:lnSpc>
-                <a:spcPct val="105000"/>
-              </a:lnSpc>
-              <a:buNone/>
-            </a:pPr>
-            <a:r>
-              <a:rPr lang="en-US" sz="1150" dirty="0">
-                <a:solidFill>
-                  <a:srgbClr val="14322C"/>
-                </a:solidFill>
-                <a:latin typeface="Calibri" pitchFamily="34" charset="0"/>
-                <a:ea typeface="Calibri" pitchFamily="34" charset="-122"/>
-                <a:cs typeface="Calibri" pitchFamily="34" charset="-120"/>
-              </a:rPr>
-              <a:t>The patient ID in the referral export; distinct PER = one patient.</a:t>
-            </a:r>
-            <a:endParaRPr lang="en-US" sz="1150" dirty="0"/>
-          </a:p>
-        </p:txBody>
-      </p:sp>
-      <p:sp>
-        <p:nvSpPr>
-          <p:cNvPr id="9" name="Text 7"/>
-          <p:cNvSpPr/>
-          <p:nvPr/>
-        </p:nvSpPr>
-        <p:spPr>
-          <a:xfrm>
-            <a:off x="548640" y="5349240"/>
-            <a:ext cx="5394960" cy="749808"/>
-          </a:xfrm>
-          <a:prstGeom prst="rect">
-            <a:avLst/>
-          </a:prstGeom>
-          <a:noFill/>
-          <a:ln/>
-        </p:spPr>
-        <p:txBody>
-          <a:bodyPr wrap="square" rtlCol="0" anchor="ctr"/>
-          <a:lstStyle/>
-          <a:p>
-            <a:pPr indent="0" marL="0">
-              <a:lnSpc>
-                <a:spcPct val="105000"/>
-              </a:lnSpc>
-              <a:buNone/>
-            </a:pPr>
-            <a:r>
-              <a:rPr lang="en-US" sz="1150" b="1" dirty="0">
-                <a:solidFill>
-                  <a:srgbClr val="1F4E4A"/>
-                </a:solidFill>
-                <a:latin typeface="Calibri" pitchFamily="34" charset="0"/>
-                <a:ea typeface="Calibri" pitchFamily="34" charset="-122"/>
-                <a:cs typeface="Calibri" pitchFamily="34" charset="-120"/>
-              </a:rPr>
-              <a:t>Attributed patient — </a:t>
-            </a:r>
-            <a:pPr indent="0" marL="0">
-              <a:lnSpc>
-                <a:spcPct val="105000"/>
-              </a:lnSpc>
-              <a:buNone/>
-            </a:pPr>
-            <a:r>
-              <a:rPr lang="en-US" sz="1150" dirty="0">
-                <a:solidFill>
-                  <a:srgbClr val="14322C"/>
-                </a:solidFill>
-                <a:latin typeface="Calibri" pitchFamily="34" charset="0"/>
-                <a:ea typeface="Calibri" pitchFamily="34" charset="-122"/>
-                <a:cs typeface="Calibri" pitchFamily="34" charset="-120"/>
-              </a:rPr>
-              <a:t>Referral matched to a practice — NOT a confirmed kept visit.</a:t>
-            </a:r>
-            <a:endParaRPr lang="en-US" sz="1150" dirty="0"/>
-          </a:p>
-        </p:txBody>
-      </p:sp>
-      <p:sp>
-        <p:nvSpPr>
-          <p:cNvPr id="10" name="Text 8"/>
-          <p:cNvSpPr/>
-          <p:nvPr/>
-        </p:nvSpPr>
-        <p:spPr>
-          <a:xfrm>
-            <a:off x="6263640" y="1417320"/>
-            <a:ext cx="5394960" cy="749808"/>
-          </a:xfrm>
-          <a:prstGeom prst="rect">
-            <a:avLst/>
-          </a:prstGeom>
-          <a:noFill/>
-          <a:ln/>
-        </p:spPr>
-        <p:txBody>
-          <a:bodyPr wrap="square" rtlCol="0" anchor="ctr"/>
-          <a:lstStyle/>
-          <a:p>
-            <a:pPr indent="0" marL="0">
-              <a:lnSpc>
-                <a:spcPct val="105000"/>
-              </a:lnSpc>
-              <a:buNone/>
-            </a:pPr>
-            <a:r>
-              <a:rPr lang="en-US" sz="1150" b="1" dirty="0">
-                <a:solidFill>
-                  <a:srgbClr val="1F4E4A"/>
-                </a:solidFill>
-                <a:latin typeface="Calibri" pitchFamily="34" charset="0"/>
-                <a:ea typeface="Calibri" pitchFamily="34" charset="-122"/>
-                <a:cs typeface="Calibri" pitchFamily="34" charset="-120"/>
-              </a:rPr>
-              <a:t>Evidence band — </a:t>
-            </a:r>
-            <a:pPr indent="0" marL="0">
-              <a:lnSpc>
-                <a:spcPct val="105000"/>
-              </a:lnSpc>
-              <a:buNone/>
-            </a:pPr>
-            <a:r>
-              <a:rPr lang="en-US" sz="1150" dirty="0">
-                <a:solidFill>
-                  <a:srgbClr val="14322C"/>
-                </a:solidFill>
-                <a:latin typeface="Calibri" pitchFamily="34" charset="0"/>
-                <a:ea typeface="Calibri" pitchFamily="34" charset="-122"/>
-                <a:cs typeface="Calibri" pitchFamily="34" charset="-120"/>
-              </a:rPr>
-              <a:t>What an account actually sent: repeat spine · one spine · ortho · other · nothing (prospect).</a:t>
-            </a:r>
-            <a:endParaRPr lang="en-US" sz="1150" dirty="0"/>
-          </a:p>
-        </p:txBody>
-      </p:sp>
-      <p:sp>
-        <p:nvSpPr>
-          <p:cNvPr id="11" name="Text 9"/>
-          <p:cNvSpPr/>
-          <p:nvPr/>
-        </p:nvSpPr>
-        <p:spPr>
-          <a:xfrm>
-            <a:off x="6263640" y="2203704"/>
-            <a:ext cx="5394960" cy="749808"/>
-          </a:xfrm>
-          <a:prstGeom prst="rect">
-            <a:avLst/>
-          </a:prstGeom>
-          <a:noFill/>
-          <a:ln/>
-        </p:spPr>
-        <p:txBody>
-          <a:bodyPr wrap="square" rtlCol="0" anchor="ctr"/>
-          <a:lstStyle/>
-          <a:p>
-            <a:pPr indent="0" marL="0">
-              <a:lnSpc>
-                <a:spcPct val="105000"/>
-              </a:lnSpc>
-              <a:buNone/>
-            </a:pPr>
-            <a:r>
-              <a:rPr lang="en-US" sz="1150" b="1" dirty="0">
-                <a:solidFill>
-                  <a:srgbClr val="1F4E4A"/>
-                </a:solidFill>
-                <a:latin typeface="Calibri" pitchFamily="34" charset="0"/>
-                <a:ea typeface="Calibri" pitchFamily="34" charset="-122"/>
-                <a:cs typeface="Calibri" pitchFamily="34" charset="-120"/>
-              </a:rPr>
-              <a:t>Wave 1 — </a:t>
-            </a:r>
-            <a:pPr indent="0" marL="0">
-              <a:lnSpc>
-                <a:spcPct val="105000"/>
-              </a:lnSpc>
-              <a:buNone/>
-            </a:pPr>
-            <a:r>
-              <a:rPr lang="en-US" sz="1150" dirty="0">
-                <a:solidFill>
-                  <a:srgbClr val="14322C"/>
-                </a:solidFill>
-                <a:latin typeface="Calibri" pitchFamily="34" charset="0"/>
-                <a:ea typeface="Calibri" pitchFamily="34" charset="-122"/>
-                <a:cs typeface="Calibri" pitchFamily="34" charset="-120"/>
-              </a:rPr>
-              <a:t>The 90 proven senders that never wait 2+ weeks.</a:t>
-            </a:r>
-            <a:endParaRPr lang="en-US" sz="1150" dirty="0"/>
-          </a:p>
-        </p:txBody>
-      </p:sp>
-      <p:sp>
-        <p:nvSpPr>
-          <p:cNvPr id="12" name="Text 10"/>
-          <p:cNvSpPr/>
-          <p:nvPr/>
-        </p:nvSpPr>
-        <p:spPr>
-          <a:xfrm>
-            <a:off x="6263640" y="2990088"/>
-            <a:ext cx="5394960" cy="749808"/>
-          </a:xfrm>
-          <a:prstGeom prst="rect">
-            <a:avLst/>
-          </a:prstGeom>
-          <a:noFill/>
-          <a:ln/>
-        </p:spPr>
-        <p:txBody>
-          <a:bodyPr wrap="square" rtlCol="0" anchor="ctr"/>
-          <a:lstStyle/>
-          <a:p>
-            <a:pPr indent="0" marL="0">
-              <a:lnSpc>
-                <a:spcPct val="105000"/>
-              </a:lnSpc>
-              <a:buNone/>
-            </a:pPr>
-            <a:r>
-              <a:rPr lang="en-US" sz="1150" b="1" dirty="0">
-                <a:solidFill>
-                  <a:srgbClr val="1F4E4A"/>
-                </a:solidFill>
-                <a:latin typeface="Calibri" pitchFamily="34" charset="0"/>
-                <a:ea typeface="Calibri" pitchFamily="34" charset="-122"/>
-                <a:cs typeface="Calibri" pitchFamily="34" charset="-120"/>
-              </a:rPr>
-              <a:t>Visit-day — </a:t>
-            </a:r>
-            <a:pPr indent="0" marL="0">
-              <a:lnSpc>
-                <a:spcPct val="105000"/>
-              </a:lnSpc>
-              <a:buNone/>
-            </a:pPr>
-            <a:r>
-              <a:rPr lang="en-US" sz="1150" dirty="0">
-                <a:solidFill>
-                  <a:srgbClr val="14322C"/>
-                </a:solidFill>
-                <a:latin typeface="Calibri" pitchFamily="34" charset="0"/>
-                <a:ea typeface="Calibri" pitchFamily="34" charset="-122"/>
-                <a:cs typeface="Calibri" pitchFamily="34" charset="-120"/>
-              </a:rPr>
-              <a:t>One PL, one practice, one date — the activity unit.</a:t>
-            </a:r>
-            <a:endParaRPr lang="en-US" sz="1150" dirty="0"/>
-          </a:p>
-        </p:txBody>
-      </p:sp>
-      <p:sp>
-        <p:nvSpPr>
-          <p:cNvPr id="13" name="Text 11"/>
-          <p:cNvSpPr/>
-          <p:nvPr/>
-        </p:nvSpPr>
-        <p:spPr>
-          <a:xfrm>
-            <a:off x="6263640" y="3776472"/>
-            <a:ext cx="5394960" cy="749808"/>
-          </a:xfrm>
-          <a:prstGeom prst="rect">
-            <a:avLst/>
-          </a:prstGeom>
-          <a:noFill/>
-          <a:ln/>
-        </p:spPr>
-        <p:txBody>
-          <a:bodyPr wrap="square" rtlCol="0" anchor="ctr"/>
-          <a:lstStyle/>
-          <a:p>
-            <a:pPr indent="0" marL="0">
-              <a:lnSpc>
-                <a:spcPct val="105000"/>
-              </a:lnSpc>
-              <a:buNone/>
-            </a:pPr>
-            <a:r>
-              <a:rPr lang="en-US" sz="1150" b="1" dirty="0">
-                <a:solidFill>
-                  <a:srgbClr val="1F4E4A"/>
-                </a:solidFill>
-                <a:latin typeface="Calibri" pitchFamily="34" charset="0"/>
-                <a:ea typeface="Calibri" pitchFamily="34" charset="-122"/>
-                <a:cs typeface="Calibri" pitchFamily="34" charset="-120"/>
-              </a:rPr>
-              <a:t>Lag — </a:t>
-            </a:r>
-            <a:pPr indent="0" marL="0">
-              <a:lnSpc>
-                <a:spcPct val="105000"/>
-              </a:lnSpc>
-              <a:buNone/>
-            </a:pPr>
-            <a:r>
-              <a:rPr lang="en-US" sz="1150" dirty="0">
-                <a:solidFill>
-                  <a:srgbClr val="14322C"/>
-                </a:solidFill>
-                <a:latin typeface="Calibri" pitchFamily="34" charset="0"/>
-                <a:ea typeface="Calibri" pitchFamily="34" charset="-122"/>
-                <a:cs typeface="Calibri" pitchFamily="34" charset="-120"/>
-              </a:rPr>
-              <a:t>Visit → first appointment: median 31 days. Today's work = September's patients.</a:t>
-            </a:r>
-            <a:endParaRPr lang="en-US" sz="1150" dirty="0"/>
-          </a:p>
-        </p:txBody>
-      </p:sp>
-      <p:sp>
-        <p:nvSpPr>
-          <p:cNvPr id="14" name="Text 12"/>
-          <p:cNvSpPr/>
-          <p:nvPr/>
-        </p:nvSpPr>
-        <p:spPr>
-          <a:xfrm>
-            <a:off x="6263640" y="4562856"/>
-            <a:ext cx="5394960" cy="749808"/>
-          </a:xfrm>
-          <a:prstGeom prst="rect">
-            <a:avLst/>
-          </a:prstGeom>
-          <a:noFill/>
-          <a:ln/>
-        </p:spPr>
-        <p:txBody>
-          <a:bodyPr wrap="square" rtlCol="0" anchor="ctr"/>
-          <a:lstStyle/>
-          <a:p>
-            <a:pPr indent="0" marL="0">
-              <a:lnSpc>
-                <a:spcPct val="105000"/>
-              </a:lnSpc>
-              <a:buNone/>
-            </a:pPr>
-            <a:r>
-              <a:rPr lang="en-US" sz="1150" b="1" dirty="0">
-                <a:solidFill>
-                  <a:srgbClr val="1F4E4A"/>
-                </a:solidFill>
-                <a:latin typeface="Calibri" pitchFamily="34" charset="0"/>
-                <a:ea typeface="Calibri" pitchFamily="34" charset="-122"/>
-                <a:cs typeface="Calibri" pitchFamily="34" charset="-120"/>
-              </a:rPr>
-              <a:t>WC / PI / no-fault — </a:t>
-            </a:r>
-            <a:pPr indent="0" marL="0">
-              <a:lnSpc>
-                <a:spcPct val="105000"/>
-              </a:lnSpc>
-              <a:buNone/>
-            </a:pPr>
-            <a:r>
-              <a:rPr lang="en-US" sz="1150" dirty="0">
-                <a:solidFill>
-                  <a:srgbClr val="14322C"/>
-                </a:solidFill>
-                <a:latin typeface="Calibri" pitchFamily="34" charset="0"/>
-                <a:ea typeface="Calibri" pitchFamily="34" charset="-122"/>
-                <a:cs typeface="Calibri" pitchFamily="34" charset="-120"/>
-              </a:rPr>
-              <a:t>Workers' comp, personal injury, Michigan auto — accepted, no referral, no copay.</a:t>
-            </a:r>
-            <a:endParaRPr lang="en-US" sz="1150" dirty="0"/>
-          </a:p>
-        </p:txBody>
-      </p:sp>
-      <p:sp>
-        <p:nvSpPr>
-          <p:cNvPr id="15" name="Text 13"/>
-          <p:cNvSpPr/>
-          <p:nvPr/>
-        </p:nvSpPr>
-        <p:spPr>
-          <a:xfrm>
-            <a:off x="6263640" y="5349240"/>
-            <a:ext cx="5394960" cy="749808"/>
-          </a:xfrm>
-          <a:prstGeom prst="rect">
-            <a:avLst/>
-          </a:prstGeom>
-          <a:noFill/>
-          <a:ln/>
-        </p:spPr>
-        <p:txBody>
-          <a:bodyPr wrap="square" rtlCol="0" anchor="ctr"/>
-          <a:lstStyle/>
-          <a:p>
-            <a:pPr indent="0" marL="0">
-              <a:lnSpc>
-                <a:spcPct val="105000"/>
-              </a:lnSpc>
-              <a:buNone/>
-            </a:pPr>
-            <a:r>
-              <a:rPr lang="en-US" sz="1150" b="1" dirty="0">
-                <a:solidFill>
-                  <a:srgbClr val="1F4E4A"/>
-                </a:solidFill>
-                <a:latin typeface="Calibri" pitchFamily="34" charset="0"/>
-                <a:ea typeface="Calibri" pitchFamily="34" charset="-122"/>
-                <a:cs typeface="Calibri" pitchFamily="34" charset="-120"/>
-              </a:rPr>
-              <a:t>FQHC — </a:t>
-            </a:r>
-            <a:pPr indent="0" marL="0">
-              <a:lnSpc>
-                <a:spcPct val="105000"/>
-              </a:lnSpc>
-              <a:buNone/>
-            </a:pPr>
-            <a:r>
-              <a:rPr lang="en-US" sz="1150" dirty="0">
-                <a:solidFill>
-                  <a:srgbClr val="14322C"/>
-                </a:solidFill>
-                <a:latin typeface="Calibri" pitchFamily="34" charset="0"/>
-                <a:ea typeface="Calibri" pitchFamily="34" charset="-122"/>
-                <a:cs typeface="Calibri" pitchFamily="34" charset="-120"/>
-              </a:rPr>
-              <a:t>Community health center — usually Medicaid-heavy (red payer chip).</a:t>
-            </a:r>
-            <a:endParaRPr lang="en-US" sz="1150" dirty="0"/>
+              <a:t>Jul 31: approved universe locked, routes regenerated, the app refreshes. Aug 3: we run on a book everyone trusts — because you built it.</a:t>
+            </a:r>
+            <a:endParaRPr lang="en-US" sz="1250" dirty="0"/>
           </a:p>
         </p:txBody>
       </p:sp>
@@ -4723,7 +2269,7 @@
 </p:sld>
 </file>
 
-<file path=ppt/slides/slide13.xml><?xml version="1.0" encoding="utf-8"?>
+<file path=ppt/slides/slide11.xml><?xml version="1.0" encoding="utf-8"?>
 <p:sld xmlns:a="http://schemas.openxmlformats.org/drawingml/2006/main" xmlns:r="http://schemas.openxmlformats.org/officeDocument/2006/relationships" xmlns:p="http://schemas.openxmlformats.org/presentationml/2006/main">
   <p:cSld name="Slide 13">
     <p:spTree>
@@ -4761,7 +2307,7 @@
           <a:bodyPr wrap="square" rtlCol="0" anchor="ctr"/>
           <a:lstStyle/>
           <a:p>
-            <a:pPr indent="0" marL="0">
+            <a:pPr marL="0" indent="0">
               <a:buNone/>
             </a:pPr>
             <a:r>
@@ -4773,7 +2319,7 @@
                 <a:ea typeface="Cambria" pitchFamily="34" charset="-122"/>
                 <a:cs typeface="Cambria" pitchFamily="34" charset="-120"/>
               </a:rPr>
-              <a:t>“Configured Frequency,” explained honestly</a:t>
+              <a:t>Say what we mean — the shared vocabulary</a:t>
             </a:r>
             <a:endParaRPr lang="en-US" sz="2900" dirty="0"/>
           </a:p>
@@ -4800,7 +2346,746 @@
           <a:bodyPr wrap="square" rtlCol="0" anchor="ctr"/>
           <a:lstStyle/>
           <a:p>
-            <a:pPr indent="0" marL="0">
+            <a:pPr marL="0" indent="0">
+              <a:buNone/>
+            </a:pPr>
+            <a:r>
+              <a:rPr lang="en-US" sz="1300" dirty="0">
+                <a:solidFill>
+                  <a:srgbClr val="5E7773"/>
+                </a:solidFill>
+                <a:latin typeface="Calibri" pitchFamily="34" charset="0"/>
+                <a:ea typeface="Calibri" pitchFamily="34" charset="-122"/>
+                <a:cs typeface="Calibri" pitchFamily="34" charset="-120"/>
+              </a:rPr>
+              <a:t>Full glossary in pm/glossary.md — flag anything that reads wrong</a:t>
+            </a:r>
+            <a:endParaRPr lang="en-US" sz="1300" dirty="0"/>
+          </a:p>
+        </p:txBody>
+      </p:sp>
+      <p:sp>
+        <p:nvSpPr>
+          <p:cNvPr id="4" name="Text 2"/>
+          <p:cNvSpPr/>
+          <p:nvPr/>
+        </p:nvSpPr>
+        <p:spPr>
+          <a:xfrm>
+            <a:off x="548640" y="1417320"/>
+            <a:ext cx="5394960" cy="749808"/>
+          </a:xfrm>
+          <a:prstGeom prst="rect">
+            <a:avLst/>
+          </a:prstGeom>
+          <a:noFill/>
+          <a:ln/>
+        </p:spPr>
+        <p:txBody>
+          <a:bodyPr wrap="square" rtlCol="0" anchor="ctr"/>
+          <a:lstStyle/>
+          <a:p>
+            <a:pPr marL="0" indent="0">
+              <a:lnSpc>
+                <a:spcPct val="105000"/>
+              </a:lnSpc>
+              <a:buNone/>
+            </a:pPr>
+            <a:r>
+              <a:rPr lang="en-US" sz="1150" b="1" dirty="0">
+                <a:solidFill>
+                  <a:srgbClr val="1F4E4A"/>
+                </a:solidFill>
+                <a:latin typeface="Calibri" pitchFamily="34" charset="0"/>
+                <a:ea typeface="Calibri" pitchFamily="34" charset="-122"/>
+                <a:cs typeface="Calibri" pitchFamily="34" charset="-120"/>
+              </a:rPr>
+              <a:t>PL — </a:t>
+            </a:r>
+            <a:r>
+              <a:rPr lang="en-US" sz="1150" dirty="0">
+                <a:solidFill>
+                  <a:srgbClr val="14322C"/>
+                </a:solidFill>
+                <a:latin typeface="Calibri" pitchFamily="34" charset="0"/>
+                <a:ea typeface="Calibri" pitchFamily="34" charset="-122"/>
+                <a:cs typeface="Calibri" pitchFamily="34" charset="-120"/>
+              </a:rPr>
+              <a:t>Physician Liaison — you.</a:t>
+            </a:r>
+            <a:endParaRPr lang="en-US" sz="1150" dirty="0"/>
+          </a:p>
+        </p:txBody>
+      </p:sp>
+      <p:sp>
+        <p:nvSpPr>
+          <p:cNvPr id="5" name="Text 3"/>
+          <p:cNvSpPr/>
+          <p:nvPr/>
+        </p:nvSpPr>
+        <p:spPr>
+          <a:xfrm>
+            <a:off x="548640" y="2203704"/>
+            <a:ext cx="5394960" cy="749808"/>
+          </a:xfrm>
+          <a:prstGeom prst="rect">
+            <a:avLst/>
+          </a:prstGeom>
+          <a:noFill/>
+          <a:ln/>
+        </p:spPr>
+        <p:txBody>
+          <a:bodyPr wrap="square" rtlCol="0" anchor="ctr"/>
+          <a:lstStyle/>
+          <a:p>
+            <a:pPr marL="0" indent="0">
+              <a:lnSpc>
+                <a:spcPct val="105000"/>
+              </a:lnSpc>
+              <a:buNone/>
+            </a:pPr>
+            <a:r>
+              <a:rPr lang="en-US" sz="1150" b="1" dirty="0">
+                <a:solidFill>
+                  <a:srgbClr val="1F4E4A"/>
+                </a:solidFill>
+                <a:latin typeface="Calibri" pitchFamily="34" charset="0"/>
+                <a:ea typeface="Calibri" pitchFamily="34" charset="-122"/>
+                <a:cs typeface="Calibri" pitchFamily="34" charset="-120"/>
+              </a:rPr>
+              <a:t>NP — </a:t>
+            </a:r>
+            <a:r>
+              <a:rPr lang="en-US" sz="1150" dirty="0">
+                <a:solidFill>
+                  <a:srgbClr val="14322C"/>
+                </a:solidFill>
+                <a:latin typeface="Calibri" pitchFamily="34" charset="0"/>
+                <a:ea typeface="Calibri" pitchFamily="34" charset="-122"/>
+                <a:cs typeface="Calibri" pitchFamily="34" charset="-120"/>
+              </a:rPr>
+              <a:t>New patient (first appointment).</a:t>
+            </a:r>
+            <a:endParaRPr lang="en-US" sz="1150" dirty="0"/>
+          </a:p>
+        </p:txBody>
+      </p:sp>
+      <p:sp>
+        <p:nvSpPr>
+          <p:cNvPr id="6" name="Text 4"/>
+          <p:cNvSpPr/>
+          <p:nvPr/>
+        </p:nvSpPr>
+        <p:spPr>
+          <a:xfrm>
+            <a:off x="548640" y="2990088"/>
+            <a:ext cx="5394960" cy="749808"/>
+          </a:xfrm>
+          <a:prstGeom prst="rect">
+            <a:avLst/>
+          </a:prstGeom>
+          <a:noFill/>
+          <a:ln/>
+        </p:spPr>
+        <p:txBody>
+          <a:bodyPr wrap="square" rtlCol="0" anchor="ctr"/>
+          <a:lstStyle/>
+          <a:p>
+            <a:pPr marL="0" indent="0">
+              <a:lnSpc>
+                <a:spcPct val="105000"/>
+              </a:lnSpc>
+              <a:buNone/>
+            </a:pPr>
+            <a:r>
+              <a:rPr lang="en-US" sz="1150" b="1" dirty="0">
+                <a:solidFill>
+                  <a:srgbClr val="1F4E4A"/>
+                </a:solidFill>
+                <a:latin typeface="Calibri" pitchFamily="34" charset="0"/>
+                <a:ea typeface="Calibri" pitchFamily="34" charset="-122"/>
+                <a:cs typeface="Calibri" pitchFamily="34" charset="-120"/>
+              </a:rPr>
+              <a:t>B2B / B2C — </a:t>
+            </a:r>
+            <a:r>
+              <a:rPr lang="en-US" sz="1150" dirty="0">
+                <a:solidFill>
+                  <a:srgbClr val="14322C"/>
+                </a:solidFill>
+                <a:latin typeface="Calibri" pitchFamily="34" charset="0"/>
+                <a:ea typeface="Calibri" pitchFamily="34" charset="-122"/>
+                <a:cs typeface="Calibri" pitchFamily="34" charset="-120"/>
+              </a:rPr>
+              <a:t>Referred through a practice / came directly. B2C is inferred (total − B2B) until Analytics validates.</a:t>
+            </a:r>
+            <a:endParaRPr lang="en-US" sz="1150" dirty="0"/>
+          </a:p>
+        </p:txBody>
+      </p:sp>
+      <p:sp>
+        <p:nvSpPr>
+          <p:cNvPr id="7" name="Text 5"/>
+          <p:cNvSpPr/>
+          <p:nvPr/>
+        </p:nvSpPr>
+        <p:spPr>
+          <a:xfrm>
+            <a:off x="548640" y="3776472"/>
+            <a:ext cx="5394960" cy="749808"/>
+          </a:xfrm>
+          <a:prstGeom prst="rect">
+            <a:avLst/>
+          </a:prstGeom>
+          <a:noFill/>
+          <a:ln/>
+        </p:spPr>
+        <p:txBody>
+          <a:bodyPr wrap="square" rtlCol="0" anchor="ctr"/>
+          <a:lstStyle/>
+          <a:p>
+            <a:pPr marL="0" indent="0">
+              <a:lnSpc>
+                <a:spcPct val="105000"/>
+              </a:lnSpc>
+              <a:buNone/>
+            </a:pPr>
+            <a:r>
+              <a:rPr lang="en-US" sz="1150" b="1" dirty="0">
+                <a:solidFill>
+                  <a:srgbClr val="1F4E4A"/>
+                </a:solidFill>
+                <a:latin typeface="Calibri" pitchFamily="34" charset="0"/>
+                <a:ea typeface="Calibri" pitchFamily="34" charset="-122"/>
+                <a:cs typeface="Calibri" pitchFamily="34" charset="-120"/>
+              </a:rPr>
+              <a:t>MMC — </a:t>
+            </a:r>
+            <a:r>
+              <a:rPr lang="en-US" sz="1150" dirty="0">
+                <a:solidFill>
+                  <a:srgbClr val="14322C"/>
+                </a:solidFill>
+                <a:latin typeface="Calibri" pitchFamily="34" charset="0"/>
+                <a:ea typeface="Calibri" pitchFamily="34" charset="-122"/>
+                <a:cs typeface="Calibri" pitchFamily="34" charset="-120"/>
+              </a:rPr>
+              <a:t>Map My Customers — the field CRM you check into.</a:t>
+            </a:r>
+            <a:endParaRPr lang="en-US" sz="1150" dirty="0"/>
+          </a:p>
+        </p:txBody>
+      </p:sp>
+      <p:sp>
+        <p:nvSpPr>
+          <p:cNvPr id="8" name="Text 6"/>
+          <p:cNvSpPr/>
+          <p:nvPr/>
+        </p:nvSpPr>
+        <p:spPr>
+          <a:xfrm>
+            <a:off x="548640" y="4562856"/>
+            <a:ext cx="5394960" cy="749808"/>
+          </a:xfrm>
+          <a:prstGeom prst="rect">
+            <a:avLst/>
+          </a:prstGeom>
+          <a:noFill/>
+          <a:ln/>
+        </p:spPr>
+        <p:txBody>
+          <a:bodyPr wrap="square" rtlCol="0" anchor="ctr"/>
+          <a:lstStyle/>
+          <a:p>
+            <a:pPr marL="0" indent="0">
+              <a:lnSpc>
+                <a:spcPct val="105000"/>
+              </a:lnSpc>
+              <a:buNone/>
+            </a:pPr>
+            <a:r>
+              <a:rPr lang="en-US" sz="1150" b="1" dirty="0">
+                <a:solidFill>
+                  <a:srgbClr val="1F4E4A"/>
+                </a:solidFill>
+                <a:latin typeface="Calibri" pitchFamily="34" charset="0"/>
+                <a:ea typeface="Calibri" pitchFamily="34" charset="-122"/>
+                <a:cs typeface="Calibri" pitchFamily="34" charset="-120"/>
+              </a:rPr>
+              <a:t>PER number — </a:t>
+            </a:r>
+            <a:r>
+              <a:rPr lang="en-US" sz="1150" dirty="0">
+                <a:solidFill>
+                  <a:srgbClr val="14322C"/>
+                </a:solidFill>
+                <a:latin typeface="Calibri" pitchFamily="34" charset="0"/>
+                <a:ea typeface="Calibri" pitchFamily="34" charset="-122"/>
+                <a:cs typeface="Calibri" pitchFamily="34" charset="-120"/>
+              </a:rPr>
+              <a:t>The patient ID in the referral export; distinct PER = one patient.</a:t>
+            </a:r>
+            <a:endParaRPr lang="en-US" sz="1150" dirty="0"/>
+          </a:p>
+        </p:txBody>
+      </p:sp>
+      <p:sp>
+        <p:nvSpPr>
+          <p:cNvPr id="9" name="Text 7"/>
+          <p:cNvSpPr/>
+          <p:nvPr/>
+        </p:nvSpPr>
+        <p:spPr>
+          <a:xfrm>
+            <a:off x="548640" y="5349240"/>
+            <a:ext cx="5394960" cy="749808"/>
+          </a:xfrm>
+          <a:prstGeom prst="rect">
+            <a:avLst/>
+          </a:prstGeom>
+          <a:noFill/>
+          <a:ln/>
+        </p:spPr>
+        <p:txBody>
+          <a:bodyPr wrap="square" rtlCol="0" anchor="ctr"/>
+          <a:lstStyle/>
+          <a:p>
+            <a:pPr marL="0" indent="0">
+              <a:lnSpc>
+                <a:spcPct val="105000"/>
+              </a:lnSpc>
+              <a:buNone/>
+            </a:pPr>
+            <a:r>
+              <a:rPr lang="en-US" sz="1150" b="1" dirty="0">
+                <a:solidFill>
+                  <a:srgbClr val="1F4E4A"/>
+                </a:solidFill>
+                <a:latin typeface="Calibri" pitchFamily="34" charset="0"/>
+                <a:ea typeface="Calibri" pitchFamily="34" charset="-122"/>
+                <a:cs typeface="Calibri" pitchFamily="34" charset="-120"/>
+              </a:rPr>
+              <a:t>Attributed patient — </a:t>
+            </a:r>
+            <a:r>
+              <a:rPr lang="en-US" sz="1150" dirty="0">
+                <a:solidFill>
+                  <a:srgbClr val="14322C"/>
+                </a:solidFill>
+                <a:latin typeface="Calibri" pitchFamily="34" charset="0"/>
+                <a:ea typeface="Calibri" pitchFamily="34" charset="-122"/>
+                <a:cs typeface="Calibri" pitchFamily="34" charset="-120"/>
+              </a:rPr>
+              <a:t>Referral matched to a practice — NOT a confirmed kept visit.</a:t>
+            </a:r>
+            <a:endParaRPr lang="en-US" sz="1150" dirty="0"/>
+          </a:p>
+        </p:txBody>
+      </p:sp>
+      <p:sp>
+        <p:nvSpPr>
+          <p:cNvPr id="10" name="Text 8"/>
+          <p:cNvSpPr/>
+          <p:nvPr/>
+        </p:nvSpPr>
+        <p:spPr>
+          <a:xfrm>
+            <a:off x="6263640" y="1417320"/>
+            <a:ext cx="5394960" cy="749808"/>
+          </a:xfrm>
+          <a:prstGeom prst="rect">
+            <a:avLst/>
+          </a:prstGeom>
+          <a:noFill/>
+          <a:ln/>
+        </p:spPr>
+        <p:txBody>
+          <a:bodyPr wrap="square" rtlCol="0" anchor="ctr"/>
+          <a:lstStyle/>
+          <a:p>
+            <a:pPr marL="0" indent="0">
+              <a:lnSpc>
+                <a:spcPct val="105000"/>
+              </a:lnSpc>
+              <a:buNone/>
+            </a:pPr>
+            <a:r>
+              <a:rPr lang="en-US" sz="1150" b="1" dirty="0">
+                <a:solidFill>
+                  <a:srgbClr val="1F4E4A"/>
+                </a:solidFill>
+                <a:latin typeface="Calibri" pitchFamily="34" charset="0"/>
+                <a:ea typeface="Calibri" pitchFamily="34" charset="-122"/>
+                <a:cs typeface="Calibri" pitchFamily="34" charset="-120"/>
+              </a:rPr>
+              <a:t>Evidence band — </a:t>
+            </a:r>
+            <a:r>
+              <a:rPr lang="en-US" sz="1150" dirty="0">
+                <a:solidFill>
+                  <a:srgbClr val="14322C"/>
+                </a:solidFill>
+                <a:latin typeface="Calibri" pitchFamily="34" charset="0"/>
+                <a:ea typeface="Calibri" pitchFamily="34" charset="-122"/>
+                <a:cs typeface="Calibri" pitchFamily="34" charset="-120"/>
+              </a:rPr>
+              <a:t>What an account actually sent: repeat spine · one spine · ortho · other · nothing (prospect).</a:t>
+            </a:r>
+            <a:endParaRPr lang="en-US" sz="1150" dirty="0"/>
+          </a:p>
+        </p:txBody>
+      </p:sp>
+      <p:sp>
+        <p:nvSpPr>
+          <p:cNvPr id="11" name="Text 9"/>
+          <p:cNvSpPr/>
+          <p:nvPr/>
+        </p:nvSpPr>
+        <p:spPr>
+          <a:xfrm>
+            <a:off x="6263640" y="2203704"/>
+            <a:ext cx="5394960" cy="749808"/>
+          </a:xfrm>
+          <a:prstGeom prst="rect">
+            <a:avLst/>
+          </a:prstGeom>
+          <a:noFill/>
+          <a:ln/>
+        </p:spPr>
+        <p:txBody>
+          <a:bodyPr wrap="square" rtlCol="0" anchor="ctr"/>
+          <a:lstStyle/>
+          <a:p>
+            <a:pPr marL="0" indent="0">
+              <a:lnSpc>
+                <a:spcPct val="105000"/>
+              </a:lnSpc>
+              <a:buNone/>
+            </a:pPr>
+            <a:r>
+              <a:rPr lang="en-US" sz="1150" b="1" dirty="0">
+                <a:solidFill>
+                  <a:srgbClr val="1F4E4A"/>
+                </a:solidFill>
+                <a:latin typeface="Calibri" pitchFamily="34" charset="0"/>
+                <a:ea typeface="Calibri" pitchFamily="34" charset="-122"/>
+                <a:cs typeface="Calibri" pitchFamily="34" charset="-120"/>
+              </a:rPr>
+              <a:t>Wave 1 — </a:t>
+            </a:r>
+            <a:r>
+              <a:rPr lang="en-US" sz="1150" dirty="0">
+                <a:solidFill>
+                  <a:srgbClr val="14322C"/>
+                </a:solidFill>
+                <a:latin typeface="Calibri" pitchFamily="34" charset="0"/>
+                <a:ea typeface="Calibri" pitchFamily="34" charset="-122"/>
+                <a:cs typeface="Calibri" pitchFamily="34" charset="-120"/>
+              </a:rPr>
+              <a:t>The 90 proven senders that never wait 2+ weeks.</a:t>
+            </a:r>
+            <a:endParaRPr lang="en-US" sz="1150" dirty="0"/>
+          </a:p>
+        </p:txBody>
+      </p:sp>
+      <p:sp>
+        <p:nvSpPr>
+          <p:cNvPr id="12" name="Text 10"/>
+          <p:cNvSpPr/>
+          <p:nvPr/>
+        </p:nvSpPr>
+        <p:spPr>
+          <a:xfrm>
+            <a:off x="6263640" y="2990088"/>
+            <a:ext cx="5394960" cy="749808"/>
+          </a:xfrm>
+          <a:prstGeom prst="rect">
+            <a:avLst/>
+          </a:prstGeom>
+          <a:noFill/>
+          <a:ln/>
+        </p:spPr>
+        <p:txBody>
+          <a:bodyPr wrap="square" rtlCol="0" anchor="ctr"/>
+          <a:lstStyle/>
+          <a:p>
+            <a:pPr marL="0" indent="0">
+              <a:lnSpc>
+                <a:spcPct val="105000"/>
+              </a:lnSpc>
+              <a:buNone/>
+            </a:pPr>
+            <a:r>
+              <a:rPr lang="en-US" sz="1150" b="1" dirty="0">
+                <a:solidFill>
+                  <a:srgbClr val="1F4E4A"/>
+                </a:solidFill>
+                <a:latin typeface="Calibri" pitchFamily="34" charset="0"/>
+                <a:ea typeface="Calibri" pitchFamily="34" charset="-122"/>
+                <a:cs typeface="Calibri" pitchFamily="34" charset="-120"/>
+              </a:rPr>
+              <a:t>Visit-day — </a:t>
+            </a:r>
+            <a:r>
+              <a:rPr lang="en-US" sz="1150" dirty="0">
+                <a:solidFill>
+                  <a:srgbClr val="14322C"/>
+                </a:solidFill>
+                <a:latin typeface="Calibri" pitchFamily="34" charset="0"/>
+                <a:ea typeface="Calibri" pitchFamily="34" charset="-122"/>
+                <a:cs typeface="Calibri" pitchFamily="34" charset="-120"/>
+              </a:rPr>
+              <a:t>One PL, one practice, one date — the activity unit.</a:t>
+            </a:r>
+            <a:endParaRPr lang="en-US" sz="1150" dirty="0"/>
+          </a:p>
+        </p:txBody>
+      </p:sp>
+      <p:sp>
+        <p:nvSpPr>
+          <p:cNvPr id="13" name="Text 11"/>
+          <p:cNvSpPr/>
+          <p:nvPr/>
+        </p:nvSpPr>
+        <p:spPr>
+          <a:xfrm>
+            <a:off x="6263640" y="3776472"/>
+            <a:ext cx="5394960" cy="749808"/>
+          </a:xfrm>
+          <a:prstGeom prst="rect">
+            <a:avLst/>
+          </a:prstGeom>
+          <a:noFill/>
+          <a:ln/>
+        </p:spPr>
+        <p:txBody>
+          <a:bodyPr wrap="square" rtlCol="0" anchor="ctr"/>
+          <a:lstStyle/>
+          <a:p>
+            <a:pPr marL="0" indent="0">
+              <a:lnSpc>
+                <a:spcPct val="105000"/>
+              </a:lnSpc>
+              <a:buNone/>
+            </a:pPr>
+            <a:r>
+              <a:rPr lang="en-US" sz="1150" b="1" dirty="0">
+                <a:solidFill>
+                  <a:srgbClr val="1F4E4A"/>
+                </a:solidFill>
+                <a:latin typeface="Calibri" pitchFamily="34" charset="0"/>
+                <a:ea typeface="Calibri" pitchFamily="34" charset="-122"/>
+                <a:cs typeface="Calibri" pitchFamily="34" charset="-120"/>
+              </a:rPr>
+              <a:t>Lag — </a:t>
+            </a:r>
+            <a:r>
+              <a:rPr lang="en-US" sz="1150" dirty="0">
+                <a:solidFill>
+                  <a:srgbClr val="14322C"/>
+                </a:solidFill>
+                <a:latin typeface="Calibri" pitchFamily="34" charset="0"/>
+                <a:ea typeface="Calibri" pitchFamily="34" charset="-122"/>
+                <a:cs typeface="Calibri" pitchFamily="34" charset="-120"/>
+              </a:rPr>
+              <a:t>Visit → first appointment: median 31 days. Today's work = September's patients.</a:t>
+            </a:r>
+            <a:endParaRPr lang="en-US" sz="1150" dirty="0"/>
+          </a:p>
+        </p:txBody>
+      </p:sp>
+      <p:sp>
+        <p:nvSpPr>
+          <p:cNvPr id="14" name="Text 12"/>
+          <p:cNvSpPr/>
+          <p:nvPr/>
+        </p:nvSpPr>
+        <p:spPr>
+          <a:xfrm>
+            <a:off x="6263640" y="4562856"/>
+            <a:ext cx="5394960" cy="749808"/>
+          </a:xfrm>
+          <a:prstGeom prst="rect">
+            <a:avLst/>
+          </a:prstGeom>
+          <a:noFill/>
+          <a:ln/>
+        </p:spPr>
+        <p:txBody>
+          <a:bodyPr wrap="square" rtlCol="0" anchor="ctr"/>
+          <a:lstStyle/>
+          <a:p>
+            <a:pPr marL="0" indent="0">
+              <a:lnSpc>
+                <a:spcPct val="105000"/>
+              </a:lnSpc>
+              <a:buNone/>
+            </a:pPr>
+            <a:r>
+              <a:rPr lang="en-US" sz="1150" b="1" dirty="0">
+                <a:solidFill>
+                  <a:srgbClr val="1F4E4A"/>
+                </a:solidFill>
+                <a:latin typeface="Calibri" pitchFamily="34" charset="0"/>
+                <a:ea typeface="Calibri" pitchFamily="34" charset="-122"/>
+                <a:cs typeface="Calibri" pitchFamily="34" charset="-120"/>
+              </a:rPr>
+              <a:t>WC / PI / no-fault — </a:t>
+            </a:r>
+            <a:r>
+              <a:rPr lang="en-US" sz="1150" dirty="0">
+                <a:solidFill>
+                  <a:srgbClr val="14322C"/>
+                </a:solidFill>
+                <a:latin typeface="Calibri" pitchFamily="34" charset="0"/>
+                <a:ea typeface="Calibri" pitchFamily="34" charset="-122"/>
+                <a:cs typeface="Calibri" pitchFamily="34" charset="-120"/>
+              </a:rPr>
+              <a:t>Workers' comp, personal injury, Michigan auto — accepted, no referral, no copay.</a:t>
+            </a:r>
+            <a:endParaRPr lang="en-US" sz="1150" dirty="0"/>
+          </a:p>
+        </p:txBody>
+      </p:sp>
+      <p:sp>
+        <p:nvSpPr>
+          <p:cNvPr id="15" name="Text 13"/>
+          <p:cNvSpPr/>
+          <p:nvPr/>
+        </p:nvSpPr>
+        <p:spPr>
+          <a:xfrm>
+            <a:off x="6263640" y="5349240"/>
+            <a:ext cx="5394960" cy="749808"/>
+          </a:xfrm>
+          <a:prstGeom prst="rect">
+            <a:avLst/>
+          </a:prstGeom>
+          <a:noFill/>
+          <a:ln/>
+        </p:spPr>
+        <p:txBody>
+          <a:bodyPr wrap="square" rtlCol="0" anchor="ctr"/>
+          <a:lstStyle/>
+          <a:p>
+            <a:pPr marL="0" indent="0">
+              <a:lnSpc>
+                <a:spcPct val="105000"/>
+              </a:lnSpc>
+              <a:buNone/>
+            </a:pPr>
+            <a:r>
+              <a:rPr lang="en-US" sz="1150" b="1" dirty="0">
+                <a:solidFill>
+                  <a:srgbClr val="1F4E4A"/>
+                </a:solidFill>
+                <a:latin typeface="Calibri" pitchFamily="34" charset="0"/>
+                <a:ea typeface="Calibri" pitchFamily="34" charset="-122"/>
+                <a:cs typeface="Calibri" pitchFamily="34" charset="-120"/>
+              </a:rPr>
+              <a:t>FQHC — </a:t>
+            </a:r>
+            <a:r>
+              <a:rPr lang="en-US" sz="1150" dirty="0">
+                <a:solidFill>
+                  <a:srgbClr val="14322C"/>
+                </a:solidFill>
+                <a:latin typeface="Calibri" pitchFamily="34" charset="0"/>
+                <a:ea typeface="Calibri" pitchFamily="34" charset="-122"/>
+                <a:cs typeface="Calibri" pitchFamily="34" charset="-120"/>
+              </a:rPr>
+              <a:t>Community health center — usually Medicaid-heavy (red payer chip).</a:t>
+            </a:r>
+            <a:endParaRPr lang="en-US" sz="1150" dirty="0"/>
+          </a:p>
+        </p:txBody>
+      </p:sp>
+    </p:spTree>
+  </p:cSld>
+  <p:clrMapOvr>
+    <a:masterClrMapping/>
+  </p:clrMapOvr>
+</p:sld>
+</file>
+
+<file path=ppt/slides/slide12.xml><?xml version="1.0" encoding="utf-8"?>
+<p:sld xmlns:a="http://schemas.openxmlformats.org/drawingml/2006/main" xmlns:r="http://schemas.openxmlformats.org/officeDocument/2006/relationships" xmlns:p="http://schemas.openxmlformats.org/presentationml/2006/main">
+  <p:cSld name="Slide 14">
+    <p:spTree>
+      <p:nvGrpSpPr>
+        <p:cNvPr id="1" name=""/>
+        <p:cNvGrpSpPr/>
+        <p:nvPr/>
+      </p:nvGrpSpPr>
+      <p:grpSpPr>
+        <a:xfrm>
+          <a:off x="0" y="0"/>
+          <a:ext cx="0" cy="0"/>
+          <a:chOff x="0" y="0"/>
+          <a:chExt cx="0" cy="0"/>
+        </a:xfrm>
+      </p:grpSpPr>
+      <p:sp>
+        <p:nvSpPr>
+          <p:cNvPr id="2" name="Text 0"/>
+          <p:cNvSpPr/>
+          <p:nvPr/>
+        </p:nvSpPr>
+        <p:spPr>
+          <a:xfrm>
+            <a:off x="502920" y="256032"/>
+            <a:ext cx="11155680" cy="594360"/>
+          </a:xfrm>
+          <a:prstGeom prst="rect">
+            <a:avLst/>
+          </a:prstGeom>
+          <a:noFill/>
+          <a:ln/>
+        </p:spPr>
+        <p:txBody>
+          <a:bodyPr wrap="square" rtlCol="0" anchor="ctr"/>
+          <a:lstStyle/>
+          <a:p>
+            <a:pPr marL="0" indent="0">
+              <a:buNone/>
+            </a:pPr>
+            <a:r>
+              <a:rPr lang="en-US" sz="2900" b="1" dirty="0">
+                <a:solidFill>
+                  <a:srgbClr val="14322C"/>
+                </a:solidFill>
+                <a:latin typeface="Cambria" pitchFamily="34" charset="0"/>
+                <a:ea typeface="Cambria" pitchFamily="34" charset="-122"/>
+                <a:cs typeface="Cambria" pitchFamily="34" charset="-120"/>
+              </a:rPr>
+              <a:t>“Configured Frequency,” explained honestly</a:t>
+            </a:r>
+            <a:endParaRPr lang="en-US" sz="2900" dirty="0"/>
+          </a:p>
+        </p:txBody>
+      </p:sp>
+      <p:sp>
+        <p:nvSpPr>
+          <p:cNvPr id="3" name="Text 1"/>
+          <p:cNvSpPr/>
+          <p:nvPr/>
+        </p:nvSpPr>
+        <p:spPr>
+          <a:xfrm>
+            <a:off x="502920" y="841248"/>
+            <a:ext cx="11155680" cy="320040"/>
+          </a:xfrm>
+          <a:prstGeom prst="rect">
+            <a:avLst/>
+          </a:prstGeom>
+          <a:noFill/>
+          <a:ln/>
+        </p:spPr>
+        <p:txBody>
+          <a:bodyPr wrap="square" rtlCol="0" anchor="ctr"/>
+          <a:lstStyle/>
+          <a:p>
+            <a:pPr marL="0" indent="0">
               <a:buNone/>
             </a:pPr>
             <a:r>
@@ -4844,6 +3129,13 @@
             <a:prstDash val="solid"/>
           </a:ln>
         </p:spPr>
+        <p:txBody>
+          <a:bodyPr/>
+          <a:lstStyle/>
+          <a:p>
+            <a:endParaRPr lang="en-US"/>
+          </a:p>
+        </p:txBody>
       </p:sp>
       <p:sp>
         <p:nvSpPr>
@@ -4866,11 +3158,11 @@
           <a:bodyPr wrap="square" rtlCol="0" anchor="ctr"/>
           <a:lstStyle/>
           <a:p>
-            <a:pPr indent="0" marL="0">
-              <a:buNone/>
-            </a:pPr>
-            <a:r>
-              <a:rPr lang="en-US" sz="1150" b="1" spc="100" kern="0" dirty="0">
+            <a:pPr marL="0" indent="0">
+              <a:buNone/>
+            </a:pPr>
+            <a:r>
+              <a:rPr lang="en-US" sz="1150" b="1" kern="0" spc="100" dirty="0">
                 <a:solidFill>
                   <a:srgbClr val="1F4E4A"/>
                 </a:solidFill>
@@ -4905,7 +3197,7 @@
           <a:bodyPr wrap="square" rtlCol="0" anchor="ctr"/>
           <a:lstStyle/>
           <a:p>
-            <a:pPr indent="0" marL="0">
+            <a:pPr marL="0" indent="0">
               <a:lnSpc>
                 <a:spcPct val="108000"/>
               </a:lnSpc>
@@ -4952,6 +3244,13 @@
             <a:prstDash val="solid"/>
           </a:ln>
         </p:spPr>
+        <p:txBody>
+          <a:bodyPr/>
+          <a:lstStyle/>
+          <a:p>
+            <a:endParaRPr lang="en-US"/>
+          </a:p>
+        </p:txBody>
       </p:sp>
       <p:sp>
         <p:nvSpPr>
@@ -4974,11 +3273,11 @@
           <a:bodyPr wrap="square" rtlCol="0" anchor="ctr"/>
           <a:lstStyle/>
           <a:p>
-            <a:pPr indent="0" marL="0">
-              <a:buNone/>
-            </a:pPr>
-            <a:r>
-              <a:rPr lang="en-US" sz="1150" b="1" spc="100" kern="0" dirty="0">
+            <a:pPr marL="0" indent="0">
+              <a:buNone/>
+            </a:pPr>
+            <a:r>
+              <a:rPr lang="en-US" sz="1150" b="1" kern="0" spc="100" dirty="0">
                 <a:solidFill>
                   <a:srgbClr val="1F4E4A"/>
                 </a:solidFill>
@@ -5013,7 +3312,7 @@
           <a:bodyPr wrap="square" rtlCol="0" anchor="ctr"/>
           <a:lstStyle/>
           <a:p>
-            <a:pPr indent="0" marL="0">
+            <a:pPr marL="0" indent="0">
               <a:lnSpc>
                 <a:spcPct val="108000"/>
               </a:lnSpc>
@@ -5060,6 +3359,13 @@
             <a:prstDash val="solid"/>
           </a:ln>
         </p:spPr>
+        <p:txBody>
+          <a:bodyPr/>
+          <a:lstStyle/>
+          <a:p>
+            <a:endParaRPr lang="en-US"/>
+          </a:p>
+        </p:txBody>
       </p:sp>
       <p:sp>
         <p:nvSpPr>
@@ -5082,11 +3388,11 @@
           <a:bodyPr wrap="square" rtlCol="0" anchor="ctr"/>
           <a:lstStyle/>
           <a:p>
-            <a:pPr indent="0" marL="0">
-              <a:buNone/>
-            </a:pPr>
-            <a:r>
-              <a:rPr lang="en-US" sz="1150" b="1" spc="100" kern="0" dirty="0">
+            <a:pPr marL="0" indent="0">
+              <a:buNone/>
+            </a:pPr>
+            <a:r>
+              <a:rPr lang="en-US" sz="1150" b="1" kern="0" spc="100" dirty="0">
                 <a:solidFill>
                   <a:srgbClr val="1F4E4A"/>
                 </a:solidFill>
@@ -5121,7 +3427,7 @@
           <a:bodyPr wrap="square" rtlCol="0" anchor="ctr"/>
           <a:lstStyle/>
           <a:p>
-            <a:pPr indent="0" marL="0">
+            <a:pPr marL="0" indent="0">
               <a:lnSpc>
                 <a:spcPct val="108000"/>
               </a:lnSpc>
@@ -5168,6 +3474,13 @@
             <a:prstDash val="solid"/>
           </a:ln>
         </p:spPr>
+        <p:txBody>
+          <a:bodyPr/>
+          <a:lstStyle/>
+          <a:p>
+            <a:endParaRPr lang="en-US"/>
+          </a:p>
+        </p:txBody>
       </p:sp>
       <p:sp>
         <p:nvSpPr>
@@ -5190,11 +3503,11 @@
           <a:bodyPr wrap="square" rtlCol="0" anchor="ctr"/>
           <a:lstStyle/>
           <a:p>
-            <a:pPr indent="0" marL="0">
-              <a:buNone/>
-            </a:pPr>
-            <a:r>
-              <a:rPr lang="en-US" sz="1150" b="1" spc="100" kern="0" dirty="0">
+            <a:pPr marL="0" indent="0">
+              <a:buNone/>
+            </a:pPr>
+            <a:r>
+              <a:rPr lang="en-US" sz="1150" b="1" kern="0" spc="100" dirty="0">
                 <a:solidFill>
                   <a:srgbClr val="1F4E4A"/>
                 </a:solidFill>
@@ -5229,7 +3542,7 @@
           <a:bodyPr wrap="square" rtlCol="0" anchor="ctr"/>
           <a:lstStyle/>
           <a:p>
-            <a:pPr indent="0" marL="0">
+            <a:pPr marL="0" indent="0">
               <a:lnSpc>
                 <a:spcPct val="108000"/>
               </a:lnSpc>
@@ -5258,14 +3571,15 @@
 </p:sld>
 </file>
 
-<file path=ppt/slides/slide14.xml><?xml version="1.0" encoding="utf-8"?>
+<file path=ppt/slides/slide13.xml><?xml version="1.0" encoding="utf-8"?>
 <p:sld xmlns:a="http://schemas.openxmlformats.org/drawingml/2006/main" xmlns:r="http://schemas.openxmlformats.org/officeDocument/2006/relationships" xmlns:p="http://schemas.openxmlformats.org/presentationml/2006/main">
-  <p:cSld name="Slide 14">
+  <p:cSld name="Slide 15">
     <p:bg>
       <p:bgPr>
         <a:solidFill>
           <a:srgbClr val="14322C"/>
         </a:solidFill>
+        <a:effectLst/>
       </p:bgPr>
     </p:bg>
     <p:spTree>
@@ -5303,7 +3617,7 @@
           <a:bodyPr wrap="square" rtlCol="0" anchor="ctr"/>
           <a:lstStyle/>
           <a:p>
-            <a:pPr indent="0" marL="0">
+            <a:pPr marL="0" indent="0">
               <a:buNone/>
             </a:pPr>
             <a:r>
@@ -5342,7 +3656,7 @@
           <a:bodyPr wrap="square" rtlCol="0" anchor="ctr"/>
           <a:lstStyle/>
           <a:p>
-            <a:pPr indent="0" marL="0">
+            <a:pPr marL="0" indent="0">
               <a:buNone/>
             </a:pPr>
             <a:r>
@@ -5381,7 +3695,7 @@
           <a:bodyPr wrap="square" rtlCol="0" anchor="ctr"/>
           <a:lstStyle/>
           <a:p>
-            <a:pPr indent="0" marL="0">
+            <a:pPr marL="0" indent="0">
               <a:lnSpc>
                 <a:spcPct val="115000"/>
               </a:lnSpc>
@@ -5423,7 +3737,7 @@
           <a:bodyPr wrap="square" rtlCol="0" anchor="ctr"/>
           <a:lstStyle/>
           <a:p>
-            <a:pPr indent="0" marL="0">
+            <a:pPr marL="0" indent="0">
               <a:buNone/>
             </a:pPr>
             <a:r>
@@ -5462,7 +3776,7 @@
           <a:bodyPr wrap="square" rtlCol="0" anchor="ctr"/>
           <a:lstStyle/>
           <a:p>
-            <a:pPr indent="0" marL="0">
+            <a:pPr marL="0" indent="0">
               <a:lnSpc>
                 <a:spcPct val="115000"/>
               </a:lnSpc>
@@ -5504,7 +3818,7 @@
           <a:bodyPr wrap="square" rtlCol="0" anchor="ctr"/>
           <a:lstStyle/>
           <a:p>
-            <a:pPr indent="0" marL="0">
+            <a:pPr marL="0" indent="0">
               <a:buNone/>
             </a:pPr>
             <a:r>
@@ -5543,7 +3857,7 @@
           <a:bodyPr wrap="square" rtlCol="0" anchor="ctr"/>
           <a:lstStyle/>
           <a:p>
-            <a:pPr indent="0" marL="0">
+            <a:pPr marL="0" indent="0">
               <a:lnSpc>
                 <a:spcPct val="115000"/>
               </a:lnSpc>
@@ -5585,7 +3899,7 @@
           <a:bodyPr wrap="square" rtlCol="0" anchor="ctr"/>
           <a:lstStyle/>
           <a:p>
-            <a:pPr indent="0" marL="0">
+            <a:pPr marL="0" indent="0">
               <a:buNone/>
             </a:pPr>
             <a:r>
@@ -5649,7 +3963,7 @@
           <a:bodyPr wrap="square" rtlCol="0" anchor="ctr"/>
           <a:lstStyle/>
           <a:p>
-            <a:pPr indent="0" marL="0">
+            <a:pPr marL="0" indent="0">
               <a:buNone/>
             </a:pPr>
             <a:r>
@@ -5688,7 +4002,7 @@
           <a:bodyPr wrap="square" rtlCol="0" anchor="ctr"/>
           <a:lstStyle/>
           <a:p>
-            <a:pPr indent="0" marL="0">
+            <a:pPr marL="0" indent="0">
               <a:buNone/>
             </a:pPr>
             <a:r>
@@ -5727,7 +4041,7 @@
           <a:bodyPr wrap="square" rtlCol="0" anchor="ctr"/>
           <a:lstStyle/>
           <a:p>
-            <a:pPr indent="0" marL="0">
+            <a:pPr marL="0" indent="0">
               <a:buNone/>
             </a:pPr>
             <a:r>
@@ -5766,7 +4080,7 @@
           <a:bodyPr wrap="square" rtlCol="0" anchor="ctr"/>
           <a:lstStyle/>
           <a:p>
-            <a:pPr indent="0" marL="0">
+            <a:pPr marL="0" indent="0">
               <a:buNone/>
             </a:pPr>
             <a:r>
@@ -5805,7 +4119,7 @@
           <a:bodyPr wrap="square" rtlCol="0" anchor="ctr"/>
           <a:lstStyle/>
           <a:p>
-            <a:pPr indent="0" marL="0">
+            <a:pPr marL="0" indent="0">
               <a:buNone/>
             </a:pPr>
             <a:r>
@@ -5844,7 +4158,7 @@
           <a:bodyPr wrap="square" rtlCol="0" anchor="ctr"/>
           <a:lstStyle/>
           <a:p>
-            <a:pPr indent="0" marL="0">
+            <a:pPr marL="0" indent="0">
               <a:buNone/>
             </a:pPr>
             <a:r>
@@ -5883,7 +4197,7 @@
           <a:bodyPr wrap="square" rtlCol="0" anchor="ctr"/>
           <a:lstStyle/>
           <a:p>
-            <a:pPr indent="0" marL="0">
+            <a:pPr marL="0" indent="0">
               <a:buNone/>
             </a:pPr>
             <a:r>
@@ -5922,7 +4236,7 @@
           <a:bodyPr wrap="square" rtlCol="0" anchor="ctr"/>
           <a:lstStyle/>
           <a:p>
-            <a:pPr indent="0" marL="0">
+            <a:pPr marL="0" indent="0">
               <a:buNone/>
             </a:pPr>
             <a:r>
@@ -5966,6 +4280,13 @@
             <a:prstDash val="solid"/>
           </a:ln>
         </p:spPr>
+        <p:txBody>
+          <a:bodyPr/>
+          <a:lstStyle/>
+          <a:p>
+            <a:endParaRPr lang="en-US"/>
+          </a:p>
+        </p:txBody>
       </p:sp>
       <p:sp>
         <p:nvSpPr>
@@ -5988,7 +4309,7 @@
           <a:bodyPr wrap="square" rtlCol="0" anchor="ctr"/>
           <a:lstStyle/>
           <a:p>
-            <a:pPr indent="0" marL="0">
+            <a:pPr marL="0" indent="0">
               <a:lnSpc>
                 <a:spcPct val="115000"/>
               </a:lnSpc>
@@ -6005,12 +4326,6 @@
               </a:rPr>
               <a:t>What does NOT change:  </a:t>
             </a:r>
-            <a:pPr indent="0" marL="0">
-              <a:lnSpc>
-                <a:spcPct val="115000"/>
-              </a:lnSpc>
-              <a:buNone/>
-            </a:pPr>
             <a:r>
               <a:rPr lang="en-US" sz="1400" dirty="0">
                 <a:solidFill>
@@ -6020,7 +4335,7 @@
                 <a:ea typeface="Calibri" pitchFamily="34" charset="-122"/>
                 <a:cs typeface="Calibri" pitchFamily="34" charset="-120"/>
               </a:rPr>
-              <a:t>ortho keeps its field days (spine gets 3–4 of ~5). Nobody is being asked to abandon their book — we're re-aiming the same road time at the accounts the data says pay.</a:t>
+              <a:t>ortho keeps its field days (spine gets 3–4 of ~5). Nobody is being asked to abandon their book — we're re-aiming the same windshield time at the accounts the data says pay.</a:t>
             </a:r>
             <a:endParaRPr lang="en-US" sz="1400" dirty="0"/>
           </a:p>
@@ -6072,7 +4387,7 @@
           <a:bodyPr wrap="square" rtlCol="0" anchor="ctr"/>
           <a:lstStyle/>
           <a:p>
-            <a:pPr indent="0" marL="0">
+            <a:pPr marL="0" indent="0">
               <a:buNone/>
             </a:pPr>
             <a:r>
@@ -6111,7 +4426,7 @@
           <a:bodyPr wrap="square" rtlCol="0" anchor="ctr"/>
           <a:lstStyle/>
           <a:p>
-            <a:pPr indent="0" marL="0">
+            <a:pPr marL="0" indent="0">
               <a:buNone/>
             </a:pPr>
             <a:r>
@@ -6155,6 +4470,13 @@
             <a:prstDash val="solid"/>
           </a:ln>
         </p:spPr>
+        <p:txBody>
+          <a:bodyPr/>
+          <a:lstStyle/>
+          <a:p>
+            <a:endParaRPr lang="en-US"/>
+          </a:p>
+        </p:txBody>
       </p:sp>
       <p:sp>
         <p:nvSpPr>
@@ -6177,7 +4499,7 @@
           <a:bodyPr wrap="square" rtlCol="0" anchor="ctr"/>
           <a:lstStyle/>
           <a:p>
-            <a:pPr indent="0" marL="0">
+            <a:pPr marL="0" indent="0">
               <a:buNone/>
             </a:pPr>
             <a:r>
@@ -6216,11 +4538,11 @@
           <a:bodyPr wrap="square" rtlCol="0" anchor="ctr"/>
           <a:lstStyle/>
           <a:p>
-            <a:pPr indent="0" marL="0">
-              <a:buNone/>
-            </a:pPr>
-            <a:r>
-              <a:rPr lang="en-US" sz="1100" b="1" spc="150" kern="0" dirty="0">
+            <a:pPr marL="0" indent="0">
+              <a:buNone/>
+            </a:pPr>
+            <a:r>
+              <a:rPr lang="en-US" sz="1100" b="1" kern="0" spc="150" dirty="0">
                 <a:solidFill>
                   <a:srgbClr val="5E7773"/>
                 </a:solidFill>
@@ -6255,7 +4577,7 @@
           <a:bodyPr wrap="square" rtlCol="0" anchor="ctr"/>
           <a:lstStyle/>
           <a:p>
-            <a:pPr indent="0" marL="0">
+            <a:pPr marL="0" indent="0">
               <a:buNone/>
             </a:pPr>
             <a:r>
@@ -6299,6 +4621,13 @@
             <a:prstDash val="solid"/>
           </a:ln>
         </p:spPr>
+        <p:txBody>
+          <a:bodyPr/>
+          <a:lstStyle/>
+          <a:p>
+            <a:endParaRPr lang="en-US"/>
+          </a:p>
+        </p:txBody>
       </p:sp>
       <p:sp>
         <p:nvSpPr>
@@ -6321,7 +4650,7 @@
           <a:bodyPr wrap="square" rtlCol="0" anchor="ctr"/>
           <a:lstStyle/>
           <a:p>
-            <a:pPr indent="0" marL="0">
+            <a:pPr marL="0" indent="0">
               <a:buNone/>
             </a:pPr>
             <a:r>
@@ -6360,11 +4689,11 @@
           <a:bodyPr wrap="square" rtlCol="0" anchor="ctr"/>
           <a:lstStyle/>
           <a:p>
-            <a:pPr indent="0" marL="0">
-              <a:buNone/>
-            </a:pPr>
-            <a:r>
-              <a:rPr lang="en-US" sz="1100" b="1" spc="150" kern="0" dirty="0">
+            <a:pPr marL="0" indent="0">
+              <a:buNone/>
+            </a:pPr>
+            <a:r>
+              <a:rPr lang="en-US" sz="1100" b="1" kern="0" spc="150" dirty="0">
                 <a:solidFill>
                   <a:srgbClr val="5E7773"/>
                 </a:solidFill>
@@ -6372,7 +4701,7 @@
                 <a:ea typeface="Calibri" pitchFamily="34" charset="-122"/>
                 <a:cs typeface="Calibri" pitchFamily="34" charset="-120"/>
               </a:rPr>
-              <a:t>'COLD' = NO PRIOR VISIT</a:t>
+              <a:t>PATIENTS ARRIVED 'COLD'</a:t>
             </a:r>
             <a:endParaRPr lang="en-US" sz="1100" dirty="0"/>
           </a:p>
@@ -6399,7 +4728,7 @@
           <a:bodyPr wrap="square" rtlCol="0" anchor="ctr"/>
           <a:lstStyle/>
           <a:p>
-            <a:pPr indent="0" marL="0">
+            <a:pPr marL="0" indent="0">
               <a:buNone/>
             </a:pPr>
             <a:r>
@@ -6411,7 +4740,7 @@
                 <a:ea typeface="Calibri" pitchFamily="34" charset="-122"/>
                 <a:cs typeface="Calibri" pitchFamily="34" charset="-120"/>
               </a:rPr>
-              <a:t>Only 6 matched referrals came from a practice we'd never visited. Virtually every referral followed field contact - your windshield time IS the pipeline.</a:t>
+              <a:t>Virtually every referral followed a field visit. Your road time IS the pipeline.</a:t>
             </a:r>
             <a:endParaRPr lang="en-US" sz="1100" dirty="0"/>
           </a:p>
@@ -6443,6 +4772,13 @@
             <a:prstDash val="solid"/>
           </a:ln>
         </p:spPr>
+        <p:txBody>
+          <a:bodyPr/>
+          <a:lstStyle/>
+          <a:p>
+            <a:endParaRPr lang="en-US"/>
+          </a:p>
+        </p:txBody>
       </p:sp>
       <p:sp>
         <p:nvSpPr>
@@ -6465,7 +4801,7 @@
           <a:bodyPr wrap="square" rtlCol="0" anchor="ctr"/>
           <a:lstStyle/>
           <a:p>
-            <a:pPr indent="0" marL="0">
+            <a:pPr marL="0" indent="0">
               <a:buNone/>
             </a:pPr>
             <a:r>
@@ -6504,11 +4840,11 @@
           <a:bodyPr wrap="square" rtlCol="0" anchor="ctr"/>
           <a:lstStyle/>
           <a:p>
-            <a:pPr indent="0" marL="0">
-              <a:buNone/>
-            </a:pPr>
-            <a:r>
-              <a:rPr lang="en-US" sz="1100" b="1" spc="150" kern="0" dirty="0">
+            <a:pPr marL="0" indent="0">
+              <a:buNone/>
+            </a:pPr>
+            <a:r>
+              <a:rPr lang="en-US" sz="1100" b="1" kern="0" spc="150" dirty="0">
                 <a:solidFill>
                   <a:srgbClr val="5E7773"/>
                 </a:solidFill>
@@ -6543,7 +4879,7 @@
           <a:bodyPr wrap="square" rtlCol="0" anchor="ctr"/>
           <a:lstStyle/>
           <a:p>
-            <a:pPr indent="0" marL="0">
+            <a:pPr marL="0" indent="0">
               <a:buNone/>
             </a:pPr>
             <a:r>
@@ -6570,7 +4906,7 @@
         <p:spPr>
           <a:xfrm>
             <a:off x="502920" y="3840480"/>
-            <a:ext cx="11155680" cy="731520"/>
+            <a:ext cx="11155680" cy="914400"/>
           </a:xfrm>
           <a:prstGeom prst="rect">
             <a:avLst/>
@@ -6582,13 +4918,24 @@
           <a:bodyPr wrap="square" rtlCol="0" anchor="ctr"/>
           <a:lstStyle/>
           <a:p>
-            <a:pPr indent="0" marL="0">
+            <a:pPr marL="0" indent="0">
               <a:lnSpc>
                 <a:spcPct val="120000"/>
               </a:lnSpc>
               <a:buNone/>
             </a:pPr>
             <a:r>
+              <a:rPr lang="en-US" sz="1400" b="1" dirty="0">
+                <a:solidFill>
+                  <a:srgbClr val="14322C"/>
+                </a:solidFill>
+                <a:latin typeface="Calibri" pitchFamily="34" charset="0"/>
+                <a:ea typeface="Calibri" pitchFamily="34" charset="-122"/>
+                <a:cs typeface="Calibri" pitchFamily="34" charset="-120"/>
+              </a:rPr>
+              <a:t>The playbook in the next slides is the shared method — same visit frame at every account, matched to what that practice actually sends. Ride-alongs start next week.</a:t>
+            </a:r>
+            <a:r>
               <a:rPr lang="en-US" sz="1400" dirty="0">
                 <a:solidFill>
                   <a:srgbClr val="14322C"/>
@@ -6597,7 +4944,7 @@
                 <a:ea typeface="Calibri" pitchFamily="34" charset="-122"/>
                 <a:cs typeface="Calibri" pitchFamily="34" charset="-120"/>
               </a:rPr>
-              <a:t>The playbook in the next slides is the shared method — same visit frame at every account, matched to what that practice actually sends. Ride-alongs start next week.</a:t>
+              <a:t/>
             </a:r>
             <a:endParaRPr lang="en-US" sz="1400" dirty="0"/>
           </a:p>
@@ -6613,7 +4960,7 @@
 
 <file path=ppt/slides/slide4.xml><?xml version="1.0" encoding="utf-8"?>
 <p:sld xmlns:a="http://schemas.openxmlformats.org/drawingml/2006/main" xmlns:r="http://schemas.openxmlformats.org/officeDocument/2006/relationships" xmlns:p="http://schemas.openxmlformats.org/presentationml/2006/main">
-  <p:cSld name="Slide 4">
+  <p:cSld name="Slide 5">
     <p:spTree>
       <p:nvGrpSpPr>
         <p:cNvPr id="1" name=""/>
@@ -6649,7 +4996,7 @@
           <a:bodyPr wrap="square" rtlCol="0" anchor="ctr"/>
           <a:lstStyle/>
           <a:p>
-            <a:pPr indent="0" marL="0">
+            <a:pPr marL="0" indent="0">
               <a:buNone/>
             </a:pPr>
             <a:r>
@@ -6688,7 +5035,7 @@
           <a:bodyPr wrap="square" rtlCol="0" anchor="ctr"/>
           <a:lstStyle/>
           <a:p>
-            <a:pPr indent="0" marL="0">
+            <a:pPr marL="0" indent="0">
               <a:buNone/>
             </a:pPr>
             <a:r>
@@ -6708,31 +5055,55 @@
       </p:sp>
       <p:graphicFrame>
         <p:nvGraphicFramePr>
-          <p:cNvPr id="5" name="Table 0"/>
+          <p:cNvPr id="6" name="Table 0"/>
           <p:cNvGraphicFramePr>
             <a:graphicFrameLocks noGrp="1"/>
           </p:cNvGraphicFramePr>
           <p:nvPr>
             <p:extLst>
               <p:ext uri="{D42A27DB-BD31-4B8C-83A1-F6EECF244321}">
-                <p14:modId xmlns:p14="http://schemas.microsoft.com/office/powerpoint/2010/main" val="1579011935"/>
+                <p14:modId xmlns:p14="http://schemas.microsoft.com/office/powerpoint/2010/main" val="4040508609"/>
               </p:ext>
             </p:extLst>
           </p:nvPr>
         </p:nvGraphicFramePr>
         <p:xfrm>
           <a:off x="502920" y="1417320"/>
-          <a:ext cx="11155680" cy="914400"/>
+          <a:ext cx="11155680" cy="3072384"/>
         </p:xfrm>
         <a:graphic>
           <a:graphicData uri="http://schemas.openxmlformats.org/drawingml/2006/table">
             <a:tbl>
               <a:tblPr/>
               <a:tblGrid>
-                <a:gridCol w="2834640"/>
-                <a:gridCol w="5120640"/>
-                <a:gridCol w="1280160"/>
-                <a:gridCol w="1920240"/>
+                <a:gridCol w="2834640">
+                  <a:extLst>
+                    <a:ext uri="{9D8B030D-6E8A-4147-A177-3AD203B41FA5}">
+                      <a16:colId xmlns:a16="http://schemas.microsoft.com/office/drawing/2014/main" val="20000"/>
+                    </a:ext>
+                  </a:extLst>
+                </a:gridCol>
+                <a:gridCol w="5120640">
+                  <a:extLst>
+                    <a:ext uri="{9D8B030D-6E8A-4147-A177-3AD203B41FA5}">
+                      <a16:colId xmlns:a16="http://schemas.microsoft.com/office/drawing/2014/main" val="20001"/>
+                    </a:ext>
+                  </a:extLst>
+                </a:gridCol>
+                <a:gridCol w="1280160">
+                  <a:extLst>
+                    <a:ext uri="{9D8B030D-6E8A-4147-A177-3AD203B41FA5}">
+                      <a16:colId xmlns:a16="http://schemas.microsoft.com/office/drawing/2014/main" val="20002"/>
+                    </a:ext>
+                  </a:extLst>
+                </a:gridCol>
+                <a:gridCol w="1920240">
+                  <a:extLst>
+                    <a:ext uri="{9D8B030D-6E8A-4147-A177-3AD203B41FA5}">
+                      <a16:colId xmlns:a16="http://schemas.microsoft.com/office/drawing/2014/main" val="20003"/>
+                    </a:ext>
+                  </a:extLst>
+                </a:gridCol>
               </a:tblGrid>
               <a:tr h="512064">
                 <a:tc>
@@ -6740,7 +5111,7 @@
                     <a:bodyPr/>
                     <a:lstStyle/>
                     <a:p>
-                      <a:pPr indent="0" marL="0">
+                      <a:pPr marL="0" indent="0">
                         <a:buNone/>
                       </a:pPr>
                       <a:r>
@@ -6808,7 +5179,7 @@
                     <a:bodyPr/>
                     <a:lstStyle/>
                     <a:p>
-                      <a:pPr indent="0" marL="0">
+                      <a:pPr marL="0" indent="0">
                         <a:buNone/>
                       </a:pPr>
                       <a:r>
@@ -6876,7 +5247,7 @@
                     <a:bodyPr/>
                     <a:lstStyle/>
                     <a:p>
-                      <a:pPr indent="0" marL="0">
+                      <a:pPr marL="0" indent="0">
                         <a:buNone/>
                       </a:pPr>
                       <a:r>
@@ -6944,7 +5315,7 @@
                     <a:bodyPr/>
                     <a:lstStyle/>
                     <a:p>
-                      <a:pPr indent="0" marL="0">
+                      <a:pPr marL="0" indent="0">
                         <a:buNone/>
                       </a:pPr>
                       <a:r>
@@ -7007,6 +5378,11 @@
                     </a:solidFill>
                   </a:tcPr>
                 </a:tc>
+                <a:extLst>
+                  <a:ext uri="{0D108BD9-81ED-4DB2-BD59-A6C34878D82A}">
+                    <a16:rowId xmlns:a16="http://schemas.microsoft.com/office/drawing/2014/main" val="10000"/>
+                  </a:ext>
+                </a:extLst>
               </a:tr>
               <a:tr h="512064">
                 <a:tc>
@@ -7014,7 +5390,7 @@
                     <a:bodyPr/>
                     <a:lstStyle/>
                     <a:p>
-                      <a:pPr indent="0" marL="0">
+                      <a:pPr marL="0" indent="0">
                         <a:buNone/>
                       </a:pPr>
                       <a:r>
@@ -7079,7 +5455,7 @@
                     <a:bodyPr/>
                     <a:lstStyle/>
                     <a:p>
-                      <a:pPr indent="0" marL="0">
+                      <a:pPr marL="0" indent="0">
                         <a:buNone/>
                       </a:pPr>
                       <a:r>
@@ -7144,7 +5520,7 @@
                     <a:bodyPr/>
                     <a:lstStyle/>
                     <a:p>
-                      <a:pPr indent="0" marL="0">
+                      <a:pPr marL="0" indent="0">
                         <a:buNone/>
                       </a:pPr>
                       <a:r>
@@ -7209,7 +5585,7 @@
                     <a:bodyPr/>
                     <a:lstStyle/>
                     <a:p>
-                      <a:pPr indent="0" marL="0">
+                      <a:pPr marL="0" indent="0">
                         <a:buNone/>
                       </a:pPr>
                       <a:r>
@@ -7269,6 +5645,11 @@
                     </a:lnB>
                   </a:tcPr>
                 </a:tc>
+                <a:extLst>
+                  <a:ext uri="{0D108BD9-81ED-4DB2-BD59-A6C34878D82A}">
+                    <a16:rowId xmlns:a16="http://schemas.microsoft.com/office/drawing/2014/main" val="10001"/>
+                  </a:ext>
+                </a:extLst>
               </a:tr>
               <a:tr h="512064">
                 <a:tc>
@@ -7276,7 +5657,7 @@
                     <a:bodyPr/>
                     <a:lstStyle/>
                     <a:p>
-                      <a:pPr indent="0" marL="0">
+                      <a:pPr marL="0" indent="0">
                         <a:buNone/>
                       </a:pPr>
                       <a:r>
@@ -7341,7 +5722,7 @@
                     <a:bodyPr/>
                     <a:lstStyle/>
                     <a:p>
-                      <a:pPr indent="0" marL="0">
+                      <a:pPr marL="0" indent="0">
                         <a:buNone/>
                       </a:pPr>
                       <a:r>
@@ -7406,7 +5787,7 @@
                     <a:bodyPr/>
                     <a:lstStyle/>
                     <a:p>
-                      <a:pPr indent="0" marL="0">
+                      <a:pPr marL="0" indent="0">
                         <a:buNone/>
                       </a:pPr>
                       <a:r>
@@ -7471,7 +5852,7 @@
                     <a:bodyPr/>
                     <a:lstStyle/>
                     <a:p>
-                      <a:pPr indent="0" marL="0">
+                      <a:pPr marL="0" indent="0">
                         <a:buNone/>
                       </a:pPr>
                       <a:r>
@@ -7531,6 +5912,11 @@
                     </a:lnB>
                   </a:tcPr>
                 </a:tc>
+                <a:extLst>
+                  <a:ext uri="{0D108BD9-81ED-4DB2-BD59-A6C34878D82A}">
+                    <a16:rowId xmlns:a16="http://schemas.microsoft.com/office/drawing/2014/main" val="10002"/>
+                  </a:ext>
+                </a:extLst>
               </a:tr>
               <a:tr h="512064">
                 <a:tc>
@@ -7538,7 +5924,7 @@
                     <a:bodyPr/>
                     <a:lstStyle/>
                     <a:p>
-                      <a:pPr indent="0" marL="0">
+                      <a:pPr marL="0" indent="0">
                         <a:buNone/>
                       </a:pPr>
                       <a:r>
@@ -7603,7 +5989,7 @@
                     <a:bodyPr/>
                     <a:lstStyle/>
                     <a:p>
-                      <a:pPr indent="0" marL="0">
+                      <a:pPr marL="0" indent="0">
                         <a:buNone/>
                       </a:pPr>
                       <a:r>
@@ -7668,7 +6054,7 @@
                     <a:bodyPr/>
                     <a:lstStyle/>
                     <a:p>
-                      <a:pPr indent="0" marL="0">
+                      <a:pPr marL="0" indent="0">
                         <a:buNone/>
                       </a:pPr>
                       <a:r>
@@ -7733,7 +6119,7 @@
                     <a:bodyPr/>
                     <a:lstStyle/>
                     <a:p>
-                      <a:pPr indent="0" marL="0">
+                      <a:pPr marL="0" indent="0">
                         <a:buNone/>
                       </a:pPr>
                       <a:r>
@@ -7793,6 +6179,11 @@
                     </a:lnB>
                   </a:tcPr>
                 </a:tc>
+                <a:extLst>
+                  <a:ext uri="{0D108BD9-81ED-4DB2-BD59-A6C34878D82A}">
+                    <a16:rowId xmlns:a16="http://schemas.microsoft.com/office/drawing/2014/main" val="10003"/>
+                  </a:ext>
+                </a:extLst>
               </a:tr>
               <a:tr h="512064">
                 <a:tc>
@@ -7800,7 +6191,7 @@
                     <a:bodyPr/>
                     <a:lstStyle/>
                     <a:p>
-                      <a:pPr indent="0" marL="0">
+                      <a:pPr marL="0" indent="0">
                         <a:buNone/>
                       </a:pPr>
                       <a:r>
@@ -7865,7 +6256,7 @@
                     <a:bodyPr/>
                     <a:lstStyle/>
                     <a:p>
-                      <a:pPr indent="0" marL="0">
+                      <a:pPr marL="0" indent="0">
                         <a:buNone/>
                       </a:pPr>
                       <a:r>
@@ -7930,7 +6321,7 @@
                     <a:bodyPr/>
                     <a:lstStyle/>
                     <a:p>
-                      <a:pPr indent="0" marL="0">
+                      <a:pPr marL="0" indent="0">
                         <a:buNone/>
                       </a:pPr>
                       <a:r>
@@ -7995,7 +6386,7 @@
                     <a:bodyPr/>
                     <a:lstStyle/>
                     <a:p>
-                      <a:pPr indent="0" marL="0">
+                      <a:pPr marL="0" indent="0">
                         <a:buNone/>
                       </a:pPr>
                       <a:r>
@@ -8055,6 +6446,11 @@
                     </a:lnB>
                   </a:tcPr>
                 </a:tc>
+                <a:extLst>
+                  <a:ext uri="{0D108BD9-81ED-4DB2-BD59-A6C34878D82A}">
+                    <a16:rowId xmlns:a16="http://schemas.microsoft.com/office/drawing/2014/main" val="10004"/>
+                  </a:ext>
+                </a:extLst>
               </a:tr>
               <a:tr h="512064">
                 <a:tc>
@@ -8062,7 +6458,7 @@
                     <a:bodyPr/>
                     <a:lstStyle/>
                     <a:p>
-                      <a:pPr indent="0" marL="0">
+                      <a:pPr marL="0" indent="0">
                         <a:buNone/>
                       </a:pPr>
                       <a:r>
@@ -8127,7 +6523,7 @@
                     <a:bodyPr/>
                     <a:lstStyle/>
                     <a:p>
-                      <a:pPr indent="0" marL="0">
+                      <a:pPr marL="0" indent="0">
                         <a:buNone/>
                       </a:pPr>
                       <a:r>
@@ -8139,7 +6535,7 @@
                           <a:ea typeface="Calibri" pitchFamily="34" charset="-122"/>
                           <a:cs typeface="Calibri" pitchFamily="34" charset="-120"/>
                         </a:rPr>
-                        <a:t>The 90 highest-priority proven senders — never wait 2+ weeks</a:t>
+                        <a:t>The 90 highest-priority proven senders — always first in line each cycle</a:t>
                       </a:r>
                       <a:endParaRPr lang="en-US" sz="1300" dirty="0">
                         <a:latin typeface="Calibri" charset="0"/>
@@ -8192,7 +6588,7 @@
                     <a:bodyPr/>
                     <a:lstStyle/>
                     <a:p>
-                      <a:pPr indent="0" marL="0">
+                      <a:pPr marL="0" indent="0">
                         <a:buNone/>
                       </a:pPr>
                       <a:r>
@@ -8257,7 +6653,7 @@
                     <a:bodyPr/>
                     <a:lstStyle/>
                     <a:p>
-                      <a:pPr indent="0" marL="0">
+                      <a:pPr marL="0" indent="0">
                         <a:buNone/>
                       </a:pPr>
                       <a:r>
@@ -8269,7 +6665,7 @@
                           <a:ea typeface="Calibri" pitchFamily="34" charset="-122"/>
                           <a:cs typeface="Calibri" pitchFamily="34" charset="-120"/>
                         </a:rPr>
-                        <a:t>≤ 14 days</a:t>
+                        <a:t>21 days · first in line</a:t>
                       </a:r>
                       <a:endParaRPr lang="en-US" sz="1300" dirty="0">
                         <a:latin typeface="Calibri" charset="0"/>
@@ -8317,6 +6713,11 @@
                     </a:lnB>
                   </a:tcPr>
                 </a:tc>
+                <a:extLst>
+                  <a:ext uri="{0D108BD9-81ED-4DB2-BD59-A6C34878D82A}">
+                    <a16:rowId xmlns:a16="http://schemas.microsoft.com/office/drawing/2014/main" val="10005"/>
+                  </a:ext>
+                </a:extLst>
               </a:tr>
             </a:tbl>
           </a:graphicData>
@@ -8343,7 +6744,7 @@
           <a:bodyPr wrap="square" rtlCol="0" anchor="ctr"/>
           <a:lstStyle/>
           <a:p>
-            <a:pPr indent="0" marL="0">
+            <a:pPr marL="0" indent="0">
               <a:lnSpc>
                 <a:spcPct val="120000"/>
               </a:lnSpc>
@@ -8360,12 +6761,6 @@
               </a:rPr>
               <a:t>Why yield order matters: </a:t>
             </a:r>
-            <a:pPr indent="0" marL="0">
-              <a:lnSpc>
-                <a:spcPct val="120000"/>
-              </a:lnSpc>
-              <a:buNone/>
-            </a:pPr>
             <a:r>
               <a:rPr lang="en-US" sz="1350" dirty="0">
                 <a:solidFill>
@@ -8390,580 +6785,6 @@
 </file>
 
 <file path=ppt/slides/slide5.xml><?xml version="1.0" encoding="utf-8"?>
-<p:sld xmlns:a="http://schemas.openxmlformats.org/drawingml/2006/main" xmlns:r="http://schemas.openxmlformats.org/officeDocument/2006/relationships" xmlns:p="http://schemas.openxmlformats.org/presentationml/2006/main">
-  <p:cSld name="Slide 5">
-    <p:spTree>
-      <p:nvGrpSpPr>
-        <p:cNvPr id="1" name=""/>
-        <p:cNvGrpSpPr/>
-        <p:nvPr/>
-      </p:nvGrpSpPr>
-      <p:grpSpPr>
-        <a:xfrm>
-          <a:off x="0" y="0"/>
-          <a:ext cx="0" cy="0"/>
-          <a:chOff x="0" y="0"/>
-          <a:chExt cx="0" cy="0"/>
-        </a:xfrm>
-      </p:grpSpPr>
-      <p:sp>
-        <p:nvSpPr>
-          <p:cNvPr id="2" name="Text 0"/>
-          <p:cNvSpPr/>
-          <p:nvPr/>
-        </p:nvSpPr>
-        <p:spPr>
-          <a:xfrm>
-            <a:off x="502920" y="256032"/>
-            <a:ext cx="11155680" cy="594360"/>
-          </a:xfrm>
-          <a:prstGeom prst="rect">
-            <a:avLst/>
-          </a:prstGeom>
-          <a:noFill/>
-          <a:ln/>
-        </p:spPr>
-        <p:txBody>
-          <a:bodyPr wrap="square" rtlCol="0" anchor="ctr"/>
-          <a:lstStyle/>
-          <a:p>
-            <a:pPr indent="0" marL="0">
-              <a:buNone/>
-            </a:pPr>
-            <a:r>
-              <a:rPr lang="en-US" sz="2900" b="1" dirty="0">
-                <a:solidFill>
-                  <a:srgbClr val="14322C"/>
-                </a:solidFill>
-                <a:latin typeface="Cambria" pitchFamily="34" charset="0"/>
-                <a:ea typeface="Cambria" pitchFamily="34" charset="-122"/>
-                <a:cs typeface="Cambria" pitchFamily="34" charset="-120"/>
-              </a:rPr>
-              <a:t>The 90-second visit frame</a:t>
-            </a:r>
-            <a:endParaRPr lang="en-US" sz="2900" dirty="0"/>
-          </a:p>
-        </p:txBody>
-      </p:sp>
-      <p:sp>
-        <p:nvSpPr>
-          <p:cNvPr id="3" name="Text 1"/>
-          <p:cNvSpPr/>
-          <p:nvPr/>
-        </p:nvSpPr>
-        <p:spPr>
-          <a:xfrm>
-            <a:off x="502920" y="841248"/>
-            <a:ext cx="11155680" cy="320040"/>
-          </a:xfrm>
-          <a:prstGeom prst="rect">
-            <a:avLst/>
-          </a:prstGeom>
-          <a:noFill/>
-          <a:ln/>
-        </p:spPr>
-        <p:txBody>
-          <a:bodyPr wrap="square" rtlCol="0" anchor="ctr"/>
-          <a:lstStyle/>
-          <a:p>
-            <a:pPr indent="0" marL="0">
-              <a:buNone/>
-            </a:pPr>
-            <a:r>
-              <a:rPr lang="en-US" sz="1300" dirty="0">
-                <a:solidFill>
-                  <a:srgbClr val="5E7773"/>
-                </a:solidFill>
-                <a:latin typeface="Calibri" pitchFamily="34" charset="0"/>
-                <a:ea typeface="Calibri" pitchFamily="34" charset="-122"/>
-                <a:cs typeface="Calibri" pitchFamily="34" charset="-120"/>
-              </a:rPr>
-              <a:t>Same skeleton at every account — the content changes by type (next 4 slides)</a:t>
-            </a:r>
-            <a:endParaRPr lang="en-US" sz="1300" dirty="0"/>
-          </a:p>
-        </p:txBody>
-      </p:sp>
-      <p:sp>
-        <p:nvSpPr>
-          <p:cNvPr id="4" name="Shape 2"/>
-          <p:cNvSpPr/>
-          <p:nvPr/>
-        </p:nvSpPr>
-        <p:spPr>
-          <a:xfrm>
-            <a:off x="502920" y="1463040"/>
-            <a:ext cx="11155680" cy="1060704"/>
-          </a:xfrm>
-          <a:prstGeom prst="roundRect">
-            <a:avLst>
-              <a:gd name="adj" fmla="val 5172"/>
-            </a:avLst>
-          </a:prstGeom>
-          <a:solidFill>
-            <a:srgbClr val="E7F2EF"/>
-          </a:solidFill>
-          <a:ln w="12700">
-            <a:solidFill>
-              <a:srgbClr val="DCE7E3"/>
-            </a:solidFill>
-            <a:prstDash val="solid"/>
-          </a:ln>
-        </p:spPr>
-      </p:sp>
-      <p:sp>
-        <p:nvSpPr>
-          <p:cNvPr id="5" name="Text 3"/>
-          <p:cNvSpPr/>
-          <p:nvPr/>
-        </p:nvSpPr>
-        <p:spPr>
-          <a:xfrm>
-            <a:off x="777240" y="1572768"/>
-            <a:ext cx="2011680" cy="822960"/>
-          </a:xfrm>
-          <a:prstGeom prst="rect">
-            <a:avLst/>
-          </a:prstGeom>
-          <a:noFill/>
-          <a:ln/>
-        </p:spPr>
-        <p:txBody>
-          <a:bodyPr wrap="square" rtlCol="0" anchor="ctr"/>
-          <a:lstStyle/>
-          <a:p>
-            <a:pPr indent="0" marL="0">
-              <a:buNone/>
-            </a:pPr>
-            <a:r>
-              <a:rPr lang="en-US" sz="1500" b="1" dirty="0">
-                <a:solidFill>
-                  <a:srgbClr val="49A698"/>
-                </a:solidFill>
-                <a:latin typeface="Cambria" pitchFamily="34" charset="0"/>
-                <a:ea typeface="Cambria" pitchFamily="34" charset="-122"/>
-                <a:cs typeface="Cambria" pitchFamily="34" charset="-120"/>
-              </a:rPr>
-              <a:t>1 · THANK</a:t>
-            </a:r>
-            <a:endParaRPr lang="en-US" sz="1500" dirty="0"/>
-          </a:p>
-        </p:txBody>
-      </p:sp>
-      <p:sp>
-        <p:nvSpPr>
-          <p:cNvPr id="6" name="Text 4"/>
-          <p:cNvSpPr/>
-          <p:nvPr/>
-        </p:nvSpPr>
-        <p:spPr>
-          <a:xfrm>
-            <a:off x="2926080" y="1554480"/>
-            <a:ext cx="8503920" cy="896112"/>
-          </a:xfrm>
-          <a:prstGeom prst="rect">
-            <a:avLst/>
-          </a:prstGeom>
-          <a:noFill/>
-          <a:ln/>
-        </p:spPr>
-        <p:txBody>
-          <a:bodyPr wrap="square" rtlCol="0" anchor="ctr"/>
-          <a:lstStyle/>
-          <a:p>
-            <a:pPr indent="0" marL="0">
-              <a:lnSpc>
-                <a:spcPct val="110000"/>
-              </a:lnSpc>
-              <a:buNone/>
-            </a:pPr>
-            <a:r>
-              <a:rPr lang="en-US" sz="1250" dirty="0">
-                <a:solidFill>
-                  <a:srgbClr val="14322C"/>
-                </a:solidFill>
-                <a:latin typeface="Calibri" pitchFamily="34" charset="0"/>
-                <a:ea typeface="Calibri" pitchFamily="34" charset="-122"/>
-                <a:cs typeface="Calibri" pitchFamily="34" charset="-120"/>
-              </a:rPr>
-              <a:t>Aggregate numbers only, never a patient: “Your practice has trusted us with N spine patients this year.” Name the top referrer when we know them — it's on your stop card.</a:t>
-            </a:r>
-            <a:endParaRPr lang="en-US" sz="1250" dirty="0"/>
-          </a:p>
-        </p:txBody>
-      </p:sp>
-      <p:sp>
-        <p:nvSpPr>
-          <p:cNvPr id="7" name="Shape 5"/>
-          <p:cNvSpPr/>
-          <p:nvPr/>
-        </p:nvSpPr>
-        <p:spPr>
-          <a:xfrm>
-            <a:off x="502920" y="2651760"/>
-            <a:ext cx="11155680" cy="1060704"/>
-          </a:xfrm>
-          <a:prstGeom prst="roundRect">
-            <a:avLst>
-              <a:gd name="adj" fmla="val 5172"/>
-            </a:avLst>
-          </a:prstGeom>
-          <a:solidFill>
-            <a:srgbClr val="E7F2EF"/>
-          </a:solidFill>
-          <a:ln w="12700">
-            <a:solidFill>
-              <a:srgbClr val="DCE7E3"/>
-            </a:solidFill>
-            <a:prstDash val="solid"/>
-          </a:ln>
-        </p:spPr>
-      </p:sp>
-      <p:sp>
-        <p:nvSpPr>
-          <p:cNvPr id="8" name="Text 6"/>
-          <p:cNvSpPr/>
-          <p:nvPr/>
-        </p:nvSpPr>
-        <p:spPr>
-          <a:xfrm>
-            <a:off x="777240" y="2761488"/>
-            <a:ext cx="2011680" cy="822960"/>
-          </a:xfrm>
-          <a:prstGeom prst="rect">
-            <a:avLst/>
-          </a:prstGeom>
-          <a:noFill/>
-          <a:ln/>
-        </p:spPr>
-        <p:txBody>
-          <a:bodyPr wrap="square" rtlCol="0" anchor="ctr"/>
-          <a:lstStyle/>
-          <a:p>
-            <a:pPr indent="0" marL="0">
-              <a:buNone/>
-            </a:pPr>
-            <a:r>
-              <a:rPr lang="en-US" sz="1500" b="1" dirty="0">
-                <a:solidFill>
-                  <a:srgbClr val="14322C"/>
-                </a:solidFill>
-                <a:latin typeface="Cambria" pitchFamily="34" charset="0"/>
-                <a:ea typeface="Cambria" pitchFamily="34" charset="-122"/>
-                <a:cs typeface="Cambria" pitchFamily="34" charset="-120"/>
-              </a:rPr>
-              <a:t>2 · OPEN</a:t>
-            </a:r>
-            <a:endParaRPr lang="en-US" sz="1500" dirty="0"/>
-          </a:p>
-        </p:txBody>
-      </p:sp>
-      <p:sp>
-        <p:nvSpPr>
-          <p:cNvPr id="9" name="Text 7"/>
-          <p:cNvSpPr/>
-          <p:nvPr/>
-        </p:nvSpPr>
-        <p:spPr>
-          <a:xfrm>
-            <a:off x="2926080" y="2743200"/>
-            <a:ext cx="8503920" cy="896112"/>
-          </a:xfrm>
-          <a:prstGeom prst="rect">
-            <a:avLst/>
-          </a:prstGeom>
-          <a:noFill/>
-          <a:ln/>
-        </p:spPr>
-        <p:txBody>
-          <a:bodyPr wrap="square" rtlCol="0" anchor="ctr"/>
-          <a:lstStyle/>
-          <a:p>
-            <a:pPr indent="0" marL="0">
-              <a:lnSpc>
-                <a:spcPct val="110000"/>
-              </a:lnSpc>
-              <a:buNone/>
-            </a:pPr>
-            <a:r>
-              <a:rPr lang="en-US" sz="1250" dirty="0">
-                <a:solidFill>
-                  <a:srgbClr val="14322C"/>
-                </a:solidFill>
-                <a:latin typeface="Calibri" pitchFamily="34" charset="0"/>
-                <a:ea typeface="Calibri" pitchFamily="34" charset="-122"/>
-                <a:cs typeface="Calibri" pitchFamily="34" charset="-120"/>
-              </a:rPr>
-              <a:t>A service question, not a pitch: “What could we do better — access, notes back, anything?” Then actually listen.</a:t>
-            </a:r>
-            <a:endParaRPr lang="en-US" sz="1250" dirty="0"/>
-          </a:p>
-        </p:txBody>
-      </p:sp>
-      <p:sp>
-        <p:nvSpPr>
-          <p:cNvPr id="10" name="Shape 8"/>
-          <p:cNvSpPr/>
-          <p:nvPr/>
-        </p:nvSpPr>
-        <p:spPr>
-          <a:xfrm>
-            <a:off x="502920" y="3840480"/>
-            <a:ext cx="11155680" cy="1060704"/>
-          </a:xfrm>
-          <a:prstGeom prst="roundRect">
-            <a:avLst>
-              <a:gd name="adj" fmla="val 5172"/>
-            </a:avLst>
-          </a:prstGeom>
-          <a:solidFill>
-            <a:srgbClr val="E7F2EF"/>
-          </a:solidFill>
-          <a:ln w="12700">
-            <a:solidFill>
-              <a:srgbClr val="DCE7E3"/>
-            </a:solidFill>
-            <a:prstDash val="solid"/>
-          </a:ln>
-        </p:spPr>
-      </p:sp>
-      <p:sp>
-        <p:nvSpPr>
-          <p:cNvPr id="11" name="Text 9"/>
-          <p:cNvSpPr/>
-          <p:nvPr/>
-        </p:nvSpPr>
-        <p:spPr>
-          <a:xfrm>
-            <a:off x="777240" y="3950208"/>
-            <a:ext cx="2011680" cy="822960"/>
-          </a:xfrm>
-          <a:prstGeom prst="rect">
-            <a:avLst/>
-          </a:prstGeom>
-          <a:noFill/>
-          <a:ln/>
-        </p:spPr>
-        <p:txBody>
-          <a:bodyPr wrap="square" rtlCol="0" anchor="ctr"/>
-          <a:lstStyle/>
-          <a:p>
-            <a:pPr indent="0" marL="0">
-              <a:buNone/>
-            </a:pPr>
-            <a:r>
-              <a:rPr lang="en-US" sz="1500" b="1" dirty="0">
-                <a:solidFill>
-                  <a:srgbClr val="9A6A12"/>
-                </a:solidFill>
-                <a:latin typeface="Cambria" pitchFamily="34" charset="0"/>
-                <a:ea typeface="Cambria" pitchFamily="34" charset="-122"/>
-                <a:cs typeface="Cambria" pitchFamily="34" charset="-120"/>
-              </a:rPr>
-              <a:t>3 · MESSAGE</a:t>
-            </a:r>
-            <a:endParaRPr lang="en-US" sz="1500" dirty="0"/>
-          </a:p>
-        </p:txBody>
-      </p:sp>
-      <p:sp>
-        <p:nvSpPr>
-          <p:cNvPr id="12" name="Text 10"/>
-          <p:cNvSpPr/>
-          <p:nvPr/>
-        </p:nvSpPr>
-        <p:spPr>
-          <a:xfrm>
-            <a:off x="2926080" y="3931920"/>
-            <a:ext cx="8503920" cy="896112"/>
-          </a:xfrm>
-          <a:prstGeom prst="rect">
-            <a:avLst/>
-          </a:prstGeom>
-          <a:noFill/>
-          <a:ln/>
-        </p:spPr>
-        <p:txBody>
-          <a:bodyPr wrap="square" rtlCol="0" anchor="ctr"/>
-          <a:lstStyle/>
-          <a:p>
-            <a:pPr indent="0" marL="0">
-              <a:lnSpc>
-                <a:spcPct val="110000"/>
-              </a:lnSpc>
-              <a:buNone/>
-            </a:pPr>
-            <a:r>
-              <a:rPr lang="en-US" sz="1250" dirty="0">
-                <a:solidFill>
-                  <a:srgbClr val="14322C"/>
-                </a:solidFill>
-                <a:latin typeface="Calibri" pitchFamily="34" charset="0"/>
-                <a:ea typeface="Calibri" pitchFamily="34" charset="-122"/>
-                <a:cs typeface="Calibri" pitchFamily="34" charset="-120"/>
-              </a:rPr>
-              <a:t>ONE sentence, matched to practice type (the app writes it for you).</a:t>
-            </a:r>
-            <a:endParaRPr lang="en-US" sz="1250" dirty="0"/>
-          </a:p>
-        </p:txBody>
-      </p:sp>
-      <p:sp>
-        <p:nvSpPr>
-          <p:cNvPr id="13" name="Shape 11"/>
-          <p:cNvSpPr/>
-          <p:nvPr/>
-        </p:nvSpPr>
-        <p:spPr>
-          <a:xfrm>
-            <a:off x="502920" y="5029200"/>
-            <a:ext cx="11155680" cy="1060704"/>
-          </a:xfrm>
-          <a:prstGeom prst="roundRect">
-            <a:avLst>
-              <a:gd name="adj" fmla="val 5172"/>
-            </a:avLst>
-          </a:prstGeom>
-          <a:solidFill>
-            <a:srgbClr val="E7F2EF"/>
-          </a:solidFill>
-          <a:ln w="12700">
-            <a:solidFill>
-              <a:srgbClr val="DCE7E3"/>
-            </a:solidFill>
-            <a:prstDash val="solid"/>
-          </a:ln>
-        </p:spPr>
-      </p:sp>
-      <p:sp>
-        <p:nvSpPr>
-          <p:cNvPr id="14" name="Text 12"/>
-          <p:cNvSpPr/>
-          <p:nvPr/>
-        </p:nvSpPr>
-        <p:spPr>
-          <a:xfrm>
-            <a:off x="777240" y="5138928"/>
-            <a:ext cx="2011680" cy="822960"/>
-          </a:xfrm>
-          <a:prstGeom prst="rect">
-            <a:avLst/>
-          </a:prstGeom>
-          <a:noFill/>
-          <a:ln/>
-        </p:spPr>
-        <p:txBody>
-          <a:bodyPr wrap="square" rtlCol="0" anchor="ctr"/>
-          <a:lstStyle/>
-          <a:p>
-            <a:pPr indent="0" marL="0">
-              <a:buNone/>
-            </a:pPr>
-            <a:r>
-              <a:rPr lang="en-US" sz="1500" b="1" dirty="0">
-                <a:solidFill>
-                  <a:srgbClr val="C4534A"/>
-                </a:solidFill>
-                <a:latin typeface="Cambria" pitchFamily="34" charset="0"/>
-                <a:ea typeface="Cambria" pitchFamily="34" charset="-122"/>
-                <a:cs typeface="Cambria" pitchFamily="34" charset="-120"/>
-              </a:rPr>
-              <a:t>4 · ASK</a:t>
-            </a:r>
-            <a:endParaRPr lang="en-US" sz="1500" dirty="0"/>
-          </a:p>
-        </p:txBody>
-      </p:sp>
-      <p:sp>
-        <p:nvSpPr>
-          <p:cNvPr id="15" name="Text 13"/>
-          <p:cNvSpPr/>
-          <p:nvPr/>
-        </p:nvSpPr>
-        <p:spPr>
-          <a:xfrm>
-            <a:off x="2926080" y="5120640"/>
-            <a:ext cx="8503920" cy="896112"/>
-          </a:xfrm>
-          <a:prstGeom prst="rect">
-            <a:avLst/>
-          </a:prstGeom>
-          <a:noFill/>
-          <a:ln/>
-        </p:spPr>
-        <p:txBody>
-          <a:bodyPr wrap="square" rtlCol="0" anchor="ctr"/>
-          <a:lstStyle/>
-          <a:p>
-            <a:pPr indent="0" marL="0">
-              <a:lnSpc>
-                <a:spcPct val="110000"/>
-              </a:lnSpc>
-              <a:buNone/>
-            </a:pPr>
-            <a:r>
-              <a:rPr lang="en-US" sz="1250" dirty="0">
-                <a:solidFill>
-                  <a:srgbClr val="14322C"/>
-                </a:solidFill>
-                <a:latin typeface="Calibri" pitchFamily="34" charset="0"/>
-                <a:ea typeface="Calibri" pitchFamily="34" charset="-122"/>
-                <a:cs typeface="Calibri" pitchFamily="34" charset="-120"/>
-              </a:rPr>
-              <a:t>One specific behavior. Then leave the one-pager + coordinator card + direct line.</a:t>
-            </a:r>
-            <a:endParaRPr lang="en-US" sz="1250" dirty="0"/>
-          </a:p>
-        </p:txBody>
-      </p:sp>
-      <p:sp>
-        <p:nvSpPr>
-          <p:cNvPr id="16" name="Text 14"/>
-          <p:cNvSpPr/>
-          <p:nvPr/>
-        </p:nvSpPr>
-        <p:spPr>
-          <a:xfrm>
-            <a:off x="502920" y="6263640"/>
-            <a:ext cx="11155680" cy="502920"/>
-          </a:xfrm>
-          <a:prstGeom prst="rect">
-            <a:avLst/>
-          </a:prstGeom>
-          <a:noFill/>
-          <a:ln/>
-        </p:spPr>
-        <p:txBody>
-          <a:bodyPr wrap="square" rtlCol="0" anchor="ctr"/>
-          <a:lstStyle/>
-          <a:p>
-            <a:pPr indent="0" marL="0">
-              <a:buNone/>
-            </a:pPr>
-            <a:r>
-              <a:rPr lang="en-US" sz="1150" i="1" dirty="0">
-                <a:solidFill>
-                  <a:srgbClr val="C4534A"/>
-                </a:solidFill>
-                <a:latin typeface="Calibri" pitchFamily="34" charset="0"/>
-                <a:ea typeface="Calibri" pitchFamily="34" charset="-122"/>
-                <a:cs typeface="Calibri" pitchFamily="34" charset="-120"/>
-              </a:rPr>
-              <a:t>Hard rules: no payments or gifts ever (anti-kickback law) · no patient names or stories, in conversation or in notes · no promises we can't keep (HMO plans need referrals; unverified payer = “intake will confirm coverage same day”).</a:t>
-            </a:r>
-            <a:endParaRPr lang="en-US" sz="1150" dirty="0"/>
-          </a:p>
-        </p:txBody>
-      </p:sp>
-    </p:spTree>
-  </p:cSld>
-  <p:clrMapOvr>
-    <a:masterClrMapping/>
-  </p:clrMapOvr>
-</p:sld>
-</file>
-
-<file path=ppt/slides/slide6.xml><?xml version="1.0" encoding="utf-8"?>
 <p:sld xmlns:a="http://schemas.openxmlformats.org/drawingml/2006/main" xmlns:r="http://schemas.openxmlformats.org/officeDocument/2006/relationships" xmlns:p="http://schemas.openxmlformats.org/presentationml/2006/main">
   <p:cSld name="Slide 6">
     <p:spTree>
@@ -9001,7 +6822,7 @@
           <a:bodyPr wrap="square" rtlCol="0" anchor="ctr"/>
           <a:lstStyle/>
           <a:p>
-            <a:pPr indent="0" marL="0">
+            <a:pPr marL="0" indent="0">
               <a:buNone/>
             </a:pPr>
             <a:r>
@@ -9013,7 +6834,7 @@
                 <a:ea typeface="Cambria" pitchFamily="34" charset="-122"/>
                 <a:cs typeface="Cambria" pitchFamily="34" charset="-120"/>
               </a:rPr>
-              <a:t>Say this: Tier 1 — proven spine senders (PROTECT)</a:t>
+              <a:t>The 90-second visit frame</a:t>
             </a:r>
             <a:endParaRPr lang="en-US" sz="2900" dirty="0"/>
           </a:p>
@@ -9040,7 +6861,7 @@
           <a:bodyPr wrap="square" rtlCol="0" anchor="ctr"/>
           <a:lstStyle/>
           <a:p>
-            <a:pPr indent="0" marL="0">
+            <a:pPr marL="0" indent="0">
               <a:buNone/>
             </a:pPr>
             <a:r>
@@ -9052,7 +6873,7 @@
                 <a:ea typeface="Calibri" pitchFamily="34" charset="-122"/>
                 <a:cs typeface="Calibri" pitchFamily="34" charset="-120"/>
               </a:rPr>
-              <a:t>Your 146 most valuable relationships. Kristen leads these personally where she can.</a:t>
+              <a:t>Same skeleton at every account — the content changes by type (next 4 slides)</a:t>
             </a:r>
             <a:endParaRPr lang="en-US" sz="1300" dirty="0"/>
           </a:p>
@@ -9067,11 +6888,11 @@
         <p:spPr>
           <a:xfrm>
             <a:off x="502920" y="1463040"/>
-            <a:ext cx="5486400" cy="4480560"/>
+            <a:ext cx="11155680" cy="1060704"/>
           </a:xfrm>
           <a:prstGeom prst="roundRect">
             <a:avLst>
-              <a:gd name="adj" fmla="val 1633"/>
+              <a:gd name="adj" fmla="val 5172"/>
             </a:avLst>
           </a:prstGeom>
           <a:solidFill>
@@ -9084,6 +6905,13 @@
             <a:prstDash val="solid"/>
           </a:ln>
         </p:spPr>
+        <p:txBody>
+          <a:bodyPr/>
+          <a:lstStyle/>
+          <a:p>
+            <a:endParaRPr lang="en-US"/>
+          </a:p>
+        </p:txBody>
       </p:sp>
       <p:sp>
         <p:nvSpPr>
@@ -9093,8 +6921,8 @@
         </p:nvSpPr>
         <p:spPr>
           <a:xfrm>
-            <a:off x="777240" y="1645920"/>
-            <a:ext cx="4937760" cy="365760"/>
+            <a:off x="777240" y="1572768"/>
+            <a:ext cx="2011680" cy="822960"/>
           </a:xfrm>
           <a:prstGeom prst="rect">
             <a:avLst/>
@@ -9106,19 +6934,19 @@
           <a:bodyPr wrap="square" rtlCol="0" anchor="ctr"/>
           <a:lstStyle/>
           <a:p>
-            <a:pPr indent="0" marL="0">
+            <a:pPr marL="0" indent="0">
               <a:buNone/>
             </a:pPr>
             <a:r>
               <a:rPr lang="en-US" sz="1500" b="1" dirty="0">
                 <a:solidFill>
-                  <a:srgbClr val="14322C"/>
+                  <a:srgbClr val="49A698"/>
                 </a:solidFill>
                 <a:latin typeface="Cambria" pitchFamily="34" charset="0"/>
                 <a:ea typeface="Cambria" pitchFamily="34" charset="-122"/>
                 <a:cs typeface="Cambria" pitchFamily="34" charset="-120"/>
               </a:rPr>
-              <a:t>Repeat sender — on cadence</a:t>
+              <a:t>1 · THANK</a:t>
             </a:r>
             <a:endParaRPr lang="en-US" sz="1500" dirty="0"/>
           </a:p>
@@ -9132,8 +6960,8 @@
         </p:nvSpPr>
         <p:spPr>
           <a:xfrm>
-            <a:off x="777240" y="2103120"/>
-            <a:ext cx="4937760" cy="3657600"/>
+            <a:off x="2926080" y="1554480"/>
+            <a:ext cx="8503920" cy="896112"/>
           </a:xfrm>
           <a:prstGeom prst="rect">
             <a:avLst/>
@@ -9145,9 +6973,9 @@
           <a:bodyPr wrap="square" rtlCol="0" anchor="ctr"/>
           <a:lstStyle/>
           <a:p>
-            <a:pPr indent="0" marL="0">
+            <a:pPr marL="0" indent="0">
               <a:lnSpc>
-                <a:spcPct val="122000"/>
+                <a:spcPct val="110000"/>
               </a:lnSpc>
               <a:buNone/>
             </a:pPr>
@@ -9160,97 +6988,10 @@
                 <a:ea typeface="Calibri" pitchFamily="34" charset="-122"/>
                 <a:cs typeface="Calibri" pitchFamily="34" charset="-120"/>
               </a:rPr>
-              <a:t>THANK: “Your practice has trusted us with 23 spine patients this year — Dr. Hesselberg's referrals especially. Thank you.”</a:t>
+              <a:t>Thank the referrals they have sent. Name the top referrer when we know them — it's on your stop card.</a:t>
             </a:r>
             <a:endParaRPr lang="en-US" sz="1250" dirty="0"/>
           </a:p>
-          <a:p>
-            <a:pPr indent="0" marL="0">
-              <a:lnSpc>
-                <a:spcPct val="122000"/>
-              </a:lnSpc>
-              <a:buNone/>
-            </a:pPr>
-            <a:endParaRPr lang="en-US" sz="1250" dirty="0"/>
-          </a:p>
-          <a:p>
-            <a:pPr indent="0" marL="0">
-              <a:lnSpc>
-                <a:spcPct val="122000"/>
-              </a:lnSpc>
-              <a:buNone/>
-            </a:pPr>
-            <a:r>
-              <a:rPr lang="en-US" sz="1250" dirty="0">
-                <a:solidFill>
-                  <a:srgbClr val="14322C"/>
-                </a:solidFill>
-                <a:latin typeface="Calibri" pitchFamily="34" charset="0"/>
-                <a:ea typeface="Calibri" pitchFamily="34" charset="-122"/>
-                <a:cs typeface="Calibri" pitchFamily="34" charset="-120"/>
-              </a:rPr>
-              <a:t>OPEN: “What could we do better — access, notes back, anything?”</a:t>
-            </a:r>
-            <a:endParaRPr lang="en-US" sz="1250" dirty="0"/>
-          </a:p>
-          <a:p>
-            <a:pPr indent="0" marL="0">
-              <a:lnSpc>
-                <a:spcPct val="122000"/>
-              </a:lnSpc>
-              <a:buNone/>
-            </a:pPr>
-            <a:endParaRPr lang="en-US" sz="1250" dirty="0"/>
-          </a:p>
-          <a:p>
-            <a:pPr indent="0" marL="0">
-              <a:lnSpc>
-                <a:spcPct val="122000"/>
-              </a:lnSpc>
-              <a:buNone/>
-            </a:pPr>
-            <a:r>
-              <a:rPr lang="en-US" sz="1250" dirty="0">
-                <a:solidFill>
-                  <a:srgbClr val="14322C"/>
-                </a:solidFill>
-                <a:latin typeface="Calibri" pitchFamily="34" charset="0"/>
-                <a:ea typeface="Calibri" pitchFamily="34" charset="-122"/>
-                <a:cs typeface="Calibri" pitchFamily="34" charset="-120"/>
-              </a:rPr>
-              <a:t>MESSAGE (by type — PCP example): “Back/neck patients get seen the same week — imaging through surgery under one roof — and we handle HMO referral paperwork with your staff.”</a:t>
-            </a:r>
-            <a:endParaRPr lang="en-US" sz="1250" dirty="0"/>
-          </a:p>
-          <a:p>
-            <a:pPr indent="0" marL="0">
-              <a:lnSpc>
-                <a:spcPct val="122000"/>
-              </a:lnSpc>
-              <a:buNone/>
-            </a:pPr>
-            <a:endParaRPr lang="en-US" sz="1250" dirty="0"/>
-          </a:p>
-          <a:p>
-            <a:pPr indent="0" marL="0">
-              <a:lnSpc>
-                <a:spcPct val="122000"/>
-              </a:lnSpc>
-              <a:buNone/>
-            </a:pPr>
-            <a:r>
-              <a:rPr lang="en-US" sz="1250" dirty="0">
-                <a:solidFill>
-                  <a:srgbClr val="14322C"/>
-                </a:solidFill>
-                <a:latin typeface="Calibri" pitchFamily="34" charset="0"/>
-                <a:ea typeface="Calibri" pitchFamily="34" charset="-122"/>
-                <a:cs typeface="Calibri" pitchFamily="34" charset="-120"/>
-              </a:rPr>
-              <a:t>ASK: “Anything pending right now we can get seen this week?”</a:t>
-            </a:r>
-            <a:endParaRPr lang="en-US" sz="1250" dirty="0"/>
-          </a:p>
         </p:txBody>
       </p:sp>
       <p:sp>
@@ -9261,16 +7002,16 @@
         </p:nvSpPr>
         <p:spPr>
           <a:xfrm>
-            <a:off x="6172200" y="1463040"/>
-            <a:ext cx="5486400" cy="4480560"/>
+            <a:off x="502920" y="2651760"/>
+            <a:ext cx="11155680" cy="1060704"/>
           </a:xfrm>
           <a:prstGeom prst="roundRect">
             <a:avLst>
-              <a:gd name="adj" fmla="val 1633"/>
+              <a:gd name="adj" fmla="val 5172"/>
             </a:avLst>
           </a:prstGeom>
           <a:solidFill>
-            <a:srgbClr val="F7E7E3"/>
+            <a:srgbClr val="E7F2EF"/>
           </a:solidFill>
           <a:ln w="12700">
             <a:solidFill>
@@ -9279,6 +7020,13 @@
             <a:prstDash val="solid"/>
           </a:ln>
         </p:spPr>
+        <p:txBody>
+          <a:bodyPr/>
+          <a:lstStyle/>
+          <a:p>
+            <a:endParaRPr lang="en-US"/>
+          </a:p>
+        </p:txBody>
       </p:sp>
       <p:sp>
         <p:nvSpPr>
@@ -9288,8 +7036,8 @@
         </p:nvSpPr>
         <p:spPr>
           <a:xfrm>
-            <a:off x="6446520" y="1645920"/>
-            <a:ext cx="4937760" cy="365760"/>
+            <a:off x="777240" y="2761488"/>
+            <a:ext cx="2011680" cy="822960"/>
           </a:xfrm>
           <a:prstGeom prst="rect">
             <a:avLst/>
@@ -9301,7 +7049,7 @@
           <a:bodyPr wrap="square" rtlCol="0" anchor="ctr"/>
           <a:lstStyle/>
           <a:p>
-            <a:pPr indent="0" marL="0">
+            <a:pPr marL="0" indent="0">
               <a:buNone/>
             </a:pPr>
             <a:r>
@@ -9313,7 +7061,7 @@
                 <a:ea typeface="Cambria" pitchFamily="34" charset="-122"/>
                 <a:cs typeface="Cambria" pitchFamily="34" charset="-120"/>
               </a:rPr>
-              <a:t>If a relationship HAS gone quiet — the recovery visit</a:t>
+              <a:t>2 · OPEN</a:t>
             </a:r>
             <a:endParaRPr lang="en-US" sz="1500" dirty="0"/>
           </a:p>
@@ -9327,8 +7075,8 @@
         </p:nvSpPr>
         <p:spPr>
           <a:xfrm>
-            <a:off x="6446520" y="2103120"/>
-            <a:ext cx="4937760" cy="3657600"/>
+            <a:off x="2926080" y="2743200"/>
+            <a:ext cx="8503920" cy="896112"/>
           </a:xfrm>
           <a:prstGeom prst="rect">
             <a:avLst/>
@@ -9340,9 +7088,9 @@
           <a:bodyPr wrap="square" rtlCol="0" anchor="ctr"/>
           <a:lstStyle/>
           <a:p>
-            <a:pPr indent="0" marL="0">
+            <a:pPr marL="0" indent="0">
               <a:lnSpc>
-                <a:spcPct val="122000"/>
+                <a:spcPct val="110000"/>
               </a:lnSpc>
               <a:buNone/>
             </a:pPr>
@@ -9355,23 +7103,224 @@
                 <a:ea typeface="Calibri" pitchFamily="34" charset="-122"/>
                 <a:cs typeface="Calibri" pitchFamily="34" charset="-120"/>
               </a:rPr>
-              <a:t>OPEN WITH OWNERSHIP: “We owe you a visit — that's on us.” No excuses, no explanations.</a:t>
+              <a:t>A service question, not a pitch: “What could we do better — access, notes back, anything?” Then actually listen.</a:t>
             </a:r>
             <a:endParaRPr lang="en-US" sz="1250" dirty="0"/>
           </a:p>
-          <a:p>
-            <a:pPr indent="0" marL="0">
+        </p:txBody>
+      </p:sp>
+      <p:sp>
+        <p:nvSpPr>
+          <p:cNvPr id="10" name="Shape 8"/>
+          <p:cNvSpPr/>
+          <p:nvPr/>
+        </p:nvSpPr>
+        <p:spPr>
+          <a:xfrm>
+            <a:off x="502920" y="3840480"/>
+            <a:ext cx="11155680" cy="1060704"/>
+          </a:xfrm>
+          <a:prstGeom prst="roundRect">
+            <a:avLst>
+              <a:gd name="adj" fmla="val 5172"/>
+            </a:avLst>
+          </a:prstGeom>
+          <a:solidFill>
+            <a:srgbClr val="E7F2EF"/>
+          </a:solidFill>
+          <a:ln w="12700">
+            <a:solidFill>
+              <a:srgbClr val="DCE7E3"/>
+            </a:solidFill>
+            <a:prstDash val="solid"/>
+          </a:ln>
+        </p:spPr>
+        <p:txBody>
+          <a:bodyPr/>
+          <a:lstStyle/>
+          <a:p>
+            <a:endParaRPr lang="en-US"/>
+          </a:p>
+        </p:txBody>
+      </p:sp>
+      <p:sp>
+        <p:nvSpPr>
+          <p:cNvPr id="11" name="Text 9"/>
+          <p:cNvSpPr/>
+          <p:nvPr/>
+        </p:nvSpPr>
+        <p:spPr>
+          <a:xfrm>
+            <a:off x="777240" y="3950208"/>
+            <a:ext cx="2011680" cy="822960"/>
+          </a:xfrm>
+          <a:prstGeom prst="rect">
+            <a:avLst/>
+          </a:prstGeom>
+          <a:noFill/>
+          <a:ln/>
+        </p:spPr>
+        <p:txBody>
+          <a:bodyPr wrap="square" rtlCol="0" anchor="ctr"/>
+          <a:lstStyle/>
+          <a:p>
+            <a:pPr marL="0" indent="0">
+              <a:buNone/>
+            </a:pPr>
+            <a:r>
+              <a:rPr lang="en-US" sz="1500" b="1" dirty="0">
+                <a:solidFill>
+                  <a:srgbClr val="9A6A12"/>
+                </a:solidFill>
+                <a:latin typeface="Cambria" pitchFamily="34" charset="0"/>
+                <a:ea typeface="Cambria" pitchFamily="34" charset="-122"/>
+                <a:cs typeface="Cambria" pitchFamily="34" charset="-120"/>
+              </a:rPr>
+              <a:t>3 · MESSAGE</a:t>
+            </a:r>
+            <a:endParaRPr lang="en-US" sz="1500" dirty="0"/>
+          </a:p>
+        </p:txBody>
+      </p:sp>
+      <p:sp>
+        <p:nvSpPr>
+          <p:cNvPr id="12" name="Text 10"/>
+          <p:cNvSpPr/>
+          <p:nvPr/>
+        </p:nvSpPr>
+        <p:spPr>
+          <a:xfrm>
+            <a:off x="2926080" y="3931920"/>
+            <a:ext cx="8503920" cy="896112"/>
+          </a:xfrm>
+          <a:prstGeom prst="rect">
+            <a:avLst/>
+          </a:prstGeom>
+          <a:noFill/>
+          <a:ln/>
+        </p:spPr>
+        <p:txBody>
+          <a:bodyPr wrap="square" rtlCol="0" anchor="ctr"/>
+          <a:lstStyle/>
+          <a:p>
+            <a:pPr marL="0" indent="0">
               <a:lnSpc>
-                <a:spcPct val="122000"/>
+                <a:spcPct val="110000"/>
               </a:lnSpc>
               <a:buNone/>
             </a:pPr>
+            <a:r>
+              <a:rPr lang="en-US" sz="1250" dirty="0">
+                <a:solidFill>
+                  <a:srgbClr val="14322C"/>
+                </a:solidFill>
+                <a:latin typeface="Calibri" pitchFamily="34" charset="0"/>
+                <a:ea typeface="Calibri" pitchFamily="34" charset="-122"/>
+                <a:cs typeface="Calibri" pitchFamily="34" charset="-120"/>
+              </a:rPr>
+              <a:t>ONE sentence, matched to practice type (the app writes it for you).</a:t>
+            </a:r>
             <a:endParaRPr lang="en-US" sz="1250" dirty="0"/>
           </a:p>
-          <a:p>
-            <a:pPr indent="0" marL="0">
+        </p:txBody>
+      </p:sp>
+      <p:sp>
+        <p:nvSpPr>
+          <p:cNvPr id="13" name="Shape 11"/>
+          <p:cNvSpPr/>
+          <p:nvPr/>
+        </p:nvSpPr>
+        <p:spPr>
+          <a:xfrm>
+            <a:off x="502920" y="5029200"/>
+            <a:ext cx="11155680" cy="1060704"/>
+          </a:xfrm>
+          <a:prstGeom prst="roundRect">
+            <a:avLst>
+              <a:gd name="adj" fmla="val 5172"/>
+            </a:avLst>
+          </a:prstGeom>
+          <a:solidFill>
+            <a:srgbClr val="E7F2EF"/>
+          </a:solidFill>
+          <a:ln w="12700">
+            <a:solidFill>
+              <a:srgbClr val="DCE7E3"/>
+            </a:solidFill>
+            <a:prstDash val="solid"/>
+          </a:ln>
+        </p:spPr>
+        <p:txBody>
+          <a:bodyPr/>
+          <a:lstStyle/>
+          <a:p>
+            <a:endParaRPr lang="en-US"/>
+          </a:p>
+        </p:txBody>
+      </p:sp>
+      <p:sp>
+        <p:nvSpPr>
+          <p:cNvPr id="14" name="Text 12"/>
+          <p:cNvSpPr/>
+          <p:nvPr/>
+        </p:nvSpPr>
+        <p:spPr>
+          <a:xfrm>
+            <a:off x="777240" y="5138928"/>
+            <a:ext cx="2011680" cy="822960"/>
+          </a:xfrm>
+          <a:prstGeom prst="rect">
+            <a:avLst/>
+          </a:prstGeom>
+          <a:noFill/>
+          <a:ln/>
+        </p:spPr>
+        <p:txBody>
+          <a:bodyPr wrap="square" rtlCol="0" anchor="ctr"/>
+          <a:lstStyle/>
+          <a:p>
+            <a:pPr marL="0" indent="0">
+              <a:buNone/>
+            </a:pPr>
+            <a:r>
+              <a:rPr lang="en-US" sz="1500" b="1" dirty="0">
+                <a:solidFill>
+                  <a:srgbClr val="C4534A"/>
+                </a:solidFill>
+                <a:latin typeface="Cambria" pitchFamily="34" charset="0"/>
+                <a:ea typeface="Cambria" pitchFamily="34" charset="-122"/>
+                <a:cs typeface="Cambria" pitchFamily="34" charset="-120"/>
+              </a:rPr>
+              <a:t>4 · ASK</a:t>
+            </a:r>
+            <a:endParaRPr lang="en-US" sz="1500" dirty="0"/>
+          </a:p>
+        </p:txBody>
+      </p:sp>
+      <p:sp>
+        <p:nvSpPr>
+          <p:cNvPr id="15" name="Text 13"/>
+          <p:cNvSpPr/>
+          <p:nvPr/>
+        </p:nvSpPr>
+        <p:spPr>
+          <a:xfrm>
+            <a:off x="2926080" y="5120640"/>
+            <a:ext cx="8503920" cy="896112"/>
+          </a:xfrm>
+          <a:prstGeom prst="rect">
+            <a:avLst/>
+          </a:prstGeom>
+          <a:noFill/>
+          <a:ln/>
+        </p:spPr>
+        <p:txBody>
+          <a:bodyPr wrap="square" rtlCol="0" anchor="ctr"/>
+          <a:lstStyle/>
+          <a:p>
+            <a:pPr marL="0" indent="0">
               <a:lnSpc>
-                <a:spcPct val="122000"/>
+                <a:spcPct val="110000"/>
               </a:lnSpc>
               <a:buNone/>
             </a:pPr>
@@ -9384,28 +7333,47 @@
                 <a:ea typeface="Calibri" pitchFamily="34" charset="-122"/>
                 <a:cs typeface="Calibri" pitchFamily="34" charset="-120"/>
               </a:rPr>
-              <a:t>Then THANK (same aggregate numbers), then the service question — and FIX whatever they name. One service commitment before you leave.</a:t>
+              <a:t>One specific behavior. Then leave the one-pager + coordinator card + direct line.</a:t>
             </a:r>
             <a:endParaRPr lang="en-US" sz="1250" dirty="0"/>
           </a:p>
-          <a:p>
-            <a:pPr indent="0" marL="0">
+        </p:txBody>
+      </p:sp>
+      <p:sp>
+        <p:nvSpPr>
+          <p:cNvPr id="18" name="Text 2">
+            <a:extLst>
+              <a:ext uri="{FF2B5EF4-FFF2-40B4-BE49-F238E27FC236}">
+                <a16:creationId xmlns:a16="http://schemas.microsoft.com/office/drawing/2014/main" id="{B80AC7F8-2420-3B63-2273-22302C758298}"/>
+              </a:ext>
+            </a:extLst>
+          </p:cNvPr>
+          <p:cNvSpPr/>
+          <p:nvPr/>
+        </p:nvSpPr>
+        <p:spPr>
+          <a:xfrm>
+            <a:off x="502920" y="6199631"/>
+            <a:ext cx="11155680" cy="541703"/>
+          </a:xfrm>
+          <a:prstGeom prst="rect">
+            <a:avLst/>
+          </a:prstGeom>
+          <a:noFill/>
+          <a:ln/>
+        </p:spPr>
+        <p:txBody>
+          <a:bodyPr wrap="square" rtlCol="0" anchor="ctr"/>
+          <a:lstStyle/>
+          <a:p>
+            <a:pPr marL="0" indent="0">
               <a:lnSpc>
-                <a:spcPct val="122000"/>
+                <a:spcPct val="120000"/>
               </a:lnSpc>
               <a:buNone/>
             </a:pPr>
-            <a:endParaRPr lang="en-US" sz="1250" dirty="0"/>
-          </a:p>
-          <a:p>
-            <a:pPr indent="0" marL="0">
-              <a:lnSpc>
-                <a:spcPct val="122000"/>
-              </a:lnSpc>
-              <a:buNone/>
-            </a:pPr>
-            <a:r>
-              <a:rPr lang="en-US" sz="1250" dirty="0">
+            <a:r>
+              <a:rPr lang="en-US" sz="1350" b="1" dirty="0">
                 <a:solidFill>
                   <a:srgbClr val="14322C"/>
                 </a:solidFill>
@@ -9413,28 +7381,10 @@
                 <a:ea typeface="Calibri" pitchFamily="34" charset="-122"/>
                 <a:cs typeface="Calibri" pitchFamily="34" charset="-120"/>
               </a:rPr>
-              <a:t>ASK: “Anything pending we can get seen this week?” — same-week access is the trust rebuilder.</a:t>
-            </a:r>
-            <a:endParaRPr lang="en-US" sz="1250" dirty="0"/>
-          </a:p>
-          <a:p>
-            <a:pPr indent="0" marL="0">
-              <a:lnSpc>
-                <a:spcPct val="122000"/>
-              </a:lnSpc>
-              <a:buNone/>
-            </a:pPr>
-            <a:endParaRPr lang="en-US" sz="1250" dirty="0"/>
-          </a:p>
-          <a:p>
-            <a:pPr indent="0" marL="0">
-              <a:lnSpc>
-                <a:spcPct val="122000"/>
-              </a:lnSpc>
-              <a:buNone/>
-            </a:pPr>
-            <a:r>
-              <a:rPr lang="en-US" sz="1250" dirty="0">
+              <a:t>Marketing Materials Needed: </a:t>
+            </a:r>
+            <a:r>
+              <a:rPr lang="en-US" sz="1350" dirty="0">
                 <a:solidFill>
                   <a:srgbClr val="14322C"/>
                 </a:solidFill>
@@ -9442,9 +7392,9 @@
                 <a:ea typeface="Calibri" pitchFamily="34" charset="-122"/>
                 <a:cs typeface="Calibri" pitchFamily="34" charset="-120"/>
               </a:rPr>
-              <a:t>Note: “quiet” means no LOGGED visit — texts and calls don't hit MMC, so you know your book better than the export does. Use judgment.</a:t>
-            </a:r>
-            <a:endParaRPr lang="en-US" sz="1250" dirty="0"/>
+              <a:t>Refresh spine assets based on spine adjacent practices and repeat sender patient types (sciatica, herniated discs, degenerative disc disease, spinal stenosis)</a:t>
+            </a:r>
+            <a:endParaRPr lang="en-US" sz="1350" dirty="0"/>
           </a:p>
         </p:txBody>
       </p:sp>
@@ -9456,7 +7406,7 @@
 </p:sld>
 </file>
 
-<file path=ppt/slides/slide7.xml><?xml version="1.0" encoding="utf-8"?>
+<file path=ppt/slides/slide6.xml><?xml version="1.0" encoding="utf-8"?>
 <p:sld xmlns:a="http://schemas.openxmlformats.org/drawingml/2006/main" xmlns:r="http://schemas.openxmlformats.org/officeDocument/2006/relationships" xmlns:p="http://schemas.openxmlformats.org/presentationml/2006/main">
   <p:cSld name="Slide 7">
     <p:spTree>
@@ -9494,7 +7444,7 @@
           <a:bodyPr wrap="square" rtlCol="0" anchor="ctr"/>
           <a:lstStyle/>
           <a:p>
-            <a:pPr indent="0" marL="0">
+            <a:pPr marL="0" indent="0">
               <a:buNone/>
             </a:pPr>
             <a:r>
@@ -9506,7 +7456,7 @@
                 <a:ea typeface="Cambria" pitchFamily="34" charset="-122"/>
                 <a:cs typeface="Cambria" pitchFamily="34" charset="-120"/>
               </a:rPr>
-              <a:t>Say this: CONVERT one-timers · CROSS-SELL ortho</a:t>
+              <a:t>Say this: Tier 1 — proven spine senders (PROTECT)</a:t>
             </a:r>
             <a:endParaRPr lang="en-US" sz="2900" dirty="0"/>
           </a:p>
@@ -9533,7 +7483,7 @@
           <a:bodyPr wrap="square" rtlCol="0" anchor="ctr"/>
           <a:lstStyle/>
           <a:p>
-            <a:pPr indent="0" marL="0">
+            <a:pPr marL="0" indent="0">
               <a:buNone/>
             </a:pPr>
             <a:r>
@@ -9545,7 +7495,7 @@
                 <a:ea typeface="Calibri" pitchFamily="34" charset="-122"/>
                 <a:cs typeface="Calibri" pitchFamily="34" charset="-120"/>
               </a:rPr>
-              <a:t>The 92 one-spine accounts are the single biggest growth lever — every 15 conversions ≈ +10 spine/month</a:t>
+              <a:t>Your 146 most valuable relationships. Kristen leads these personally where she can.</a:t>
             </a:r>
             <a:endParaRPr lang="en-US" sz="1300" dirty="0"/>
           </a:p>
@@ -9577,6 +7527,13 @@
             <a:prstDash val="solid"/>
           </a:ln>
         </p:spPr>
+        <p:txBody>
+          <a:bodyPr/>
+          <a:lstStyle/>
+          <a:p>
+            <a:endParaRPr lang="en-US"/>
+          </a:p>
+        </p:txBody>
       </p:sp>
       <p:sp>
         <p:nvSpPr>
@@ -9599,7 +7556,7 @@
           <a:bodyPr wrap="square" rtlCol="0" anchor="ctr"/>
           <a:lstStyle/>
           <a:p>
-            <a:pPr indent="0" marL="0">
+            <a:pPr marL="0" indent="0">
               <a:buNone/>
             </a:pPr>
             <a:r>
@@ -9611,7 +7568,7 @@
                 <a:ea typeface="Cambria" pitchFamily="34" charset="-122"/>
                 <a:cs typeface="Cambria" pitchFamily="34" charset="-120"/>
               </a:rPr>
-              <a:t>One spine patient — make us the default</a:t>
+              <a:t>Repeat sender — on cadence</a:t>
             </a:r>
             <a:endParaRPr lang="en-US" sz="1500" dirty="0"/>
           </a:p>
@@ -9638,7 +7595,7 @@
           <a:bodyPr wrap="square" rtlCol="0" anchor="ctr"/>
           <a:lstStyle/>
           <a:p>
-            <a:pPr indent="0" marL="0">
+            <a:pPr marL="0" indent="0">
               <a:lnSpc>
                 <a:spcPct val="122000"/>
               </a:lnSpc>
@@ -9653,12 +7610,12 @@
                 <a:ea typeface="Calibri" pitchFamily="34" charset="-122"/>
                 <a:cs typeface="Calibri" pitchFamily="34" charset="-120"/>
               </a:rPr>
-              <a:t>THANK: “Thank you for the spine patient you trusted us with.”</a:t>
+              <a:t>THANK: “Thanks for trusting us with the care of your patients — Dr. Hesselberg's referrals especially. Thank you.”</a:t>
             </a:r>
             <a:endParaRPr lang="en-US" sz="1250" dirty="0"/>
           </a:p>
           <a:p>
-            <a:pPr indent="0" marL="0">
+            <a:pPr marL="0" indent="0">
               <a:lnSpc>
                 <a:spcPct val="122000"/>
               </a:lnSpc>
@@ -9667,7 +7624,7 @@
             <a:endParaRPr lang="en-US" sz="1250" dirty="0"/>
           </a:p>
           <a:p>
-            <a:pPr indent="0" marL="0">
+            <a:pPr marL="0" indent="0">
               <a:lnSpc>
                 <a:spcPct val="122000"/>
               </a:lnSpc>
@@ -9682,12 +7639,12 @@
                 <a:ea typeface="Calibri" pitchFamily="34" charset="-122"/>
                 <a:cs typeface="Calibri" pitchFamily="34" charset="-120"/>
               </a:rPr>
-              <a:t>OPEN: “How was that experience — for you and for them?” (Their answer tells you exactly what to fix or amplify.)</a:t>
+              <a:t>OPEN: “What could we do better — access, notes back, anything?”</a:t>
             </a:r>
             <a:endParaRPr lang="en-US" sz="1250" dirty="0"/>
           </a:p>
           <a:p>
-            <a:pPr indent="0" marL="0">
+            <a:pPr marL="0" indent="0">
               <a:lnSpc>
                 <a:spcPct val="122000"/>
               </a:lnSpc>
@@ -9696,7 +7653,7 @@
             <a:endParaRPr lang="en-US" sz="1250" dirty="0"/>
           </a:p>
           <a:p>
-            <a:pPr indent="0" marL="0">
+            <a:pPr marL="0" indent="0">
               <a:lnSpc>
                 <a:spcPct val="122000"/>
               </a:lnSpc>
@@ -9711,12 +7668,12 @@
                 <a:ea typeface="Calibri" pitchFamily="34" charset="-122"/>
                 <a:cs typeface="Calibri" pitchFamily="34" charset="-120"/>
               </a:rPr>
-              <a:t>MESSAGE: “That same pathway works every time — same-week access, conservative first, surgery only when warranted.”</a:t>
+              <a:t>MESSAGE (by type — PCP example): “Back/neck patients get seen the same week — imaging through surgery under one roof — and we handle HMO referral paperwork with your staff.”</a:t>
             </a:r>
             <a:endParaRPr lang="en-US" sz="1250" dirty="0"/>
           </a:p>
           <a:p>
-            <a:pPr indent="0" marL="0">
+            <a:pPr marL="0" indent="0">
               <a:lnSpc>
                 <a:spcPct val="122000"/>
               </a:lnSpc>
@@ -9725,7 +7682,7 @@
             <a:endParaRPr lang="en-US" sz="1250" dirty="0"/>
           </a:p>
           <a:p>
-            <a:pPr indent="0" marL="0">
+            <a:pPr marL="0" indent="0">
               <a:lnSpc>
                 <a:spcPct val="122000"/>
               </a:lnSpc>
@@ -9740,7 +7697,7 @@
                 <a:ea typeface="Calibri" pitchFamily="34" charset="-122"/>
                 <a:cs typeface="Calibri" pitchFamily="34" charset="-120"/>
               </a:rPr>
-              <a:t>ASK: “Make us your default for the NEXT back or neck patient.” Leave the coordinator card.</a:t>
+              <a:t>ASK: “Anything pending right now we can get seen this week?”</a:t>
             </a:r>
             <a:endParaRPr lang="en-US" sz="1250" dirty="0"/>
           </a:p>
@@ -9763,7 +7720,7 @@
             </a:avLst>
           </a:prstGeom>
           <a:solidFill>
-            <a:srgbClr val="FDF6E7"/>
+            <a:srgbClr val="F7E7E3"/>
           </a:solidFill>
           <a:ln w="12700">
             <a:solidFill>
@@ -9772,6 +7729,13 @@
             <a:prstDash val="solid"/>
           </a:ln>
         </p:spPr>
+        <p:txBody>
+          <a:bodyPr/>
+          <a:lstStyle/>
+          <a:p>
+            <a:endParaRPr lang="en-US"/>
+          </a:p>
+        </p:txBody>
       </p:sp>
       <p:sp>
         <p:nvSpPr>
@@ -9794,7 +7758,7 @@
           <a:bodyPr wrap="square" rtlCol="0" anchor="ctr"/>
           <a:lstStyle/>
           <a:p>
-            <a:pPr indent="0" marL="0">
+            <a:pPr marL="0" indent="0">
               <a:buNone/>
             </a:pPr>
             <a:r>
@@ -9806,7 +7770,7 @@
                 <a:ea typeface="Cambria" pitchFamily="34" charset="-122"/>
                 <a:cs typeface="Cambria" pitchFamily="34" charset="-120"/>
               </a:rPr>
-              <a:t>Ortho referrer — spine works the same way</a:t>
+              <a:t>If a relationship HAS gone quiet — the recovery visit</a:t>
             </a:r>
             <a:endParaRPr lang="en-US" sz="1500" dirty="0"/>
           </a:p>
@@ -9833,7 +7797,7 @@
           <a:bodyPr wrap="square" rtlCol="0" anchor="ctr"/>
           <a:lstStyle/>
           <a:p>
-            <a:pPr indent="0" marL="0">
+            <a:pPr marL="0" indent="0">
               <a:lnSpc>
                 <a:spcPct val="122000"/>
               </a:lnSpc>
@@ -9848,12 +7812,12 @@
                 <a:ea typeface="Calibri" pitchFamily="34" charset="-122"/>
                 <a:cs typeface="Calibri" pitchFamily="34" charset="-120"/>
               </a:rPr>
-              <a:t>THANK: “You've sent us N ortho patients this year — thank you.”</a:t>
+              <a:t>OPEN WITH OWNERSHIP: “We owe you a visit — that's on us.” No excuses, no explanations.</a:t>
             </a:r>
             <a:endParaRPr lang="en-US" sz="1250" dirty="0"/>
           </a:p>
           <a:p>
-            <a:pPr indent="0" marL="0">
+            <a:pPr marL="0" indent="0">
               <a:lnSpc>
                 <a:spcPct val="122000"/>
               </a:lnSpc>
@@ -9862,7 +7826,7 @@
             <a:endParaRPr lang="en-US" sz="1250" dirty="0"/>
           </a:p>
           <a:p>
-            <a:pPr indent="0" marL="0">
+            <a:pPr marL="0" indent="0">
               <a:lnSpc>
                 <a:spcPct val="122000"/>
               </a:lnSpc>
@@ -9877,12 +7841,12 @@
                 <a:ea typeface="Calibri" pitchFamily="34" charset="-122"/>
                 <a:cs typeface="Calibri" pitchFamily="34" charset="-120"/>
               </a:rPr>
-              <a:t>OPEN: service question.</a:t>
+              <a:t>Then THANK (same aggregate numbers), then the service question — and FIX whatever they name. One service commitment before you leave.</a:t>
             </a:r>
             <a:endParaRPr lang="en-US" sz="1250" dirty="0"/>
           </a:p>
           <a:p>
-            <a:pPr indent="0" marL="0">
+            <a:pPr marL="0" indent="0">
               <a:lnSpc>
                 <a:spcPct val="122000"/>
               </a:lnSpc>
@@ -9891,7 +7855,7 @@
             <a:endParaRPr lang="en-US" sz="1250" dirty="0"/>
           </a:p>
           <a:p>
-            <a:pPr indent="0" marL="0">
+            <a:pPr marL="0" indent="0">
               <a:lnSpc>
                 <a:spcPct val="122000"/>
               </a:lnSpc>
@@ -9906,12 +7870,12 @@
                 <a:ea typeface="Calibri" pitchFamily="34" charset="-122"/>
                 <a:cs typeface="Calibri" pitchFamily="34" charset="-120"/>
               </a:rPr>
-              <a:t>MESSAGE: “Spine works exactly the way your knees and shoulders already do — same door, same speed. Your patient stays yours; notes back every visit.”</a:t>
+              <a:t>ASK: “Anything pending we can get seen this week?” — same-week access is the trust rebuilder.</a:t>
             </a:r>
             <a:endParaRPr lang="en-US" sz="1250" dirty="0"/>
           </a:p>
           <a:p>
-            <a:pPr indent="0" marL="0">
+            <a:pPr marL="0" indent="0">
               <a:lnSpc>
                 <a:spcPct val="122000"/>
               </a:lnSpc>
@@ -9920,7 +7884,7 @@
             <a:endParaRPr lang="en-US" sz="1250" dirty="0"/>
           </a:p>
           <a:p>
-            <a:pPr indent="0" marL="0">
+            <a:pPr marL="0" indent="0">
               <a:lnSpc>
                 <a:spcPct val="122000"/>
               </a:lnSpc>
@@ -9935,36 +7899,7 @@
                 <a:ea typeface="Calibri" pitchFamily="34" charset="-122"/>
                 <a:cs typeface="Calibri" pitchFamily="34" charset="-120"/>
               </a:rPr>
-              <a:t>ASK: “Send the next back/neck patient the way you send knees.”</a:t>
-            </a:r>
-            <a:endParaRPr lang="en-US" sz="1250" dirty="0"/>
-          </a:p>
-          <a:p>
-            <a:pPr indent="0" marL="0">
-              <a:lnSpc>
-                <a:spcPct val="122000"/>
-              </a:lnSpc>
-              <a:buNone/>
-            </a:pPr>
-            <a:endParaRPr lang="en-US" sz="1250" dirty="0"/>
-          </a:p>
-          <a:p>
-            <a:pPr indent="0" marL="0">
-              <a:lnSpc>
-                <a:spcPct val="122000"/>
-              </a:lnSpc>
-              <a:buNone/>
-            </a:pPr>
-            <a:r>
-              <a:rPr lang="en-US" sz="1250" dirty="0">
-                <a:solidFill>
-                  <a:srgbClr val="14322C"/>
-                </a:solidFill>
-                <a:latin typeface="Calibri" pitchFamily="34" charset="0"/>
-                <a:ea typeface="Calibri" pitchFamily="34" charset="-122"/>
-                <a:cs typeface="Calibri" pitchFamily="34" charset="-120"/>
-              </a:rPr>
-              <a:t>These are Tier 2 — 30-day rhythm, and we are ALL-IN on them: they already trust us with patients.</a:t>
+              <a:t>Note: “quiet” means no LOGGED visit — texts and calls don't hit MMC, so you know your book better than the export does. Use judgment.</a:t>
             </a:r>
             <a:endParaRPr lang="en-US" sz="1250" dirty="0"/>
           </a:p>
@@ -9978,7 +7913,7 @@
 </p:sld>
 </file>
 
-<file path=ppt/slides/slide8.xml><?xml version="1.0" encoding="utf-8"?>
+<file path=ppt/slides/slide7.xml><?xml version="1.0" encoding="utf-8"?>
 <p:sld xmlns:a="http://schemas.openxmlformats.org/drawingml/2006/main" xmlns:r="http://schemas.openxmlformats.org/officeDocument/2006/relationships" xmlns:p="http://schemas.openxmlformats.org/presentationml/2006/main">
   <p:cSld name="Slide 8">
     <p:spTree>
@@ -10016,7 +7951,7 @@
           <a:bodyPr wrap="square" rtlCol="0" anchor="ctr"/>
           <a:lstStyle/>
           <a:p>
-            <a:pPr indent="0" marL="0">
+            <a:pPr marL="0" indent="0">
               <a:buNone/>
             </a:pPr>
             <a:r>
@@ -10028,7 +7963,7 @@
                 <a:ea typeface="Cambria" pitchFamily="34" charset="-122"/>
                 <a:cs typeface="Cambria" pitchFamily="34" charset="-120"/>
               </a:rPr>
-              <a:t>Say this: prospects — and the 90-day read</a:t>
+              <a:t>Say this: CONVERT one-timers · CROSS-SELL ortho</a:t>
             </a:r>
             <a:endParaRPr lang="en-US" sz="2900" dirty="0"/>
           </a:p>
@@ -10055,7 +7990,7 @@
           <a:bodyPr wrap="square" rtlCol="0" anchor="ctr"/>
           <a:lstStyle/>
           <a:p>
-            <a:pPr indent="0" marL="0">
+            <a:pPr marL="0" indent="0">
               <a:buNone/>
             </a:pPr>
             <a:r>
@@ -10067,7 +8002,7 @@
                 <a:ea typeface="Calibri" pitchFamily="34" charset="-122"/>
                 <a:cs typeface="Calibri" pitchFamily="34" charset="-120"/>
               </a:rPr>
-              <a:t>469 accounts, pre-mixed into your route days. Nothing gets deleted — your field read decides what moves up.</a:t>
+              <a:t>The 92 one-spine accounts are the single biggest growth lever — every 15 conversions ≈ +10 spine/month</a:t>
             </a:r>
             <a:endParaRPr lang="en-US" sz="1300" dirty="0"/>
           </a:p>
@@ -10082,7 +8017,7 @@
         <p:spPr>
           <a:xfrm>
             <a:off x="502920" y="1463040"/>
-            <a:ext cx="6766560" cy="4480560"/>
+            <a:ext cx="5486400" cy="4480560"/>
           </a:xfrm>
           <a:prstGeom prst="roundRect">
             <a:avLst>
@@ -10099,6 +8034,13 @@
             <a:prstDash val="solid"/>
           </a:ln>
         </p:spPr>
+        <p:txBody>
+          <a:bodyPr/>
+          <a:lstStyle/>
+          <a:p>
+            <a:endParaRPr lang="en-US"/>
+          </a:p>
+        </p:txBody>
       </p:sp>
       <p:sp>
         <p:nvSpPr>
@@ -10109,7 +8051,7 @@
         <p:spPr>
           <a:xfrm>
             <a:off x="777240" y="1645920"/>
-            <a:ext cx="6217920" cy="365760"/>
+            <a:ext cx="4937760" cy="365760"/>
           </a:xfrm>
           <a:prstGeom prst="rect">
             <a:avLst/>
@@ -10121,7 +8063,7 @@
           <a:bodyPr wrap="square" rtlCol="0" anchor="ctr"/>
           <a:lstStyle/>
           <a:p>
-            <a:pPr indent="0" marL="0">
+            <a:pPr marL="0" indent="0">
               <a:buNone/>
             </a:pPr>
             <a:r>
@@ -10133,7 +8075,7 @@
                 <a:ea typeface="Cambria" pitchFamily="34" charset="-122"/>
                 <a:cs typeface="Cambria" pitchFamily="34" charset="-120"/>
               </a:rPr>
-              <a:t>Prospect first touch — earn the first handful</a:t>
+              <a:t>One spine patient — make us the default</a:t>
             </a:r>
             <a:endParaRPr lang="en-US" sz="1500" dirty="0"/>
           </a:p>
@@ -10148,7 +8090,7 @@
         <p:spPr>
           <a:xfrm>
             <a:off x="777240" y="2103120"/>
-            <a:ext cx="6217920" cy="3657600"/>
+            <a:ext cx="4937760" cy="3657600"/>
           </a:xfrm>
           <a:prstGeom prst="rect">
             <a:avLst/>
@@ -10160,7 +8102,7 @@
           <a:bodyPr wrap="square" rtlCol="0" anchor="ctr"/>
           <a:lstStyle/>
           <a:p>
-            <a:pPr indent="0" marL="0">
+            <a:pPr marL="0" indent="0">
               <a:lnSpc>
                 <a:spcPct val="122000"/>
               </a:lnSpc>
@@ -10175,12 +8117,12 @@
                 <a:ea typeface="Calibri" pitchFamily="34" charset="-122"/>
                 <a:cs typeface="Calibri" pitchFamily="34" charset="-120"/>
               </a:rPr>
-              <a:t>INTRODUCE: “Synergy — integrated ortho + spine, deep bench, conservative-first. Patients seen the same week.”</a:t>
+              <a:t>THANK: “Thank you for the spine patient you trusted us with.”</a:t>
             </a:r>
             <a:endParaRPr lang="en-US" sz="1250" dirty="0"/>
           </a:p>
           <a:p>
-            <a:pPr indent="0" marL="0">
+            <a:pPr marL="0" indent="0">
               <a:lnSpc>
                 <a:spcPct val="122000"/>
               </a:lnSpc>
@@ -10189,7 +8131,7 @@
             <a:endParaRPr lang="en-US" sz="1250" dirty="0"/>
           </a:p>
           <a:p>
-            <a:pPr indent="0" marL="0">
+            <a:pPr marL="0" indent="0">
               <a:lnSpc>
                 <a:spcPct val="122000"/>
               </a:lnSpc>
@@ -10204,12 +8146,12 @@
                 <a:ea typeface="Calibri" pitchFamily="34" charset="-122"/>
                 <a:cs typeface="Calibri" pitchFamily="34" charset="-120"/>
               </a:rPr>
-              <a:t>MESSAGE (type-matched — urgent care example): “Your discharge sheet can book a spine evaluation the same week — one number, we take it from there.”</a:t>
+              <a:t>OPEN: “How was that experience — for you and for them?” (Their answer tells you exactly what to fix or amplify.)</a:t>
             </a:r>
             <a:endParaRPr lang="en-US" sz="1250" dirty="0"/>
           </a:p>
           <a:p>
-            <a:pPr indent="0" marL="0">
+            <a:pPr marL="0" indent="0">
               <a:lnSpc>
                 <a:spcPct val="122000"/>
               </a:lnSpc>
@@ -10218,7 +8160,7 @@
             <a:endParaRPr lang="en-US" sz="1250" dirty="0"/>
           </a:p>
           <a:p>
-            <a:pPr indent="0" marL="0">
+            <a:pPr marL="0" indent="0">
               <a:lnSpc>
                 <a:spcPct val="122000"/>
               </a:lnSpc>
@@ -10233,10 +8175,39 @@
                 <a:ea typeface="Calibri" pitchFamily="34" charset="-122"/>
                 <a:cs typeface="Calibri" pitchFamily="34" charset="-120"/>
               </a:rPr>
-              <a:t>ASK: “Send us a handful — let us show you what we're about.” Leave one-pager + direct line. Log who you met — next time you greet them by name.</a:t>
+              <a:t>MESSAGE: “That same pathway works every time — same-week access, conservative first, surgery only when warranted.”</a:t>
             </a:r>
             <a:endParaRPr lang="en-US" sz="1250" dirty="0"/>
           </a:p>
+          <a:p>
+            <a:pPr marL="0" indent="0">
+              <a:lnSpc>
+                <a:spcPct val="122000"/>
+              </a:lnSpc>
+              <a:buNone/>
+            </a:pPr>
+            <a:endParaRPr lang="en-US" sz="1250" dirty="0"/>
+          </a:p>
+          <a:p>
+            <a:pPr marL="0" indent="0">
+              <a:lnSpc>
+                <a:spcPct val="122000"/>
+              </a:lnSpc>
+              <a:buNone/>
+            </a:pPr>
+            <a:r>
+              <a:rPr lang="en-US" sz="1250" dirty="0">
+                <a:solidFill>
+                  <a:srgbClr val="14322C"/>
+                </a:solidFill>
+                <a:latin typeface="Calibri" pitchFamily="34" charset="0"/>
+                <a:ea typeface="Calibri" pitchFamily="34" charset="-122"/>
+                <a:cs typeface="Calibri" pitchFamily="34" charset="-120"/>
+              </a:rPr>
+              <a:t>ASK: “Make us your default for the NEXT back or neck patient.” Leave the coordinator card.</a:t>
+            </a:r>
+            <a:endParaRPr lang="en-US" sz="1250" dirty="0"/>
+          </a:p>
         </p:txBody>
       </p:sp>
       <p:sp>
@@ -10247,19 +8218,31 @@
         </p:nvSpPr>
         <p:spPr>
           <a:xfrm>
-            <a:off x="7452360" y="1463040"/>
-            <a:ext cx="4206240" cy="4480560"/>
+            <a:off x="6172200" y="1463040"/>
+            <a:ext cx="5486400" cy="4480560"/>
           </a:xfrm>
           <a:prstGeom prst="roundRect">
             <a:avLst>
-              <a:gd name="adj" fmla="val 1739"/>
+              <a:gd name="adj" fmla="val 1633"/>
             </a:avLst>
           </a:prstGeom>
           <a:solidFill>
-            <a:srgbClr val="14322C"/>
+            <a:srgbClr val="FDF6E7"/>
           </a:solidFill>
-          <a:ln/>
-        </p:spPr>
+          <a:ln w="12700">
+            <a:solidFill>
+              <a:srgbClr val="DCE7E3"/>
+            </a:solidFill>
+            <a:prstDash val="solid"/>
+          </a:ln>
+        </p:spPr>
+        <p:txBody>
+          <a:bodyPr/>
+          <a:lstStyle/>
+          <a:p>
+            <a:endParaRPr lang="en-US"/>
+          </a:p>
+        </p:txBody>
       </p:sp>
       <p:sp>
         <p:nvSpPr>
@@ -10269,8 +8252,8 @@
         </p:nvSpPr>
         <p:spPr>
           <a:xfrm>
-            <a:off x="7726680" y="1691640"/>
-            <a:ext cx="3657600" cy="365760"/>
+            <a:off x="6446520" y="1645920"/>
+            <a:ext cx="4937760" cy="365760"/>
           </a:xfrm>
           <a:prstGeom prst="rect">
             <a:avLst/>
@@ -10282,21 +8265,21 @@
           <a:bodyPr wrap="square" rtlCol="0" anchor="ctr"/>
           <a:lstStyle/>
           <a:p>
-            <a:pPr indent="0" marL="0">
-              <a:buNone/>
-            </a:pPr>
-            <a:r>
-              <a:rPr lang="en-US" sz="1400" b="1" spc="200" kern="0" dirty="0">
-                <a:solidFill>
-                  <a:srgbClr val="49A698"/>
-                </a:solidFill>
-                <a:latin typeface="Calibri" pitchFamily="34" charset="0"/>
-                <a:ea typeface="Calibri" pitchFamily="34" charset="-122"/>
-                <a:cs typeface="Calibri" pitchFamily="34" charset="-120"/>
-              </a:rPr>
-              <a:t>THE 90-DAY READ</a:t>
-            </a:r>
-            <a:endParaRPr lang="en-US" sz="1400" dirty="0"/>
+            <a:pPr marL="0" indent="0">
+              <a:buNone/>
+            </a:pPr>
+            <a:r>
+              <a:rPr lang="en-US" sz="1500" b="1" dirty="0">
+                <a:solidFill>
+                  <a:srgbClr val="14322C"/>
+                </a:solidFill>
+                <a:latin typeface="Cambria" pitchFamily="34" charset="0"/>
+                <a:ea typeface="Cambria" pitchFamily="34" charset="-122"/>
+                <a:cs typeface="Cambria" pitchFamily="34" charset="-120"/>
+              </a:rPr>
+              <a:t>Ortho referrer — spine works the same way</a:t>
+            </a:r>
+            <a:endParaRPr lang="en-US" sz="1500" dirty="0"/>
           </a:p>
         </p:txBody>
       </p:sp>
@@ -10308,8 +8291,8 @@
         </p:nvSpPr>
         <p:spPr>
           <a:xfrm>
-            <a:off x="7726680" y="2148840"/>
-            <a:ext cx="3657600" cy="3657600"/>
+            <a:off x="6446520" y="2103120"/>
+            <a:ext cx="4937760" cy="3657600"/>
           </a:xfrm>
           <a:prstGeom prst="rect">
             <a:avLst/>
@@ -10321,140 +8304,140 @@
           <a:bodyPr wrap="square" rtlCol="0" anchor="ctr"/>
           <a:lstStyle/>
           <a:p>
-            <a:pPr indent="0" marL="0">
+            <a:pPr marL="0" indent="0">
               <a:lnSpc>
-                <a:spcPct val="118000"/>
+                <a:spcPct val="122000"/>
               </a:lnSpc>
               <a:buNone/>
             </a:pPr>
             <a:r>
-              <a:rPr lang="en-US" sz="1150" dirty="0">
-                <a:solidFill>
-                  <a:srgbClr val="E4EFEC"/>
-                </a:solidFill>
-                <a:latin typeface="Calibri" pitchFamily="34" charset="0"/>
-                <a:ea typeface="Calibri" pitchFamily="34" charset="-122"/>
-                <a:cs typeface="Calibri" pitchFamily="34" charset="-120"/>
-              </a:rPr>
-              <a:t>Nothing gets deleted — every account stays on the list. After ~2 touches (about 90 days at prospect rhythm), YOUR read decides:</a:t>
-            </a:r>
-            <a:endParaRPr lang="en-US" sz="1150" dirty="0"/>
-          </a:p>
-          <a:p>
-            <a:pPr indent="0" marL="0">
+              <a:rPr lang="en-US" sz="1250" dirty="0">
+                <a:solidFill>
+                  <a:srgbClr val="14322C"/>
+                </a:solidFill>
+                <a:latin typeface="Calibri" pitchFamily="34" charset="0"/>
+                <a:ea typeface="Calibri" pitchFamily="34" charset="-122"/>
+                <a:cs typeface="Calibri" pitchFamily="34" charset="-120"/>
+              </a:rPr>
+              <a:t>THANK: “Thanks for trusting us with your patients.”</a:t>
+            </a:r>
+            <a:endParaRPr lang="en-US" sz="1250" dirty="0"/>
+          </a:p>
+          <a:p>
+            <a:pPr marL="0" indent="0">
               <a:lnSpc>
-                <a:spcPct val="118000"/>
+                <a:spcPct val="122000"/>
               </a:lnSpc>
               <a:buNone/>
             </a:pPr>
-            <a:endParaRPr lang="en-US" sz="1150" dirty="0"/>
-          </a:p>
-          <a:p>
-            <a:pPr indent="0" marL="0">
+            <a:endParaRPr lang="en-US" sz="1250" dirty="0"/>
+          </a:p>
+          <a:p>
+            <a:pPr marL="0" indent="0">
               <a:lnSpc>
-                <a:spcPct val="118000"/>
+                <a:spcPct val="122000"/>
               </a:lnSpc>
               <a:buNone/>
             </a:pPr>
             <a:r>
-              <a:rPr lang="en-US" sz="1150" dirty="0">
-                <a:solidFill>
-                  <a:srgbClr val="E4EFEC"/>
-                </a:solidFill>
-                <a:latin typeface="Calibri" pitchFamily="34" charset="0"/>
-                <a:ea typeface="Calibri" pitchFamily="34" charset="-122"/>
-                <a:cs typeface="Calibri" pitchFamily="34" charset="-120"/>
-              </a:rPr>
-              <a:t>PROMOTE — real potential? Move it up, hit it more often.</a:t>
-            </a:r>
-            <a:endParaRPr lang="en-US" sz="1150" dirty="0"/>
-          </a:p>
-          <a:p>
-            <a:pPr indent="0" marL="0">
+              <a:rPr lang="en-US" sz="1250" dirty="0">
+                <a:solidFill>
+                  <a:srgbClr val="14322C"/>
+                </a:solidFill>
+                <a:latin typeface="Calibri" pitchFamily="34" charset="0"/>
+                <a:ea typeface="Calibri" pitchFamily="34" charset="-122"/>
+                <a:cs typeface="Calibri" pitchFamily="34" charset="-120"/>
+              </a:rPr>
+              <a:t>OPEN: service question.</a:t>
+            </a:r>
+            <a:endParaRPr lang="en-US" sz="1250" dirty="0"/>
+          </a:p>
+          <a:p>
+            <a:pPr marL="0" indent="0">
               <a:lnSpc>
-                <a:spcPct val="118000"/>
+                <a:spcPct val="122000"/>
               </a:lnSpc>
               <a:buNone/>
             </a:pPr>
-            <a:endParaRPr lang="en-US" sz="1150" dirty="0"/>
-          </a:p>
-          <a:p>
-            <a:pPr indent="0" marL="0">
+            <a:endParaRPr lang="en-US" sz="1250" dirty="0"/>
+          </a:p>
+          <a:p>
+            <a:pPr marL="0" indent="0">
               <a:lnSpc>
-                <a:spcPct val="118000"/>
+                <a:spcPct val="122000"/>
               </a:lnSpc>
               <a:buNone/>
             </a:pPr>
             <a:r>
-              <a:rPr lang="en-US" sz="1150" dirty="0">
-                <a:solidFill>
-                  <a:srgbClr val="E4EFEC"/>
-                </a:solidFill>
-                <a:latin typeface="Calibri" pitchFamily="34" charset="0"/>
-                <a:ea typeface="Calibri" pitchFamily="34" charset="-122"/>
-                <a:cs typeface="Calibri" pitchFamily="34" charset="-120"/>
-              </a:rPr>
-              <a:t>HOLD — keep the 45-day rhythm.</a:t>
-            </a:r>
-            <a:endParaRPr lang="en-US" sz="1150" dirty="0"/>
-          </a:p>
-          <a:p>
-            <a:pPr indent="0" marL="0">
+              <a:rPr lang="en-US" sz="1250" dirty="0">
+                <a:solidFill>
+                  <a:srgbClr val="14322C"/>
+                </a:solidFill>
+                <a:latin typeface="Calibri" pitchFamily="34" charset="0"/>
+                <a:ea typeface="Calibri" pitchFamily="34" charset="-122"/>
+                <a:cs typeface="Calibri" pitchFamily="34" charset="-120"/>
+              </a:rPr>
+              <a:t>MESSAGE: “Spine works exactly the way your knees and shoulders already do — same door, same speed. Your patient stays yours; notes back every visit.”</a:t>
+            </a:r>
+            <a:endParaRPr lang="en-US" sz="1250" dirty="0"/>
+          </a:p>
+          <a:p>
+            <a:pPr marL="0" indent="0">
               <a:lnSpc>
-                <a:spcPct val="118000"/>
+                <a:spcPct val="122000"/>
               </a:lnSpc>
               <a:buNone/>
             </a:pPr>
-            <a:endParaRPr lang="en-US" sz="1150" dirty="0"/>
-          </a:p>
-          <a:p>
-            <a:pPr indent="0" marL="0">
+            <a:endParaRPr lang="en-US" sz="1250" dirty="0"/>
+          </a:p>
+          <a:p>
+            <a:pPr marL="0" indent="0">
               <a:lnSpc>
-                <a:spcPct val="118000"/>
+                <a:spcPct val="122000"/>
               </a:lnSpc>
               <a:buNone/>
             </a:pPr>
             <a:r>
-              <a:rPr lang="en-US" sz="1150" dirty="0">
-                <a:solidFill>
-                  <a:srgbClr val="E4EFEC"/>
-                </a:solidFill>
-                <a:latin typeface="Calibri" pitchFamily="34" charset="0"/>
-                <a:ea typeface="Calibri" pitchFamily="34" charset="-122"/>
-                <a:cs typeface="Calibri" pitchFamily="34" charset="-120"/>
-              </a:rPr>
-              <a:t>PARK — no signal? Backlog it and give that road time to the next prospect; revisit next quarter.</a:t>
-            </a:r>
-            <a:endParaRPr lang="en-US" sz="1150" dirty="0"/>
-          </a:p>
-          <a:p>
-            <a:pPr indent="0" marL="0">
+              <a:rPr lang="en-US" sz="1250" dirty="0">
+                <a:solidFill>
+                  <a:srgbClr val="14322C"/>
+                </a:solidFill>
+                <a:latin typeface="Calibri" pitchFamily="34" charset="0"/>
+                <a:ea typeface="Calibri" pitchFamily="34" charset="-122"/>
+                <a:cs typeface="Calibri" pitchFamily="34" charset="-120"/>
+              </a:rPr>
+              <a:t>ASK: “Send the next back/neck patient the way you send knees.”</a:t>
+            </a:r>
+            <a:endParaRPr lang="en-US" sz="1250" dirty="0"/>
+          </a:p>
+          <a:p>
+            <a:pPr marL="0" indent="0">
               <a:lnSpc>
-                <a:spcPct val="118000"/>
+                <a:spcPct val="122000"/>
               </a:lnSpc>
               <a:buNone/>
             </a:pPr>
-            <a:endParaRPr lang="en-US" sz="1150" dirty="0"/>
-          </a:p>
-          <a:p>
-            <a:pPr indent="0" marL="0">
+            <a:endParaRPr lang="en-US" sz="1250" dirty="0"/>
+          </a:p>
+          <a:p>
+            <a:pPr marL="0" indent="0">
               <a:lnSpc>
-                <a:spcPct val="118000"/>
+                <a:spcPct val="122000"/>
               </a:lnSpc>
               <a:buNone/>
             </a:pPr>
             <a:r>
-              <a:rPr lang="en-US" sz="1150" dirty="0">
-                <a:solidFill>
-                  <a:srgbClr val="E4EFEC"/>
-                </a:solidFill>
-                <a:latin typeface="Calibri" pitchFamily="34" charset="0"/>
-                <a:ea typeface="Calibri" pitchFamily="34" charset="-122"/>
-                <a:cs typeface="Calibri" pitchFamily="34" charset="-120"/>
-              </a:rPr>
-              <a:t>Your one-line note after each touch is what makes this call possible.</a:t>
-            </a:r>
-            <a:endParaRPr lang="en-US" sz="1150" dirty="0"/>
+              <a:rPr lang="en-US" sz="1250" dirty="0">
+                <a:solidFill>
+                  <a:srgbClr val="14322C"/>
+                </a:solidFill>
+                <a:latin typeface="Calibri" pitchFamily="34" charset="0"/>
+                <a:ea typeface="Calibri" pitchFamily="34" charset="-122"/>
+                <a:cs typeface="Calibri" pitchFamily="34" charset="-120"/>
+              </a:rPr>
+              <a:t>These are Tier 2 — 30-day rhythm</a:t>
+            </a:r>
+            <a:endParaRPr lang="en-US" sz="1250" dirty="0"/>
           </a:p>
         </p:txBody>
       </p:sp>
@@ -10466,7 +8449,7 @@
 </p:sld>
 </file>
 
-<file path=ppt/slides/slide9.xml><?xml version="1.0" encoding="utf-8"?>
+<file path=ppt/slides/slide8.xml><?xml version="1.0" encoding="utf-8"?>
 <p:sld xmlns:a="http://schemas.openxmlformats.org/drawingml/2006/main" xmlns:r="http://schemas.openxmlformats.org/officeDocument/2006/relationships" xmlns:p="http://schemas.openxmlformats.org/presentationml/2006/main">
   <p:cSld name="Slide 9">
     <p:spTree>
@@ -10504,7 +8487,7 @@
           <a:bodyPr wrap="square" rtlCol="0" anchor="ctr"/>
           <a:lstStyle/>
           <a:p>
-            <a:pPr indent="0" marL="0">
+            <a:pPr marL="0" indent="0">
               <a:buNone/>
             </a:pPr>
             <a:r>
@@ -10516,7 +8499,7 @@
                 <a:ea typeface="Cambria" pitchFamily="34" charset="-122"/>
                 <a:cs typeface="Cambria" pitchFamily="34" charset="-120"/>
               </a:rPr>
-              <a:t>Attorneys &amp; payer flags — the careful lane</a:t>
+              <a:t>Say this: prospects — and the 90-day read</a:t>
             </a:r>
             <a:endParaRPr lang="en-US" sz="2900" dirty="0"/>
           </a:p>
@@ -10543,7 +8526,7 @@
           <a:bodyPr wrap="square" rtlCol="0" anchor="ctr"/>
           <a:lstStyle/>
           <a:p>
-            <a:pPr indent="0" marL="0">
+            <a:pPr marL="0" indent="0">
               <a:buNone/>
             </a:pPr>
             <a:r>
@@ -10555,7 +8538,7 @@
                 <a:ea typeface="Calibri" pitchFamily="34" charset="-122"/>
                 <a:cs typeface="Calibri" pitchFamily="34" charset="-120"/>
               </a:rPr>
-              <a:t>31% of our spine comes from 14 law firms. Highest yield per account, tightest rules.</a:t>
+              <a:t>469 accounts, pre-mixed into your route days. Nothing gets deleted — your field read decides what moves up.</a:t>
             </a:r>
             <a:endParaRPr lang="en-US" sz="1300" dirty="0"/>
           </a:p>
@@ -10570,7 +8553,7 @@
         <p:spPr>
           <a:xfrm>
             <a:off x="502920" y="1463040"/>
-            <a:ext cx="5486400" cy="4480560"/>
+            <a:ext cx="6766560" cy="4480560"/>
           </a:xfrm>
           <a:prstGeom prst="roundRect">
             <a:avLst>
@@ -10578,7 +8561,7 @@
             </a:avLst>
           </a:prstGeom>
           <a:solidFill>
-            <a:srgbClr val="FDF6E7"/>
+            <a:srgbClr val="E7F2EF"/>
           </a:solidFill>
           <a:ln w="12700">
             <a:solidFill>
@@ -10587,6 +8570,13 @@
             <a:prstDash val="solid"/>
           </a:ln>
         </p:spPr>
+        <p:txBody>
+          <a:bodyPr/>
+          <a:lstStyle/>
+          <a:p>
+            <a:endParaRPr lang="en-US"/>
+          </a:p>
+        </p:txBody>
       </p:sp>
       <p:sp>
         <p:nvSpPr>
@@ -10597,7 +8587,7 @@
         <p:spPr>
           <a:xfrm>
             <a:off x="777240" y="1645920"/>
-            <a:ext cx="4937760" cy="365760"/>
+            <a:ext cx="6217920" cy="365760"/>
           </a:xfrm>
           <a:prstGeom prst="rect">
             <a:avLst/>
@@ -10609,7 +8599,7 @@
           <a:bodyPr wrap="square" rtlCol="0" anchor="ctr"/>
           <a:lstStyle/>
           <a:p>
-            <a:pPr indent="0" marL="0">
+            <a:pPr marL="0" indent="0">
               <a:buNone/>
             </a:pPr>
             <a:r>
@@ -10621,7 +8611,7 @@
                 <a:ea typeface="Cambria" pitchFamily="34" charset="-122"/>
                 <a:cs typeface="Cambria" pitchFamily="34" charset="-120"/>
               </a:rPr>
-              <a:t>WC / auto no-fault attorneys (Kristen's lane)</a:t>
+              <a:t>Prospect first touch — earn the first handful</a:t>
             </a:r>
             <a:endParaRPr lang="en-US" sz="1500" dirty="0"/>
           </a:p>
@@ -10636,7 +8626,7 @@
         <p:spPr>
           <a:xfrm>
             <a:off x="777240" y="2103120"/>
-            <a:ext cx="4937760" cy="3657600"/>
+            <a:ext cx="6217920" cy="3657600"/>
           </a:xfrm>
           <a:prstGeom prst="rect">
             <a:avLst/>
@@ -10648,7 +8638,7 @@
           <a:bodyPr wrap="square" rtlCol="0" anchor="ctr"/>
           <a:lstStyle/>
           <a:p>
-            <a:pPr indent="0" marL="0">
+            <a:pPr marL="0" indent="0">
               <a:lnSpc>
                 <a:spcPct val="122000"/>
               </a:lnSpc>
@@ -10663,12 +8653,12 @@
                 <a:ea typeface="Calibri" pitchFamily="34" charset="-122"/>
                 <a:cs typeface="Calibri" pitchFamily="34" charset="-120"/>
               </a:rPr>
-              <a:t>OPEN: “Are records, scheduling, and communication meeting your standard?” — it's a SERVICE call, always.</a:t>
+              <a:t>INTRODUCE: “Synergy — integrated ortho + spine, deep bench, conservative-first. Patients seen the same week.”</a:t>
             </a:r>
             <a:endParaRPr lang="en-US" sz="1250" dirty="0"/>
           </a:p>
           <a:p>
-            <a:pPr indent="0" marL="0">
+            <a:pPr marL="0" indent="0">
               <a:lnSpc>
                 <a:spcPct val="122000"/>
               </a:lnSpc>
@@ -10677,7 +8667,7 @@
             <a:endParaRPr lang="en-US" sz="1250" dirty="0"/>
           </a:p>
           <a:p>
-            <a:pPr indent="0" marL="0">
+            <a:pPr marL="0" indent="0">
               <a:lnSpc>
                 <a:spcPct val="122000"/>
               </a:lnSpc>
@@ -10692,12 +8682,12 @@
                 <a:ea typeface="Calibri" pitchFamily="34" charset="-122"/>
                 <a:cs typeface="Calibri" pitchFamily="34" charset="-120"/>
               </a:rPr>
-              <a:t>MESSAGE: “Auto no-fault and workers' comp spine evaluations — fast scheduling, thorough documentation, clean records turnaround.”</a:t>
+              <a:t>MESSAGE (type-matched — urgent care example): “Your discharge sheet can book a spine evaluation the same week — one number, we take it from there.”</a:t>
             </a:r>
             <a:endParaRPr lang="en-US" sz="1250" dirty="0"/>
           </a:p>
           <a:p>
-            <a:pPr indent="0" marL="0">
+            <a:pPr marL="0" indent="0">
               <a:lnSpc>
                 <a:spcPct val="122000"/>
               </a:lnSpc>
@@ -10706,7 +8696,7 @@
             <a:endParaRPr lang="en-US" sz="1250" dirty="0"/>
           </a:p>
           <a:p>
-            <a:pPr indent="0" marL="0">
+            <a:pPr marL="0" indent="0">
               <a:lnSpc>
                 <a:spcPct val="122000"/>
               </a:lnSpc>
@@ -10721,51 +8711,215 @@
                 <a:ea typeface="Calibri" pitchFamily="34" charset="-122"/>
                 <a:cs typeface="Calibri" pitchFamily="34" charset="-120"/>
               </a:rPr>
-              <a:t>ASK: keep us as the evaluation resource; leave the direct line + turnaround commitment.</a:t>
+              <a:t>ASK: “Send us a handful and let us show you what we are all about.” Leave one-pager + direct line. Log who you met — next time you greet them by name.</a:t>
             </a:r>
             <a:endParaRPr lang="en-US" sz="1250" dirty="0"/>
           </a:p>
-          <a:p>
-            <a:pPr indent="0" marL="0">
+        </p:txBody>
+      </p:sp>
+      <p:sp>
+        <p:nvSpPr>
+          <p:cNvPr id="7" name="Shape 5"/>
+          <p:cNvSpPr/>
+          <p:nvPr/>
+        </p:nvSpPr>
+        <p:spPr>
+          <a:xfrm>
+            <a:off x="7452360" y="1463040"/>
+            <a:ext cx="4206240" cy="4480560"/>
+          </a:xfrm>
+          <a:prstGeom prst="roundRect">
+            <a:avLst>
+              <a:gd name="adj" fmla="val 1739"/>
+            </a:avLst>
+          </a:prstGeom>
+          <a:solidFill>
+            <a:srgbClr val="14322C"/>
+          </a:solidFill>
+          <a:ln/>
+        </p:spPr>
+        <p:txBody>
+          <a:bodyPr/>
+          <a:lstStyle/>
+          <a:p>
+            <a:endParaRPr lang="en-US"/>
+          </a:p>
+        </p:txBody>
+      </p:sp>
+      <p:sp>
+        <p:nvSpPr>
+          <p:cNvPr id="8" name="Text 6"/>
+          <p:cNvSpPr/>
+          <p:nvPr/>
+        </p:nvSpPr>
+        <p:spPr>
+          <a:xfrm>
+            <a:off x="7726680" y="1691640"/>
+            <a:ext cx="3657600" cy="365760"/>
+          </a:xfrm>
+          <a:prstGeom prst="rect">
+            <a:avLst/>
+          </a:prstGeom>
+          <a:noFill/>
+          <a:ln/>
+        </p:spPr>
+        <p:txBody>
+          <a:bodyPr wrap="square" rtlCol="0" anchor="ctr"/>
+          <a:lstStyle/>
+          <a:p>
+            <a:pPr marL="0" indent="0">
+              <a:buNone/>
+            </a:pPr>
+            <a:r>
+              <a:rPr lang="en-US" sz="1400" b="1" kern="0" spc="200" dirty="0">
+                <a:solidFill>
+                  <a:srgbClr val="49A698"/>
+                </a:solidFill>
+                <a:latin typeface="Calibri" pitchFamily="34" charset="0"/>
+                <a:ea typeface="Calibri" pitchFamily="34" charset="-122"/>
+                <a:cs typeface="Calibri" pitchFamily="34" charset="-120"/>
+              </a:rPr>
+              <a:t>THE 90-DAY READ</a:t>
+            </a:r>
+            <a:endParaRPr lang="en-US" sz="1400" dirty="0"/>
+          </a:p>
+        </p:txBody>
+      </p:sp>
+      <p:sp>
+        <p:nvSpPr>
+          <p:cNvPr id="9" name="Text 7"/>
+          <p:cNvSpPr/>
+          <p:nvPr/>
+        </p:nvSpPr>
+        <p:spPr>
+          <a:xfrm>
+            <a:off x="7726680" y="2148840"/>
+            <a:ext cx="3657600" cy="3566160"/>
+          </a:xfrm>
+          <a:prstGeom prst="rect">
+            <a:avLst/>
+          </a:prstGeom>
+          <a:noFill/>
+          <a:ln/>
+        </p:spPr>
+        <p:txBody>
+          <a:bodyPr wrap="square" rtlCol="0" anchor="ctr"/>
+          <a:lstStyle/>
+          <a:p>
+            <a:pPr marL="0" indent="0">
               <a:lnSpc>
-                <a:spcPct val="122000"/>
+                <a:spcPct val="125000"/>
               </a:lnSpc>
               <a:buNone/>
             </a:pPr>
+            <a:r>
+              <a:rPr lang="en-US" sz="1250" dirty="0">
+                <a:solidFill>
+                  <a:srgbClr val="E4EFEC"/>
+                </a:solidFill>
+                <a:latin typeface="Calibri" pitchFamily="34" charset="0"/>
+                <a:ea typeface="Calibri" pitchFamily="34" charset="-122"/>
+                <a:cs typeface="Calibri" pitchFamily="34" charset="-120"/>
+              </a:rPr>
+              <a:t>Nothing gets deleted — every account stays on the list. After ~2 touches (about 90 days at prospect rhythm), YOUR read decides:</a:t>
+            </a:r>
             <a:endParaRPr lang="en-US" sz="1250" dirty="0"/>
           </a:p>
           <a:p>
-            <a:pPr indent="0" marL="0">
+            <a:pPr marL="0" indent="0">
               <a:lnSpc>
-                <a:spcPct val="122000"/>
+                <a:spcPct val="125000"/>
               </a:lnSpc>
               <a:buNone/>
             </a:pPr>
+            <a:endParaRPr lang="en-US" sz="1250" dirty="0"/>
+          </a:p>
+          <a:p>
+            <a:pPr marL="0" indent="0">
+              <a:lnSpc>
+                <a:spcPct val="125000"/>
+              </a:lnSpc>
+              <a:buNone/>
+            </a:pPr>
             <a:r>
               <a:rPr lang="en-US" sz="1250" dirty="0">
                 <a:solidFill>
-                  <a:srgbClr val="14322C"/>
-                </a:solidFill>
-                <a:latin typeface="Calibri" pitchFamily="34" charset="0"/>
-                <a:ea typeface="Calibri" pitchFamily="34" charset="-122"/>
-                <a:cs typeface="Calibri" pitchFamily="34" charset="-120"/>
-              </a:rPr>
-              <a:t>NEVER: payments, gifts, referral fees, event sponsorships-for-referrals. Service and merit only — that line is legal, not cultural.</a:t>
+                  <a:srgbClr val="E4EFEC"/>
+                </a:solidFill>
+                <a:latin typeface="Calibri" pitchFamily="34" charset="0"/>
+                <a:ea typeface="Calibri" pitchFamily="34" charset="-122"/>
+                <a:cs typeface="Calibri" pitchFamily="34" charset="-120"/>
+              </a:rPr>
+              <a:t>PROMOTE — real potential? Hit it more often.</a:t>
             </a:r>
             <a:endParaRPr lang="en-US" sz="1250" dirty="0"/>
           </a:p>
-        </p:txBody>
-      </p:sp>
-      <p:sp>
-        <p:nvSpPr>
-          <p:cNvPr id="7" name="Text 5"/>
-          <p:cNvSpPr/>
-          <p:nvPr/>
-        </p:nvSpPr>
-        <p:spPr>
-          <a:xfrm>
-            <a:off x="6172200" y="1463040"/>
-            <a:ext cx="5486400" cy="365760"/>
+          <a:p>
+            <a:pPr marL="0" indent="0">
+              <a:lnSpc>
+                <a:spcPct val="125000"/>
+              </a:lnSpc>
+              <a:buNone/>
+            </a:pPr>
+            <a:endParaRPr lang="en-US" sz="1250" dirty="0"/>
+          </a:p>
+          <a:p>
+            <a:pPr marL="0" indent="0">
+              <a:lnSpc>
+                <a:spcPct val="125000"/>
+              </a:lnSpc>
+              <a:buNone/>
+            </a:pPr>
+            <a:r>
+              <a:rPr lang="en-US" sz="1250" dirty="0">
+                <a:solidFill>
+                  <a:srgbClr val="E4EFEC"/>
+                </a:solidFill>
+                <a:latin typeface="Calibri" pitchFamily="34" charset="0"/>
+                <a:ea typeface="Calibri" pitchFamily="34" charset="-122"/>
+                <a:cs typeface="Calibri" pitchFamily="34" charset="-120"/>
+              </a:rPr>
+              <a:t>HOLD — keep the 45-day rhythm.  PARK — no signal? Backlog it and give that road time to the next prospect; revisit next quarter.  Your one-line note after each touch is what makes this call possible.</a:t>
+            </a:r>
+            <a:endParaRPr lang="en-US" sz="1250" dirty="0"/>
+          </a:p>
+        </p:txBody>
+      </p:sp>
+    </p:spTree>
+  </p:cSld>
+  <p:clrMapOvr>
+    <a:masterClrMapping/>
+  </p:clrMapOvr>
+</p:sld>
+</file>
+
+<file path=ppt/slides/slide9.xml><?xml version="1.0" encoding="utf-8"?>
+<p:sld xmlns:a="http://schemas.openxmlformats.org/drawingml/2006/main" xmlns:r="http://schemas.openxmlformats.org/officeDocument/2006/relationships" xmlns:p="http://schemas.openxmlformats.org/presentationml/2006/main">
+  <p:cSld name="Slide 11">
+    <p:spTree>
+      <p:nvGrpSpPr>
+        <p:cNvPr id="1" name=""/>
+        <p:cNvGrpSpPr/>
+        <p:nvPr/>
+      </p:nvGrpSpPr>
+      <p:grpSpPr>
+        <a:xfrm>
+          <a:off x="0" y="0"/>
+          <a:ext cx="0" cy="0"/>
+          <a:chOff x="0" y="0"/>
+          <a:chExt cx="0" cy="0"/>
+        </a:xfrm>
+      </p:grpSpPr>
+      <p:sp>
+        <p:nvSpPr>
+          <p:cNvPr id="2" name="Text 0"/>
+          <p:cNvSpPr/>
+          <p:nvPr/>
+        </p:nvSpPr>
+        <p:spPr>
+          <a:xfrm>
+            <a:off x="502920" y="256032"/>
+            <a:ext cx="11155680" cy="594360"/>
           </a:xfrm>
           <a:prstGeom prst="rect">
             <a:avLst/>
@@ -10777,11 +8931,11 @@
           <a:bodyPr wrap="square" rtlCol="0" anchor="ctr"/>
           <a:lstStyle/>
           <a:p>
-            <a:pPr indent="0" marL="0">
-              <a:buNone/>
-            </a:pPr>
-            <a:r>
-              <a:rPr lang="en-US" sz="1400" b="1" dirty="0">
+            <a:pPr marL="0" indent="0">
+              <a:buNone/>
+            </a:pPr>
+            <a:r>
+              <a:rPr lang="en-US" sz="2900" b="1" dirty="0">
                 <a:solidFill>
                   <a:srgbClr val="14322C"/>
                 </a:solidFill>
@@ -10789,7 +8943,112 @@
                 <a:ea typeface="Cambria" pitchFamily="34" charset="-122"/>
                 <a:cs typeface="Cambria" pitchFamily="34" charset="-120"/>
               </a:rPr>
-              <a:t>The payer chip on every stop card:</a:t>
+              <a:t>Your week and your tool</a:t>
+            </a:r>
+            <a:endParaRPr lang="en-US" sz="2900" dirty="0"/>
+          </a:p>
+        </p:txBody>
+      </p:sp>
+      <p:sp>
+        <p:nvSpPr>
+          <p:cNvPr id="3" name="Text 1"/>
+          <p:cNvSpPr/>
+          <p:nvPr/>
+        </p:nvSpPr>
+        <p:spPr>
+          <a:xfrm>
+            <a:off x="502920" y="841248"/>
+            <a:ext cx="11155680" cy="320040"/>
+          </a:xfrm>
+          <a:prstGeom prst="rect">
+            <a:avLst/>
+          </a:prstGeom>
+          <a:noFill/>
+          <a:ln/>
+        </p:spPr>
+        <p:txBody>
+          <a:bodyPr wrap="square" rtlCol="0" anchor="ctr"/>
+          <a:lstStyle/>
+          <a:p>
+            <a:pPr marL="0" indent="0">
+              <a:buNone/>
+            </a:pPr>
+            <a:r>
+              <a:rPr lang="en-US" sz="1300" dirty="0">
+                <a:solidFill>
+                  <a:srgbClr val="5E7773"/>
+                </a:solidFill>
+                <a:latin typeface="Calibri" pitchFamily="34" charset="0"/>
+                <a:ea typeface="Calibri" pitchFamily="34" charset="-122"/>
+                <a:cs typeface="Calibri" pitchFamily="34" charset="-120"/>
+              </a:rPr>
+              <a:t>Everything above is pre-loaded per stop — nobody memorizes anything</a:t>
+            </a:r>
+            <a:endParaRPr lang="en-US" sz="1300" dirty="0"/>
+          </a:p>
+        </p:txBody>
+      </p:sp>
+      <p:sp>
+        <p:nvSpPr>
+          <p:cNvPr id="4" name="Shape 2"/>
+          <p:cNvSpPr/>
+          <p:nvPr/>
+        </p:nvSpPr>
+        <p:spPr>
+          <a:xfrm>
+            <a:off x="548640" y="1417320"/>
+            <a:ext cx="402336" cy="402336"/>
+          </a:xfrm>
+          <a:prstGeom prst="ellipse">
+            <a:avLst/>
+          </a:prstGeom>
+          <a:solidFill>
+            <a:srgbClr val="49A698"/>
+          </a:solidFill>
+          <a:ln/>
+        </p:spPr>
+        <p:txBody>
+          <a:bodyPr/>
+          <a:lstStyle/>
+          <a:p>
+            <a:endParaRPr lang="en-US"/>
+          </a:p>
+        </p:txBody>
+      </p:sp>
+      <p:sp>
+        <p:nvSpPr>
+          <p:cNvPr id="5" name="Text 3"/>
+          <p:cNvSpPr/>
+          <p:nvPr/>
+        </p:nvSpPr>
+        <p:spPr>
+          <a:xfrm>
+            <a:off x="548640" y="1417320"/>
+            <a:ext cx="402336" cy="402336"/>
+          </a:xfrm>
+          <a:prstGeom prst="rect">
+            <a:avLst/>
+          </a:prstGeom>
+          <a:noFill/>
+          <a:ln/>
+        </p:spPr>
+        <p:txBody>
+          <a:bodyPr wrap="square" lIns="0" tIns="0" rIns="0" bIns="0" rtlCol="0" anchor="ctr"/>
+          <a:lstStyle/>
+          <a:p>
+            <a:pPr marL="0" indent="0" algn="ctr">
+              <a:buNone/>
+            </a:pPr>
+            <a:r>
+              <a:rPr lang="en-US" sz="1400" b="1" dirty="0">
+                <a:solidFill>
+                  <a:srgbClr val="FFFFFF"/>
+                </a:solidFill>
+                <a:latin typeface="Calibri" pitchFamily="34" charset="0"/>
+                <a:ea typeface="Calibri" pitchFamily="34" charset="-122"/>
+                <a:cs typeface="Calibri" pitchFamily="34" charset="-120"/>
+              </a:rPr>
+              <a:t>1</a:t>
             </a:r>
             <a:endParaRPr lang="en-US" sz="1400" dirty="0"/>
           </a:p>
@@ -10797,14 +9056,119 @@
       </p:sp>
       <p:sp>
         <p:nvSpPr>
+          <p:cNvPr id="6" name="Text 4"/>
+          <p:cNvSpPr/>
+          <p:nvPr/>
+        </p:nvSpPr>
+        <p:spPr>
+          <a:xfrm>
+            <a:off x="1143000" y="1399032"/>
+            <a:ext cx="6035040" cy="548640"/>
+          </a:xfrm>
+          <a:prstGeom prst="rect">
+            <a:avLst/>
+          </a:prstGeom>
+          <a:noFill/>
+          <a:ln/>
+        </p:spPr>
+        <p:txBody>
+          <a:bodyPr wrap="square" rtlCol="0" anchor="ctr"/>
+          <a:lstStyle/>
+          <a:p>
+            <a:pPr marL="0" indent="0">
+              <a:buNone/>
+            </a:pPr>
+            <a:r>
+              <a:rPr lang="en-US" sz="1250" dirty="0">
+                <a:solidFill>
+                  <a:srgbClr val="14322C"/>
+                </a:solidFill>
+                <a:latin typeface="Calibri" pitchFamily="34" charset="0"/>
+                <a:ea typeface="Calibri" pitchFamily="34" charset="-122"/>
+                <a:cs typeface="Calibri" pitchFamily="34" charset="-120"/>
+              </a:rPr>
+              <a:t>Open the app — your name, this week. Days come ranked.</a:t>
+            </a:r>
+            <a:endParaRPr lang="en-US" sz="1250" dirty="0"/>
+          </a:p>
+        </p:txBody>
+      </p:sp>
+      <p:sp>
+        <p:nvSpPr>
+          <p:cNvPr id="7" name="Shape 5"/>
+          <p:cNvSpPr/>
+          <p:nvPr/>
+        </p:nvSpPr>
+        <p:spPr>
+          <a:xfrm>
+            <a:off x="548640" y="1984248"/>
+            <a:ext cx="402336" cy="402336"/>
+          </a:xfrm>
+          <a:prstGeom prst="ellipse">
+            <a:avLst/>
+          </a:prstGeom>
+          <a:solidFill>
+            <a:srgbClr val="49A698"/>
+          </a:solidFill>
+          <a:ln/>
+        </p:spPr>
+        <p:txBody>
+          <a:bodyPr/>
+          <a:lstStyle/>
+          <a:p>
+            <a:endParaRPr lang="en-US"/>
+          </a:p>
+        </p:txBody>
+      </p:sp>
+      <p:sp>
+        <p:nvSpPr>
           <p:cNvPr id="8" name="Text 6"/>
           <p:cNvSpPr/>
           <p:nvPr/>
         </p:nvSpPr>
         <p:spPr>
           <a:xfrm>
-            <a:off x="6172200" y="1920240"/>
-            <a:ext cx="5486400" cy="777240"/>
+            <a:off x="548640" y="1984248"/>
+            <a:ext cx="402336" cy="402336"/>
+          </a:xfrm>
+          <a:prstGeom prst="rect">
+            <a:avLst/>
+          </a:prstGeom>
+          <a:noFill/>
+          <a:ln/>
+        </p:spPr>
+        <p:txBody>
+          <a:bodyPr wrap="square" lIns="0" tIns="0" rIns="0" bIns="0" rtlCol="0" anchor="ctr"/>
+          <a:lstStyle/>
+          <a:p>
+            <a:pPr marL="0" indent="0" algn="ctr">
+              <a:buNone/>
+            </a:pPr>
+            <a:r>
+              <a:rPr lang="en-US" sz="1400" b="1" dirty="0">
+                <a:solidFill>
+                  <a:srgbClr val="FFFFFF"/>
+                </a:solidFill>
+                <a:latin typeface="Calibri" pitchFamily="34" charset="0"/>
+                <a:ea typeface="Calibri" pitchFamily="34" charset="-122"/>
+                <a:cs typeface="Calibri" pitchFamily="34" charset="-120"/>
+              </a:rPr>
+              <a:t>2</a:t>
+            </a:r>
+            <a:endParaRPr lang="en-US" sz="1400" dirty="0"/>
+          </a:p>
+        </p:txBody>
+      </p:sp>
+      <p:sp>
+        <p:nvSpPr>
+          <p:cNvPr id="9" name="Text 7"/>
+          <p:cNvSpPr/>
+          <p:nvPr/>
+        </p:nvSpPr>
+        <p:spPr>
+          <a:xfrm>
+            <a:off x="1143000" y="1965960"/>
+            <a:ext cx="6035040" cy="548640"/>
           </a:xfrm>
           <a:prstGeom prst="rect">
             <a:avLst/>
@@ -10816,14 +9180,11 @@
           <a:bodyPr wrap="square" rtlCol="0" anchor="ctr"/>
           <a:lstStyle/>
           <a:p>
-            <a:pPr indent="0" marL="0">
-              <a:lnSpc>
-                <a:spcPct val="105000"/>
-              </a:lnSpc>
-              <a:buNone/>
-            </a:pPr>
-            <a:r>
-              <a:rPr lang="en-US" sz="1150" b="1" dirty="0">
+            <a:pPr marL="0" indent="0">
+              <a:buNone/>
+            </a:pPr>
+            <a:r>
+              <a:rPr lang="en-US" sz="1250" dirty="0">
                 <a:solidFill>
                   <a:srgbClr val="14322C"/>
                 </a:solidFill>
@@ -10831,16 +9192,104 @@
                 <a:ea typeface="Calibri" pitchFamily="34" charset="-122"/>
                 <a:cs typeface="Calibri" pitchFamily="34" charset="-120"/>
               </a:rPr>
-              <a:t>Comm/Medicare (grey chip) — </a:t>
-            </a:r>
-            <a:pPr indent="0" marL="0">
-              <a:lnSpc>
-                <a:spcPct val="105000"/>
-              </a:lnSpc>
-              <a:buNone/>
-            </a:pPr>
-            <a:r>
-              <a:rPr lang="en-US" sz="1150" dirty="0">
+              <a:t>▶ Next stop — turn-by-turn; the stop card shows the message, the payer chip, who refers.</a:t>
+            </a:r>
+            <a:endParaRPr lang="en-US" sz="1250" dirty="0"/>
+          </a:p>
+        </p:txBody>
+      </p:sp>
+      <p:sp>
+        <p:nvSpPr>
+          <p:cNvPr id="10" name="Shape 8"/>
+          <p:cNvSpPr/>
+          <p:nvPr/>
+        </p:nvSpPr>
+        <p:spPr>
+          <a:xfrm>
+            <a:off x="548640" y="2551176"/>
+            <a:ext cx="402336" cy="402336"/>
+          </a:xfrm>
+          <a:prstGeom prst="ellipse">
+            <a:avLst/>
+          </a:prstGeom>
+          <a:solidFill>
+            <a:srgbClr val="49A698"/>
+          </a:solidFill>
+          <a:ln/>
+        </p:spPr>
+        <p:txBody>
+          <a:bodyPr/>
+          <a:lstStyle/>
+          <a:p>
+            <a:endParaRPr lang="en-US"/>
+          </a:p>
+        </p:txBody>
+      </p:sp>
+      <p:sp>
+        <p:nvSpPr>
+          <p:cNvPr id="11" name="Text 9"/>
+          <p:cNvSpPr/>
+          <p:nvPr/>
+        </p:nvSpPr>
+        <p:spPr>
+          <a:xfrm>
+            <a:off x="548640" y="2551176"/>
+            <a:ext cx="402336" cy="402336"/>
+          </a:xfrm>
+          <a:prstGeom prst="rect">
+            <a:avLst/>
+          </a:prstGeom>
+          <a:noFill/>
+          <a:ln/>
+        </p:spPr>
+        <p:txBody>
+          <a:bodyPr wrap="square" lIns="0" tIns="0" rIns="0" bIns="0" rtlCol="0" anchor="ctr"/>
+          <a:lstStyle/>
+          <a:p>
+            <a:pPr marL="0" indent="0" algn="ctr">
+              <a:buNone/>
+            </a:pPr>
+            <a:r>
+              <a:rPr lang="en-US" sz="1400" b="1" dirty="0">
+                <a:solidFill>
+                  <a:srgbClr val="FFFFFF"/>
+                </a:solidFill>
+                <a:latin typeface="Calibri" pitchFamily="34" charset="0"/>
+                <a:ea typeface="Calibri" pitchFamily="34" charset="-122"/>
+                <a:cs typeface="Calibri" pitchFamily="34" charset="-120"/>
+              </a:rPr>
+              <a:t>3</a:t>
+            </a:r>
+            <a:endParaRPr lang="en-US" sz="1400" dirty="0"/>
+          </a:p>
+        </p:txBody>
+      </p:sp>
+      <p:sp>
+        <p:nvSpPr>
+          <p:cNvPr id="12" name="Text 10"/>
+          <p:cNvSpPr/>
+          <p:nvPr/>
+        </p:nvSpPr>
+        <p:spPr>
+          <a:xfrm>
+            <a:off x="1143000" y="2532888"/>
+            <a:ext cx="6035040" cy="548640"/>
+          </a:xfrm>
+          <a:prstGeom prst="rect">
+            <a:avLst/>
+          </a:prstGeom>
+          <a:noFill/>
+          <a:ln/>
+        </p:spPr>
+        <p:txBody>
+          <a:bodyPr wrap="square" rtlCol="0" anchor="ctr"/>
+          <a:lstStyle/>
+          <a:p>
+            <a:pPr marL="0" indent="0">
+              <a:buNone/>
+            </a:pPr>
+            <a:r>
+              <a:rPr lang="en-US" sz="1250" dirty="0">
                 <a:solidFill>
                   <a:srgbClr val="14322C"/>
                 </a:solidFill>
@@ -10848,22 +9297,88 @@
                 <a:ea typeface="Calibri" pitchFamily="34" charset="-122"/>
                 <a:cs typeface="Calibri" pitchFamily="34" charset="-120"/>
               </a:rPr>
-              <a:t>Qualified — confirm HMO share; we handle referral paperwork.</a:t>
-            </a:r>
-            <a:endParaRPr lang="en-US" sz="1150" dirty="0"/>
-          </a:p>
-        </p:txBody>
-      </p:sp>
-      <p:sp>
-        <p:nvSpPr>
-          <p:cNvPr id="9" name="Text 7"/>
-          <p:cNvSpPr/>
-          <p:nvPr/>
-        </p:nvSpPr>
-        <p:spPr>
-          <a:xfrm>
-            <a:off x="6172200" y="2761488"/>
-            <a:ext cx="5486400" cy="777240"/>
+              <a:t>Check in + one business-only note.</a:t>
+            </a:r>
+            <a:endParaRPr lang="en-US" sz="1250" dirty="0"/>
+          </a:p>
+        </p:txBody>
+      </p:sp>
+      <p:sp>
+        <p:nvSpPr>
+          <p:cNvPr id="13" name="Shape 11"/>
+          <p:cNvSpPr/>
+          <p:nvPr/>
+        </p:nvSpPr>
+        <p:spPr>
+          <a:xfrm>
+            <a:off x="548640" y="3118104"/>
+            <a:ext cx="402336" cy="402336"/>
+          </a:xfrm>
+          <a:prstGeom prst="ellipse">
+            <a:avLst/>
+          </a:prstGeom>
+          <a:solidFill>
+            <a:srgbClr val="49A698"/>
+          </a:solidFill>
+          <a:ln/>
+        </p:spPr>
+        <p:txBody>
+          <a:bodyPr/>
+          <a:lstStyle/>
+          <a:p>
+            <a:endParaRPr lang="en-US"/>
+          </a:p>
+        </p:txBody>
+      </p:sp>
+      <p:sp>
+        <p:nvSpPr>
+          <p:cNvPr id="14" name="Text 12"/>
+          <p:cNvSpPr/>
+          <p:nvPr/>
+        </p:nvSpPr>
+        <p:spPr>
+          <a:xfrm>
+            <a:off x="548640" y="3118104"/>
+            <a:ext cx="402336" cy="402336"/>
+          </a:xfrm>
+          <a:prstGeom prst="rect">
+            <a:avLst/>
+          </a:prstGeom>
+          <a:noFill/>
+          <a:ln/>
+        </p:spPr>
+        <p:txBody>
+          <a:bodyPr wrap="square" lIns="0" tIns="0" rIns="0" bIns="0" rtlCol="0" anchor="ctr"/>
+          <a:lstStyle/>
+          <a:p>
+            <a:pPr marL="0" indent="0" algn="ctr">
+              <a:buNone/>
+            </a:pPr>
+            <a:r>
+              <a:rPr lang="en-US" sz="1400" b="1" dirty="0">
+                <a:solidFill>
+                  <a:srgbClr val="FFFFFF"/>
+                </a:solidFill>
+                <a:latin typeface="Calibri" pitchFamily="34" charset="0"/>
+                <a:ea typeface="Calibri" pitchFamily="34" charset="-122"/>
+                <a:cs typeface="Calibri" pitchFamily="34" charset="-120"/>
+              </a:rPr>
+              <a:t>4</a:t>
+            </a:r>
+            <a:endParaRPr lang="en-US" sz="1400" dirty="0"/>
+          </a:p>
+        </p:txBody>
+      </p:sp>
+      <p:sp>
+        <p:nvSpPr>
+          <p:cNvPr id="15" name="Text 13"/>
+          <p:cNvSpPr/>
+          <p:nvPr/>
+        </p:nvSpPr>
+        <p:spPr>
+          <a:xfrm>
+            <a:off x="1143000" y="3099816"/>
+            <a:ext cx="6035040" cy="548640"/>
           </a:xfrm>
           <a:prstGeom prst="rect">
             <a:avLst/>
@@ -10875,14 +9390,11 @@
           <a:bodyPr wrap="square" rtlCol="0" anchor="ctr"/>
           <a:lstStyle/>
           <a:p>
-            <a:pPr indent="0" marL="0">
-              <a:lnSpc>
-                <a:spcPct val="105000"/>
-              </a:lnSpc>
-              <a:buNone/>
-            </a:pPr>
-            <a:r>
-              <a:rPr lang="en-US" sz="1150" b="1" dirty="0">
+            <a:pPr marL="0" indent="0">
+              <a:buNone/>
+            </a:pPr>
+            <a:r>
+              <a:rPr lang="en-US" sz="1250" dirty="0">
                 <a:solidFill>
                   <a:srgbClr val="14322C"/>
                 </a:solidFill>
@@ -10890,16 +9402,104 @@
                 <a:ea typeface="Calibri" pitchFamily="34" charset="-122"/>
                 <a:cs typeface="Calibri" pitchFamily="34" charset="-120"/>
               </a:rPr>
-              <a:t>Mixed panel (amber chip) — </a:t>
-            </a:r>
-            <a:pPr indent="0" marL="0">
-              <a:lnSpc>
-                <a:spcPct val="105000"/>
-              </a:lnSpc>
-              <a:buNone/>
-            </a:pPr>
-            <a:r>
-              <a:rPr lang="en-US" sz="1150" dirty="0">
+              <a:t>Friday: Export log → send to Joe (feeds the scorecard).</a:t>
+            </a:r>
+            <a:endParaRPr lang="en-US" sz="1250" dirty="0"/>
+          </a:p>
+        </p:txBody>
+      </p:sp>
+      <p:sp>
+        <p:nvSpPr>
+          <p:cNvPr id="16" name="Shape 14"/>
+          <p:cNvSpPr/>
+          <p:nvPr/>
+        </p:nvSpPr>
+        <p:spPr>
+          <a:xfrm>
+            <a:off x="548640" y="3685032"/>
+            <a:ext cx="402336" cy="402336"/>
+          </a:xfrm>
+          <a:prstGeom prst="ellipse">
+            <a:avLst/>
+          </a:prstGeom>
+          <a:solidFill>
+            <a:srgbClr val="49A698"/>
+          </a:solidFill>
+          <a:ln/>
+        </p:spPr>
+        <p:txBody>
+          <a:bodyPr/>
+          <a:lstStyle/>
+          <a:p>
+            <a:endParaRPr lang="en-US"/>
+          </a:p>
+        </p:txBody>
+      </p:sp>
+      <p:sp>
+        <p:nvSpPr>
+          <p:cNvPr id="17" name="Text 15"/>
+          <p:cNvSpPr/>
+          <p:nvPr/>
+        </p:nvSpPr>
+        <p:spPr>
+          <a:xfrm>
+            <a:off x="548640" y="3685032"/>
+            <a:ext cx="402336" cy="402336"/>
+          </a:xfrm>
+          <a:prstGeom prst="rect">
+            <a:avLst/>
+          </a:prstGeom>
+          <a:noFill/>
+          <a:ln/>
+        </p:spPr>
+        <p:txBody>
+          <a:bodyPr wrap="square" lIns="0" tIns="0" rIns="0" bIns="0" rtlCol="0" anchor="ctr"/>
+          <a:lstStyle/>
+          <a:p>
+            <a:pPr marL="0" indent="0" algn="ctr">
+              <a:buNone/>
+            </a:pPr>
+            <a:r>
+              <a:rPr lang="en-US" sz="1400" b="1" dirty="0">
+                <a:solidFill>
+                  <a:srgbClr val="FFFFFF"/>
+                </a:solidFill>
+                <a:latin typeface="Calibri" pitchFamily="34" charset="0"/>
+                <a:ea typeface="Calibri" pitchFamily="34" charset="-122"/>
+                <a:cs typeface="Calibri" pitchFamily="34" charset="-120"/>
+              </a:rPr>
+              <a:t>5</a:t>
+            </a:r>
+            <a:endParaRPr lang="en-US" sz="1400" dirty="0"/>
+          </a:p>
+        </p:txBody>
+      </p:sp>
+      <p:sp>
+        <p:nvSpPr>
+          <p:cNvPr id="18" name="Text 16"/>
+          <p:cNvSpPr/>
+          <p:nvPr/>
+        </p:nvSpPr>
+        <p:spPr>
+          <a:xfrm>
+            <a:off x="1143000" y="3666744"/>
+            <a:ext cx="6035040" cy="548640"/>
+          </a:xfrm>
+          <a:prstGeom prst="rect">
+            <a:avLst/>
+          </a:prstGeom>
+          <a:noFill/>
+          <a:ln/>
+        </p:spPr>
+        <p:txBody>
+          <a:bodyPr wrap="square" rtlCol="0" anchor="ctr"/>
+          <a:lstStyle/>
+          <a:p>
+            <a:pPr marL="0" indent="0">
+              <a:buNone/>
+            </a:pPr>
+            <a:r>
+              <a:rPr lang="en-US" sz="1250" dirty="0">
                 <a:solidFill>
                   <a:srgbClr val="14322C"/>
                 </a:solidFill>
@@ -10907,228 +9507,768 @@
                 <a:ea typeface="Calibri" pitchFamily="34" charset="-122"/>
                 <a:cs typeface="Calibri" pitchFamily="34" charset="-120"/>
               </a:rPr>
-              <a:t>Hospital-system or walk-in — intake screens each referral.</a:t>
-            </a:r>
-            <a:endParaRPr lang="en-US" sz="1150" dirty="0"/>
-          </a:p>
-        </p:txBody>
-      </p:sp>
-      <p:sp>
-        <p:nvSpPr>
-          <p:cNvPr id="10" name="Text 8"/>
-          <p:cNvSpPr/>
-          <p:nvPr/>
-        </p:nvSpPr>
-        <p:spPr>
-          <a:xfrm>
-            <a:off x="6172200" y="3602736"/>
-            <a:ext cx="5486400" cy="777240"/>
-          </a:xfrm>
-          <a:prstGeom prst="rect">
-            <a:avLst/>
-          </a:prstGeom>
-          <a:noFill/>
-          <a:ln/>
-        </p:spPr>
-        <p:txBody>
-          <a:bodyPr wrap="square" rtlCol="0" anchor="ctr"/>
-          <a:lstStyle/>
-          <a:p>
-            <a:pPr indent="0" marL="0">
-              <a:lnSpc>
-                <a:spcPct val="105000"/>
-              </a:lnSpc>
-              <a:buNone/>
-            </a:pPr>
-            <a:r>
-              <a:rPr lang="en-US" sz="1150" b="1" dirty="0">
-                <a:solidFill>
-                  <a:srgbClr val="14322C"/>
-                </a:solidFill>
-                <a:latin typeface="Calibri" pitchFamily="34" charset="0"/>
-                <a:ea typeface="Calibri" pitchFamily="34" charset="-122"/>
-                <a:cs typeface="Calibri" pitchFamily="34" charset="-120"/>
-              </a:rPr>
-              <a:t>WC/Auto ✓ (teal chip) — </a:t>
-            </a:r>
-            <a:pPr indent="0" marL="0">
-              <a:lnSpc>
-                <a:spcPct val="105000"/>
-              </a:lnSpc>
-              <a:buNone/>
-            </a:pPr>
-            <a:r>
-              <a:rPr lang="en-US" sz="1150" dirty="0">
-                <a:solidFill>
-                  <a:srgbClr val="14322C"/>
-                </a:solidFill>
-                <a:latin typeface="Calibri" pitchFamily="34" charset="0"/>
-                <a:ea typeface="Calibri" pitchFamily="34" charset="-122"/>
-                <a:cs typeface="Calibri" pitchFamily="34" charset="-120"/>
-              </a:rPr>
-              <a:t>No referral, no copay — commercial-equivalent. Go.</a:t>
-            </a:r>
-            <a:endParaRPr lang="en-US" sz="1150" dirty="0"/>
-          </a:p>
-        </p:txBody>
-      </p:sp>
-      <p:sp>
-        <p:nvSpPr>
-          <p:cNvPr id="11" name="Text 9"/>
-          <p:cNvSpPr/>
-          <p:nvPr/>
-        </p:nvSpPr>
-        <p:spPr>
-          <a:xfrm>
-            <a:off x="6172200" y="4443984"/>
-            <a:ext cx="5486400" cy="777240"/>
-          </a:xfrm>
-          <a:prstGeom prst="rect">
-            <a:avLst/>
-          </a:prstGeom>
-          <a:noFill/>
-          <a:ln/>
-        </p:spPr>
-        <p:txBody>
-          <a:bodyPr wrap="square" rtlCol="0" anchor="ctr"/>
-          <a:lstStyle/>
-          <a:p>
-            <a:pPr indent="0" marL="0">
-              <a:lnSpc>
-                <a:spcPct val="105000"/>
-              </a:lnSpc>
-              <a:buNone/>
-            </a:pPr>
-            <a:r>
-              <a:rPr lang="en-US" sz="1150" b="1" dirty="0">
-                <a:solidFill>
-                  <a:srgbClr val="14322C"/>
-                </a:solidFill>
-                <a:latin typeface="Calibri" pitchFamily="34" charset="0"/>
-                <a:ea typeface="Calibri" pitchFamily="34" charset="-122"/>
-                <a:cs typeface="Calibri" pitchFamily="34" charset="-120"/>
-              </a:rPr>
-              <a:t>Medicaid? VERIFY (red chip) — </a:t>
-            </a:r>
-            <a:pPr indent="0" marL="0">
-              <a:lnSpc>
-                <a:spcPct val="105000"/>
-              </a:lnSpc>
-              <a:buNone/>
-            </a:pPr>
-            <a:r>
-              <a:rPr lang="en-US" sz="1150" dirty="0">
-                <a:solidFill>
-                  <a:srgbClr val="14322C"/>
-                </a:solidFill>
-                <a:latin typeface="Calibri" pitchFamily="34" charset="0"/>
-                <a:ea typeface="Calibri" pitchFamily="34" charset="-122"/>
-                <a:cs typeface="Calibri" pitchFamily="34" charset="-120"/>
-              </a:rPr>
-              <a:t>FQHC/community pattern — do NOT promise same-week until verified. Uninsured → Harmony Direct Pay.</a:t>
-            </a:r>
-            <a:endParaRPr lang="en-US" sz="1150" dirty="0"/>
-          </a:p>
-        </p:txBody>
-      </p:sp>
-      <p:sp>
-        <p:nvSpPr>
-          <p:cNvPr id="12" name="Text 10"/>
-          <p:cNvSpPr/>
-          <p:nvPr/>
-        </p:nvSpPr>
-        <p:spPr>
-          <a:xfrm>
-            <a:off x="6172200" y="5285232"/>
-            <a:ext cx="5486400" cy="777240"/>
-          </a:xfrm>
-          <a:prstGeom prst="rect">
-            <a:avLst/>
-          </a:prstGeom>
-          <a:noFill/>
-          <a:ln/>
-        </p:spPr>
-        <p:txBody>
-          <a:bodyPr wrap="square" rtlCol="0" anchor="ctr"/>
-          <a:lstStyle/>
-          <a:p>
-            <a:pPr indent="0" marL="0">
-              <a:lnSpc>
-                <a:spcPct val="105000"/>
-              </a:lnSpc>
-              <a:buNone/>
-            </a:pPr>
-            <a:r>
-              <a:rPr lang="en-US" sz="1150" b="1" dirty="0">
-                <a:solidFill>
-                  <a:srgbClr val="14322C"/>
-                </a:solidFill>
-                <a:latin typeface="Calibri" pitchFamily="34" charset="0"/>
-                <a:ea typeface="Calibri" pitchFamily="34" charset="-122"/>
-                <a:cs typeface="Calibri" pitchFamily="34" charset="-120"/>
-              </a:rPr>
-              <a:t>Peds — low fit — </a:t>
-            </a:r>
-            <a:pPr indent="0" marL="0">
-              <a:lnSpc>
-                <a:spcPct val="105000"/>
-              </a:lnSpc>
-              <a:buNone/>
-            </a:pPr>
-            <a:r>
-              <a:rPr lang="en-US" sz="1150" dirty="0">
-                <a:solidFill>
-                  <a:srgbClr val="14322C"/>
-                </a:solidFill>
-                <a:latin typeface="Calibri" pitchFamily="34" charset="0"/>
-                <a:ea typeface="Calibri" pitchFamily="34" charset="-122"/>
-                <a:cs typeface="Calibri" pitchFamily="34" charset="-120"/>
-              </a:rPr>
-              <a:t>Adult family/staff referrals only.</a:t>
-            </a:r>
-            <a:endParaRPr lang="en-US" sz="1150" dirty="0"/>
-          </a:p>
-        </p:txBody>
-      </p:sp>
-      <p:sp>
-        <p:nvSpPr>
-          <p:cNvPr id="13" name="Text 11"/>
-          <p:cNvSpPr/>
-          <p:nvPr/>
-        </p:nvSpPr>
-        <p:spPr>
-          <a:xfrm>
-            <a:off x="6172200" y="6172200"/>
-            <a:ext cx="5486400" cy="640080"/>
-          </a:xfrm>
-          <a:prstGeom prst="rect">
-            <a:avLst/>
-          </a:prstGeom>
-          <a:noFill/>
-          <a:ln/>
-        </p:spPr>
-        <p:txBody>
-          <a:bodyPr wrap="square" rtlCol="0" anchor="ctr"/>
-          <a:lstStyle/>
-          <a:p>
-            <a:pPr indent="0" marL="0">
-              <a:buNone/>
-            </a:pPr>
-            <a:r>
-              <a:rPr lang="en-US" sz="1050" i="1" dirty="0">
-                <a:solidFill>
-                  <a:srgbClr val="5E7773"/>
-                </a:solidFill>
-                <a:latin typeface="Calibri" pitchFamily="34" charset="0"/>
-                <a:ea typeface="Calibri" pitchFamily="34" charset="-122"/>
-                <a:cs typeface="Calibri" pitchFamily="34" charset="-120"/>
-              </a:rPr>
-              <a:t>Payer chips are pattern-based guesses until Kelly's verification pass (Tier 1 first, by Jul 31). When unsure: “intake will confirm coverage the same day.”</a:t>
-            </a:r>
-            <a:endParaRPr lang="en-US" sz="1050" dirty="0"/>
-          </a:p>
-        </p:txBody>
-      </p:sp>
+              <a:t>Monday: Protect Radar together — lapses at zero is the win.</a:t>
+            </a:r>
+            <a:endParaRPr lang="en-US" sz="1250" dirty="0"/>
+          </a:p>
+        </p:txBody>
+      </p:sp>
+      <p:graphicFrame>
+        <p:nvGraphicFramePr>
+          <p:cNvPr id="19" name="Table 0"/>
+          <p:cNvGraphicFramePr>
+            <a:graphicFrameLocks noGrp="1"/>
+          </p:cNvGraphicFramePr>
+          <p:nvPr>
+            <p:extLst>
+              <p:ext uri="{D42A27DB-BD31-4B8C-83A1-F6EECF244321}">
+                <p14:modId xmlns:p14="http://schemas.microsoft.com/office/powerpoint/2010/main" val="1579011935"/>
+              </p:ext>
+            </p:extLst>
+          </p:nvPr>
+        </p:nvGraphicFramePr>
+        <p:xfrm>
+          <a:off x="502920" y="4480560"/>
+          <a:ext cx="11155680" cy="2103120"/>
+        </p:xfrm>
+        <a:graphic>
+          <a:graphicData uri="http://schemas.openxmlformats.org/drawingml/2006/table">
+            <a:tbl>
+              <a:tblPr/>
+              <a:tblGrid>
+                <a:gridCol w="1463040">
+                  <a:extLst>
+                    <a:ext uri="{9D8B030D-6E8A-4147-A177-3AD203B41FA5}">
+                      <a16:colId xmlns:a16="http://schemas.microsoft.com/office/drawing/2014/main" val="20000"/>
+                    </a:ext>
+                  </a:extLst>
+                </a:gridCol>
+                <a:gridCol w="9692640">
+                  <a:extLst>
+                    <a:ext uri="{9D8B030D-6E8A-4147-A177-3AD203B41FA5}">
+                      <a16:colId xmlns:a16="http://schemas.microsoft.com/office/drawing/2014/main" val="20001"/>
+                    </a:ext>
+                  </a:extLst>
+                </a:gridCol>
+              </a:tblGrid>
+              <a:tr h="420624">
+                <a:tc>
+                  <a:txBody>
+                    <a:bodyPr/>
+                    <a:lstStyle/>
+                    <a:p>
+                      <a:pPr marL="0" indent="0">
+                        <a:buNone/>
+                      </a:pPr>
+                      <a:r>
+                        <a:rPr lang="en-US" sz="1200" b="1" dirty="0">
+                          <a:solidFill>
+                            <a:srgbClr val="FFFFFF"/>
+                          </a:solidFill>
+                          <a:latin typeface="Calibri" pitchFamily="34" charset="0"/>
+                          <a:ea typeface="Calibri" pitchFamily="34" charset="-122"/>
+                          <a:cs typeface="Calibri" pitchFamily="34" charset="-120"/>
+                        </a:rPr>
+                        <a:t>PL</a:t>
+                      </a:r>
+                      <a:endParaRPr lang="en-US" sz="1200" dirty="0">
+                        <a:latin typeface="Calibri" charset="0"/>
+                        <a:ea typeface="Calibri" charset="0"/>
+                        <a:cs typeface="Calibri" charset="0"/>
+                      </a:endParaRPr>
+                    </a:p>
+                  </a:txBody>
+                  <a:tcPr marL="45720" marR="45720" anchor="ctr">
+                    <a:lnL w="6350" cap="flat" cmpd="sng" algn="ctr">
+                      <a:solidFill>
+                        <a:srgbClr val="DCE7E3"/>
+                      </a:solidFill>
+                      <a:prstDash val="solid"/>
+                      <a:round/>
+                      <a:headEnd type="none" w="med" len="med"/>
+                      <a:tailEnd type="none" w="med" len="med"/>
+                    </a:lnL>
+                    <a:lnR w="6350" cap="flat" cmpd="sng" algn="ctr">
+                      <a:solidFill>
+                        <a:srgbClr val="DCE7E3"/>
+                      </a:solidFill>
+                      <a:prstDash val="solid"/>
+                      <a:round/>
+                      <a:headEnd type="none" w="med" len="med"/>
+                      <a:tailEnd type="none" w="med" len="med"/>
+                    </a:lnR>
+                    <a:lnT w="6350" cap="flat" cmpd="sng" algn="ctr">
+                      <a:solidFill>
+                        <a:srgbClr val="DCE7E3"/>
+                      </a:solidFill>
+                      <a:prstDash val="solid"/>
+                      <a:round/>
+                      <a:headEnd type="none" w="med" len="med"/>
+                      <a:tailEnd type="none" w="med" len="med"/>
+                    </a:lnT>
+                    <a:lnB w="6350" cap="flat" cmpd="sng" algn="ctr">
+                      <a:solidFill>
+                        <a:srgbClr val="DCE7E3"/>
+                      </a:solidFill>
+                      <a:prstDash val="solid"/>
+                      <a:round/>
+                      <a:headEnd type="none" w="med" len="med"/>
+                      <a:tailEnd type="none" w="med" len="med"/>
+                    </a:lnB>
+                    <a:solidFill>
+                      <a:srgbClr val="1F4E4A"/>
+                    </a:solidFill>
+                  </a:tcPr>
+                </a:tc>
+                <a:tc>
+                  <a:txBody>
+                    <a:bodyPr/>
+                    <a:lstStyle/>
+                    <a:p>
+                      <a:pPr marL="0" indent="0">
+                        <a:buNone/>
+                      </a:pPr>
+                      <a:r>
+                        <a:rPr lang="en-US" sz="1200" b="1" dirty="0">
+                          <a:solidFill>
+                            <a:srgbClr val="FFFFFF"/>
+                          </a:solidFill>
+                          <a:latin typeface="Calibri" pitchFamily="34" charset="0"/>
+                          <a:ea typeface="Calibri" pitchFamily="34" charset="-122"/>
+                          <a:cs typeface="Calibri" pitchFamily="34" charset="-120"/>
+                        </a:rPr>
+                        <a:t>This week (W1, Jul 22–25)</a:t>
+                      </a:r>
+                      <a:endParaRPr lang="en-US" sz="1200" dirty="0">
+                        <a:latin typeface="Calibri" charset="0"/>
+                        <a:ea typeface="Calibri" charset="0"/>
+                        <a:cs typeface="Calibri" charset="0"/>
+                      </a:endParaRPr>
+                    </a:p>
+                  </a:txBody>
+                  <a:tcPr marL="45720" marR="45720" anchor="ctr">
+                    <a:lnL w="6350" cap="flat" cmpd="sng" algn="ctr">
+                      <a:solidFill>
+                        <a:srgbClr val="DCE7E3"/>
+                      </a:solidFill>
+                      <a:prstDash val="solid"/>
+                      <a:round/>
+                      <a:headEnd type="none" w="med" len="med"/>
+                      <a:tailEnd type="none" w="med" len="med"/>
+                    </a:lnL>
+                    <a:lnR w="6350" cap="flat" cmpd="sng" algn="ctr">
+                      <a:solidFill>
+                        <a:srgbClr val="DCE7E3"/>
+                      </a:solidFill>
+                      <a:prstDash val="solid"/>
+                      <a:round/>
+                      <a:headEnd type="none" w="med" len="med"/>
+                      <a:tailEnd type="none" w="med" len="med"/>
+                    </a:lnR>
+                    <a:lnT w="6350" cap="flat" cmpd="sng" algn="ctr">
+                      <a:solidFill>
+                        <a:srgbClr val="DCE7E3"/>
+                      </a:solidFill>
+                      <a:prstDash val="solid"/>
+                      <a:round/>
+                      <a:headEnd type="none" w="med" len="med"/>
+                      <a:tailEnd type="none" w="med" len="med"/>
+                    </a:lnT>
+                    <a:lnB w="6350" cap="flat" cmpd="sng" algn="ctr">
+                      <a:solidFill>
+                        <a:srgbClr val="DCE7E3"/>
+                      </a:solidFill>
+                      <a:prstDash val="solid"/>
+                      <a:round/>
+                      <a:headEnd type="none" w="med" len="med"/>
+                      <a:tailEnd type="none" w="med" len="med"/>
+                    </a:lnB>
+                    <a:solidFill>
+                      <a:srgbClr val="1F4E4A"/>
+                    </a:solidFill>
+                  </a:tcPr>
+                </a:tc>
+                <a:extLst>
+                  <a:ext uri="{0D108BD9-81ED-4DB2-BD59-A6C34878D82A}">
+                    <a16:rowId xmlns:a16="http://schemas.microsoft.com/office/drawing/2014/main" val="10000"/>
+                  </a:ext>
+                </a:extLst>
+              </a:tr>
+              <a:tr h="420624">
+                <a:tc>
+                  <a:txBody>
+                    <a:bodyPr/>
+                    <a:lstStyle/>
+                    <a:p>
+                      <a:pPr marL="0" indent="0">
+                        <a:buNone/>
+                      </a:pPr>
+                      <a:r>
+                        <a:rPr lang="en-US" sz="1200" dirty="0">
+                          <a:solidFill>
+                            <a:srgbClr val="14322C"/>
+                          </a:solidFill>
+                          <a:latin typeface="Calibri" pitchFamily="34" charset="0"/>
+                          <a:ea typeface="Calibri" pitchFamily="34" charset="-122"/>
+                          <a:cs typeface="Calibri" pitchFamily="34" charset="-120"/>
+                        </a:rPr>
+                        <a:t>Kristen</a:t>
+                      </a:r>
+                      <a:endParaRPr lang="en-US" sz="1200" dirty="0">
+                        <a:latin typeface="Calibri" charset="0"/>
+                        <a:ea typeface="Calibri" charset="0"/>
+                        <a:cs typeface="Calibri" charset="0"/>
+                      </a:endParaRPr>
+                    </a:p>
+                  </a:txBody>
+                  <a:tcPr marL="45720" marR="45720" anchor="ctr">
+                    <a:lnL w="6350" cap="flat" cmpd="sng" algn="ctr">
+                      <a:solidFill>
+                        <a:srgbClr val="DCE7E3"/>
+                      </a:solidFill>
+                      <a:prstDash val="solid"/>
+                      <a:round/>
+                      <a:headEnd type="none" w="med" len="med"/>
+                      <a:tailEnd type="none" w="med" len="med"/>
+                    </a:lnL>
+                    <a:lnR w="6350" cap="flat" cmpd="sng" algn="ctr">
+                      <a:solidFill>
+                        <a:srgbClr val="DCE7E3"/>
+                      </a:solidFill>
+                      <a:prstDash val="solid"/>
+                      <a:round/>
+                      <a:headEnd type="none" w="med" len="med"/>
+                      <a:tailEnd type="none" w="med" len="med"/>
+                    </a:lnR>
+                    <a:lnT w="6350" cap="flat" cmpd="sng" algn="ctr">
+                      <a:solidFill>
+                        <a:srgbClr val="DCE7E3"/>
+                      </a:solidFill>
+                      <a:prstDash val="solid"/>
+                      <a:round/>
+                      <a:headEnd type="none" w="med" len="med"/>
+                      <a:tailEnd type="none" w="med" len="med"/>
+                    </a:lnT>
+                    <a:lnB w="6350" cap="flat" cmpd="sng" algn="ctr">
+                      <a:solidFill>
+                        <a:srgbClr val="DCE7E3"/>
+                      </a:solidFill>
+                      <a:prstDash val="solid"/>
+                      <a:round/>
+                      <a:headEnd type="none" w="med" len="med"/>
+                      <a:tailEnd type="none" w="med" len="med"/>
+                    </a:lnB>
+                  </a:tcPr>
+                </a:tc>
+                <a:tc>
+                  <a:txBody>
+                    <a:bodyPr/>
+                    <a:lstStyle/>
+                    <a:p>
+                      <a:pPr marL="0" indent="0">
+                        <a:buNone/>
+                      </a:pPr>
+                      <a:r>
+                        <a:rPr lang="en-US" sz="1200" dirty="0">
+                          <a:solidFill>
+                            <a:srgbClr val="14322C"/>
+                          </a:solidFill>
+                          <a:latin typeface="Calibri" pitchFamily="34" charset="0"/>
+                          <a:ea typeface="Calibri" pitchFamily="34" charset="-122"/>
+                          <a:cs typeface="Calibri" pitchFamily="34" charset="-120"/>
+                        </a:rPr>
+                        <a:t>3 route days + 4 catch-up stops (accounts overdue for a visit) · 34 total</a:t>
+                      </a:r>
+                      <a:endParaRPr lang="en-US" sz="1200" dirty="0">
+                        <a:latin typeface="Calibri" charset="0"/>
+                        <a:ea typeface="Calibri" charset="0"/>
+                        <a:cs typeface="Calibri" charset="0"/>
+                      </a:endParaRPr>
+                    </a:p>
+                  </a:txBody>
+                  <a:tcPr marL="45720" marR="45720" anchor="ctr">
+                    <a:lnL w="6350" cap="flat" cmpd="sng" algn="ctr">
+                      <a:solidFill>
+                        <a:srgbClr val="DCE7E3"/>
+                      </a:solidFill>
+                      <a:prstDash val="solid"/>
+                      <a:round/>
+                      <a:headEnd type="none" w="med" len="med"/>
+                      <a:tailEnd type="none" w="med" len="med"/>
+                    </a:lnL>
+                    <a:lnR w="6350" cap="flat" cmpd="sng" algn="ctr">
+                      <a:solidFill>
+                        <a:srgbClr val="DCE7E3"/>
+                      </a:solidFill>
+                      <a:prstDash val="solid"/>
+                      <a:round/>
+                      <a:headEnd type="none" w="med" len="med"/>
+                      <a:tailEnd type="none" w="med" len="med"/>
+                    </a:lnR>
+                    <a:lnT w="6350" cap="flat" cmpd="sng" algn="ctr">
+                      <a:solidFill>
+                        <a:srgbClr val="DCE7E3"/>
+                      </a:solidFill>
+                      <a:prstDash val="solid"/>
+                      <a:round/>
+                      <a:headEnd type="none" w="med" len="med"/>
+                      <a:tailEnd type="none" w="med" len="med"/>
+                    </a:lnT>
+                    <a:lnB w="6350" cap="flat" cmpd="sng" algn="ctr">
+                      <a:solidFill>
+                        <a:srgbClr val="DCE7E3"/>
+                      </a:solidFill>
+                      <a:prstDash val="solid"/>
+                      <a:round/>
+                      <a:headEnd type="none" w="med" len="med"/>
+                      <a:tailEnd type="none" w="med" len="med"/>
+                    </a:lnB>
+                  </a:tcPr>
+                </a:tc>
+                <a:extLst>
+                  <a:ext uri="{0D108BD9-81ED-4DB2-BD59-A6C34878D82A}">
+                    <a16:rowId xmlns:a16="http://schemas.microsoft.com/office/drawing/2014/main" val="10001"/>
+                  </a:ext>
+                </a:extLst>
+              </a:tr>
+              <a:tr h="420624">
+                <a:tc>
+                  <a:txBody>
+                    <a:bodyPr/>
+                    <a:lstStyle/>
+                    <a:p>
+                      <a:pPr marL="0" indent="0">
+                        <a:buNone/>
+                      </a:pPr>
+                      <a:r>
+                        <a:rPr lang="en-US" sz="1200" dirty="0">
+                          <a:solidFill>
+                            <a:srgbClr val="14322C"/>
+                          </a:solidFill>
+                          <a:latin typeface="Calibri" pitchFamily="34" charset="0"/>
+                          <a:ea typeface="Calibri" pitchFamily="34" charset="-122"/>
+                          <a:cs typeface="Calibri" pitchFamily="34" charset="-120"/>
+                        </a:rPr>
+                        <a:t>Jasmine</a:t>
+                      </a:r>
+                      <a:endParaRPr lang="en-US" sz="1200" dirty="0">
+                        <a:latin typeface="Calibri" charset="0"/>
+                        <a:ea typeface="Calibri" charset="0"/>
+                        <a:cs typeface="Calibri" charset="0"/>
+                      </a:endParaRPr>
+                    </a:p>
+                  </a:txBody>
+                  <a:tcPr marL="45720" marR="45720" anchor="ctr">
+                    <a:lnL w="6350" cap="flat" cmpd="sng" algn="ctr">
+                      <a:solidFill>
+                        <a:srgbClr val="DCE7E3"/>
+                      </a:solidFill>
+                      <a:prstDash val="solid"/>
+                      <a:round/>
+                      <a:headEnd type="none" w="med" len="med"/>
+                      <a:tailEnd type="none" w="med" len="med"/>
+                    </a:lnL>
+                    <a:lnR w="6350" cap="flat" cmpd="sng" algn="ctr">
+                      <a:solidFill>
+                        <a:srgbClr val="DCE7E3"/>
+                      </a:solidFill>
+                      <a:prstDash val="solid"/>
+                      <a:round/>
+                      <a:headEnd type="none" w="med" len="med"/>
+                      <a:tailEnd type="none" w="med" len="med"/>
+                    </a:lnR>
+                    <a:lnT w="6350" cap="flat" cmpd="sng" algn="ctr">
+                      <a:solidFill>
+                        <a:srgbClr val="DCE7E3"/>
+                      </a:solidFill>
+                      <a:prstDash val="solid"/>
+                      <a:round/>
+                      <a:headEnd type="none" w="med" len="med"/>
+                      <a:tailEnd type="none" w="med" len="med"/>
+                    </a:lnT>
+                    <a:lnB w="6350" cap="flat" cmpd="sng" algn="ctr">
+                      <a:solidFill>
+                        <a:srgbClr val="DCE7E3"/>
+                      </a:solidFill>
+                      <a:prstDash val="solid"/>
+                      <a:round/>
+                      <a:headEnd type="none" w="med" len="med"/>
+                      <a:tailEnd type="none" w="med" len="med"/>
+                    </a:lnB>
+                  </a:tcPr>
+                </a:tc>
+                <a:tc>
+                  <a:txBody>
+                    <a:bodyPr/>
+                    <a:lstStyle/>
+                    <a:p>
+                      <a:pPr marL="0" indent="0">
+                        <a:buNone/>
+                      </a:pPr>
+                      <a:r>
+                        <a:rPr lang="en-US" sz="1200" dirty="0">
+                          <a:solidFill>
+                            <a:srgbClr val="14322C"/>
+                          </a:solidFill>
+                          <a:latin typeface="Calibri" pitchFamily="34" charset="0"/>
+                          <a:ea typeface="Calibri" pitchFamily="34" charset="-122"/>
+                          <a:cs typeface="Calibri" pitchFamily="34" charset="-120"/>
+                        </a:rPr>
+                        <a:t>Route days 02 · 05 · 09 — 30 stops</a:t>
+                      </a:r>
+                      <a:endParaRPr lang="en-US" sz="1200" dirty="0">
+                        <a:latin typeface="Calibri" charset="0"/>
+                        <a:ea typeface="Calibri" charset="0"/>
+                        <a:cs typeface="Calibri" charset="0"/>
+                      </a:endParaRPr>
+                    </a:p>
+                  </a:txBody>
+                  <a:tcPr marL="45720" marR="45720" anchor="ctr">
+                    <a:lnL w="6350" cap="flat" cmpd="sng" algn="ctr">
+                      <a:solidFill>
+                        <a:srgbClr val="DCE7E3"/>
+                      </a:solidFill>
+                      <a:prstDash val="solid"/>
+                      <a:round/>
+                      <a:headEnd type="none" w="med" len="med"/>
+                      <a:tailEnd type="none" w="med" len="med"/>
+                    </a:lnL>
+                    <a:lnR w="6350" cap="flat" cmpd="sng" algn="ctr">
+                      <a:solidFill>
+                        <a:srgbClr val="DCE7E3"/>
+                      </a:solidFill>
+                      <a:prstDash val="solid"/>
+                      <a:round/>
+                      <a:headEnd type="none" w="med" len="med"/>
+                      <a:tailEnd type="none" w="med" len="med"/>
+                    </a:lnR>
+                    <a:lnT w="6350" cap="flat" cmpd="sng" algn="ctr">
+                      <a:solidFill>
+                        <a:srgbClr val="DCE7E3"/>
+                      </a:solidFill>
+                      <a:prstDash val="solid"/>
+                      <a:round/>
+                      <a:headEnd type="none" w="med" len="med"/>
+                      <a:tailEnd type="none" w="med" len="med"/>
+                    </a:lnT>
+                    <a:lnB w="6350" cap="flat" cmpd="sng" algn="ctr">
+                      <a:solidFill>
+                        <a:srgbClr val="DCE7E3"/>
+                      </a:solidFill>
+                      <a:prstDash val="solid"/>
+                      <a:round/>
+                      <a:headEnd type="none" w="med" len="med"/>
+                      <a:tailEnd type="none" w="med" len="med"/>
+                    </a:lnB>
+                  </a:tcPr>
+                </a:tc>
+                <a:extLst>
+                  <a:ext uri="{0D108BD9-81ED-4DB2-BD59-A6C34878D82A}">
+                    <a16:rowId xmlns:a16="http://schemas.microsoft.com/office/drawing/2014/main" val="10002"/>
+                  </a:ext>
+                </a:extLst>
+              </a:tr>
+              <a:tr h="420624">
+                <a:tc>
+                  <a:txBody>
+                    <a:bodyPr/>
+                    <a:lstStyle/>
+                    <a:p>
+                      <a:pPr marL="0" indent="0">
+                        <a:buNone/>
+                      </a:pPr>
+                      <a:r>
+                        <a:rPr lang="en-US" sz="1200" dirty="0">
+                          <a:solidFill>
+                            <a:srgbClr val="14322C"/>
+                          </a:solidFill>
+                          <a:latin typeface="Calibri" pitchFamily="34" charset="0"/>
+                          <a:ea typeface="Calibri" pitchFamily="34" charset="-122"/>
+                          <a:cs typeface="Calibri" pitchFamily="34" charset="-120"/>
+                        </a:rPr>
+                        <a:t>Coty</a:t>
+                      </a:r>
+                      <a:endParaRPr lang="en-US" sz="1200" dirty="0">
+                        <a:latin typeface="Calibri" charset="0"/>
+                        <a:ea typeface="Calibri" charset="0"/>
+                        <a:cs typeface="Calibri" charset="0"/>
+                      </a:endParaRPr>
+                    </a:p>
+                  </a:txBody>
+                  <a:tcPr marL="45720" marR="45720" anchor="ctr">
+                    <a:lnL w="6350" cap="flat" cmpd="sng" algn="ctr">
+                      <a:solidFill>
+                        <a:srgbClr val="DCE7E3"/>
+                      </a:solidFill>
+                      <a:prstDash val="solid"/>
+                      <a:round/>
+                      <a:headEnd type="none" w="med" len="med"/>
+                      <a:tailEnd type="none" w="med" len="med"/>
+                    </a:lnL>
+                    <a:lnR w="6350" cap="flat" cmpd="sng" algn="ctr">
+                      <a:solidFill>
+                        <a:srgbClr val="DCE7E3"/>
+                      </a:solidFill>
+                      <a:prstDash val="solid"/>
+                      <a:round/>
+                      <a:headEnd type="none" w="med" len="med"/>
+                      <a:tailEnd type="none" w="med" len="med"/>
+                    </a:lnR>
+                    <a:lnT w="6350" cap="flat" cmpd="sng" algn="ctr">
+                      <a:solidFill>
+                        <a:srgbClr val="DCE7E3"/>
+                      </a:solidFill>
+                      <a:prstDash val="solid"/>
+                      <a:round/>
+                      <a:headEnd type="none" w="med" len="med"/>
+                      <a:tailEnd type="none" w="med" len="med"/>
+                    </a:lnT>
+                    <a:lnB w="6350" cap="flat" cmpd="sng" algn="ctr">
+                      <a:solidFill>
+                        <a:srgbClr val="DCE7E3"/>
+                      </a:solidFill>
+                      <a:prstDash val="solid"/>
+                      <a:round/>
+                      <a:headEnd type="none" w="med" len="med"/>
+                      <a:tailEnd type="none" w="med" len="med"/>
+                    </a:lnB>
+                  </a:tcPr>
+                </a:tc>
+                <a:tc>
+                  <a:txBody>
+                    <a:bodyPr/>
+                    <a:lstStyle/>
+                    <a:p>
+                      <a:pPr marL="0" indent="0">
+                        <a:buNone/>
+                      </a:pPr>
+                      <a:r>
+                        <a:rPr lang="en-US" sz="1200" dirty="0">
+                          <a:solidFill>
+                            <a:srgbClr val="14322C"/>
+                          </a:solidFill>
+                          <a:latin typeface="Calibri" pitchFamily="34" charset="0"/>
+                          <a:ea typeface="Calibri" pitchFamily="34" charset="-122"/>
+                          <a:cs typeface="Calibri" pitchFamily="34" charset="-120"/>
+                        </a:rPr>
+                        <a:t>Route days 01 · 04 · 03 — 30 stops</a:t>
+                      </a:r>
+                      <a:endParaRPr lang="en-US" sz="1200" dirty="0">
+                        <a:latin typeface="Calibri" charset="0"/>
+                        <a:ea typeface="Calibri" charset="0"/>
+                        <a:cs typeface="Calibri" charset="0"/>
+                      </a:endParaRPr>
+                    </a:p>
+                  </a:txBody>
+                  <a:tcPr marL="45720" marR="45720" anchor="ctr">
+                    <a:lnL w="6350" cap="flat" cmpd="sng" algn="ctr">
+                      <a:solidFill>
+                        <a:srgbClr val="DCE7E3"/>
+                      </a:solidFill>
+                      <a:prstDash val="solid"/>
+                      <a:round/>
+                      <a:headEnd type="none" w="med" len="med"/>
+                      <a:tailEnd type="none" w="med" len="med"/>
+                    </a:lnL>
+                    <a:lnR w="6350" cap="flat" cmpd="sng" algn="ctr">
+                      <a:solidFill>
+                        <a:srgbClr val="DCE7E3"/>
+                      </a:solidFill>
+                      <a:prstDash val="solid"/>
+                      <a:round/>
+                      <a:headEnd type="none" w="med" len="med"/>
+                      <a:tailEnd type="none" w="med" len="med"/>
+                    </a:lnR>
+                    <a:lnT w="6350" cap="flat" cmpd="sng" algn="ctr">
+                      <a:solidFill>
+                        <a:srgbClr val="DCE7E3"/>
+                      </a:solidFill>
+                      <a:prstDash val="solid"/>
+                      <a:round/>
+                      <a:headEnd type="none" w="med" len="med"/>
+                      <a:tailEnd type="none" w="med" len="med"/>
+                    </a:lnT>
+                    <a:lnB w="6350" cap="flat" cmpd="sng" algn="ctr">
+                      <a:solidFill>
+                        <a:srgbClr val="DCE7E3"/>
+                      </a:solidFill>
+                      <a:prstDash val="solid"/>
+                      <a:round/>
+                      <a:headEnd type="none" w="med" len="med"/>
+                      <a:tailEnd type="none" w="med" len="med"/>
+                    </a:lnB>
+                  </a:tcPr>
+                </a:tc>
+                <a:extLst>
+                  <a:ext uri="{0D108BD9-81ED-4DB2-BD59-A6C34878D82A}">
+                    <a16:rowId xmlns:a16="http://schemas.microsoft.com/office/drawing/2014/main" val="10003"/>
+                  </a:ext>
+                </a:extLst>
+              </a:tr>
+              <a:tr h="420624">
+                <a:tc>
+                  <a:txBody>
+                    <a:bodyPr/>
+                    <a:lstStyle/>
+                    <a:p>
+                      <a:pPr marL="0" indent="0">
+                        <a:buNone/>
+                      </a:pPr>
+                      <a:r>
+                        <a:rPr lang="en-US" sz="1200" dirty="0">
+                          <a:solidFill>
+                            <a:srgbClr val="14322C"/>
+                          </a:solidFill>
+                          <a:latin typeface="Calibri" pitchFamily="34" charset="0"/>
+                          <a:ea typeface="Calibri" pitchFamily="34" charset="-122"/>
+                          <a:cs typeface="Calibri" pitchFamily="34" charset="-120"/>
+                        </a:rPr>
+                        <a:t>Sean</a:t>
+                      </a:r>
+                      <a:endParaRPr lang="en-US" sz="1200" dirty="0">
+                        <a:latin typeface="Calibri" charset="0"/>
+                        <a:ea typeface="Calibri" charset="0"/>
+                        <a:cs typeface="Calibri" charset="0"/>
+                      </a:endParaRPr>
+                    </a:p>
+                  </a:txBody>
+                  <a:tcPr marL="45720" marR="45720" anchor="ctr">
+                    <a:lnL w="6350" cap="flat" cmpd="sng" algn="ctr">
+                      <a:solidFill>
+                        <a:srgbClr val="DCE7E3"/>
+                      </a:solidFill>
+                      <a:prstDash val="solid"/>
+                      <a:round/>
+                      <a:headEnd type="none" w="med" len="med"/>
+                      <a:tailEnd type="none" w="med" len="med"/>
+                    </a:lnL>
+                    <a:lnR w="6350" cap="flat" cmpd="sng" algn="ctr">
+                      <a:solidFill>
+                        <a:srgbClr val="DCE7E3"/>
+                      </a:solidFill>
+                      <a:prstDash val="solid"/>
+                      <a:round/>
+                      <a:headEnd type="none" w="med" len="med"/>
+                      <a:tailEnd type="none" w="med" len="med"/>
+                    </a:lnR>
+                    <a:lnT w="6350" cap="flat" cmpd="sng" algn="ctr">
+                      <a:solidFill>
+                        <a:srgbClr val="DCE7E3"/>
+                      </a:solidFill>
+                      <a:prstDash val="solid"/>
+                      <a:round/>
+                      <a:headEnd type="none" w="med" len="med"/>
+                      <a:tailEnd type="none" w="med" len="med"/>
+                    </a:lnT>
+                    <a:lnB w="6350" cap="flat" cmpd="sng" algn="ctr">
+                      <a:solidFill>
+                        <a:srgbClr val="DCE7E3"/>
+                      </a:solidFill>
+                      <a:prstDash val="solid"/>
+                      <a:round/>
+                      <a:headEnd type="none" w="med" len="med"/>
+                      <a:tailEnd type="none" w="med" len="med"/>
+                    </a:lnB>
+                  </a:tcPr>
+                </a:tc>
+                <a:tc>
+                  <a:txBody>
+                    <a:bodyPr/>
+                    <a:lstStyle/>
+                    <a:p>
+                      <a:pPr marL="0" indent="0">
+                        <a:buNone/>
+                      </a:pPr>
+                      <a:r>
+                        <a:rPr lang="en-US" sz="1200" dirty="0">
+                          <a:solidFill>
+                            <a:srgbClr val="14322C"/>
+                          </a:solidFill>
+                          <a:latin typeface="Calibri" pitchFamily="34" charset="0"/>
+                          <a:ea typeface="Calibri" pitchFamily="34" charset="-122"/>
+                          <a:cs typeface="Calibri" pitchFamily="34" charset="-120"/>
+                        </a:rPr>
+                        <a:t>Days 03 · 02 — 20 stops · pending Thursday's check-in; Coty covers if needed</a:t>
+                      </a:r>
+                      <a:endParaRPr lang="en-US" sz="1200" dirty="0">
+                        <a:latin typeface="Calibri" charset="0"/>
+                        <a:ea typeface="Calibri" charset="0"/>
+                        <a:cs typeface="Calibri" charset="0"/>
+                      </a:endParaRPr>
+                    </a:p>
+                  </a:txBody>
+                  <a:tcPr marL="45720" marR="45720" anchor="ctr">
+                    <a:lnL w="6350" cap="flat" cmpd="sng" algn="ctr">
+                      <a:solidFill>
+                        <a:srgbClr val="DCE7E3"/>
+                      </a:solidFill>
+                      <a:prstDash val="solid"/>
+                      <a:round/>
+                      <a:headEnd type="none" w="med" len="med"/>
+                      <a:tailEnd type="none" w="med" len="med"/>
+                    </a:lnL>
+                    <a:lnR w="6350" cap="flat" cmpd="sng" algn="ctr">
+                      <a:solidFill>
+                        <a:srgbClr val="DCE7E3"/>
+                      </a:solidFill>
+                      <a:prstDash val="solid"/>
+                      <a:round/>
+                      <a:headEnd type="none" w="med" len="med"/>
+                      <a:tailEnd type="none" w="med" len="med"/>
+                    </a:lnR>
+                    <a:lnT w="6350" cap="flat" cmpd="sng" algn="ctr">
+                      <a:solidFill>
+                        <a:srgbClr val="DCE7E3"/>
+                      </a:solidFill>
+                      <a:prstDash val="solid"/>
+                      <a:round/>
+                      <a:headEnd type="none" w="med" len="med"/>
+                      <a:tailEnd type="none" w="med" len="med"/>
+                    </a:lnT>
+                    <a:lnB w="6350" cap="flat" cmpd="sng" algn="ctr">
+                      <a:solidFill>
+                        <a:srgbClr val="DCE7E3"/>
+                      </a:solidFill>
+                      <a:prstDash val="solid"/>
+                      <a:round/>
+                      <a:headEnd type="none" w="med" len="med"/>
+                      <a:tailEnd type="none" w="med" len="med"/>
+                    </a:lnB>
+                  </a:tcPr>
+                </a:tc>
+                <a:extLst>
+                  <a:ext uri="{0D108BD9-81ED-4DB2-BD59-A6C34878D82A}">
+                    <a16:rowId xmlns:a16="http://schemas.microsoft.com/office/drawing/2014/main" val="10004"/>
+                  </a:ext>
+                </a:extLst>
+              </a:tr>
+            </a:tbl>
+          </a:graphicData>
+        </a:graphic>
+      </p:graphicFrame>
+      <p:pic>
+        <p:nvPicPr>
+          <p:cNvPr id="20" name="Image 0" descr="app_stop_detail.png"/>
+          <p:cNvPicPr>
+            <a:picLocks noChangeAspect="1"/>
+          </p:cNvPicPr>
+          <p:nvPr/>
+        </p:nvPicPr>
+        <p:blipFill>
+          <a:blip r:embed="rId3"/>
+          <a:srcRect/>
+          <a:stretch/>
+        </p:blipFill>
+        <p:spPr>
+          <a:xfrm>
+            <a:off x="7863840" y="1325880"/>
+            <a:ext cx="2743200" cy="2926080"/>
+          </a:xfrm>
+          <a:prstGeom prst="rect">
+            <a:avLst/>
+          </a:prstGeom>
+        </p:spPr>
+      </p:pic>
     </p:spTree>
   </p:cSld>
   <p:clrMapOvr>
@@ -11430,4 +10570,319 @@
     </a:ext>
   </a:extLst>
 </a:theme>
+</file>
+
+<file path=ppt/theme/theme2.xml><?xml version="1.0" encoding="utf-8"?>
+<a:theme xmlns:a="http://schemas.openxmlformats.org/drawingml/2006/main" name="Office Theme">
+  <a:themeElements>
+    <a:clrScheme name="Office">
+      <a:dk1>
+        <a:sysClr val="windowText" lastClr="000000"/>
+      </a:dk1>
+      <a:lt1>
+        <a:sysClr val="window" lastClr="FFFFFF"/>
+      </a:lt1>
+      <a:dk2>
+        <a:srgbClr val="0E2841"/>
+      </a:dk2>
+      <a:lt2>
+        <a:srgbClr val="E8E8E8"/>
+      </a:lt2>
+      <a:accent1>
+        <a:srgbClr val="156082"/>
+      </a:accent1>
+      <a:accent2>
+        <a:srgbClr val="E97132"/>
+      </a:accent2>
+      <a:accent3>
+        <a:srgbClr val="196B24"/>
+      </a:accent3>
+      <a:accent4>
+        <a:srgbClr val="0F9ED5"/>
+      </a:accent4>
+      <a:accent5>
+        <a:srgbClr val="A02B93"/>
+      </a:accent5>
+      <a:accent6>
+        <a:srgbClr val="4EA72E"/>
+      </a:accent6>
+      <a:hlink>
+        <a:srgbClr val="467886"/>
+      </a:hlink>
+      <a:folHlink>
+        <a:srgbClr val="96607D"/>
+      </a:folHlink>
+    </a:clrScheme>
+    <a:fontScheme name="Office">
+      <a:majorFont>
+        <a:latin typeface="Aptos Display" panose="02110004020202020204"/>
+        <a:ea typeface=""/>
+        <a:cs typeface=""/>
+        <a:font script="Jpan" typeface="游ゴシック Light"/>
+        <a:font script="Hang" typeface="맑은 고딕"/>
+        <a:font script="Hans" typeface="等线 Light"/>
+        <a:font script="Hant" typeface="新細明體"/>
+        <a:font script="Arab" typeface="Times New Roman"/>
+        <a:font script="Hebr" typeface="Times New Roman"/>
+        <a:font script="Thai" typeface="Angsana New"/>
+        <a:font script="Ethi" typeface="Nyala"/>
+        <a:font script="Beng" typeface="Vrinda"/>
+        <a:font script="Gujr" typeface="Shruti"/>
+        <a:font script="Khmr" typeface="MoolBoran"/>
+        <a:font script="Knda" typeface="Tunga"/>
+        <a:font script="Guru" typeface="Raavi"/>
+        <a:font script="Cans" typeface="Euphemia"/>
+        <a:font script="Cher" typeface="Plantagenet Cherokee"/>
+        <a:font script="Yiii" typeface="Microsoft Yi Baiti"/>
+        <a:font script="Tibt" typeface="Microsoft Himalaya"/>
+        <a:font script="Thaa" typeface="MV Boli"/>
+        <a:font script="Deva" typeface="Mangal"/>
+        <a:font script="Telu" typeface="Gautami"/>
+        <a:font script="Taml" typeface="Latha"/>
+        <a:font script="Syrc" typeface="Estrangelo Edessa"/>
+        <a:font script="Orya" typeface="Kalinga"/>
+        <a:font script="Mlym" typeface="Kartika"/>
+        <a:font script="Laoo" typeface="DokChampa"/>
+        <a:font script="Sinh" typeface="Iskoola Pota"/>
+        <a:font script="Mong" typeface="Mongolian Baiti"/>
+        <a:font script="Viet" typeface="Times New Roman"/>
+        <a:font script="Uigh" typeface="Microsoft Uighur"/>
+        <a:font script="Geor" typeface="Sylfaen"/>
+        <a:font script="Armn" typeface="Arial"/>
+        <a:font script="Bugi" typeface="Leelawadee UI"/>
+        <a:font script="Bopo" typeface="Microsoft JhengHei"/>
+        <a:font script="Java" typeface="Javanese Text"/>
+        <a:font script="Lisu" typeface="Segoe UI"/>
+        <a:font script="Mymr" typeface="Myanmar Text"/>
+        <a:font script="Nkoo" typeface="Ebrima"/>
+        <a:font script="Olck" typeface="Nirmala UI"/>
+        <a:font script="Osma" typeface="Ebrima"/>
+        <a:font script="Phag" typeface="Phagspa"/>
+        <a:font script="Syrn" typeface="Estrangelo Edessa"/>
+        <a:font script="Syrj" typeface="Estrangelo Edessa"/>
+        <a:font script="Syre" typeface="Estrangelo Edessa"/>
+        <a:font script="Sora" typeface="Nirmala UI"/>
+        <a:font script="Tale" typeface="Microsoft Tai Le"/>
+        <a:font script="Talu" typeface="Microsoft New Tai Lue"/>
+        <a:font script="Tfng" typeface="Ebrima"/>
+      </a:majorFont>
+      <a:minorFont>
+        <a:latin typeface="Aptos" panose="02110004020202020204"/>
+        <a:ea typeface=""/>
+        <a:cs typeface=""/>
+        <a:font script="Jpan" typeface="游ゴシック"/>
+        <a:font script="Hang" typeface="맑은 고딕"/>
+        <a:font script="Hans" typeface="等线"/>
+        <a:font script="Hant" typeface="新細明體"/>
+        <a:font script="Arab" typeface="Arial"/>
+        <a:font script="Hebr" typeface="Arial"/>
+        <a:font script="Thai" typeface="Cordia New"/>
+        <a:font script="Ethi" typeface="Nyala"/>
+        <a:font script="Beng" typeface="Vrinda"/>
+        <a:font script="Gujr" typeface="Shruti"/>
+        <a:font script="Khmr" typeface="DaunPenh"/>
+        <a:font script="Knda" typeface="Tunga"/>
+        <a:font script="Guru" typeface="Raavi"/>
+        <a:font script="Cans" typeface="Euphemia"/>
+        <a:font script="Cher" typeface="Plantagenet Cherokee"/>
+        <a:font script="Yiii" typeface="Microsoft Yi Baiti"/>
+        <a:font script="Tibt" typeface="Microsoft Himalaya"/>
+        <a:font script="Thaa" typeface="MV Boli"/>
+        <a:font script="Deva" typeface="Mangal"/>
+        <a:font script="Telu" typeface="Gautami"/>
+        <a:font script="Taml" typeface="Latha"/>
+        <a:font script="Syrc" typeface="Estrangelo Edessa"/>
+        <a:font script="Orya" typeface="Kalinga"/>
+        <a:font script="Mlym" typeface="Kartika"/>
+        <a:font script="Laoo" typeface="DokChampa"/>
+        <a:font script="Sinh" typeface="Iskoola Pota"/>
+        <a:font script="Mong" typeface="Mongolian Baiti"/>
+        <a:font script="Viet" typeface="Arial"/>
+        <a:font script="Uigh" typeface="Microsoft Uighur"/>
+        <a:font script="Geor" typeface="Sylfaen"/>
+        <a:font script="Armn" typeface="Arial"/>
+        <a:font script="Bugi" typeface="Leelawadee UI"/>
+        <a:font script="Bopo" typeface="Microsoft JhengHei"/>
+        <a:font script="Java" typeface="Javanese Text"/>
+        <a:font script="Lisu" typeface="Segoe UI"/>
+        <a:font script="Mymr" typeface="Myanmar Text"/>
+        <a:font script="Nkoo" typeface="Ebrima"/>
+        <a:font script="Olck" typeface="Nirmala UI"/>
+        <a:font script="Osma" typeface="Ebrima"/>
+        <a:font script="Phag" typeface="Phagspa"/>
+        <a:font script="Syrn" typeface="Estrangelo Edessa"/>
+        <a:font script="Syrj" typeface="Estrangelo Edessa"/>
+        <a:font script="Syre" typeface="Estrangelo Edessa"/>
+        <a:font script="Sora" typeface="Nirmala UI"/>
+        <a:font script="Tale" typeface="Microsoft Tai Le"/>
+        <a:font script="Talu" typeface="Microsoft New Tai Lue"/>
+        <a:font script="Tfng" typeface="Ebrima"/>
+      </a:minorFont>
+    </a:fontScheme>
+    <a:fmtScheme name="Office">
+      <a:fillStyleLst>
+        <a:solidFill>
+          <a:schemeClr val="phClr"/>
+        </a:solidFill>
+        <a:gradFill rotWithShape="1">
+          <a:gsLst>
+            <a:gs pos="0">
+              <a:schemeClr val="phClr">
+                <a:lumMod val="110000"/>
+                <a:satMod val="105000"/>
+                <a:tint val="67000"/>
+              </a:schemeClr>
+            </a:gs>
+            <a:gs pos="50000">
+              <a:schemeClr val="phClr">
+                <a:lumMod val="105000"/>
+                <a:satMod val="103000"/>
+                <a:tint val="73000"/>
+              </a:schemeClr>
+            </a:gs>
+            <a:gs pos="100000">
+              <a:schemeClr val="phClr">
+                <a:lumMod val="105000"/>
+                <a:satMod val="109000"/>
+                <a:tint val="81000"/>
+              </a:schemeClr>
+            </a:gs>
+          </a:gsLst>
+          <a:lin ang="5400000" scaled="0"/>
+        </a:gradFill>
+        <a:gradFill rotWithShape="1">
+          <a:gsLst>
+            <a:gs pos="0">
+              <a:schemeClr val="phClr">
+                <a:satMod val="103000"/>
+                <a:lumMod val="102000"/>
+                <a:tint val="94000"/>
+              </a:schemeClr>
+            </a:gs>
+            <a:gs pos="50000">
+              <a:schemeClr val="phClr">
+                <a:satMod val="110000"/>
+                <a:lumMod val="100000"/>
+                <a:shade val="100000"/>
+              </a:schemeClr>
+            </a:gs>
+            <a:gs pos="100000">
+              <a:schemeClr val="phClr">
+                <a:lumMod val="99000"/>
+                <a:satMod val="120000"/>
+                <a:shade val="78000"/>
+              </a:schemeClr>
+            </a:gs>
+          </a:gsLst>
+          <a:lin ang="5400000" scaled="0"/>
+        </a:gradFill>
+      </a:fillStyleLst>
+      <a:lnStyleLst>
+        <a:ln w="12700" cap="flat" cmpd="sng" algn="ctr">
+          <a:solidFill>
+            <a:schemeClr val="phClr"/>
+          </a:solidFill>
+          <a:prstDash val="solid"/>
+          <a:miter lim="800000"/>
+        </a:ln>
+        <a:ln w="19050" cap="flat" cmpd="sng" algn="ctr">
+          <a:solidFill>
+            <a:schemeClr val="phClr"/>
+          </a:solidFill>
+          <a:prstDash val="solid"/>
+          <a:miter lim="800000"/>
+        </a:ln>
+        <a:ln w="25400" cap="flat" cmpd="sng" algn="ctr">
+          <a:solidFill>
+            <a:schemeClr val="phClr"/>
+          </a:solidFill>
+          <a:prstDash val="solid"/>
+          <a:miter lim="800000"/>
+        </a:ln>
+      </a:lnStyleLst>
+      <a:effectStyleLst>
+        <a:effectStyle>
+          <a:effectLst/>
+        </a:effectStyle>
+        <a:effectStyle>
+          <a:effectLst/>
+        </a:effectStyle>
+        <a:effectStyle>
+          <a:effectLst>
+            <a:outerShdw blurRad="57150" dist="19050" dir="5400000" algn="ctr" rotWithShape="0">
+              <a:srgbClr val="000000">
+                <a:alpha val="63000"/>
+              </a:srgbClr>
+            </a:outerShdw>
+          </a:effectLst>
+        </a:effectStyle>
+      </a:effectStyleLst>
+      <a:bgFillStyleLst>
+        <a:solidFill>
+          <a:schemeClr val="phClr"/>
+        </a:solidFill>
+        <a:solidFill>
+          <a:schemeClr val="phClr">
+            <a:tint val="95000"/>
+            <a:satMod val="170000"/>
+          </a:schemeClr>
+        </a:solidFill>
+        <a:gradFill rotWithShape="1">
+          <a:gsLst>
+            <a:gs pos="0">
+              <a:schemeClr val="phClr">
+                <a:tint val="93000"/>
+                <a:satMod val="150000"/>
+                <a:shade val="98000"/>
+                <a:lumMod val="102000"/>
+              </a:schemeClr>
+            </a:gs>
+            <a:gs pos="50000">
+              <a:schemeClr val="phClr">
+                <a:tint val="98000"/>
+                <a:satMod val="130000"/>
+                <a:shade val="90000"/>
+                <a:lumMod val="103000"/>
+              </a:schemeClr>
+            </a:gs>
+            <a:gs pos="100000">
+              <a:schemeClr val="phClr">
+                <a:shade val="63000"/>
+                <a:satMod val="120000"/>
+              </a:schemeClr>
+            </a:gs>
+          </a:gsLst>
+          <a:lin ang="5400000" scaled="0"/>
+        </a:gradFill>
+      </a:bgFillStyleLst>
+    </a:fmtScheme>
+  </a:themeElements>
+  <a:objectDefaults>
+    <a:lnDef>
+      <a:spPr/>
+      <a:bodyPr/>
+      <a:lstStyle/>
+      <a:style>
+        <a:lnRef idx="2">
+          <a:schemeClr val="accent1"/>
+        </a:lnRef>
+        <a:fillRef idx="0">
+          <a:schemeClr val="accent1"/>
+        </a:fillRef>
+        <a:effectRef idx="1">
+          <a:schemeClr val="accent1"/>
+        </a:effectRef>
+        <a:fontRef idx="minor">
+          <a:schemeClr val="tx1"/>
+        </a:fontRef>
+      </a:style>
+    </a:lnDef>
+  </a:objectDefaults>
+  <a:extraClrSchemeLst/>
+  <a:extLst>
+    <a:ext uri="{05A4C25C-085E-4340-85A3-A5531E510DB2}">
+      <thm15:themeFamily xmlns:thm15="http://schemas.microsoft.com/office/thememl/2012/main" name="Office Theme" id="{2E142A2C-CD16-42D6-873A-C26D2A0506FA}" vid="{1BDDFF52-6CD6-40A5-AB3C-68EB2F1E4D0A}"/>
+    </a:ext>
+  </a:extLst>
+</a:theme>
 </file>